--- a/presentation/0909_15_Hash-Functions-and-Lamport-OTS.pptx
+++ b/presentation/0909_15_Hash-Functions-and-Lamport-OTS.pptx
@@ -9808,7 +9808,14 @@
             <p:spPr/>
             <p:txBody>
               <a:bodyPr/>
-              <a:lstStyle/>
+              <a:lstStyle>
+                <a:lvl1pPr>
+                  <a:defRPr sz="1800"/>
+                </a:lvl1pPr>
+                <a:lvl2pPr>
+                  <a:defRPr sz="1800"/>
+                </a:lvl2pPr>
+              </a:lstStyle>
               <a:p>
                 <a:r>
                   <a:rPr sz="1800" dirty="0"/>
@@ -10348,7 +10355,14 @@
             <p:spPr/>
             <p:txBody>
               <a:bodyPr/>
-              <a:lstStyle/>
+              <a:lstStyle>
+                <a:lvl1pPr>
+                  <a:defRPr sz="1800"/>
+                </a:lvl1pPr>
+                <a:lvl2pPr>
+                  <a:defRPr sz="1800"/>
+                </a:lvl2pPr>
+              </a:lstStyle>
               <a:p>
                 <a:r>
                   <a:rPr sz="1800" dirty="0"/>
@@ -12524,7 +12538,14 @@
             </p:spPr>
             <p:txBody>
               <a:bodyPr/>
-              <a:lstStyle/>
+              <a:lstStyle>
+                <a:lvl1pPr>
+                  <a:defRPr sz="1800"/>
+                </a:lvl1pPr>
+                <a:lvl2pPr>
+                  <a:defRPr sz="1800"/>
+                </a:lvl2pPr>
+              </a:lstStyle>
               <a:p>
                 <a14:m>
                   <m:oMath xmlns:m="http://schemas.openxmlformats.org/officeDocument/2006/math">
@@ -13350,7 +13371,14 @@
             <p:spPr/>
             <p:txBody>
               <a:bodyPr/>
-              <a:lstStyle/>
+              <a:lstStyle>
+                <a:lvl1pPr>
+                  <a:defRPr sz="1800"/>
+                </a:lvl1pPr>
+                <a:lvl2pPr>
+                  <a:defRPr sz="1800"/>
+                </a:lvl2pPr>
+              </a:lstStyle>
               <a:p>
                 <a:r>
                   <a:rPr sz="1800" dirty="0"/>
@@ -14049,7 +14077,14 @@
             </p:spPr>
             <p:txBody>
               <a:bodyPr/>
-              <a:lstStyle/>
+              <a:lstStyle>
+                <a:lvl1pPr>
+                  <a:defRPr sz="1800"/>
+                </a:lvl1pPr>
+                <a:lvl2pPr>
+                  <a:defRPr sz="1800"/>
+                </a:lvl2pPr>
+              </a:lstStyle>
               <a:p>
                 <a:r>
                   <a:rPr sz="1800" dirty="0"/>
@@ -14556,7 +14591,14 @@
             </p:spPr>
             <p:txBody>
               <a:bodyPr/>
-              <a:lstStyle/>
+              <a:lstStyle>
+                <a:lvl1pPr>
+                  <a:defRPr sz="1800"/>
+                </a:lvl1pPr>
+                <a:lvl2pPr>
+                  <a:defRPr sz="1800"/>
+                </a:lvl2pPr>
+              </a:lstStyle>
               <a:p>
                 <a:r>
                   <a:rPr sz="1800" dirty="0"/>
@@ -15219,7 +15261,14 @@
             <p:spPr/>
             <p:txBody>
               <a:bodyPr/>
-              <a:lstStyle/>
+              <a:lstStyle>
+                <a:lvl1pPr>
+                  <a:defRPr sz="1800"/>
+                </a:lvl1pPr>
+                <a:lvl2pPr>
+                  <a:defRPr sz="1800"/>
+                </a:lvl2pPr>
+              </a:lstStyle>
               <a:p>
                 <a:r>
                   <a:rPr sz="1800" dirty="0"/>
@@ -18119,7 +18168,14 @@
             <p:spPr/>
             <p:txBody>
               <a:bodyPr/>
-              <a:lstStyle/>
+              <a:lstStyle>
+                <a:lvl1pPr>
+                  <a:defRPr sz="1800"/>
+                </a:lvl1pPr>
+                <a:lvl2pPr>
+                  <a:defRPr sz="1800"/>
+                </a:lvl2pPr>
+              </a:lstStyle>
               <a:p>
                 <a:r>
                   <a:rPr sz="1800" dirty="0"/>
@@ -21497,7 +21553,14 @@
             <p:spPr/>
             <p:txBody>
               <a:bodyPr/>
-              <a:lstStyle/>
+              <a:lstStyle>
+                <a:lvl1pPr>
+                  <a:defRPr sz="1800"/>
+                </a:lvl1pPr>
+                <a:lvl2pPr>
+                  <a:defRPr sz="1800"/>
+                </a:lvl2pPr>
+              </a:lstStyle>
               <a:p>
                 <a:r>
                   <a:rPr sz="1800" dirty="0"/>
@@ -22203,7 +22266,14 @@
             <p:spPr/>
             <p:txBody>
               <a:bodyPr/>
-              <a:lstStyle/>
+              <a:lstStyle>
+                <a:lvl1pPr>
+                  <a:defRPr sz="1800"/>
+                </a:lvl1pPr>
+                <a:lvl2pPr>
+                  <a:defRPr sz="1800"/>
+                </a:lvl2pPr>
+              </a:lstStyle>
               <a:p>
                 <a:r>
                   <a:rPr sz="1800" dirty="0"/>
@@ -23905,7 +23975,14 @@
             <p:spPr/>
             <p:txBody>
               <a:bodyPr/>
-              <a:lstStyle/>
+              <a:lstStyle>
+                <a:lvl1pPr>
+                  <a:defRPr sz="1800"/>
+                </a:lvl1pPr>
+                <a:lvl2pPr>
+                  <a:defRPr sz="1800"/>
+                </a:lvl2pPr>
+              </a:lstStyle>
               <a:p>
                 <a:r>
                   <a:rPr sz="1800" dirty="0"/>
@@ -24291,7 +24368,14 @@
             <p:spPr/>
             <p:txBody>
               <a:bodyPr/>
-              <a:lstStyle/>
+              <a:lstStyle>
+                <a:lvl1pPr>
+                  <a:defRPr sz="1800"/>
+                </a:lvl1pPr>
+                <a:lvl2pPr>
+                  <a:defRPr sz="1800"/>
+                </a:lvl2pPr>
+              </a:lstStyle>
               <a:p>
                 <a:r>
                   <a:rPr sz="1800" dirty="0"/>
@@ -25648,7 +25732,14 @@
             <p:spPr/>
             <p:txBody>
               <a:bodyPr/>
-              <a:lstStyle/>
+              <a:lstStyle>
+                <a:lvl1pPr>
+                  <a:defRPr sz="1800"/>
+                </a:lvl1pPr>
+                <a:lvl2pPr>
+                  <a:defRPr sz="1800"/>
+                </a:lvl2pPr>
+              </a:lstStyle>
               <a:p>
                 <a:r>
                   <a:rPr sz="1800" dirty="0"/>
@@ -27147,7 +27238,14 @@
             <p:spPr/>
             <p:txBody>
               <a:bodyPr/>
-              <a:lstStyle/>
+              <a:lstStyle>
+                <a:lvl1pPr>
+                  <a:defRPr sz="1800"/>
+                </a:lvl1pPr>
+                <a:lvl2pPr>
+                  <a:defRPr sz="1800"/>
+                </a:lvl2pPr>
+              </a:lstStyle>
               <a:p>
                 <a:r>
                   <a:rPr sz="1800" dirty="0"/>

--- a/presentation/0909_15_Hash-Functions-and-Lamport-OTS.pptx
+++ b/presentation/0909_15_Hash-Functions-and-Lamport-OTS.pptx
@@ -14,7 +14,6 @@
     <p:sldId id="259" r:id="rId5"/>
     <p:sldId id="260" r:id="rId6"/>
     <p:sldId id="261" r:id="rId7"/>
-    <p:sldId id="262" r:id="rId8"/>
     <p:sldId id="263" r:id="rId9"/>
     <p:sldId id="264" r:id="rId10"/>
     <p:sldId id="265" r:id="rId11"/>
@@ -23,11 +22,8 @@
     <p:sldId id="268" r:id="rId14"/>
     <p:sldId id="269" r:id="rId15"/>
     <p:sldId id="270" r:id="rId16"/>
-    <p:sldId id="271" r:id="rId17"/>
     <p:sldId id="272" r:id="rId18"/>
     <p:sldId id="273" r:id="rId19"/>
-    <p:sldId id="274" r:id="rId20"/>
-    <p:sldId id="275" r:id="rId21"/>
     <p:sldId id="276" r:id="rId22"/>
     <p:sldId id="277" r:id="rId23"/>
     <p:sldId id="278" r:id="rId24"/>
@@ -13317,707 +13313,6 @@
 </p:sld>
 </file>
 
-<file path=ppt/slides/slide16.xml><?xml version="1.0" encoding="utf-8"?>
-<p:sld xmlns:a="http://schemas.openxmlformats.org/drawingml/2006/main" xmlns:r="http://schemas.openxmlformats.org/officeDocument/2006/relationships" xmlns:p="http://schemas.openxmlformats.org/presentationml/2006/main">
-  <p:cSld>
-    <p:spTree>
-      <p:nvGrpSpPr>
-        <p:cNvPr id="1" name=""/>
-        <p:cNvGrpSpPr/>
-        <p:nvPr/>
-      </p:nvGrpSpPr>
-      <p:grpSpPr>
-        <a:xfrm>
-          <a:off x="0" y="0"/>
-          <a:ext cx="0" cy="0"/>
-          <a:chOff x="0" y="0"/>
-          <a:chExt cx="0" cy="0"/>
-        </a:xfrm>
-      </p:grpSpPr>
-      <p:sp>
-        <p:nvSpPr>
-          <p:cNvPr id="2" name="Title 1"/>
-          <p:cNvSpPr>
-            <a:spLocks noGrp="1"/>
-          </p:cNvSpPr>
-          <p:nvPr>
-            <p:ph type="title"/>
-          </p:nvPr>
-        </p:nvSpPr>
-        <p:spPr/>
-        <p:txBody>
-          <a:bodyPr/>
-          <a:lstStyle/>
-          <a:p>
-            <a:r>
-              <a:rPr dirty="0"/>
-              <a:t>숫자 예제: 단일 비트 서명</a:t>
-            </a:r>
-          </a:p>
-        </p:txBody>
-      </p:sp>
-      <mc:AlternateContent xmlns:mc="http://schemas.openxmlformats.org/markup-compatibility/2006">
-        <mc:Choice xmlns:a14="http://schemas.microsoft.com/office/drawing/2010/main" Requires="a14">
-          <p:sp>
-            <p:nvSpPr>
-              <p:cNvPr id="3" name="Content Placeholder 2"/>
-              <p:cNvSpPr>
-                <a:spLocks noGrp="1"/>
-              </p:cNvSpPr>
-              <p:nvPr>
-                <p:ph idx="1"/>
-              </p:nvPr>
-            </p:nvSpPr>
-            <p:spPr/>
-            <p:txBody>
-              <a:bodyPr/>
-              <a:lstStyle>
-                <a:lvl1pPr>
-                  <a:defRPr sz="1800"/>
-                </a:lvl1pPr>
-                <a:lvl2pPr>
-                  <a:defRPr sz="1800"/>
-                </a:lvl2pPr>
-              </a:lstStyle>
-              <a:p>
-                <a:r>
-                  <a:rPr sz="1800" dirty="0"/>
-                  <a:t>G(x)는 SHA-256(x)의 첫 바이트로 정의한 </a:t>
-                </a:r>
-                <a14:m>
-                  <m:oMath xmlns:m="http://schemas.openxmlformats.org/officeDocument/2006/math">
-                    <m:r>
-                      <a:rPr lang="en-US" i="1">
-                        <a:latin typeface="Cambria Math"/>
-                      </a:rPr>
-                      <m:t>𝑛</m:t>
-                    </m:r>
-                    <m:r>
-                      <a:rPr lang="en-US" i="1">
-                        <a:latin typeface="Cambria Math"/>
-                      </a:rPr>
-                      <m:t>=8</m:t>
-                    </m:r>
-                  </m:oMath>
-                </a14:m>
-                <a:r>
-                  <a:rPr sz="1800" dirty="0"/>
-                  <a:t> 토이 버전으로 시연</a:t>
-                </a:r>
-              </a:p>
-              <a:p>
-                <a:r>
-                  <a:rPr sz="1800" dirty="0"/>
-                  <a:t>Alice가 </a:t>
-                </a:r>
-                <a14:m>
-                  <m:oMath xmlns:m="http://schemas.openxmlformats.org/officeDocument/2006/math">
-                    <m:sSub>
-                      <m:sSubPr>
-                        <m:ctrlPr>
-                          <a:rPr lang="en-US" i="1">
-                            <a:latin typeface="Cambria Math" panose="02040503050406030204" pitchFamily="18" charset="0"/>
-                          </a:rPr>
-                        </m:ctrlPr>
-                      </m:sSubPr>
-                      <m:e>
-                        <m:r>
-                          <a:rPr lang="en-US" i="1">
-                            <a:latin typeface="Cambria Math"/>
-                          </a:rPr>
-                          <m:t>𝑥</m:t>
-                        </m:r>
-                      </m:e>
-                      <m:sub>
-                        <m:r>
-                          <a:rPr lang="en-US" i="1">
-                            <a:latin typeface="Cambria Math"/>
-                          </a:rPr>
-                          <m:t>0</m:t>
-                        </m:r>
-                      </m:sub>
-                    </m:sSub>
-                  </m:oMath>
-                </a14:m>
-                <a:r>
-                  <a:rPr sz="1800" dirty="0"/>
-                  <a:t> = 0x3A, </a:t>
-                </a:r>
-                <a14:m>
-                  <m:oMath xmlns:m="http://schemas.openxmlformats.org/officeDocument/2006/math">
-                    <m:sSub>
-                      <m:sSubPr>
-                        <m:ctrlPr>
-                          <a:rPr lang="en-US" i="1">
-                            <a:latin typeface="Cambria Math" panose="02040503050406030204" pitchFamily="18" charset="0"/>
-                          </a:rPr>
-                        </m:ctrlPr>
-                      </m:sSubPr>
-                      <m:e>
-                        <m:r>
-                          <a:rPr lang="en-US" i="1">
-                            <a:latin typeface="Cambria Math"/>
-                          </a:rPr>
-                          <m:t>𝑥</m:t>
-                        </m:r>
-                      </m:e>
-                      <m:sub>
-                        <m:r>
-                          <a:rPr lang="en-US" i="1">
-                            <a:latin typeface="Cambria Math"/>
-                          </a:rPr>
-                          <m:t>1</m:t>
-                        </m:r>
-                      </m:sub>
-                    </m:sSub>
-                  </m:oMath>
-                </a14:m>
-                <a:r>
-                  <a:rPr sz="1800" dirty="0"/>
-                  <a:t> = 0x7E를 선택</a:t>
-                </a:r>
-              </a:p>
-              <a:p>
-                <a:r>
-                  <a:rPr sz="1800" dirty="0"/>
-                  <a:t>해시 계산: </a:t>
-                </a:r>
-                <a14:m>
-                  <m:oMath xmlns:m="http://schemas.openxmlformats.org/officeDocument/2006/math">
-                    <m:sSub>
-                      <m:sSubPr>
-                        <m:ctrlPr>
-                          <a:rPr lang="en-US" i="1">
-                            <a:latin typeface="Cambria Math" panose="02040503050406030204" pitchFamily="18" charset="0"/>
-                          </a:rPr>
-                        </m:ctrlPr>
-                      </m:sSubPr>
-                      <m:e>
-                        <m:r>
-                          <a:rPr lang="en-US" i="1">
-                            <a:latin typeface="Cambria Math"/>
-                          </a:rPr>
-                          <m:t>𝑦</m:t>
-                        </m:r>
-                      </m:e>
-                      <m:sub>
-                        <m:r>
-                          <a:rPr lang="en-US" i="1">
-                            <a:latin typeface="Cambria Math"/>
-                          </a:rPr>
-                          <m:t>0</m:t>
-                        </m:r>
-                      </m:sub>
-                    </m:sSub>
-                    <m:r>
-                      <a:rPr lang="en-US" i="1">
-                        <a:latin typeface="Cambria Math"/>
-                      </a:rPr>
-                      <m:t>=</m:t>
-                    </m:r>
-                    <m:r>
-                      <a:rPr lang="en-US" i="1">
-                        <a:latin typeface="Cambria Math"/>
-                      </a:rPr>
-                      <m:t>𝐺</m:t>
-                    </m:r>
-                    <m:r>
-                      <a:rPr lang="en-US" i="1">
-                        <a:latin typeface="Cambria Math"/>
-                      </a:rPr>
-                      <m:t>(</m:t>
-                    </m:r>
-                    <m:sSub>
-                      <m:sSubPr>
-                        <m:ctrlPr>
-                          <a:rPr lang="en-US" i="1">
-                            <a:latin typeface="Cambria Math" panose="02040503050406030204" pitchFamily="18" charset="0"/>
-                          </a:rPr>
-                        </m:ctrlPr>
-                      </m:sSubPr>
-                      <m:e>
-                        <m:r>
-                          <a:rPr lang="en-US" i="1">
-                            <a:latin typeface="Cambria Math"/>
-                          </a:rPr>
-                          <m:t>𝑥</m:t>
-                        </m:r>
-                      </m:e>
-                      <m:sub>
-                        <m:r>
-                          <a:rPr lang="en-US" i="1">
-                            <a:latin typeface="Cambria Math"/>
-                          </a:rPr>
-                          <m:t>0</m:t>
-                        </m:r>
-                      </m:sub>
-                    </m:sSub>
-                    <m:r>
-                      <a:rPr lang="en-US" i="1">
-                        <a:latin typeface="Cambria Math"/>
-                      </a:rPr>
-                      <m:t>)</m:t>
-                    </m:r>
-                  </m:oMath>
-                </a14:m>
-                <a:r>
-                  <a:rPr sz="1800" dirty="0"/>
-                  <a:t> = 0xE7, </a:t>
-                </a:r>
-                <a14:m>
-                  <m:oMath xmlns:m="http://schemas.openxmlformats.org/officeDocument/2006/math">
-                    <m:sSub>
-                      <m:sSubPr>
-                        <m:ctrlPr>
-                          <a:rPr lang="en-US" i="1">
-                            <a:latin typeface="Cambria Math" panose="02040503050406030204" pitchFamily="18" charset="0"/>
-                          </a:rPr>
-                        </m:ctrlPr>
-                      </m:sSubPr>
-                      <m:e>
-                        <m:r>
-                          <a:rPr lang="en-US" i="1">
-                            <a:latin typeface="Cambria Math"/>
-                          </a:rPr>
-                          <m:t>𝑦</m:t>
-                        </m:r>
-                      </m:e>
-                      <m:sub>
-                        <m:r>
-                          <a:rPr lang="en-US" i="1">
-                            <a:latin typeface="Cambria Math"/>
-                          </a:rPr>
-                          <m:t>1</m:t>
-                        </m:r>
-                      </m:sub>
-                    </m:sSub>
-                    <m:r>
-                      <a:rPr lang="en-US" i="1">
-                        <a:latin typeface="Cambria Math"/>
-                      </a:rPr>
-                      <m:t>=</m:t>
-                    </m:r>
-                    <m:r>
-                      <a:rPr lang="en-US" i="1">
-                        <a:latin typeface="Cambria Math"/>
-                      </a:rPr>
-                      <m:t>𝐺</m:t>
-                    </m:r>
-                    <m:r>
-                      <a:rPr lang="en-US" i="1">
-                        <a:latin typeface="Cambria Math"/>
-                      </a:rPr>
-                      <m:t>(</m:t>
-                    </m:r>
-                    <m:sSub>
-                      <m:sSubPr>
-                        <m:ctrlPr>
-                          <a:rPr lang="en-US" i="1">
-                            <a:latin typeface="Cambria Math" panose="02040503050406030204" pitchFamily="18" charset="0"/>
-                          </a:rPr>
-                        </m:ctrlPr>
-                      </m:sSubPr>
-                      <m:e>
-                        <m:r>
-                          <a:rPr lang="en-US" i="1">
-                            <a:latin typeface="Cambria Math"/>
-                          </a:rPr>
-                          <m:t>𝑥</m:t>
-                        </m:r>
-                      </m:e>
-                      <m:sub>
-                        <m:r>
-                          <a:rPr lang="en-US" i="1">
-                            <a:latin typeface="Cambria Math"/>
-                          </a:rPr>
-                          <m:t>1</m:t>
-                        </m:r>
-                      </m:sub>
-                    </m:sSub>
-                    <m:r>
-                      <a:rPr lang="en-US" i="1">
-                        <a:latin typeface="Cambria Math"/>
-                      </a:rPr>
-                      <m:t>)</m:t>
-                    </m:r>
-                  </m:oMath>
-                </a14:m>
-                <a:r>
-                  <a:rPr sz="1800" dirty="0"/>
-                  <a:t> = 0x7A → 공개키 </a:t>
-                </a:r>
-                <a14:m>
-                  <m:oMath xmlns:m="http://schemas.openxmlformats.org/officeDocument/2006/math">
-                    <m:r>
-                      <a:rPr lang="en-US" i="1">
-                        <a:latin typeface="Cambria Math"/>
-                      </a:rPr>
-                      <m:t>𝑌</m:t>
-                    </m:r>
-                    <m:r>
-                      <a:rPr lang="en-US" i="1">
-                        <a:latin typeface="Cambria Math"/>
-                      </a:rPr>
-                      <m:t>=(</m:t>
-                    </m:r>
-                    <m:sSub>
-                      <m:sSubPr>
-                        <m:ctrlPr>
-                          <a:rPr lang="en-US" i="1">
-                            <a:latin typeface="Cambria Math" panose="02040503050406030204" pitchFamily="18" charset="0"/>
-                          </a:rPr>
-                        </m:ctrlPr>
-                      </m:sSubPr>
-                      <m:e>
-                        <m:r>
-                          <a:rPr lang="en-US" i="1">
-                            <a:latin typeface="Cambria Math"/>
-                          </a:rPr>
-                          <m:t>𝑦</m:t>
-                        </m:r>
-                      </m:e>
-                      <m:sub>
-                        <m:r>
-                          <a:rPr lang="en-US" i="1">
-                            <a:latin typeface="Cambria Math"/>
-                          </a:rPr>
-                          <m:t>0</m:t>
-                        </m:r>
-                      </m:sub>
-                    </m:sSub>
-                    <m:r>
-                      <a:rPr lang="en-US" i="1">
-                        <a:latin typeface="Cambria Math"/>
-                      </a:rPr>
-                      <m:t>,</m:t>
-                    </m:r>
-                    <m:sSub>
-                      <m:sSubPr>
-                        <m:ctrlPr>
-                          <a:rPr lang="en-US" i="1">
-                            <a:latin typeface="Cambria Math" panose="02040503050406030204" pitchFamily="18" charset="0"/>
-                          </a:rPr>
-                        </m:ctrlPr>
-                      </m:sSubPr>
-                      <m:e>
-                        <m:r>
-                          <a:rPr lang="en-US" i="1">
-                            <a:latin typeface="Cambria Math"/>
-                          </a:rPr>
-                          <m:t>𝑦</m:t>
-                        </m:r>
-                      </m:e>
-                      <m:sub>
-                        <m:r>
-                          <a:rPr lang="en-US" i="1">
-                            <a:latin typeface="Cambria Math"/>
-                          </a:rPr>
-                          <m:t>1</m:t>
-                        </m:r>
-                      </m:sub>
-                    </m:sSub>
-                    <m:r>
-                      <a:rPr lang="en-US" i="1">
-                        <a:latin typeface="Cambria Math"/>
-                      </a:rPr>
-                      <m:t>)</m:t>
-                    </m:r>
-                  </m:oMath>
-                </a14:m>
-                <a:r>
-                  <a:rPr sz="1800" dirty="0"/>
-                  <a:t> = (0xE7, 0x7A)</a:t>
-                </a:r>
-              </a:p>
-              <a:p>
-                <a:r>
-                  <a:rPr sz="1800" dirty="0"/>
-                  <a:t>비트 </a:t>
-                </a:r>
-                <a14:m>
-                  <m:oMath xmlns:m="http://schemas.openxmlformats.org/officeDocument/2006/math">
-                    <m:r>
-                      <a:rPr lang="en-US" i="1">
-                        <a:latin typeface="Cambria Math"/>
-                      </a:rPr>
-                      <m:t>𝑚</m:t>
-                    </m:r>
-                    <m:r>
-                      <a:rPr lang="en-US" i="1">
-                        <a:latin typeface="Cambria Math"/>
-                      </a:rPr>
-                      <m:t>=0</m:t>
-                    </m:r>
-                  </m:oMath>
-                </a14:m>
-                <a:r>
-                  <a:rPr sz="1800" dirty="0"/>
-                  <a:t>을 서명 → </a:t>
-                </a:r>
-                <a14:m>
-                  <m:oMath xmlns:m="http://schemas.openxmlformats.org/officeDocument/2006/math">
-                    <m:r>
-                      <a:rPr lang="en-US" i="1">
-                        <a:latin typeface="Cambria Math"/>
-                      </a:rPr>
-                      <m:t>𝑆</m:t>
-                    </m:r>
-                    <m:r>
-                      <a:rPr lang="en-US" i="1">
-                        <a:latin typeface="Cambria Math"/>
-                      </a:rPr>
-                      <m:t>=</m:t>
-                    </m:r>
-                    <m:sSub>
-                      <m:sSubPr>
-                        <m:ctrlPr>
-                          <a:rPr lang="en-US" i="1">
-                            <a:latin typeface="Cambria Math" panose="02040503050406030204" pitchFamily="18" charset="0"/>
-                          </a:rPr>
-                        </m:ctrlPr>
-                      </m:sSubPr>
-                      <m:e>
-                        <m:r>
-                          <a:rPr lang="en-US" i="1">
-                            <a:latin typeface="Cambria Math"/>
-                          </a:rPr>
-                          <m:t>𝑥</m:t>
-                        </m:r>
-                      </m:e>
-                      <m:sub>
-                        <m:r>
-                          <a:rPr lang="en-US" i="1">
-                            <a:latin typeface="Cambria Math"/>
-                          </a:rPr>
-                          <m:t>0</m:t>
-                        </m:r>
-                      </m:sub>
-                    </m:sSub>
-                  </m:oMath>
-                </a14:m>
-                <a:r>
-                  <a:rPr sz="1800" dirty="0"/>
-                  <a:t> = 0x3A 공개</a:t>
-                </a:r>
-              </a:p>
-              <a:p>
-                <a:r>
-                  <a:rPr sz="1800" dirty="0"/>
-                  <a:t>검증: </a:t>
-                </a:r>
-                <a14:m>
-                  <m:oMath xmlns:m="http://schemas.openxmlformats.org/officeDocument/2006/math">
-                    <m:r>
-                      <a:rPr lang="en-US" i="1">
-                        <a:latin typeface="Cambria Math"/>
-                      </a:rPr>
-                      <m:t>𝐺</m:t>
-                    </m:r>
-                    <m:r>
-                      <a:rPr lang="en-US" i="1">
-                        <a:latin typeface="Cambria Math"/>
-                      </a:rPr>
-                      <m:t>(</m:t>
-                    </m:r>
-                    <m:r>
-                      <a:rPr lang="en-US" i="1">
-                        <a:latin typeface="Cambria Math"/>
-                      </a:rPr>
-                      <m:t>𝑆</m:t>
-                    </m:r>
-                    <m:r>
-                      <a:rPr lang="en-US" i="1">
-                        <a:latin typeface="Cambria Math"/>
-                      </a:rPr>
-                      <m:t>)</m:t>
-                    </m:r>
-                  </m:oMath>
-                </a14:m>
-                <a:r>
-                  <a:rPr sz="1800" dirty="0"/>
-                  <a:t> = 0xE7 = </a:t>
-                </a:r>
-                <a14:m>
-                  <m:oMath xmlns:m="http://schemas.openxmlformats.org/officeDocument/2006/math">
-                    <m:sSub>
-                      <m:sSubPr>
-                        <m:ctrlPr>
-                          <a:rPr lang="en-US" i="1">
-                            <a:latin typeface="Cambria Math" panose="02040503050406030204" pitchFamily="18" charset="0"/>
-                          </a:rPr>
-                        </m:ctrlPr>
-                      </m:sSubPr>
-                      <m:e>
-                        <m:r>
-                          <a:rPr lang="en-US" i="1">
-                            <a:latin typeface="Cambria Math"/>
-                          </a:rPr>
-                          <m:t>𝑦</m:t>
-                        </m:r>
-                      </m:e>
-                      <m:sub>
-                        <m:r>
-                          <a:rPr lang="en-US" i="1">
-                            <a:latin typeface="Cambria Math"/>
-                          </a:rPr>
-                          <m:t>0</m:t>
-                        </m:r>
-                      </m:sub>
-                    </m:sSub>
-                  </m:oMath>
-                </a14:m>
-                <a:r>
-                  <a:rPr sz="1800" dirty="0"/>
-                  <a:t> → 수락 (만약 </a:t>
-                </a:r>
-                <a14:m>
-                  <m:oMath xmlns:m="http://schemas.openxmlformats.org/officeDocument/2006/math">
-                    <m:r>
-                      <a:rPr lang="en-US" i="1">
-                        <a:latin typeface="Cambria Math"/>
-                      </a:rPr>
-                      <m:t>𝑆</m:t>
-                    </m:r>
-                  </m:oMath>
-                </a14:m>
-                <a:r>
-                  <a:rPr sz="1800" dirty="0"/>
-                  <a:t> = 0x7E였다면 </a:t>
-                </a:r>
-                <a14:m>
-                  <m:oMath xmlns:m="http://schemas.openxmlformats.org/officeDocument/2006/math">
-                    <m:r>
-                      <a:rPr lang="en-US" i="1">
-                        <a:latin typeface="Cambria Math"/>
-                      </a:rPr>
-                      <m:t>𝐺</m:t>
-                    </m:r>
-                    <m:r>
-                      <a:rPr lang="en-US" i="1">
-                        <a:latin typeface="Cambria Math"/>
-                      </a:rPr>
-                      <m:t>(</m:t>
-                    </m:r>
-                    <m:r>
-                      <a:rPr lang="en-US" i="1">
-                        <a:latin typeface="Cambria Math"/>
-                      </a:rPr>
-                      <m:t>𝑆</m:t>
-                    </m:r>
-                    <m:r>
-                      <a:rPr lang="en-US" i="1">
-                        <a:latin typeface="Cambria Math"/>
-                      </a:rPr>
-                      <m:t>)</m:t>
-                    </m:r>
-                  </m:oMath>
-                </a14:m>
-                <a:r>
-                  <a:rPr sz="1800" dirty="0"/>
-                  <a:t> = 0x7A ≠ </a:t>
-                </a:r>
-                <a14:m>
-                  <m:oMath xmlns:m="http://schemas.openxmlformats.org/officeDocument/2006/math">
-                    <m:sSub>
-                      <m:sSubPr>
-                        <m:ctrlPr>
-                          <a:rPr lang="en-US" i="1">
-                            <a:latin typeface="Cambria Math" panose="02040503050406030204" pitchFamily="18" charset="0"/>
-                          </a:rPr>
-                        </m:ctrlPr>
-                      </m:sSubPr>
-                      <m:e>
-                        <m:r>
-                          <a:rPr lang="en-US" i="1">
-                            <a:latin typeface="Cambria Math"/>
-                          </a:rPr>
-                          <m:t>𝑦</m:t>
-                        </m:r>
-                      </m:e>
-                      <m:sub>
-                        <m:r>
-                          <a:rPr lang="en-US" i="1">
-                            <a:latin typeface="Cambria Math"/>
-                          </a:rPr>
-                          <m:t>0</m:t>
-                        </m:r>
-                      </m:sub>
-                    </m:sSub>
-                  </m:oMath>
-                </a14:m>
-                <a:r>
-                  <a:rPr sz="1800" dirty="0"/>
-                  <a:t> → 기각)</a:t>
-                </a:r>
-              </a:p>
-            </p:txBody>
-          </p:sp>
-        </mc:Choice>
-        <mc:Fallback>
-          <p:sp>
-            <p:nvSpPr>
-              <p:cNvPr id="3" name="Content Placeholder 2"/>
-              <p:cNvSpPr>
-                <a:spLocks noGrp="1" noRot="1" noChangeAspect="1" noMove="1" noResize="1" noEditPoints="1" noAdjustHandles="1" noChangeArrowheads="1" noChangeShapeType="1" noTextEdit="1"/>
-              </p:cNvSpPr>
-              <p:nvPr>
-                <p:ph idx="1"/>
-              </p:nvPr>
-            </p:nvSpPr>
-            <p:spPr>
-              <a:blipFill>
-                <a:blip r:embed="rId2"/>
-                <a:stretch>
-                  <a:fillRect l="-232"/>
-                </a:stretch>
-              </a:blipFill>
-            </p:spPr>
-            <p:txBody>
-              <a:bodyPr/>
-              <a:lstStyle/>
-              <a:p>
-                <a:r>
-                  <a:rPr lang="ko-KR" altLang="en-US">
-                    <a:noFill/>
-                  </a:rPr>
-                  <a:t> </a:t>
-                </a:r>
-              </a:p>
-            </p:txBody>
-          </p:sp>
-        </mc:Fallback>
-      </mc:AlternateContent>
-      <p:sp>
-        <p:nvSpPr>
-          <p:cNvPr id="4" name="슬라이드 번호 개체 틀"/>
-          <p:cNvSpPr>
-            <a:spLocks noGrp="1"/>
-          </p:cNvSpPr>
-          <p:nvPr>
-            <p:ph type="sldNum" sz="quarter" idx="12"/>
-          </p:nvPr>
-        </p:nvSpPr>
-        <p:spPr/>
-        <p:txBody>
-          <a:bodyPr/>
-          <a:lstStyle/>
-          <a:p>
-            <a:fld id="{4438A2D4-3867-488E-A04E-7BFFCAED45A6}" type="slidenum">
-              <a:rPr lang="ko-KR" altLang="en-US" smtClean="0"/>
-              <a:t>16</a:t>
-            </a:fld>
-            <a:endParaRPr lang="ko-KR" altLang="en-US" dirty="0"/>
-          </a:p>
-        </p:txBody>
-      </p:sp>
-    </p:spTree>
-  </p:cSld>
-  <p:clrMapOvr>
-    <a:masterClrMapping/>
-  </p:clrMapOvr>
-</p:sld>
-</file>
-
 <file path=ppt/slides/slide17.xml><?xml version="1.0" encoding="utf-8"?>
 <p:sld xmlns:a="http://schemas.openxmlformats.org/drawingml/2006/main" xmlns:r="http://schemas.openxmlformats.org/officeDocument/2006/relationships" xmlns:p="http://schemas.openxmlformats.org/presentationml/2006/main">
   <p:cSld>
@@ -15207,2767 +14502,6 @@
 </p:sld>
 </file>
 
-<file path=ppt/slides/slide19.xml><?xml version="1.0" encoding="utf-8"?>
-<p:sld xmlns:a="http://schemas.openxmlformats.org/drawingml/2006/main" xmlns:r="http://schemas.openxmlformats.org/officeDocument/2006/relationships" xmlns:p="http://schemas.openxmlformats.org/presentationml/2006/main">
-  <p:cSld>
-    <p:spTree>
-      <p:nvGrpSpPr>
-        <p:cNvPr id="1" name=""/>
-        <p:cNvGrpSpPr/>
-        <p:nvPr/>
-      </p:nvGrpSpPr>
-      <p:grpSpPr>
-        <a:xfrm>
-          <a:off x="0" y="0"/>
-          <a:ext cx="0" cy="0"/>
-          <a:chOff x="0" y="0"/>
-          <a:chExt cx="0" cy="0"/>
-        </a:xfrm>
-      </p:grpSpPr>
-      <p:sp>
-        <p:nvSpPr>
-          <p:cNvPr id="2" name="Title 1"/>
-          <p:cNvSpPr>
-            <a:spLocks noGrp="1"/>
-          </p:cNvSpPr>
-          <p:nvPr>
-            <p:ph type="title"/>
-          </p:nvPr>
-        </p:nvSpPr>
-        <p:spPr/>
-        <p:txBody>
-          <a:bodyPr/>
-          <a:lstStyle/>
-          <a:p>
-            <a:r>
-              <a:rPr dirty="0"/>
-              <a:t>숫자 예제: 키 생성 결과 (n=8)</a:t>
-            </a:r>
-          </a:p>
-        </p:txBody>
-      </p:sp>
-      <mc:AlternateContent xmlns:mc="http://schemas.openxmlformats.org/markup-compatibility/2006">
-        <mc:Choice xmlns:a14="http://schemas.microsoft.com/office/drawing/2010/main" Requires="a14">
-          <p:sp>
-            <p:nvSpPr>
-              <p:cNvPr id="3" name="Content Placeholder 2"/>
-              <p:cNvSpPr>
-                <a:spLocks noGrp="1"/>
-              </p:cNvSpPr>
-              <p:nvPr>
-                <p:ph idx="1"/>
-              </p:nvPr>
-            </p:nvSpPr>
-            <p:spPr/>
-            <p:txBody>
-              <a:bodyPr/>
-              <a:lstStyle>
-                <a:lvl1pPr>
-                  <a:defRPr sz="1800"/>
-                </a:lvl1pPr>
-                <a:lvl2pPr>
-                  <a:defRPr sz="1800"/>
-                </a:lvl2pPr>
-              </a:lstStyle>
-              <a:p>
-                <a:r>
-                  <a:rPr sz="1800" dirty="0"/>
-                  <a:t>앞서와 같은 토이 함수(G, H 모두 SHA-256의 첫 바이트)로 </a:t>
-                </a:r>
-                <a14:m>
-                  <m:oMath xmlns:m="http://schemas.openxmlformats.org/officeDocument/2006/math">
-                    <m:r>
-                      <a:rPr lang="en-US" i="1">
-                        <a:latin typeface="Cambria Math"/>
-                      </a:rPr>
-                      <m:t>𝑛</m:t>
-                    </m:r>
-                    <m:r>
-                      <a:rPr lang="en-US" i="1">
-                        <a:latin typeface="Cambria Math"/>
-                      </a:rPr>
-                      <m:t>=8</m:t>
-                    </m:r>
-                  </m:oMath>
-                </a14:m>
-                <a:r>
-                  <a:rPr sz="1800" dirty="0"/>
-                  <a:t> 예제를 구성</a:t>
-                </a:r>
-              </a:p>
-              <a:p>
-                <a:r>
-                  <a:rPr sz="1800" dirty="0"/>
-                  <a:t>원래는 완전히 무작위여야 하지만, 재현 가능하도록 </a:t>
-                </a:r>
-                <a14:m>
-                  <m:oMath xmlns:m="http://schemas.openxmlformats.org/officeDocument/2006/math">
-                    <m:sSub>
-                      <m:sSubPr>
-                        <m:ctrlPr>
-                          <a:rPr lang="en-US" i="1">
-                            <a:latin typeface="Cambria Math" panose="02040503050406030204" pitchFamily="18" charset="0"/>
-                          </a:rPr>
-                        </m:ctrlPr>
-                      </m:sSubPr>
-                      <m:e>
-                        <m:r>
-                          <a:rPr lang="en-US" i="1">
-                            <a:latin typeface="Cambria Math"/>
-                          </a:rPr>
-                          <m:t>𝑥</m:t>
-                        </m:r>
-                      </m:e>
-                      <m:sub>
-                        <m:r>
-                          <a:rPr lang="en-US" i="1">
-                            <a:latin typeface="Cambria Math"/>
-                          </a:rPr>
-                          <m:t>𝑖</m:t>
-                        </m:r>
-                        <m:r>
-                          <a:rPr lang="en-US" i="1">
-                            <a:latin typeface="Cambria Math"/>
-                          </a:rPr>
-                          <m:t>,</m:t>
-                        </m:r>
-                        <m:r>
-                          <a:rPr lang="en-US" i="1">
-                            <a:latin typeface="Cambria Math"/>
-                          </a:rPr>
-                          <m:t>𝑗</m:t>
-                        </m:r>
-                      </m:sub>
-                    </m:sSub>
-                    <m:r>
-                      <a:rPr lang="en-US" i="1">
-                        <a:latin typeface="Cambria Math"/>
-                      </a:rPr>
-                      <m:t>=100</m:t>
-                    </m:r>
-                    <m:r>
-                      <a:rPr lang="en-US" i="1">
-                        <a:latin typeface="Cambria Math"/>
-                      </a:rPr>
-                      <m:t>𝑖</m:t>
-                    </m:r>
-                    <m:r>
-                      <a:rPr lang="en-US" i="1">
-                        <a:latin typeface="Cambria Math"/>
-                      </a:rPr>
-                      <m:t>+</m:t>
-                    </m:r>
-                    <m:r>
-                      <a:rPr lang="en-US" i="1">
-                        <a:latin typeface="Cambria Math"/>
-                      </a:rPr>
-                      <m:t>𝑗</m:t>
-                    </m:r>
-                  </m:oMath>
-                </a14:m>
-                <a:r>
-                  <a:rPr sz="1800" dirty="0"/>
-                  <a:t>(1바이트)로 고정</a:t>
-                </a:r>
-              </a:p>
-            </p:txBody>
-          </p:sp>
-        </mc:Choice>
-        <mc:Fallback>
-          <p:sp>
-            <p:nvSpPr>
-              <p:cNvPr id="3" name="Content Placeholder 2"/>
-              <p:cNvSpPr>
-                <a:spLocks noGrp="1" noRot="1" noChangeAspect="1" noMove="1" noResize="1" noEditPoints="1" noAdjustHandles="1" noChangeArrowheads="1" noChangeShapeType="1" noTextEdit="1"/>
-              </p:cNvSpPr>
-              <p:nvPr>
-                <p:ph idx="1"/>
-              </p:nvPr>
-            </p:nvSpPr>
-            <p:spPr>
-              <a:blipFill>
-                <a:blip r:embed="rId2"/>
-                <a:stretch>
-                  <a:fillRect l="-232"/>
-                </a:stretch>
-              </a:blipFill>
-            </p:spPr>
-            <p:txBody>
-              <a:bodyPr/>
-              <a:lstStyle/>
-              <a:p>
-                <a:r>
-                  <a:rPr lang="ko-KR" altLang="en-US">
-                    <a:noFill/>
-                  </a:rPr>
-                  <a:t> </a:t>
-                </a:r>
-              </a:p>
-            </p:txBody>
-          </p:sp>
-        </mc:Fallback>
-      </mc:AlternateContent>
-      <p:sp>
-        <p:nvSpPr>
-          <p:cNvPr id="4" name="슬라이드 번호 개체 틀"/>
-          <p:cNvSpPr>
-            <a:spLocks noGrp="1"/>
-          </p:cNvSpPr>
-          <p:nvPr>
-            <p:ph type="sldNum" sz="quarter" idx="12"/>
-          </p:nvPr>
-        </p:nvSpPr>
-        <p:spPr/>
-        <p:txBody>
-          <a:bodyPr/>
-          <a:lstStyle/>
-          <a:p>
-            <a:fld id="{4438A2D4-3867-488E-A04E-7BFFCAED45A6}" type="slidenum">
-              <a:rPr lang="ko-KR" altLang="en-US" smtClean="0"/>
-              <a:t>19</a:t>
-            </a:fld>
-            <a:endParaRPr lang="ko-KR" altLang="en-US" dirty="0"/>
-          </a:p>
-        </p:txBody>
-      </p:sp>
-      <p:graphicFrame>
-        <p:nvGraphicFramePr>
-          <p:cNvPr id="5" name="Table 4"/>
-          <p:cNvGraphicFramePr>
-            <a:graphicFrameLocks noGrp="1"/>
-          </p:cNvGraphicFramePr>
-          <p:nvPr>
-            <p:extLst>
-              <p:ext uri="{D42A27DB-BD31-4B8C-83A1-F6EECF244321}">
-                <p14:modId xmlns:p14="http://schemas.microsoft.com/office/powerpoint/2010/main" val="3652289788"/>
-              </p:ext>
-            </p:extLst>
-          </p:nvPr>
-        </p:nvGraphicFramePr>
-        <p:xfrm>
-          <a:off x="838200" y="2704571"/>
-          <a:ext cx="10515600" cy="3291840"/>
-        </p:xfrm>
-        <a:graphic>
-          <a:graphicData uri="http://schemas.openxmlformats.org/drawingml/2006/table">
-            <a:tbl>
-              <a:tblPr firstRow="1" bandRow="1">
-                <a:tableStyleId>{5C22544A-7EE6-4342-B048-85BDC9FD1C3A}</a:tableStyleId>
-              </a:tblPr>
-              <a:tblGrid>
-                <a:gridCol w="1209760">
-                  <a:extLst>
-                    <a:ext uri="{9D8B030D-6E8A-4147-A177-3AD203B41FA5}">
-                      <a16:colId xmlns:a16="http://schemas.microsoft.com/office/drawing/2014/main" val="20000"/>
-                    </a:ext>
-                  </a:extLst>
-                </a:gridCol>
-                <a:gridCol w="2326460">
-                  <a:extLst>
-                    <a:ext uri="{9D8B030D-6E8A-4147-A177-3AD203B41FA5}">
-                      <a16:colId xmlns:a16="http://schemas.microsoft.com/office/drawing/2014/main" val="20001"/>
-                    </a:ext>
-                  </a:extLst>
-                </a:gridCol>
-                <a:gridCol w="2326460">
-                  <a:extLst>
-                    <a:ext uri="{9D8B030D-6E8A-4147-A177-3AD203B41FA5}">
-                      <a16:colId xmlns:a16="http://schemas.microsoft.com/office/drawing/2014/main" val="20002"/>
-                    </a:ext>
-                  </a:extLst>
-                </a:gridCol>
-                <a:gridCol w="2326460">
-                  <a:extLst>
-                    <a:ext uri="{9D8B030D-6E8A-4147-A177-3AD203B41FA5}">
-                      <a16:colId xmlns:a16="http://schemas.microsoft.com/office/drawing/2014/main" val="20003"/>
-                    </a:ext>
-                  </a:extLst>
-                </a:gridCol>
-                <a:gridCol w="2326460">
-                  <a:extLst>
-                    <a:ext uri="{9D8B030D-6E8A-4147-A177-3AD203B41FA5}">
-                      <a16:colId xmlns:a16="http://schemas.microsoft.com/office/drawing/2014/main" val="20004"/>
-                    </a:ext>
-                  </a:extLst>
-                </a:gridCol>
-              </a:tblGrid>
-              <a:tr h="345440">
-                <a:tc>
-                  <a:txBody>
-                    <a:bodyPr/>
-                    <a:lstStyle/>
-                    <a:p>
-                      <a:pPr algn="ctr"/>
-                      <a:r>
-                        <a:rPr sz="1800" b="1" dirty="0">
-                          <a:solidFill>
-                            <a:schemeClr val="bg1"/>
-                          </a:solidFill>
-                        </a:rPr>
-                        <a:t>j</a:t>
-                      </a:r>
-                    </a:p>
-                  </a:txBody>
-                  <a:tcPr anchor="ctr">
-                    <a:lnL w="12700" cap="flat" cmpd="sng" algn="ctr">
-                      <a:solidFill>
-                        <a:schemeClr val="tx1"/>
-                      </a:solidFill>
-                      <a:prstDash val="solid"/>
-                      <a:round/>
-                      <a:headEnd type="none" w="med" len="med"/>
-                      <a:tailEnd type="none" w="med" len="med"/>
-                    </a:lnL>
-                    <a:lnR w="12700" cap="flat" cmpd="sng" algn="ctr">
-                      <a:solidFill>
-                        <a:schemeClr val="tx1"/>
-                      </a:solidFill>
-                      <a:prstDash val="solid"/>
-                      <a:round/>
-                      <a:headEnd type="none" w="med" len="med"/>
-                      <a:tailEnd type="none" w="med" len="med"/>
-                    </a:lnR>
-                    <a:lnT w="12700" cap="flat" cmpd="sng" algn="ctr">
-                      <a:solidFill>
-                        <a:schemeClr val="tx1"/>
-                      </a:solidFill>
-                      <a:prstDash val="solid"/>
-                      <a:round/>
-                      <a:headEnd type="none" w="med" len="med"/>
-                      <a:tailEnd type="none" w="med" len="med"/>
-                    </a:lnT>
-                    <a:lnB w="12700" cap="flat" cmpd="sng" algn="ctr">
-                      <a:solidFill>
-                        <a:schemeClr val="tx1"/>
-                      </a:solidFill>
-                      <a:prstDash val="solid"/>
-                      <a:round/>
-                      <a:headEnd type="none" w="med" len="med"/>
-                      <a:tailEnd type="none" w="med" len="med"/>
-                    </a:lnB>
-                    <a:solidFill>
-                      <a:schemeClr val="accent2"/>
-                    </a:solidFill>
-                  </a:tcPr>
-                </a:tc>
-                <a:tc>
-                  <a:txBody>
-                    <a:bodyPr/>
-                    <a:lstStyle/>
-                    <a:p>
-                      <a:pPr algn="ctr"/>
-                      <a:r>
-                        <a:rPr sz="1800" b="1" dirty="0">
-                          <a:solidFill>
-                            <a:schemeClr val="bg1"/>
-                          </a:solidFill>
-                        </a:rPr>
-                        <a:t>x</a:t>
-                      </a:r>
-                      <a:r>
-                        <a:rPr sz="1800" b="1" baseline="-25000" dirty="0">
-                          <a:solidFill>
-                            <a:schemeClr val="bg1"/>
-                          </a:solidFill>
-                        </a:rPr>
-                        <a:t>0,j</a:t>
-                      </a:r>
-                    </a:p>
-                  </a:txBody>
-                  <a:tcPr anchor="ctr">
-                    <a:lnL w="12700" cap="flat" cmpd="sng" algn="ctr">
-                      <a:solidFill>
-                        <a:schemeClr val="tx1"/>
-                      </a:solidFill>
-                      <a:prstDash val="solid"/>
-                      <a:round/>
-                      <a:headEnd type="none" w="med" len="med"/>
-                      <a:tailEnd type="none" w="med" len="med"/>
-                    </a:lnL>
-                    <a:lnR w="12700" cap="flat" cmpd="sng" algn="ctr">
-                      <a:solidFill>
-                        <a:schemeClr val="tx1"/>
-                      </a:solidFill>
-                      <a:prstDash val="solid"/>
-                      <a:round/>
-                      <a:headEnd type="none" w="med" len="med"/>
-                      <a:tailEnd type="none" w="med" len="med"/>
-                    </a:lnR>
-                    <a:lnT w="12700" cap="flat" cmpd="sng" algn="ctr">
-                      <a:solidFill>
-                        <a:schemeClr val="tx1"/>
-                      </a:solidFill>
-                      <a:prstDash val="solid"/>
-                      <a:round/>
-                      <a:headEnd type="none" w="med" len="med"/>
-                      <a:tailEnd type="none" w="med" len="med"/>
-                    </a:lnT>
-                    <a:lnB w="12700" cap="flat" cmpd="sng" algn="ctr">
-                      <a:solidFill>
-                        <a:schemeClr val="tx1"/>
-                      </a:solidFill>
-                      <a:prstDash val="solid"/>
-                      <a:round/>
-                      <a:headEnd type="none" w="med" len="med"/>
-                      <a:tailEnd type="none" w="med" len="med"/>
-                    </a:lnB>
-                    <a:solidFill>
-                      <a:schemeClr val="accent2"/>
-                    </a:solidFill>
-                  </a:tcPr>
-                </a:tc>
-                <a:tc>
-                  <a:txBody>
-                    <a:bodyPr/>
-                    <a:lstStyle/>
-                    <a:p>
-                      <a:pPr algn="ctr"/>
-                      <a:r>
-                        <a:rPr sz="1800" b="1" dirty="0">
-                          <a:solidFill>
-                            <a:schemeClr val="bg1"/>
-                          </a:solidFill>
-                        </a:rPr>
-                        <a:t>y</a:t>
-                      </a:r>
-                      <a:r>
-                        <a:rPr sz="1800" b="1" baseline="-25000" dirty="0">
-                          <a:solidFill>
-                            <a:schemeClr val="bg1"/>
-                          </a:solidFill>
-                        </a:rPr>
-                        <a:t>0,j</a:t>
-                      </a:r>
-                    </a:p>
-                  </a:txBody>
-                  <a:tcPr anchor="ctr">
-                    <a:lnL w="12700" cap="flat" cmpd="sng" algn="ctr">
-                      <a:solidFill>
-                        <a:schemeClr val="tx1"/>
-                      </a:solidFill>
-                      <a:prstDash val="solid"/>
-                      <a:round/>
-                      <a:headEnd type="none" w="med" len="med"/>
-                      <a:tailEnd type="none" w="med" len="med"/>
-                    </a:lnL>
-                    <a:lnR w="12700" cap="flat" cmpd="sng" algn="ctr">
-                      <a:solidFill>
-                        <a:schemeClr val="tx1"/>
-                      </a:solidFill>
-                      <a:prstDash val="solid"/>
-                      <a:round/>
-                      <a:headEnd type="none" w="med" len="med"/>
-                      <a:tailEnd type="none" w="med" len="med"/>
-                    </a:lnR>
-                    <a:lnT w="12700" cap="flat" cmpd="sng" algn="ctr">
-                      <a:solidFill>
-                        <a:schemeClr val="tx1"/>
-                      </a:solidFill>
-                      <a:prstDash val="solid"/>
-                      <a:round/>
-                      <a:headEnd type="none" w="med" len="med"/>
-                      <a:tailEnd type="none" w="med" len="med"/>
-                    </a:lnT>
-                    <a:lnB w="12700" cap="flat" cmpd="sng" algn="ctr">
-                      <a:solidFill>
-                        <a:schemeClr val="tx1"/>
-                      </a:solidFill>
-                      <a:prstDash val="solid"/>
-                      <a:round/>
-                      <a:headEnd type="none" w="med" len="med"/>
-                      <a:tailEnd type="none" w="med" len="med"/>
-                    </a:lnB>
-                    <a:solidFill>
-                      <a:schemeClr val="accent2"/>
-                    </a:solidFill>
-                  </a:tcPr>
-                </a:tc>
-                <a:tc>
-                  <a:txBody>
-                    <a:bodyPr/>
-                    <a:lstStyle/>
-                    <a:p>
-                      <a:pPr algn="ctr"/>
-                      <a:r>
-                        <a:rPr sz="1800" b="1" dirty="0">
-                          <a:solidFill>
-                            <a:schemeClr val="bg1"/>
-                          </a:solidFill>
-                        </a:rPr>
-                        <a:t>x</a:t>
-                      </a:r>
-                      <a:r>
-                        <a:rPr sz="1800" b="1" baseline="-25000" dirty="0">
-                          <a:solidFill>
-                            <a:schemeClr val="bg1"/>
-                          </a:solidFill>
-                        </a:rPr>
-                        <a:t>1,j</a:t>
-                      </a:r>
-                    </a:p>
-                  </a:txBody>
-                  <a:tcPr anchor="ctr">
-                    <a:lnL w="12700" cap="flat" cmpd="sng" algn="ctr">
-                      <a:solidFill>
-                        <a:schemeClr val="tx1"/>
-                      </a:solidFill>
-                      <a:prstDash val="solid"/>
-                      <a:round/>
-                      <a:headEnd type="none" w="med" len="med"/>
-                      <a:tailEnd type="none" w="med" len="med"/>
-                    </a:lnL>
-                    <a:lnR w="12700" cap="flat" cmpd="sng" algn="ctr">
-                      <a:solidFill>
-                        <a:schemeClr val="tx1"/>
-                      </a:solidFill>
-                      <a:prstDash val="solid"/>
-                      <a:round/>
-                      <a:headEnd type="none" w="med" len="med"/>
-                      <a:tailEnd type="none" w="med" len="med"/>
-                    </a:lnR>
-                    <a:lnT w="12700" cap="flat" cmpd="sng" algn="ctr">
-                      <a:solidFill>
-                        <a:schemeClr val="tx1"/>
-                      </a:solidFill>
-                      <a:prstDash val="solid"/>
-                      <a:round/>
-                      <a:headEnd type="none" w="med" len="med"/>
-                      <a:tailEnd type="none" w="med" len="med"/>
-                    </a:lnT>
-                    <a:lnB w="12700" cap="flat" cmpd="sng" algn="ctr">
-                      <a:solidFill>
-                        <a:schemeClr val="tx1"/>
-                      </a:solidFill>
-                      <a:prstDash val="solid"/>
-                      <a:round/>
-                      <a:headEnd type="none" w="med" len="med"/>
-                      <a:tailEnd type="none" w="med" len="med"/>
-                    </a:lnB>
-                    <a:solidFill>
-                      <a:schemeClr val="accent2"/>
-                    </a:solidFill>
-                  </a:tcPr>
-                </a:tc>
-                <a:tc>
-                  <a:txBody>
-                    <a:bodyPr/>
-                    <a:lstStyle/>
-                    <a:p>
-                      <a:pPr algn="ctr"/>
-                      <a:r>
-                        <a:rPr sz="1800" b="1" dirty="0">
-                          <a:solidFill>
-                            <a:schemeClr val="bg1"/>
-                          </a:solidFill>
-                        </a:rPr>
-                        <a:t>y</a:t>
-                      </a:r>
-                      <a:r>
-                        <a:rPr sz="1800" b="1" baseline="-25000" dirty="0">
-                          <a:solidFill>
-                            <a:schemeClr val="bg1"/>
-                          </a:solidFill>
-                        </a:rPr>
-                        <a:t>1,j</a:t>
-                      </a:r>
-                    </a:p>
-                  </a:txBody>
-                  <a:tcPr anchor="ctr">
-                    <a:lnL w="12700" cap="flat" cmpd="sng" algn="ctr">
-                      <a:solidFill>
-                        <a:schemeClr val="tx1"/>
-                      </a:solidFill>
-                      <a:prstDash val="solid"/>
-                      <a:round/>
-                      <a:headEnd type="none" w="med" len="med"/>
-                      <a:tailEnd type="none" w="med" len="med"/>
-                    </a:lnL>
-                    <a:lnR w="12700" cap="flat" cmpd="sng" algn="ctr">
-                      <a:solidFill>
-                        <a:schemeClr val="tx1"/>
-                      </a:solidFill>
-                      <a:prstDash val="solid"/>
-                      <a:round/>
-                      <a:headEnd type="none" w="med" len="med"/>
-                      <a:tailEnd type="none" w="med" len="med"/>
-                    </a:lnR>
-                    <a:lnT w="12700" cap="flat" cmpd="sng" algn="ctr">
-                      <a:solidFill>
-                        <a:schemeClr val="tx1"/>
-                      </a:solidFill>
-                      <a:prstDash val="solid"/>
-                      <a:round/>
-                      <a:headEnd type="none" w="med" len="med"/>
-                      <a:tailEnd type="none" w="med" len="med"/>
-                    </a:lnT>
-                    <a:lnB w="12700" cap="flat" cmpd="sng" algn="ctr">
-                      <a:solidFill>
-                        <a:schemeClr val="tx1"/>
-                      </a:solidFill>
-                      <a:prstDash val="solid"/>
-                      <a:round/>
-                      <a:headEnd type="none" w="med" len="med"/>
-                      <a:tailEnd type="none" w="med" len="med"/>
-                    </a:lnB>
-                    <a:solidFill>
-                      <a:schemeClr val="accent2"/>
-                    </a:solidFill>
-                  </a:tcPr>
-                </a:tc>
-                <a:extLst>
-                  <a:ext uri="{0D108BD9-81ED-4DB2-BD59-A6C34878D82A}">
-                    <a16:rowId xmlns:a16="http://schemas.microsoft.com/office/drawing/2014/main" val="10000"/>
-                  </a:ext>
-                </a:extLst>
-              </a:tr>
-              <a:tr h="345440">
-                <a:tc>
-                  <a:txBody>
-                    <a:bodyPr/>
-                    <a:lstStyle/>
-                    <a:p>
-                      <a:pPr algn="ctr"/>
-                      <a:r>
-                        <a:rPr sz="1800" dirty="0"/>
-                        <a:t>0</a:t>
-                      </a:r>
-                    </a:p>
-                  </a:txBody>
-                  <a:tcPr anchor="ctr">
-                    <a:lnL w="12700" cap="flat" cmpd="sng" algn="ctr">
-                      <a:solidFill>
-                        <a:schemeClr val="tx1"/>
-                      </a:solidFill>
-                      <a:prstDash val="solid"/>
-                      <a:round/>
-                      <a:headEnd type="none" w="med" len="med"/>
-                      <a:tailEnd type="none" w="med" len="med"/>
-                    </a:lnL>
-                    <a:lnR w="12700" cap="flat" cmpd="sng" algn="ctr">
-                      <a:solidFill>
-                        <a:schemeClr val="tx1"/>
-                      </a:solidFill>
-                      <a:prstDash val="solid"/>
-                      <a:round/>
-                      <a:headEnd type="none" w="med" len="med"/>
-                      <a:tailEnd type="none" w="med" len="med"/>
-                    </a:lnR>
-                    <a:lnT w="12700" cap="flat" cmpd="sng" algn="ctr">
-                      <a:solidFill>
-                        <a:schemeClr val="tx1"/>
-                      </a:solidFill>
-                      <a:prstDash val="solid"/>
-                      <a:round/>
-                      <a:headEnd type="none" w="med" len="med"/>
-                      <a:tailEnd type="none" w="med" len="med"/>
-                    </a:lnT>
-                    <a:lnB w="12700" cap="flat" cmpd="sng" algn="ctr">
-                      <a:solidFill>
-                        <a:schemeClr val="tx1"/>
-                      </a:solidFill>
-                      <a:prstDash val="solid"/>
-                      <a:round/>
-                      <a:headEnd type="none" w="med" len="med"/>
-                      <a:tailEnd type="none" w="med" len="med"/>
-                    </a:lnB>
-                    <a:noFill/>
-                  </a:tcPr>
-                </a:tc>
-                <a:tc>
-                  <a:txBody>
-                    <a:bodyPr/>
-                    <a:lstStyle/>
-                    <a:p>
-                      <a:pPr algn="ctr"/>
-                      <a:r>
-                        <a:rPr sz="1800" dirty="0"/>
-                        <a:t>0x00</a:t>
-                      </a:r>
-                    </a:p>
-                  </a:txBody>
-                  <a:tcPr anchor="ctr">
-                    <a:lnL w="12700" cap="flat" cmpd="sng" algn="ctr">
-                      <a:solidFill>
-                        <a:schemeClr val="tx1"/>
-                      </a:solidFill>
-                      <a:prstDash val="solid"/>
-                      <a:round/>
-                      <a:headEnd type="none" w="med" len="med"/>
-                      <a:tailEnd type="none" w="med" len="med"/>
-                    </a:lnL>
-                    <a:lnR w="12700" cap="flat" cmpd="sng" algn="ctr">
-                      <a:solidFill>
-                        <a:schemeClr val="tx1"/>
-                      </a:solidFill>
-                      <a:prstDash val="solid"/>
-                      <a:round/>
-                      <a:headEnd type="none" w="med" len="med"/>
-                      <a:tailEnd type="none" w="med" len="med"/>
-                    </a:lnR>
-                    <a:lnT w="12700" cap="flat" cmpd="sng" algn="ctr">
-                      <a:solidFill>
-                        <a:schemeClr val="tx1"/>
-                      </a:solidFill>
-                      <a:prstDash val="solid"/>
-                      <a:round/>
-                      <a:headEnd type="none" w="med" len="med"/>
-                      <a:tailEnd type="none" w="med" len="med"/>
-                    </a:lnT>
-                    <a:lnB w="12700" cap="flat" cmpd="sng" algn="ctr">
-                      <a:solidFill>
-                        <a:schemeClr val="tx1"/>
-                      </a:solidFill>
-                      <a:prstDash val="solid"/>
-                      <a:round/>
-                      <a:headEnd type="none" w="med" len="med"/>
-                      <a:tailEnd type="none" w="med" len="med"/>
-                    </a:lnB>
-                    <a:noFill/>
-                  </a:tcPr>
-                </a:tc>
-                <a:tc>
-                  <a:txBody>
-                    <a:bodyPr/>
-                    <a:lstStyle/>
-                    <a:p>
-                      <a:pPr algn="ctr"/>
-                      <a:r>
-                        <a:rPr sz="1800" dirty="0"/>
-                        <a:t>0x6E</a:t>
-                      </a:r>
-                    </a:p>
-                  </a:txBody>
-                  <a:tcPr anchor="ctr">
-                    <a:lnL w="12700" cap="flat" cmpd="sng" algn="ctr">
-                      <a:solidFill>
-                        <a:schemeClr val="tx1"/>
-                      </a:solidFill>
-                      <a:prstDash val="solid"/>
-                      <a:round/>
-                      <a:headEnd type="none" w="med" len="med"/>
-                      <a:tailEnd type="none" w="med" len="med"/>
-                    </a:lnL>
-                    <a:lnR w="12700" cap="flat" cmpd="sng" algn="ctr">
-                      <a:solidFill>
-                        <a:schemeClr val="tx1"/>
-                      </a:solidFill>
-                      <a:prstDash val="solid"/>
-                      <a:round/>
-                      <a:headEnd type="none" w="med" len="med"/>
-                      <a:tailEnd type="none" w="med" len="med"/>
-                    </a:lnR>
-                    <a:lnT w="12700" cap="flat" cmpd="sng" algn="ctr">
-                      <a:solidFill>
-                        <a:schemeClr val="tx1"/>
-                      </a:solidFill>
-                      <a:prstDash val="solid"/>
-                      <a:round/>
-                      <a:headEnd type="none" w="med" len="med"/>
-                      <a:tailEnd type="none" w="med" len="med"/>
-                    </a:lnT>
-                    <a:lnB w="12700" cap="flat" cmpd="sng" algn="ctr">
-                      <a:solidFill>
-                        <a:schemeClr val="tx1"/>
-                      </a:solidFill>
-                      <a:prstDash val="solid"/>
-                      <a:round/>
-                      <a:headEnd type="none" w="med" len="med"/>
-                      <a:tailEnd type="none" w="med" len="med"/>
-                    </a:lnB>
-                    <a:noFill/>
-                  </a:tcPr>
-                </a:tc>
-                <a:tc>
-                  <a:txBody>
-                    <a:bodyPr/>
-                    <a:lstStyle/>
-                    <a:p>
-                      <a:pPr algn="ctr"/>
-                      <a:r>
-                        <a:rPr sz="1800" dirty="0"/>
-                        <a:t>0x64</a:t>
-                      </a:r>
-                    </a:p>
-                  </a:txBody>
-                  <a:tcPr anchor="ctr">
-                    <a:lnL w="12700" cap="flat" cmpd="sng" algn="ctr">
-                      <a:solidFill>
-                        <a:schemeClr val="tx1"/>
-                      </a:solidFill>
-                      <a:prstDash val="solid"/>
-                      <a:round/>
-                      <a:headEnd type="none" w="med" len="med"/>
-                      <a:tailEnd type="none" w="med" len="med"/>
-                    </a:lnL>
-                    <a:lnR w="12700" cap="flat" cmpd="sng" algn="ctr">
-                      <a:solidFill>
-                        <a:schemeClr val="tx1"/>
-                      </a:solidFill>
-                      <a:prstDash val="solid"/>
-                      <a:round/>
-                      <a:headEnd type="none" w="med" len="med"/>
-                      <a:tailEnd type="none" w="med" len="med"/>
-                    </a:lnR>
-                    <a:lnT w="12700" cap="flat" cmpd="sng" algn="ctr">
-                      <a:solidFill>
-                        <a:schemeClr val="tx1"/>
-                      </a:solidFill>
-                      <a:prstDash val="solid"/>
-                      <a:round/>
-                      <a:headEnd type="none" w="med" len="med"/>
-                      <a:tailEnd type="none" w="med" len="med"/>
-                    </a:lnT>
-                    <a:lnB w="12700" cap="flat" cmpd="sng" algn="ctr">
-                      <a:solidFill>
-                        <a:schemeClr val="tx1"/>
-                      </a:solidFill>
-                      <a:prstDash val="solid"/>
-                      <a:round/>
-                      <a:headEnd type="none" w="med" len="med"/>
-                      <a:tailEnd type="none" w="med" len="med"/>
-                    </a:lnB>
-                    <a:noFill/>
-                  </a:tcPr>
-                </a:tc>
-                <a:tc>
-                  <a:txBody>
-                    <a:bodyPr/>
-                    <a:lstStyle/>
-                    <a:p>
-                      <a:pPr algn="ctr"/>
-                      <a:r>
-                        <a:rPr sz="1800" dirty="0"/>
-                        <a:t>0x18</a:t>
-                      </a:r>
-                    </a:p>
-                  </a:txBody>
-                  <a:tcPr anchor="ctr">
-                    <a:lnL w="12700" cap="flat" cmpd="sng" algn="ctr">
-                      <a:solidFill>
-                        <a:schemeClr val="tx1"/>
-                      </a:solidFill>
-                      <a:prstDash val="solid"/>
-                      <a:round/>
-                      <a:headEnd type="none" w="med" len="med"/>
-                      <a:tailEnd type="none" w="med" len="med"/>
-                    </a:lnL>
-                    <a:lnR w="12700" cap="flat" cmpd="sng" algn="ctr">
-                      <a:solidFill>
-                        <a:schemeClr val="tx1"/>
-                      </a:solidFill>
-                      <a:prstDash val="solid"/>
-                      <a:round/>
-                      <a:headEnd type="none" w="med" len="med"/>
-                      <a:tailEnd type="none" w="med" len="med"/>
-                    </a:lnR>
-                    <a:lnT w="12700" cap="flat" cmpd="sng" algn="ctr">
-                      <a:solidFill>
-                        <a:schemeClr val="tx1"/>
-                      </a:solidFill>
-                      <a:prstDash val="solid"/>
-                      <a:round/>
-                      <a:headEnd type="none" w="med" len="med"/>
-                      <a:tailEnd type="none" w="med" len="med"/>
-                    </a:lnT>
-                    <a:lnB w="12700" cap="flat" cmpd="sng" algn="ctr">
-                      <a:solidFill>
-                        <a:schemeClr val="tx1"/>
-                      </a:solidFill>
-                      <a:prstDash val="solid"/>
-                      <a:round/>
-                      <a:headEnd type="none" w="med" len="med"/>
-                      <a:tailEnd type="none" w="med" len="med"/>
-                    </a:lnB>
-                    <a:noFill/>
-                  </a:tcPr>
-                </a:tc>
-                <a:extLst>
-                  <a:ext uri="{0D108BD9-81ED-4DB2-BD59-A6C34878D82A}">
-                    <a16:rowId xmlns:a16="http://schemas.microsoft.com/office/drawing/2014/main" val="10001"/>
-                  </a:ext>
-                </a:extLst>
-              </a:tr>
-              <a:tr h="345440">
-                <a:tc>
-                  <a:txBody>
-                    <a:bodyPr/>
-                    <a:lstStyle/>
-                    <a:p>
-                      <a:pPr algn="ctr"/>
-                      <a:r>
-                        <a:rPr sz="1800" dirty="0"/>
-                        <a:t>1</a:t>
-                      </a:r>
-                    </a:p>
-                  </a:txBody>
-                  <a:tcPr anchor="ctr">
-                    <a:lnL w="12700" cap="flat" cmpd="sng" algn="ctr">
-                      <a:solidFill>
-                        <a:schemeClr val="tx1"/>
-                      </a:solidFill>
-                      <a:prstDash val="solid"/>
-                      <a:round/>
-                      <a:headEnd type="none" w="med" len="med"/>
-                      <a:tailEnd type="none" w="med" len="med"/>
-                    </a:lnL>
-                    <a:lnR w="12700" cap="flat" cmpd="sng" algn="ctr">
-                      <a:solidFill>
-                        <a:schemeClr val="tx1"/>
-                      </a:solidFill>
-                      <a:prstDash val="solid"/>
-                      <a:round/>
-                      <a:headEnd type="none" w="med" len="med"/>
-                      <a:tailEnd type="none" w="med" len="med"/>
-                    </a:lnR>
-                    <a:lnT w="12700" cap="flat" cmpd="sng" algn="ctr">
-                      <a:solidFill>
-                        <a:schemeClr val="tx1"/>
-                      </a:solidFill>
-                      <a:prstDash val="solid"/>
-                      <a:round/>
-                      <a:headEnd type="none" w="med" len="med"/>
-                      <a:tailEnd type="none" w="med" len="med"/>
-                    </a:lnT>
-                    <a:lnB w="12700" cap="flat" cmpd="sng" algn="ctr">
-                      <a:solidFill>
-                        <a:schemeClr val="tx1"/>
-                      </a:solidFill>
-                      <a:prstDash val="solid"/>
-                      <a:round/>
-                      <a:headEnd type="none" w="med" len="med"/>
-                      <a:tailEnd type="none" w="med" len="med"/>
-                    </a:lnB>
-                    <a:noFill/>
-                  </a:tcPr>
-                </a:tc>
-                <a:tc>
-                  <a:txBody>
-                    <a:bodyPr/>
-                    <a:lstStyle/>
-                    <a:p>
-                      <a:pPr algn="ctr"/>
-                      <a:r>
-                        <a:rPr sz="1800" dirty="0"/>
-                        <a:t>0x01</a:t>
-                      </a:r>
-                    </a:p>
-                  </a:txBody>
-                  <a:tcPr anchor="ctr">
-                    <a:lnL w="12700" cap="flat" cmpd="sng" algn="ctr">
-                      <a:solidFill>
-                        <a:schemeClr val="tx1"/>
-                      </a:solidFill>
-                      <a:prstDash val="solid"/>
-                      <a:round/>
-                      <a:headEnd type="none" w="med" len="med"/>
-                      <a:tailEnd type="none" w="med" len="med"/>
-                    </a:lnL>
-                    <a:lnR w="12700" cap="flat" cmpd="sng" algn="ctr">
-                      <a:solidFill>
-                        <a:schemeClr val="tx1"/>
-                      </a:solidFill>
-                      <a:prstDash val="solid"/>
-                      <a:round/>
-                      <a:headEnd type="none" w="med" len="med"/>
-                      <a:tailEnd type="none" w="med" len="med"/>
-                    </a:lnR>
-                    <a:lnT w="12700" cap="flat" cmpd="sng" algn="ctr">
-                      <a:solidFill>
-                        <a:schemeClr val="tx1"/>
-                      </a:solidFill>
-                      <a:prstDash val="solid"/>
-                      <a:round/>
-                      <a:headEnd type="none" w="med" len="med"/>
-                      <a:tailEnd type="none" w="med" len="med"/>
-                    </a:lnT>
-                    <a:lnB w="12700" cap="flat" cmpd="sng" algn="ctr">
-                      <a:solidFill>
-                        <a:schemeClr val="tx1"/>
-                      </a:solidFill>
-                      <a:prstDash val="solid"/>
-                      <a:round/>
-                      <a:headEnd type="none" w="med" len="med"/>
-                      <a:tailEnd type="none" w="med" len="med"/>
-                    </a:lnB>
-                    <a:noFill/>
-                  </a:tcPr>
-                </a:tc>
-                <a:tc>
-                  <a:txBody>
-                    <a:bodyPr/>
-                    <a:lstStyle/>
-                    <a:p>
-                      <a:pPr algn="ctr"/>
-                      <a:r>
-                        <a:rPr sz="1800" dirty="0"/>
-                        <a:t>0x4B</a:t>
-                      </a:r>
-                    </a:p>
-                  </a:txBody>
-                  <a:tcPr anchor="ctr">
-                    <a:lnL w="12700" cap="flat" cmpd="sng" algn="ctr">
-                      <a:solidFill>
-                        <a:schemeClr val="tx1"/>
-                      </a:solidFill>
-                      <a:prstDash val="solid"/>
-                      <a:round/>
-                      <a:headEnd type="none" w="med" len="med"/>
-                      <a:tailEnd type="none" w="med" len="med"/>
-                    </a:lnL>
-                    <a:lnR w="12700" cap="flat" cmpd="sng" algn="ctr">
-                      <a:solidFill>
-                        <a:schemeClr val="tx1"/>
-                      </a:solidFill>
-                      <a:prstDash val="solid"/>
-                      <a:round/>
-                      <a:headEnd type="none" w="med" len="med"/>
-                      <a:tailEnd type="none" w="med" len="med"/>
-                    </a:lnR>
-                    <a:lnT w="12700" cap="flat" cmpd="sng" algn="ctr">
-                      <a:solidFill>
-                        <a:schemeClr val="tx1"/>
-                      </a:solidFill>
-                      <a:prstDash val="solid"/>
-                      <a:round/>
-                      <a:headEnd type="none" w="med" len="med"/>
-                      <a:tailEnd type="none" w="med" len="med"/>
-                    </a:lnT>
-                    <a:lnB w="12700" cap="flat" cmpd="sng" algn="ctr">
-                      <a:solidFill>
-                        <a:schemeClr val="tx1"/>
-                      </a:solidFill>
-                      <a:prstDash val="solid"/>
-                      <a:round/>
-                      <a:headEnd type="none" w="med" len="med"/>
-                      <a:tailEnd type="none" w="med" len="med"/>
-                    </a:lnB>
-                    <a:noFill/>
-                  </a:tcPr>
-                </a:tc>
-                <a:tc>
-                  <a:txBody>
-                    <a:bodyPr/>
-                    <a:lstStyle/>
-                    <a:p>
-                      <a:pPr algn="ctr"/>
-                      <a:r>
-                        <a:rPr sz="1800" dirty="0"/>
-                        <a:t>0x65</a:t>
-                      </a:r>
-                    </a:p>
-                  </a:txBody>
-                  <a:tcPr anchor="ctr">
-                    <a:lnL w="12700" cap="flat" cmpd="sng" algn="ctr">
-                      <a:solidFill>
-                        <a:schemeClr val="tx1"/>
-                      </a:solidFill>
-                      <a:prstDash val="solid"/>
-                      <a:round/>
-                      <a:headEnd type="none" w="med" len="med"/>
-                      <a:tailEnd type="none" w="med" len="med"/>
-                    </a:lnL>
-                    <a:lnR w="12700" cap="flat" cmpd="sng" algn="ctr">
-                      <a:solidFill>
-                        <a:schemeClr val="tx1"/>
-                      </a:solidFill>
-                      <a:prstDash val="solid"/>
-                      <a:round/>
-                      <a:headEnd type="none" w="med" len="med"/>
-                      <a:tailEnd type="none" w="med" len="med"/>
-                    </a:lnR>
-                    <a:lnT w="12700" cap="flat" cmpd="sng" algn="ctr">
-                      <a:solidFill>
-                        <a:schemeClr val="tx1"/>
-                      </a:solidFill>
-                      <a:prstDash val="solid"/>
-                      <a:round/>
-                      <a:headEnd type="none" w="med" len="med"/>
-                      <a:tailEnd type="none" w="med" len="med"/>
-                    </a:lnT>
-                    <a:lnB w="12700" cap="flat" cmpd="sng" algn="ctr">
-                      <a:solidFill>
-                        <a:schemeClr val="tx1"/>
-                      </a:solidFill>
-                      <a:prstDash val="solid"/>
-                      <a:round/>
-                      <a:headEnd type="none" w="med" len="med"/>
-                      <a:tailEnd type="none" w="med" len="med"/>
-                    </a:lnB>
-                    <a:noFill/>
-                  </a:tcPr>
-                </a:tc>
-                <a:tc>
-                  <a:txBody>
-                    <a:bodyPr/>
-                    <a:lstStyle/>
-                    <a:p>
-                      <a:pPr algn="ctr"/>
-                      <a:r>
-                        <a:rPr sz="1800" dirty="0"/>
-                        <a:t>0x3F</a:t>
-                      </a:r>
-                    </a:p>
-                  </a:txBody>
-                  <a:tcPr anchor="ctr">
-                    <a:lnL w="12700" cap="flat" cmpd="sng" algn="ctr">
-                      <a:solidFill>
-                        <a:schemeClr val="tx1"/>
-                      </a:solidFill>
-                      <a:prstDash val="solid"/>
-                      <a:round/>
-                      <a:headEnd type="none" w="med" len="med"/>
-                      <a:tailEnd type="none" w="med" len="med"/>
-                    </a:lnL>
-                    <a:lnR w="12700" cap="flat" cmpd="sng" algn="ctr">
-                      <a:solidFill>
-                        <a:schemeClr val="tx1"/>
-                      </a:solidFill>
-                      <a:prstDash val="solid"/>
-                      <a:round/>
-                      <a:headEnd type="none" w="med" len="med"/>
-                      <a:tailEnd type="none" w="med" len="med"/>
-                    </a:lnR>
-                    <a:lnT w="12700" cap="flat" cmpd="sng" algn="ctr">
-                      <a:solidFill>
-                        <a:schemeClr val="tx1"/>
-                      </a:solidFill>
-                      <a:prstDash val="solid"/>
-                      <a:round/>
-                      <a:headEnd type="none" w="med" len="med"/>
-                      <a:tailEnd type="none" w="med" len="med"/>
-                    </a:lnT>
-                    <a:lnB w="12700" cap="flat" cmpd="sng" algn="ctr">
-                      <a:solidFill>
-                        <a:schemeClr val="tx1"/>
-                      </a:solidFill>
-                      <a:prstDash val="solid"/>
-                      <a:round/>
-                      <a:headEnd type="none" w="med" len="med"/>
-                      <a:tailEnd type="none" w="med" len="med"/>
-                    </a:lnB>
-                    <a:noFill/>
-                  </a:tcPr>
-                </a:tc>
-                <a:extLst>
-                  <a:ext uri="{0D108BD9-81ED-4DB2-BD59-A6C34878D82A}">
-                    <a16:rowId xmlns:a16="http://schemas.microsoft.com/office/drawing/2014/main" val="10002"/>
-                  </a:ext>
-                </a:extLst>
-              </a:tr>
-              <a:tr h="345440">
-                <a:tc>
-                  <a:txBody>
-                    <a:bodyPr/>
-                    <a:lstStyle/>
-                    <a:p>
-                      <a:pPr algn="ctr"/>
-                      <a:r>
-                        <a:rPr sz="1800" dirty="0"/>
-                        <a:t>2</a:t>
-                      </a:r>
-                    </a:p>
-                  </a:txBody>
-                  <a:tcPr anchor="ctr">
-                    <a:lnL w="12700" cap="flat" cmpd="sng" algn="ctr">
-                      <a:solidFill>
-                        <a:schemeClr val="tx1"/>
-                      </a:solidFill>
-                      <a:prstDash val="solid"/>
-                      <a:round/>
-                      <a:headEnd type="none" w="med" len="med"/>
-                      <a:tailEnd type="none" w="med" len="med"/>
-                    </a:lnL>
-                    <a:lnR w="12700" cap="flat" cmpd="sng" algn="ctr">
-                      <a:solidFill>
-                        <a:schemeClr val="tx1"/>
-                      </a:solidFill>
-                      <a:prstDash val="solid"/>
-                      <a:round/>
-                      <a:headEnd type="none" w="med" len="med"/>
-                      <a:tailEnd type="none" w="med" len="med"/>
-                    </a:lnR>
-                    <a:lnT w="12700" cap="flat" cmpd="sng" algn="ctr">
-                      <a:solidFill>
-                        <a:schemeClr val="tx1"/>
-                      </a:solidFill>
-                      <a:prstDash val="solid"/>
-                      <a:round/>
-                      <a:headEnd type="none" w="med" len="med"/>
-                      <a:tailEnd type="none" w="med" len="med"/>
-                    </a:lnT>
-                    <a:lnB w="12700" cap="flat" cmpd="sng" algn="ctr">
-                      <a:solidFill>
-                        <a:schemeClr val="tx1"/>
-                      </a:solidFill>
-                      <a:prstDash val="solid"/>
-                      <a:round/>
-                      <a:headEnd type="none" w="med" len="med"/>
-                      <a:tailEnd type="none" w="med" len="med"/>
-                    </a:lnB>
-                    <a:noFill/>
-                  </a:tcPr>
-                </a:tc>
-                <a:tc>
-                  <a:txBody>
-                    <a:bodyPr/>
-                    <a:lstStyle/>
-                    <a:p>
-                      <a:pPr algn="ctr"/>
-                      <a:r>
-                        <a:rPr sz="1800" dirty="0"/>
-                        <a:t>0x02</a:t>
-                      </a:r>
-                    </a:p>
-                  </a:txBody>
-                  <a:tcPr anchor="ctr">
-                    <a:lnL w="12700" cap="flat" cmpd="sng" algn="ctr">
-                      <a:solidFill>
-                        <a:schemeClr val="tx1"/>
-                      </a:solidFill>
-                      <a:prstDash val="solid"/>
-                      <a:round/>
-                      <a:headEnd type="none" w="med" len="med"/>
-                      <a:tailEnd type="none" w="med" len="med"/>
-                    </a:lnL>
-                    <a:lnR w="12700" cap="flat" cmpd="sng" algn="ctr">
-                      <a:solidFill>
-                        <a:schemeClr val="tx1"/>
-                      </a:solidFill>
-                      <a:prstDash val="solid"/>
-                      <a:round/>
-                      <a:headEnd type="none" w="med" len="med"/>
-                      <a:tailEnd type="none" w="med" len="med"/>
-                    </a:lnR>
-                    <a:lnT w="12700" cap="flat" cmpd="sng" algn="ctr">
-                      <a:solidFill>
-                        <a:schemeClr val="tx1"/>
-                      </a:solidFill>
-                      <a:prstDash val="solid"/>
-                      <a:round/>
-                      <a:headEnd type="none" w="med" len="med"/>
-                      <a:tailEnd type="none" w="med" len="med"/>
-                    </a:lnT>
-                    <a:lnB w="12700" cap="flat" cmpd="sng" algn="ctr">
-                      <a:solidFill>
-                        <a:schemeClr val="tx1"/>
-                      </a:solidFill>
-                      <a:prstDash val="solid"/>
-                      <a:round/>
-                      <a:headEnd type="none" w="med" len="med"/>
-                      <a:tailEnd type="none" w="med" len="med"/>
-                    </a:lnB>
-                    <a:noFill/>
-                  </a:tcPr>
-                </a:tc>
-                <a:tc>
-                  <a:txBody>
-                    <a:bodyPr/>
-                    <a:lstStyle/>
-                    <a:p>
-                      <a:pPr algn="ctr"/>
-                      <a:r>
-                        <a:rPr sz="1800" dirty="0"/>
-                        <a:t>0xDB</a:t>
-                      </a:r>
-                    </a:p>
-                  </a:txBody>
-                  <a:tcPr anchor="ctr">
-                    <a:lnL w="12700" cap="flat" cmpd="sng" algn="ctr">
-                      <a:solidFill>
-                        <a:schemeClr val="tx1"/>
-                      </a:solidFill>
-                      <a:prstDash val="solid"/>
-                      <a:round/>
-                      <a:headEnd type="none" w="med" len="med"/>
-                      <a:tailEnd type="none" w="med" len="med"/>
-                    </a:lnL>
-                    <a:lnR w="12700" cap="flat" cmpd="sng" algn="ctr">
-                      <a:solidFill>
-                        <a:schemeClr val="tx1"/>
-                      </a:solidFill>
-                      <a:prstDash val="solid"/>
-                      <a:round/>
-                      <a:headEnd type="none" w="med" len="med"/>
-                      <a:tailEnd type="none" w="med" len="med"/>
-                    </a:lnR>
-                    <a:lnT w="12700" cap="flat" cmpd="sng" algn="ctr">
-                      <a:solidFill>
-                        <a:schemeClr val="tx1"/>
-                      </a:solidFill>
-                      <a:prstDash val="solid"/>
-                      <a:round/>
-                      <a:headEnd type="none" w="med" len="med"/>
-                      <a:tailEnd type="none" w="med" len="med"/>
-                    </a:lnT>
-                    <a:lnB w="12700" cap="flat" cmpd="sng" algn="ctr">
-                      <a:solidFill>
-                        <a:schemeClr val="tx1"/>
-                      </a:solidFill>
-                      <a:prstDash val="solid"/>
-                      <a:round/>
-                      <a:headEnd type="none" w="med" len="med"/>
-                      <a:tailEnd type="none" w="med" len="med"/>
-                    </a:lnB>
-                    <a:noFill/>
-                  </a:tcPr>
-                </a:tc>
-                <a:tc>
-                  <a:txBody>
-                    <a:bodyPr/>
-                    <a:lstStyle/>
-                    <a:p>
-                      <a:pPr algn="ctr"/>
-                      <a:r>
-                        <a:rPr sz="1800" dirty="0"/>
-                        <a:t>0x66</a:t>
-                      </a:r>
-                    </a:p>
-                  </a:txBody>
-                  <a:tcPr anchor="ctr">
-                    <a:lnL w="12700" cap="flat" cmpd="sng" algn="ctr">
-                      <a:solidFill>
-                        <a:schemeClr val="tx1"/>
-                      </a:solidFill>
-                      <a:prstDash val="solid"/>
-                      <a:round/>
-                      <a:headEnd type="none" w="med" len="med"/>
-                      <a:tailEnd type="none" w="med" len="med"/>
-                    </a:lnL>
-                    <a:lnR w="12700" cap="flat" cmpd="sng" algn="ctr">
-                      <a:solidFill>
-                        <a:schemeClr val="tx1"/>
-                      </a:solidFill>
-                      <a:prstDash val="solid"/>
-                      <a:round/>
-                      <a:headEnd type="none" w="med" len="med"/>
-                      <a:tailEnd type="none" w="med" len="med"/>
-                    </a:lnR>
-                    <a:lnT w="12700" cap="flat" cmpd="sng" algn="ctr">
-                      <a:solidFill>
-                        <a:schemeClr val="tx1"/>
-                      </a:solidFill>
-                      <a:prstDash val="solid"/>
-                      <a:round/>
-                      <a:headEnd type="none" w="med" len="med"/>
-                      <a:tailEnd type="none" w="med" len="med"/>
-                    </a:lnT>
-                    <a:lnB w="12700" cap="flat" cmpd="sng" algn="ctr">
-                      <a:solidFill>
-                        <a:schemeClr val="tx1"/>
-                      </a:solidFill>
-                      <a:prstDash val="solid"/>
-                      <a:round/>
-                      <a:headEnd type="none" w="med" len="med"/>
-                      <a:tailEnd type="none" w="med" len="med"/>
-                    </a:lnB>
-                    <a:noFill/>
-                  </a:tcPr>
-                </a:tc>
-                <a:tc>
-                  <a:txBody>
-                    <a:bodyPr/>
-                    <a:lstStyle/>
-                    <a:p>
-                      <a:pPr algn="ctr"/>
-                      <a:r>
-                        <a:rPr sz="1800" dirty="0"/>
-                        <a:t>0x25</a:t>
-                      </a:r>
-                    </a:p>
-                  </a:txBody>
-                  <a:tcPr anchor="ctr">
-                    <a:lnL w="12700" cap="flat" cmpd="sng" algn="ctr">
-                      <a:solidFill>
-                        <a:schemeClr val="tx1"/>
-                      </a:solidFill>
-                      <a:prstDash val="solid"/>
-                      <a:round/>
-                      <a:headEnd type="none" w="med" len="med"/>
-                      <a:tailEnd type="none" w="med" len="med"/>
-                    </a:lnL>
-                    <a:lnR w="12700" cap="flat" cmpd="sng" algn="ctr">
-                      <a:solidFill>
-                        <a:schemeClr val="tx1"/>
-                      </a:solidFill>
-                      <a:prstDash val="solid"/>
-                      <a:round/>
-                      <a:headEnd type="none" w="med" len="med"/>
-                      <a:tailEnd type="none" w="med" len="med"/>
-                    </a:lnR>
-                    <a:lnT w="12700" cap="flat" cmpd="sng" algn="ctr">
-                      <a:solidFill>
-                        <a:schemeClr val="tx1"/>
-                      </a:solidFill>
-                      <a:prstDash val="solid"/>
-                      <a:round/>
-                      <a:headEnd type="none" w="med" len="med"/>
-                      <a:tailEnd type="none" w="med" len="med"/>
-                    </a:lnT>
-                    <a:lnB w="12700" cap="flat" cmpd="sng" algn="ctr">
-                      <a:solidFill>
-                        <a:schemeClr val="tx1"/>
-                      </a:solidFill>
-                      <a:prstDash val="solid"/>
-                      <a:round/>
-                      <a:headEnd type="none" w="med" len="med"/>
-                      <a:tailEnd type="none" w="med" len="med"/>
-                    </a:lnB>
-                    <a:noFill/>
-                  </a:tcPr>
-                </a:tc>
-                <a:extLst>
-                  <a:ext uri="{0D108BD9-81ED-4DB2-BD59-A6C34878D82A}">
-                    <a16:rowId xmlns:a16="http://schemas.microsoft.com/office/drawing/2014/main" val="10003"/>
-                  </a:ext>
-                </a:extLst>
-              </a:tr>
-              <a:tr h="345440">
-                <a:tc>
-                  <a:txBody>
-                    <a:bodyPr/>
-                    <a:lstStyle/>
-                    <a:p>
-                      <a:pPr algn="ctr"/>
-                      <a:r>
-                        <a:rPr sz="1800" dirty="0"/>
-                        <a:t>3</a:t>
-                      </a:r>
-                    </a:p>
-                  </a:txBody>
-                  <a:tcPr anchor="ctr">
-                    <a:lnL w="12700" cap="flat" cmpd="sng" algn="ctr">
-                      <a:solidFill>
-                        <a:schemeClr val="tx1"/>
-                      </a:solidFill>
-                      <a:prstDash val="solid"/>
-                      <a:round/>
-                      <a:headEnd type="none" w="med" len="med"/>
-                      <a:tailEnd type="none" w="med" len="med"/>
-                    </a:lnL>
-                    <a:lnR w="12700" cap="flat" cmpd="sng" algn="ctr">
-                      <a:solidFill>
-                        <a:schemeClr val="tx1"/>
-                      </a:solidFill>
-                      <a:prstDash val="solid"/>
-                      <a:round/>
-                      <a:headEnd type="none" w="med" len="med"/>
-                      <a:tailEnd type="none" w="med" len="med"/>
-                    </a:lnR>
-                    <a:lnT w="12700" cap="flat" cmpd="sng" algn="ctr">
-                      <a:solidFill>
-                        <a:schemeClr val="tx1"/>
-                      </a:solidFill>
-                      <a:prstDash val="solid"/>
-                      <a:round/>
-                      <a:headEnd type="none" w="med" len="med"/>
-                      <a:tailEnd type="none" w="med" len="med"/>
-                    </a:lnT>
-                    <a:lnB w="12700" cap="flat" cmpd="sng" algn="ctr">
-                      <a:solidFill>
-                        <a:schemeClr val="tx1"/>
-                      </a:solidFill>
-                      <a:prstDash val="solid"/>
-                      <a:round/>
-                      <a:headEnd type="none" w="med" len="med"/>
-                      <a:tailEnd type="none" w="med" len="med"/>
-                    </a:lnB>
-                    <a:noFill/>
-                  </a:tcPr>
-                </a:tc>
-                <a:tc>
-                  <a:txBody>
-                    <a:bodyPr/>
-                    <a:lstStyle/>
-                    <a:p>
-                      <a:pPr algn="ctr"/>
-                      <a:r>
-                        <a:rPr sz="1800" dirty="0"/>
-                        <a:t>0x03</a:t>
-                      </a:r>
-                    </a:p>
-                  </a:txBody>
-                  <a:tcPr anchor="ctr">
-                    <a:lnL w="12700" cap="flat" cmpd="sng" algn="ctr">
-                      <a:solidFill>
-                        <a:schemeClr val="tx1"/>
-                      </a:solidFill>
-                      <a:prstDash val="solid"/>
-                      <a:round/>
-                      <a:headEnd type="none" w="med" len="med"/>
-                      <a:tailEnd type="none" w="med" len="med"/>
-                    </a:lnL>
-                    <a:lnR w="12700" cap="flat" cmpd="sng" algn="ctr">
-                      <a:solidFill>
-                        <a:schemeClr val="tx1"/>
-                      </a:solidFill>
-                      <a:prstDash val="solid"/>
-                      <a:round/>
-                      <a:headEnd type="none" w="med" len="med"/>
-                      <a:tailEnd type="none" w="med" len="med"/>
-                    </a:lnR>
-                    <a:lnT w="12700" cap="flat" cmpd="sng" algn="ctr">
-                      <a:solidFill>
-                        <a:schemeClr val="tx1"/>
-                      </a:solidFill>
-                      <a:prstDash val="solid"/>
-                      <a:round/>
-                      <a:headEnd type="none" w="med" len="med"/>
-                      <a:tailEnd type="none" w="med" len="med"/>
-                    </a:lnT>
-                    <a:lnB w="12700" cap="flat" cmpd="sng" algn="ctr">
-                      <a:solidFill>
-                        <a:schemeClr val="tx1"/>
-                      </a:solidFill>
-                      <a:prstDash val="solid"/>
-                      <a:round/>
-                      <a:headEnd type="none" w="med" len="med"/>
-                      <a:tailEnd type="none" w="med" len="med"/>
-                    </a:lnB>
-                    <a:noFill/>
-                  </a:tcPr>
-                </a:tc>
-                <a:tc>
-                  <a:txBody>
-                    <a:bodyPr/>
-                    <a:lstStyle/>
-                    <a:p>
-                      <a:pPr algn="ctr"/>
-                      <a:r>
-                        <a:rPr sz="1800" dirty="0"/>
-                        <a:t>0x08</a:t>
-                      </a:r>
-                    </a:p>
-                  </a:txBody>
-                  <a:tcPr anchor="ctr">
-                    <a:lnL w="12700" cap="flat" cmpd="sng" algn="ctr">
-                      <a:solidFill>
-                        <a:schemeClr val="tx1"/>
-                      </a:solidFill>
-                      <a:prstDash val="solid"/>
-                      <a:round/>
-                      <a:headEnd type="none" w="med" len="med"/>
-                      <a:tailEnd type="none" w="med" len="med"/>
-                    </a:lnL>
-                    <a:lnR w="12700" cap="flat" cmpd="sng" algn="ctr">
-                      <a:solidFill>
-                        <a:schemeClr val="tx1"/>
-                      </a:solidFill>
-                      <a:prstDash val="solid"/>
-                      <a:round/>
-                      <a:headEnd type="none" w="med" len="med"/>
-                      <a:tailEnd type="none" w="med" len="med"/>
-                    </a:lnR>
-                    <a:lnT w="12700" cap="flat" cmpd="sng" algn="ctr">
-                      <a:solidFill>
-                        <a:schemeClr val="tx1"/>
-                      </a:solidFill>
-                      <a:prstDash val="solid"/>
-                      <a:round/>
-                      <a:headEnd type="none" w="med" len="med"/>
-                      <a:tailEnd type="none" w="med" len="med"/>
-                    </a:lnT>
-                    <a:lnB w="12700" cap="flat" cmpd="sng" algn="ctr">
-                      <a:solidFill>
-                        <a:schemeClr val="tx1"/>
-                      </a:solidFill>
-                      <a:prstDash val="solid"/>
-                      <a:round/>
-                      <a:headEnd type="none" w="med" len="med"/>
-                      <a:tailEnd type="none" w="med" len="med"/>
-                    </a:lnB>
-                    <a:noFill/>
-                  </a:tcPr>
-                </a:tc>
-                <a:tc>
-                  <a:txBody>
-                    <a:bodyPr/>
-                    <a:lstStyle/>
-                    <a:p>
-                      <a:pPr algn="ctr"/>
-                      <a:r>
-                        <a:rPr sz="1800" dirty="0"/>
-                        <a:t>0x67</a:t>
-                      </a:r>
-                    </a:p>
-                  </a:txBody>
-                  <a:tcPr anchor="ctr">
-                    <a:lnL w="12700" cap="flat" cmpd="sng" algn="ctr">
-                      <a:solidFill>
-                        <a:schemeClr val="tx1"/>
-                      </a:solidFill>
-                      <a:prstDash val="solid"/>
-                      <a:round/>
-                      <a:headEnd type="none" w="med" len="med"/>
-                      <a:tailEnd type="none" w="med" len="med"/>
-                    </a:lnL>
-                    <a:lnR w="12700" cap="flat" cmpd="sng" algn="ctr">
-                      <a:solidFill>
-                        <a:schemeClr val="tx1"/>
-                      </a:solidFill>
-                      <a:prstDash val="solid"/>
-                      <a:round/>
-                      <a:headEnd type="none" w="med" len="med"/>
-                      <a:tailEnd type="none" w="med" len="med"/>
-                    </a:lnR>
-                    <a:lnT w="12700" cap="flat" cmpd="sng" algn="ctr">
-                      <a:solidFill>
-                        <a:schemeClr val="tx1"/>
-                      </a:solidFill>
-                      <a:prstDash val="solid"/>
-                      <a:round/>
-                      <a:headEnd type="none" w="med" len="med"/>
-                      <a:tailEnd type="none" w="med" len="med"/>
-                    </a:lnT>
-                    <a:lnB w="12700" cap="flat" cmpd="sng" algn="ctr">
-                      <a:solidFill>
-                        <a:schemeClr val="tx1"/>
-                      </a:solidFill>
-                      <a:prstDash val="solid"/>
-                      <a:round/>
-                      <a:headEnd type="none" w="med" len="med"/>
-                      <a:tailEnd type="none" w="med" len="med"/>
-                    </a:lnB>
-                    <a:noFill/>
-                  </a:tcPr>
-                </a:tc>
-                <a:tc>
-                  <a:txBody>
-                    <a:bodyPr/>
-                    <a:lstStyle/>
-                    <a:p>
-                      <a:pPr algn="ctr"/>
-                      <a:r>
-                        <a:rPr sz="1800" dirty="0"/>
-                        <a:t>0xCD</a:t>
-                      </a:r>
-                    </a:p>
-                  </a:txBody>
-                  <a:tcPr anchor="ctr">
-                    <a:lnL w="12700" cap="flat" cmpd="sng" algn="ctr">
-                      <a:solidFill>
-                        <a:schemeClr val="tx1"/>
-                      </a:solidFill>
-                      <a:prstDash val="solid"/>
-                      <a:round/>
-                      <a:headEnd type="none" w="med" len="med"/>
-                      <a:tailEnd type="none" w="med" len="med"/>
-                    </a:lnL>
-                    <a:lnR w="12700" cap="flat" cmpd="sng" algn="ctr">
-                      <a:solidFill>
-                        <a:schemeClr val="tx1"/>
-                      </a:solidFill>
-                      <a:prstDash val="solid"/>
-                      <a:round/>
-                      <a:headEnd type="none" w="med" len="med"/>
-                      <a:tailEnd type="none" w="med" len="med"/>
-                    </a:lnR>
-                    <a:lnT w="12700" cap="flat" cmpd="sng" algn="ctr">
-                      <a:solidFill>
-                        <a:schemeClr val="tx1"/>
-                      </a:solidFill>
-                      <a:prstDash val="solid"/>
-                      <a:round/>
-                      <a:headEnd type="none" w="med" len="med"/>
-                      <a:tailEnd type="none" w="med" len="med"/>
-                    </a:lnT>
-                    <a:lnB w="12700" cap="flat" cmpd="sng" algn="ctr">
-                      <a:solidFill>
-                        <a:schemeClr val="tx1"/>
-                      </a:solidFill>
-                      <a:prstDash val="solid"/>
-                      <a:round/>
-                      <a:headEnd type="none" w="med" len="med"/>
-                      <a:tailEnd type="none" w="med" len="med"/>
-                    </a:lnB>
-                    <a:noFill/>
-                  </a:tcPr>
-                </a:tc>
-                <a:extLst>
-                  <a:ext uri="{0D108BD9-81ED-4DB2-BD59-A6C34878D82A}">
-                    <a16:rowId xmlns:a16="http://schemas.microsoft.com/office/drawing/2014/main" val="10004"/>
-                  </a:ext>
-                </a:extLst>
-              </a:tr>
-              <a:tr h="345440">
-                <a:tc>
-                  <a:txBody>
-                    <a:bodyPr/>
-                    <a:lstStyle/>
-                    <a:p>
-                      <a:pPr algn="ctr"/>
-                      <a:r>
-                        <a:rPr sz="1800" dirty="0"/>
-                        <a:t>4</a:t>
-                      </a:r>
-                    </a:p>
-                  </a:txBody>
-                  <a:tcPr anchor="ctr">
-                    <a:lnL w="12700" cap="flat" cmpd="sng" algn="ctr">
-                      <a:solidFill>
-                        <a:schemeClr val="tx1"/>
-                      </a:solidFill>
-                      <a:prstDash val="solid"/>
-                      <a:round/>
-                      <a:headEnd type="none" w="med" len="med"/>
-                      <a:tailEnd type="none" w="med" len="med"/>
-                    </a:lnL>
-                    <a:lnR w="12700" cap="flat" cmpd="sng" algn="ctr">
-                      <a:solidFill>
-                        <a:schemeClr val="tx1"/>
-                      </a:solidFill>
-                      <a:prstDash val="solid"/>
-                      <a:round/>
-                      <a:headEnd type="none" w="med" len="med"/>
-                      <a:tailEnd type="none" w="med" len="med"/>
-                    </a:lnR>
-                    <a:lnT w="12700" cap="flat" cmpd="sng" algn="ctr">
-                      <a:solidFill>
-                        <a:schemeClr val="tx1"/>
-                      </a:solidFill>
-                      <a:prstDash val="solid"/>
-                      <a:round/>
-                      <a:headEnd type="none" w="med" len="med"/>
-                      <a:tailEnd type="none" w="med" len="med"/>
-                    </a:lnT>
-                    <a:lnB w="12700" cap="flat" cmpd="sng" algn="ctr">
-                      <a:solidFill>
-                        <a:schemeClr val="tx1"/>
-                      </a:solidFill>
-                      <a:prstDash val="solid"/>
-                      <a:round/>
-                      <a:headEnd type="none" w="med" len="med"/>
-                      <a:tailEnd type="none" w="med" len="med"/>
-                    </a:lnB>
-                    <a:noFill/>
-                  </a:tcPr>
-                </a:tc>
-                <a:tc>
-                  <a:txBody>
-                    <a:bodyPr/>
-                    <a:lstStyle/>
-                    <a:p>
-                      <a:pPr algn="ctr"/>
-                      <a:r>
-                        <a:rPr sz="1800" dirty="0"/>
-                        <a:t>0x04</a:t>
-                      </a:r>
-                    </a:p>
-                  </a:txBody>
-                  <a:tcPr anchor="ctr">
-                    <a:lnL w="12700" cap="flat" cmpd="sng" algn="ctr">
-                      <a:solidFill>
-                        <a:schemeClr val="tx1"/>
-                      </a:solidFill>
-                      <a:prstDash val="solid"/>
-                      <a:round/>
-                      <a:headEnd type="none" w="med" len="med"/>
-                      <a:tailEnd type="none" w="med" len="med"/>
-                    </a:lnL>
-                    <a:lnR w="12700" cap="flat" cmpd="sng" algn="ctr">
-                      <a:solidFill>
-                        <a:schemeClr val="tx1"/>
-                      </a:solidFill>
-                      <a:prstDash val="solid"/>
-                      <a:round/>
-                      <a:headEnd type="none" w="med" len="med"/>
-                      <a:tailEnd type="none" w="med" len="med"/>
-                    </a:lnR>
-                    <a:lnT w="12700" cap="flat" cmpd="sng" algn="ctr">
-                      <a:solidFill>
-                        <a:schemeClr val="tx1"/>
-                      </a:solidFill>
-                      <a:prstDash val="solid"/>
-                      <a:round/>
-                      <a:headEnd type="none" w="med" len="med"/>
-                      <a:tailEnd type="none" w="med" len="med"/>
-                    </a:lnT>
-                    <a:lnB w="12700" cap="flat" cmpd="sng" algn="ctr">
-                      <a:solidFill>
-                        <a:schemeClr val="tx1"/>
-                      </a:solidFill>
-                      <a:prstDash val="solid"/>
-                      <a:round/>
-                      <a:headEnd type="none" w="med" len="med"/>
-                      <a:tailEnd type="none" w="med" len="med"/>
-                    </a:lnB>
-                    <a:noFill/>
-                  </a:tcPr>
-                </a:tc>
-                <a:tc>
-                  <a:txBody>
-                    <a:bodyPr/>
-                    <a:lstStyle/>
-                    <a:p>
-                      <a:pPr algn="ctr"/>
-                      <a:r>
-                        <a:rPr sz="1800" dirty="0"/>
-                        <a:t>0xE5</a:t>
-                      </a:r>
-                    </a:p>
-                  </a:txBody>
-                  <a:tcPr anchor="ctr">
-                    <a:lnL w="12700" cap="flat" cmpd="sng" algn="ctr">
-                      <a:solidFill>
-                        <a:schemeClr val="tx1"/>
-                      </a:solidFill>
-                      <a:prstDash val="solid"/>
-                      <a:round/>
-                      <a:headEnd type="none" w="med" len="med"/>
-                      <a:tailEnd type="none" w="med" len="med"/>
-                    </a:lnL>
-                    <a:lnR w="12700" cap="flat" cmpd="sng" algn="ctr">
-                      <a:solidFill>
-                        <a:schemeClr val="tx1"/>
-                      </a:solidFill>
-                      <a:prstDash val="solid"/>
-                      <a:round/>
-                      <a:headEnd type="none" w="med" len="med"/>
-                      <a:tailEnd type="none" w="med" len="med"/>
-                    </a:lnR>
-                    <a:lnT w="12700" cap="flat" cmpd="sng" algn="ctr">
-                      <a:solidFill>
-                        <a:schemeClr val="tx1"/>
-                      </a:solidFill>
-                      <a:prstDash val="solid"/>
-                      <a:round/>
-                      <a:headEnd type="none" w="med" len="med"/>
-                      <a:tailEnd type="none" w="med" len="med"/>
-                    </a:lnT>
-                    <a:lnB w="12700" cap="flat" cmpd="sng" algn="ctr">
-                      <a:solidFill>
-                        <a:schemeClr val="tx1"/>
-                      </a:solidFill>
-                      <a:prstDash val="solid"/>
-                      <a:round/>
-                      <a:headEnd type="none" w="med" len="med"/>
-                      <a:tailEnd type="none" w="med" len="med"/>
-                    </a:lnB>
-                    <a:noFill/>
-                  </a:tcPr>
-                </a:tc>
-                <a:tc>
-                  <a:txBody>
-                    <a:bodyPr/>
-                    <a:lstStyle/>
-                    <a:p>
-                      <a:pPr algn="ctr"/>
-                      <a:r>
-                        <a:rPr sz="1800" dirty="0"/>
-                        <a:t>0x68</a:t>
-                      </a:r>
-                    </a:p>
-                  </a:txBody>
-                  <a:tcPr anchor="ctr">
-                    <a:lnL w="12700" cap="flat" cmpd="sng" algn="ctr">
-                      <a:solidFill>
-                        <a:schemeClr val="tx1"/>
-                      </a:solidFill>
-                      <a:prstDash val="solid"/>
-                      <a:round/>
-                      <a:headEnd type="none" w="med" len="med"/>
-                      <a:tailEnd type="none" w="med" len="med"/>
-                    </a:lnL>
-                    <a:lnR w="12700" cap="flat" cmpd="sng" algn="ctr">
-                      <a:solidFill>
-                        <a:schemeClr val="tx1"/>
-                      </a:solidFill>
-                      <a:prstDash val="solid"/>
-                      <a:round/>
-                      <a:headEnd type="none" w="med" len="med"/>
-                      <a:tailEnd type="none" w="med" len="med"/>
-                    </a:lnR>
-                    <a:lnT w="12700" cap="flat" cmpd="sng" algn="ctr">
-                      <a:solidFill>
-                        <a:schemeClr val="tx1"/>
-                      </a:solidFill>
-                      <a:prstDash val="solid"/>
-                      <a:round/>
-                      <a:headEnd type="none" w="med" len="med"/>
-                      <a:tailEnd type="none" w="med" len="med"/>
-                    </a:lnT>
-                    <a:lnB w="12700" cap="flat" cmpd="sng" algn="ctr">
-                      <a:solidFill>
-                        <a:schemeClr val="tx1"/>
-                      </a:solidFill>
-                      <a:prstDash val="solid"/>
-                      <a:round/>
-                      <a:headEnd type="none" w="med" len="med"/>
-                      <a:tailEnd type="none" w="med" len="med"/>
-                    </a:lnB>
-                    <a:noFill/>
-                  </a:tcPr>
-                </a:tc>
-                <a:tc>
-                  <a:txBody>
-                    <a:bodyPr/>
-                    <a:lstStyle/>
-                    <a:p>
-                      <a:pPr algn="ctr"/>
-                      <a:r>
-                        <a:rPr sz="1800" dirty="0"/>
-                        <a:t>0xAA</a:t>
-                      </a:r>
-                    </a:p>
-                  </a:txBody>
-                  <a:tcPr anchor="ctr">
-                    <a:lnL w="12700" cap="flat" cmpd="sng" algn="ctr">
-                      <a:solidFill>
-                        <a:schemeClr val="tx1"/>
-                      </a:solidFill>
-                      <a:prstDash val="solid"/>
-                      <a:round/>
-                      <a:headEnd type="none" w="med" len="med"/>
-                      <a:tailEnd type="none" w="med" len="med"/>
-                    </a:lnL>
-                    <a:lnR w="12700" cap="flat" cmpd="sng" algn="ctr">
-                      <a:solidFill>
-                        <a:schemeClr val="tx1"/>
-                      </a:solidFill>
-                      <a:prstDash val="solid"/>
-                      <a:round/>
-                      <a:headEnd type="none" w="med" len="med"/>
-                      <a:tailEnd type="none" w="med" len="med"/>
-                    </a:lnR>
-                    <a:lnT w="12700" cap="flat" cmpd="sng" algn="ctr">
-                      <a:solidFill>
-                        <a:schemeClr val="tx1"/>
-                      </a:solidFill>
-                      <a:prstDash val="solid"/>
-                      <a:round/>
-                      <a:headEnd type="none" w="med" len="med"/>
-                      <a:tailEnd type="none" w="med" len="med"/>
-                    </a:lnT>
-                    <a:lnB w="12700" cap="flat" cmpd="sng" algn="ctr">
-                      <a:solidFill>
-                        <a:schemeClr val="tx1"/>
-                      </a:solidFill>
-                      <a:prstDash val="solid"/>
-                      <a:round/>
-                      <a:headEnd type="none" w="med" len="med"/>
-                      <a:tailEnd type="none" w="med" len="med"/>
-                    </a:lnB>
-                    <a:noFill/>
-                  </a:tcPr>
-                </a:tc>
-                <a:extLst>
-                  <a:ext uri="{0D108BD9-81ED-4DB2-BD59-A6C34878D82A}">
-                    <a16:rowId xmlns:a16="http://schemas.microsoft.com/office/drawing/2014/main" val="10005"/>
-                  </a:ext>
-                </a:extLst>
-              </a:tr>
-              <a:tr h="345440">
-                <a:tc>
-                  <a:txBody>
-                    <a:bodyPr/>
-                    <a:lstStyle/>
-                    <a:p>
-                      <a:pPr algn="ctr"/>
-                      <a:r>
-                        <a:rPr sz="1800" dirty="0"/>
-                        <a:t>5</a:t>
-                      </a:r>
-                    </a:p>
-                  </a:txBody>
-                  <a:tcPr anchor="ctr">
-                    <a:lnL w="12700" cap="flat" cmpd="sng" algn="ctr">
-                      <a:solidFill>
-                        <a:schemeClr val="tx1"/>
-                      </a:solidFill>
-                      <a:prstDash val="solid"/>
-                      <a:round/>
-                      <a:headEnd type="none" w="med" len="med"/>
-                      <a:tailEnd type="none" w="med" len="med"/>
-                    </a:lnL>
-                    <a:lnR w="12700" cap="flat" cmpd="sng" algn="ctr">
-                      <a:solidFill>
-                        <a:schemeClr val="tx1"/>
-                      </a:solidFill>
-                      <a:prstDash val="solid"/>
-                      <a:round/>
-                      <a:headEnd type="none" w="med" len="med"/>
-                      <a:tailEnd type="none" w="med" len="med"/>
-                    </a:lnR>
-                    <a:lnT w="12700" cap="flat" cmpd="sng" algn="ctr">
-                      <a:solidFill>
-                        <a:schemeClr val="tx1"/>
-                      </a:solidFill>
-                      <a:prstDash val="solid"/>
-                      <a:round/>
-                      <a:headEnd type="none" w="med" len="med"/>
-                      <a:tailEnd type="none" w="med" len="med"/>
-                    </a:lnT>
-                    <a:lnB w="12700" cap="flat" cmpd="sng" algn="ctr">
-                      <a:solidFill>
-                        <a:schemeClr val="tx1"/>
-                      </a:solidFill>
-                      <a:prstDash val="solid"/>
-                      <a:round/>
-                      <a:headEnd type="none" w="med" len="med"/>
-                      <a:tailEnd type="none" w="med" len="med"/>
-                    </a:lnB>
-                    <a:noFill/>
-                  </a:tcPr>
-                </a:tc>
-                <a:tc>
-                  <a:txBody>
-                    <a:bodyPr/>
-                    <a:lstStyle/>
-                    <a:p>
-                      <a:pPr algn="ctr"/>
-                      <a:r>
-                        <a:rPr sz="1800" dirty="0"/>
-                        <a:t>0x05</a:t>
-                      </a:r>
-                    </a:p>
-                  </a:txBody>
-                  <a:tcPr anchor="ctr">
-                    <a:lnL w="12700" cap="flat" cmpd="sng" algn="ctr">
-                      <a:solidFill>
-                        <a:schemeClr val="tx1"/>
-                      </a:solidFill>
-                      <a:prstDash val="solid"/>
-                      <a:round/>
-                      <a:headEnd type="none" w="med" len="med"/>
-                      <a:tailEnd type="none" w="med" len="med"/>
-                    </a:lnL>
-                    <a:lnR w="12700" cap="flat" cmpd="sng" algn="ctr">
-                      <a:solidFill>
-                        <a:schemeClr val="tx1"/>
-                      </a:solidFill>
-                      <a:prstDash val="solid"/>
-                      <a:round/>
-                      <a:headEnd type="none" w="med" len="med"/>
-                      <a:tailEnd type="none" w="med" len="med"/>
-                    </a:lnR>
-                    <a:lnT w="12700" cap="flat" cmpd="sng" algn="ctr">
-                      <a:solidFill>
-                        <a:schemeClr val="tx1"/>
-                      </a:solidFill>
-                      <a:prstDash val="solid"/>
-                      <a:round/>
-                      <a:headEnd type="none" w="med" len="med"/>
-                      <a:tailEnd type="none" w="med" len="med"/>
-                    </a:lnT>
-                    <a:lnB w="12700" cap="flat" cmpd="sng" algn="ctr">
-                      <a:solidFill>
-                        <a:schemeClr val="tx1"/>
-                      </a:solidFill>
-                      <a:prstDash val="solid"/>
-                      <a:round/>
-                      <a:headEnd type="none" w="med" len="med"/>
-                      <a:tailEnd type="none" w="med" len="med"/>
-                    </a:lnB>
-                    <a:noFill/>
-                  </a:tcPr>
-                </a:tc>
-                <a:tc>
-                  <a:txBody>
-                    <a:bodyPr/>
-                    <a:lstStyle/>
-                    <a:p>
-                      <a:pPr algn="ctr"/>
-                      <a:r>
-                        <a:rPr sz="1800" dirty="0"/>
-                        <a:t>0xE7</a:t>
-                      </a:r>
-                    </a:p>
-                  </a:txBody>
-                  <a:tcPr anchor="ctr">
-                    <a:lnL w="12700" cap="flat" cmpd="sng" algn="ctr">
-                      <a:solidFill>
-                        <a:schemeClr val="tx1"/>
-                      </a:solidFill>
-                      <a:prstDash val="solid"/>
-                      <a:round/>
-                      <a:headEnd type="none" w="med" len="med"/>
-                      <a:tailEnd type="none" w="med" len="med"/>
-                    </a:lnL>
-                    <a:lnR w="12700" cap="flat" cmpd="sng" algn="ctr">
-                      <a:solidFill>
-                        <a:schemeClr val="tx1"/>
-                      </a:solidFill>
-                      <a:prstDash val="solid"/>
-                      <a:round/>
-                      <a:headEnd type="none" w="med" len="med"/>
-                      <a:tailEnd type="none" w="med" len="med"/>
-                    </a:lnR>
-                    <a:lnT w="12700" cap="flat" cmpd="sng" algn="ctr">
-                      <a:solidFill>
-                        <a:schemeClr val="tx1"/>
-                      </a:solidFill>
-                      <a:prstDash val="solid"/>
-                      <a:round/>
-                      <a:headEnd type="none" w="med" len="med"/>
-                      <a:tailEnd type="none" w="med" len="med"/>
-                    </a:lnT>
-                    <a:lnB w="12700" cap="flat" cmpd="sng" algn="ctr">
-                      <a:solidFill>
-                        <a:schemeClr val="tx1"/>
-                      </a:solidFill>
-                      <a:prstDash val="solid"/>
-                      <a:round/>
-                      <a:headEnd type="none" w="med" len="med"/>
-                      <a:tailEnd type="none" w="med" len="med"/>
-                    </a:lnB>
-                    <a:noFill/>
-                  </a:tcPr>
-                </a:tc>
-                <a:tc>
-                  <a:txBody>
-                    <a:bodyPr/>
-                    <a:lstStyle/>
-                    <a:p>
-                      <a:pPr algn="ctr"/>
-                      <a:r>
-                        <a:rPr sz="1800" dirty="0"/>
-                        <a:t>0x69</a:t>
-                      </a:r>
-                    </a:p>
-                  </a:txBody>
-                  <a:tcPr anchor="ctr">
-                    <a:lnL w="12700" cap="flat" cmpd="sng" algn="ctr">
-                      <a:solidFill>
-                        <a:schemeClr val="tx1"/>
-                      </a:solidFill>
-                      <a:prstDash val="solid"/>
-                      <a:round/>
-                      <a:headEnd type="none" w="med" len="med"/>
-                      <a:tailEnd type="none" w="med" len="med"/>
-                    </a:lnL>
-                    <a:lnR w="12700" cap="flat" cmpd="sng" algn="ctr">
-                      <a:solidFill>
-                        <a:schemeClr val="tx1"/>
-                      </a:solidFill>
-                      <a:prstDash val="solid"/>
-                      <a:round/>
-                      <a:headEnd type="none" w="med" len="med"/>
-                      <a:tailEnd type="none" w="med" len="med"/>
-                    </a:lnR>
-                    <a:lnT w="12700" cap="flat" cmpd="sng" algn="ctr">
-                      <a:solidFill>
-                        <a:schemeClr val="tx1"/>
-                      </a:solidFill>
-                      <a:prstDash val="solid"/>
-                      <a:round/>
-                      <a:headEnd type="none" w="med" len="med"/>
-                      <a:tailEnd type="none" w="med" len="med"/>
-                    </a:lnT>
-                    <a:lnB w="12700" cap="flat" cmpd="sng" algn="ctr">
-                      <a:solidFill>
-                        <a:schemeClr val="tx1"/>
-                      </a:solidFill>
-                      <a:prstDash val="solid"/>
-                      <a:round/>
-                      <a:headEnd type="none" w="med" len="med"/>
-                      <a:tailEnd type="none" w="med" len="med"/>
-                    </a:lnB>
-                    <a:noFill/>
-                  </a:tcPr>
-                </a:tc>
-                <a:tc>
-                  <a:txBody>
-                    <a:bodyPr/>
-                    <a:lstStyle/>
-                    <a:p>
-                      <a:pPr algn="ctr"/>
-                      <a:r>
-                        <a:rPr sz="1800" dirty="0"/>
-                        <a:t>0xDE</a:t>
-                      </a:r>
-                    </a:p>
-                  </a:txBody>
-                  <a:tcPr anchor="ctr">
-                    <a:lnL w="12700" cap="flat" cmpd="sng" algn="ctr">
-                      <a:solidFill>
-                        <a:schemeClr val="tx1"/>
-                      </a:solidFill>
-                      <a:prstDash val="solid"/>
-                      <a:round/>
-                      <a:headEnd type="none" w="med" len="med"/>
-                      <a:tailEnd type="none" w="med" len="med"/>
-                    </a:lnL>
-                    <a:lnR w="12700" cap="flat" cmpd="sng" algn="ctr">
-                      <a:solidFill>
-                        <a:schemeClr val="tx1"/>
-                      </a:solidFill>
-                      <a:prstDash val="solid"/>
-                      <a:round/>
-                      <a:headEnd type="none" w="med" len="med"/>
-                      <a:tailEnd type="none" w="med" len="med"/>
-                    </a:lnR>
-                    <a:lnT w="12700" cap="flat" cmpd="sng" algn="ctr">
-                      <a:solidFill>
-                        <a:schemeClr val="tx1"/>
-                      </a:solidFill>
-                      <a:prstDash val="solid"/>
-                      <a:round/>
-                      <a:headEnd type="none" w="med" len="med"/>
-                      <a:tailEnd type="none" w="med" len="med"/>
-                    </a:lnT>
-                    <a:lnB w="12700" cap="flat" cmpd="sng" algn="ctr">
-                      <a:solidFill>
-                        <a:schemeClr val="tx1"/>
-                      </a:solidFill>
-                      <a:prstDash val="solid"/>
-                      <a:round/>
-                      <a:headEnd type="none" w="med" len="med"/>
-                      <a:tailEnd type="none" w="med" len="med"/>
-                    </a:lnB>
-                    <a:noFill/>
-                  </a:tcPr>
-                </a:tc>
-                <a:extLst>
-                  <a:ext uri="{0D108BD9-81ED-4DB2-BD59-A6C34878D82A}">
-                    <a16:rowId xmlns:a16="http://schemas.microsoft.com/office/drawing/2014/main" val="10006"/>
-                  </a:ext>
-                </a:extLst>
-              </a:tr>
-              <a:tr h="345440">
-                <a:tc>
-                  <a:txBody>
-                    <a:bodyPr/>
-                    <a:lstStyle/>
-                    <a:p>
-                      <a:pPr algn="ctr"/>
-                      <a:r>
-                        <a:rPr sz="1800" dirty="0"/>
-                        <a:t>6</a:t>
-                      </a:r>
-                    </a:p>
-                  </a:txBody>
-                  <a:tcPr anchor="ctr">
-                    <a:lnL w="12700" cap="flat" cmpd="sng" algn="ctr">
-                      <a:solidFill>
-                        <a:schemeClr val="tx1"/>
-                      </a:solidFill>
-                      <a:prstDash val="solid"/>
-                      <a:round/>
-                      <a:headEnd type="none" w="med" len="med"/>
-                      <a:tailEnd type="none" w="med" len="med"/>
-                    </a:lnL>
-                    <a:lnR w="12700" cap="flat" cmpd="sng" algn="ctr">
-                      <a:solidFill>
-                        <a:schemeClr val="tx1"/>
-                      </a:solidFill>
-                      <a:prstDash val="solid"/>
-                      <a:round/>
-                      <a:headEnd type="none" w="med" len="med"/>
-                      <a:tailEnd type="none" w="med" len="med"/>
-                    </a:lnR>
-                    <a:lnT w="12700" cap="flat" cmpd="sng" algn="ctr">
-                      <a:solidFill>
-                        <a:schemeClr val="tx1"/>
-                      </a:solidFill>
-                      <a:prstDash val="solid"/>
-                      <a:round/>
-                      <a:headEnd type="none" w="med" len="med"/>
-                      <a:tailEnd type="none" w="med" len="med"/>
-                    </a:lnT>
-                    <a:lnB w="12700" cap="flat" cmpd="sng" algn="ctr">
-                      <a:solidFill>
-                        <a:schemeClr val="tx1"/>
-                      </a:solidFill>
-                      <a:prstDash val="solid"/>
-                      <a:round/>
-                      <a:headEnd type="none" w="med" len="med"/>
-                      <a:tailEnd type="none" w="med" len="med"/>
-                    </a:lnB>
-                    <a:noFill/>
-                  </a:tcPr>
-                </a:tc>
-                <a:tc>
-                  <a:txBody>
-                    <a:bodyPr/>
-                    <a:lstStyle/>
-                    <a:p>
-                      <a:pPr algn="ctr"/>
-                      <a:r>
-                        <a:rPr sz="1800" dirty="0"/>
-                        <a:t>0x06</a:t>
-                      </a:r>
-                    </a:p>
-                  </a:txBody>
-                  <a:tcPr anchor="ctr">
-                    <a:lnL w="12700" cap="flat" cmpd="sng" algn="ctr">
-                      <a:solidFill>
-                        <a:schemeClr val="tx1"/>
-                      </a:solidFill>
-                      <a:prstDash val="solid"/>
-                      <a:round/>
-                      <a:headEnd type="none" w="med" len="med"/>
-                      <a:tailEnd type="none" w="med" len="med"/>
-                    </a:lnL>
-                    <a:lnR w="12700" cap="flat" cmpd="sng" algn="ctr">
-                      <a:solidFill>
-                        <a:schemeClr val="tx1"/>
-                      </a:solidFill>
-                      <a:prstDash val="solid"/>
-                      <a:round/>
-                      <a:headEnd type="none" w="med" len="med"/>
-                      <a:tailEnd type="none" w="med" len="med"/>
-                    </a:lnR>
-                    <a:lnT w="12700" cap="flat" cmpd="sng" algn="ctr">
-                      <a:solidFill>
-                        <a:schemeClr val="tx1"/>
-                      </a:solidFill>
-                      <a:prstDash val="solid"/>
-                      <a:round/>
-                      <a:headEnd type="none" w="med" len="med"/>
-                      <a:tailEnd type="none" w="med" len="med"/>
-                    </a:lnT>
-                    <a:lnB w="12700" cap="flat" cmpd="sng" algn="ctr">
-                      <a:solidFill>
-                        <a:schemeClr val="tx1"/>
-                      </a:solidFill>
-                      <a:prstDash val="solid"/>
-                      <a:round/>
-                      <a:headEnd type="none" w="med" len="med"/>
-                      <a:tailEnd type="none" w="med" len="med"/>
-                    </a:lnB>
-                    <a:noFill/>
-                  </a:tcPr>
-                </a:tc>
-                <a:tc>
-                  <a:txBody>
-                    <a:bodyPr/>
-                    <a:lstStyle/>
-                    <a:p>
-                      <a:pPr algn="ctr"/>
-                      <a:r>
-                        <a:rPr sz="1800" dirty="0"/>
-                        <a:t>0x67</a:t>
-                      </a:r>
-                    </a:p>
-                  </a:txBody>
-                  <a:tcPr anchor="ctr">
-                    <a:lnL w="12700" cap="flat" cmpd="sng" algn="ctr">
-                      <a:solidFill>
-                        <a:schemeClr val="tx1"/>
-                      </a:solidFill>
-                      <a:prstDash val="solid"/>
-                      <a:round/>
-                      <a:headEnd type="none" w="med" len="med"/>
-                      <a:tailEnd type="none" w="med" len="med"/>
-                    </a:lnL>
-                    <a:lnR w="12700" cap="flat" cmpd="sng" algn="ctr">
-                      <a:solidFill>
-                        <a:schemeClr val="tx1"/>
-                      </a:solidFill>
-                      <a:prstDash val="solid"/>
-                      <a:round/>
-                      <a:headEnd type="none" w="med" len="med"/>
-                      <a:tailEnd type="none" w="med" len="med"/>
-                    </a:lnR>
-                    <a:lnT w="12700" cap="flat" cmpd="sng" algn="ctr">
-                      <a:solidFill>
-                        <a:schemeClr val="tx1"/>
-                      </a:solidFill>
-                      <a:prstDash val="solid"/>
-                      <a:round/>
-                      <a:headEnd type="none" w="med" len="med"/>
-                      <a:tailEnd type="none" w="med" len="med"/>
-                    </a:lnT>
-                    <a:lnB w="12700" cap="flat" cmpd="sng" algn="ctr">
-                      <a:solidFill>
-                        <a:schemeClr val="tx1"/>
-                      </a:solidFill>
-                      <a:prstDash val="solid"/>
-                      <a:round/>
-                      <a:headEnd type="none" w="med" len="med"/>
-                      <a:tailEnd type="none" w="med" len="med"/>
-                    </a:lnB>
-                    <a:noFill/>
-                  </a:tcPr>
-                </a:tc>
-                <a:tc>
-                  <a:txBody>
-                    <a:bodyPr/>
-                    <a:lstStyle/>
-                    <a:p>
-                      <a:pPr algn="ctr"/>
-                      <a:r>
-                        <a:rPr sz="1800" dirty="0"/>
-                        <a:t>0x6A</a:t>
-                      </a:r>
-                    </a:p>
-                  </a:txBody>
-                  <a:tcPr anchor="ctr">
-                    <a:lnL w="12700" cap="flat" cmpd="sng" algn="ctr">
-                      <a:solidFill>
-                        <a:schemeClr val="tx1"/>
-                      </a:solidFill>
-                      <a:prstDash val="solid"/>
-                      <a:round/>
-                      <a:headEnd type="none" w="med" len="med"/>
-                      <a:tailEnd type="none" w="med" len="med"/>
-                    </a:lnL>
-                    <a:lnR w="12700" cap="flat" cmpd="sng" algn="ctr">
-                      <a:solidFill>
-                        <a:schemeClr val="tx1"/>
-                      </a:solidFill>
-                      <a:prstDash val="solid"/>
-                      <a:round/>
-                      <a:headEnd type="none" w="med" len="med"/>
-                      <a:tailEnd type="none" w="med" len="med"/>
-                    </a:lnR>
-                    <a:lnT w="12700" cap="flat" cmpd="sng" algn="ctr">
-                      <a:solidFill>
-                        <a:schemeClr val="tx1"/>
-                      </a:solidFill>
-                      <a:prstDash val="solid"/>
-                      <a:round/>
-                      <a:headEnd type="none" w="med" len="med"/>
-                      <a:tailEnd type="none" w="med" len="med"/>
-                    </a:lnT>
-                    <a:lnB w="12700" cap="flat" cmpd="sng" algn="ctr">
-                      <a:solidFill>
-                        <a:schemeClr val="tx1"/>
-                      </a:solidFill>
-                      <a:prstDash val="solid"/>
-                      <a:round/>
-                      <a:headEnd type="none" w="med" len="med"/>
-                      <a:tailEnd type="none" w="med" len="med"/>
-                    </a:lnB>
-                    <a:noFill/>
-                  </a:tcPr>
-                </a:tc>
-                <a:tc>
-                  <a:txBody>
-                    <a:bodyPr/>
-                    <a:lstStyle/>
-                    <a:p>
-                      <a:pPr algn="ctr"/>
-                      <a:r>
-                        <a:rPr sz="1800" dirty="0"/>
-                        <a:t>0x18</a:t>
-                      </a:r>
-                    </a:p>
-                  </a:txBody>
-                  <a:tcPr anchor="ctr">
-                    <a:lnL w="12700" cap="flat" cmpd="sng" algn="ctr">
-                      <a:solidFill>
-                        <a:schemeClr val="tx1"/>
-                      </a:solidFill>
-                      <a:prstDash val="solid"/>
-                      <a:round/>
-                      <a:headEnd type="none" w="med" len="med"/>
-                      <a:tailEnd type="none" w="med" len="med"/>
-                    </a:lnL>
-                    <a:lnR w="12700" cap="flat" cmpd="sng" algn="ctr">
-                      <a:solidFill>
-                        <a:schemeClr val="tx1"/>
-                      </a:solidFill>
-                      <a:prstDash val="solid"/>
-                      <a:round/>
-                      <a:headEnd type="none" w="med" len="med"/>
-                      <a:tailEnd type="none" w="med" len="med"/>
-                    </a:lnR>
-                    <a:lnT w="12700" cap="flat" cmpd="sng" algn="ctr">
-                      <a:solidFill>
-                        <a:schemeClr val="tx1"/>
-                      </a:solidFill>
-                      <a:prstDash val="solid"/>
-                      <a:round/>
-                      <a:headEnd type="none" w="med" len="med"/>
-                      <a:tailEnd type="none" w="med" len="med"/>
-                    </a:lnT>
-                    <a:lnB w="12700" cap="flat" cmpd="sng" algn="ctr">
-                      <a:solidFill>
-                        <a:schemeClr val="tx1"/>
-                      </a:solidFill>
-                      <a:prstDash val="solid"/>
-                      <a:round/>
-                      <a:headEnd type="none" w="med" len="med"/>
-                      <a:tailEnd type="none" w="med" len="med"/>
-                    </a:lnB>
-                    <a:noFill/>
-                  </a:tcPr>
-                </a:tc>
-                <a:extLst>
-                  <a:ext uri="{0D108BD9-81ED-4DB2-BD59-A6C34878D82A}">
-                    <a16:rowId xmlns:a16="http://schemas.microsoft.com/office/drawing/2014/main" val="10007"/>
-                  </a:ext>
-                </a:extLst>
-              </a:tr>
-              <a:tr h="345440">
-                <a:tc>
-                  <a:txBody>
-                    <a:bodyPr/>
-                    <a:lstStyle/>
-                    <a:p>
-                      <a:pPr algn="ctr"/>
-                      <a:r>
-                        <a:rPr sz="1800" dirty="0"/>
-                        <a:t>7</a:t>
-                      </a:r>
-                    </a:p>
-                  </a:txBody>
-                  <a:tcPr anchor="ctr">
-                    <a:lnL w="12700" cap="flat" cmpd="sng" algn="ctr">
-                      <a:solidFill>
-                        <a:schemeClr val="tx1"/>
-                      </a:solidFill>
-                      <a:prstDash val="solid"/>
-                      <a:round/>
-                      <a:headEnd type="none" w="med" len="med"/>
-                      <a:tailEnd type="none" w="med" len="med"/>
-                    </a:lnL>
-                    <a:lnR w="12700" cap="flat" cmpd="sng" algn="ctr">
-                      <a:solidFill>
-                        <a:schemeClr val="tx1"/>
-                      </a:solidFill>
-                      <a:prstDash val="solid"/>
-                      <a:round/>
-                      <a:headEnd type="none" w="med" len="med"/>
-                      <a:tailEnd type="none" w="med" len="med"/>
-                    </a:lnR>
-                    <a:lnT w="12700" cap="flat" cmpd="sng" algn="ctr">
-                      <a:solidFill>
-                        <a:schemeClr val="tx1"/>
-                      </a:solidFill>
-                      <a:prstDash val="solid"/>
-                      <a:round/>
-                      <a:headEnd type="none" w="med" len="med"/>
-                      <a:tailEnd type="none" w="med" len="med"/>
-                    </a:lnT>
-                    <a:lnB w="12700" cap="flat" cmpd="sng" algn="ctr">
-                      <a:solidFill>
-                        <a:schemeClr val="tx1"/>
-                      </a:solidFill>
-                      <a:prstDash val="solid"/>
-                      <a:round/>
-                      <a:headEnd type="none" w="med" len="med"/>
-                      <a:tailEnd type="none" w="med" len="med"/>
-                    </a:lnB>
-                    <a:noFill/>
-                  </a:tcPr>
-                </a:tc>
-                <a:tc>
-                  <a:txBody>
-                    <a:bodyPr/>
-                    <a:lstStyle/>
-                    <a:p>
-                      <a:pPr algn="ctr"/>
-                      <a:r>
-                        <a:rPr sz="1800" dirty="0"/>
-                        <a:t>0x07</a:t>
-                      </a:r>
-                    </a:p>
-                  </a:txBody>
-                  <a:tcPr anchor="ctr">
-                    <a:lnL w="12700" cap="flat" cmpd="sng" algn="ctr">
-                      <a:solidFill>
-                        <a:schemeClr val="tx1"/>
-                      </a:solidFill>
-                      <a:prstDash val="solid"/>
-                      <a:round/>
-                      <a:headEnd type="none" w="med" len="med"/>
-                      <a:tailEnd type="none" w="med" len="med"/>
-                    </a:lnL>
-                    <a:lnR w="12700" cap="flat" cmpd="sng" algn="ctr">
-                      <a:solidFill>
-                        <a:schemeClr val="tx1"/>
-                      </a:solidFill>
-                      <a:prstDash val="solid"/>
-                      <a:round/>
-                      <a:headEnd type="none" w="med" len="med"/>
-                      <a:tailEnd type="none" w="med" len="med"/>
-                    </a:lnR>
-                    <a:lnT w="12700" cap="flat" cmpd="sng" algn="ctr">
-                      <a:solidFill>
-                        <a:schemeClr val="tx1"/>
-                      </a:solidFill>
-                      <a:prstDash val="solid"/>
-                      <a:round/>
-                      <a:headEnd type="none" w="med" len="med"/>
-                      <a:tailEnd type="none" w="med" len="med"/>
-                    </a:lnT>
-                    <a:lnB w="12700" cap="flat" cmpd="sng" algn="ctr">
-                      <a:solidFill>
-                        <a:schemeClr val="tx1"/>
-                      </a:solidFill>
-                      <a:prstDash val="solid"/>
-                      <a:round/>
-                      <a:headEnd type="none" w="med" len="med"/>
-                      <a:tailEnd type="none" w="med" len="med"/>
-                    </a:lnB>
-                    <a:noFill/>
-                  </a:tcPr>
-                </a:tc>
-                <a:tc>
-                  <a:txBody>
-                    <a:bodyPr/>
-                    <a:lstStyle/>
-                    <a:p>
-                      <a:pPr algn="ctr"/>
-                      <a:r>
-                        <a:rPr sz="1800" dirty="0"/>
-                        <a:t>0xCA</a:t>
-                      </a:r>
-                    </a:p>
-                  </a:txBody>
-                  <a:tcPr anchor="ctr">
-                    <a:lnL w="12700" cap="flat" cmpd="sng" algn="ctr">
-                      <a:solidFill>
-                        <a:schemeClr val="tx1"/>
-                      </a:solidFill>
-                      <a:prstDash val="solid"/>
-                      <a:round/>
-                      <a:headEnd type="none" w="med" len="med"/>
-                      <a:tailEnd type="none" w="med" len="med"/>
-                    </a:lnL>
-                    <a:lnR w="12700" cap="flat" cmpd="sng" algn="ctr">
-                      <a:solidFill>
-                        <a:schemeClr val="tx1"/>
-                      </a:solidFill>
-                      <a:prstDash val="solid"/>
-                      <a:round/>
-                      <a:headEnd type="none" w="med" len="med"/>
-                      <a:tailEnd type="none" w="med" len="med"/>
-                    </a:lnR>
-                    <a:lnT w="12700" cap="flat" cmpd="sng" algn="ctr">
-                      <a:solidFill>
-                        <a:schemeClr val="tx1"/>
-                      </a:solidFill>
-                      <a:prstDash val="solid"/>
-                      <a:round/>
-                      <a:headEnd type="none" w="med" len="med"/>
-                      <a:tailEnd type="none" w="med" len="med"/>
-                    </a:lnT>
-                    <a:lnB w="12700" cap="flat" cmpd="sng" algn="ctr">
-                      <a:solidFill>
-                        <a:schemeClr val="tx1"/>
-                      </a:solidFill>
-                      <a:prstDash val="solid"/>
-                      <a:round/>
-                      <a:headEnd type="none" w="med" len="med"/>
-                      <a:tailEnd type="none" w="med" len="med"/>
-                    </a:lnB>
-                    <a:noFill/>
-                  </a:tcPr>
-                </a:tc>
-                <a:tc>
-                  <a:txBody>
-                    <a:bodyPr/>
-                    <a:lstStyle/>
-                    <a:p>
-                      <a:pPr algn="ctr"/>
-                      <a:r>
-                        <a:rPr sz="1800" dirty="0"/>
-                        <a:t>0x6B</a:t>
-                      </a:r>
-                    </a:p>
-                  </a:txBody>
-                  <a:tcPr anchor="ctr">
-                    <a:lnL w="12700" cap="flat" cmpd="sng" algn="ctr">
-                      <a:solidFill>
-                        <a:schemeClr val="tx1"/>
-                      </a:solidFill>
-                      <a:prstDash val="solid"/>
-                      <a:round/>
-                      <a:headEnd type="none" w="med" len="med"/>
-                      <a:tailEnd type="none" w="med" len="med"/>
-                    </a:lnL>
-                    <a:lnR w="12700" cap="flat" cmpd="sng" algn="ctr">
-                      <a:solidFill>
-                        <a:schemeClr val="tx1"/>
-                      </a:solidFill>
-                      <a:prstDash val="solid"/>
-                      <a:round/>
-                      <a:headEnd type="none" w="med" len="med"/>
-                      <a:tailEnd type="none" w="med" len="med"/>
-                    </a:lnR>
-                    <a:lnT w="12700" cap="flat" cmpd="sng" algn="ctr">
-                      <a:solidFill>
-                        <a:schemeClr val="tx1"/>
-                      </a:solidFill>
-                      <a:prstDash val="solid"/>
-                      <a:round/>
-                      <a:headEnd type="none" w="med" len="med"/>
-                      <a:tailEnd type="none" w="med" len="med"/>
-                    </a:lnT>
-                    <a:lnB w="12700" cap="flat" cmpd="sng" algn="ctr">
-                      <a:solidFill>
-                        <a:schemeClr val="tx1"/>
-                      </a:solidFill>
-                      <a:prstDash val="solid"/>
-                      <a:round/>
-                      <a:headEnd type="none" w="med" len="med"/>
-                      <a:tailEnd type="none" w="med" len="med"/>
-                    </a:lnB>
-                    <a:noFill/>
-                  </a:tcPr>
-                </a:tc>
-                <a:tc>
-                  <a:txBody>
-                    <a:bodyPr/>
-                    <a:lstStyle/>
-                    <a:p>
-                      <a:pPr algn="ctr"/>
-                      <a:r>
-                        <a:rPr sz="1800" dirty="0"/>
-                        <a:t>0x82</a:t>
-                      </a:r>
-                    </a:p>
-                  </a:txBody>
-                  <a:tcPr anchor="ctr">
-                    <a:lnL w="12700" cap="flat" cmpd="sng" algn="ctr">
-                      <a:solidFill>
-                        <a:schemeClr val="tx1"/>
-                      </a:solidFill>
-                      <a:prstDash val="solid"/>
-                      <a:round/>
-                      <a:headEnd type="none" w="med" len="med"/>
-                      <a:tailEnd type="none" w="med" len="med"/>
-                    </a:lnL>
-                    <a:lnR w="12700" cap="flat" cmpd="sng" algn="ctr">
-                      <a:solidFill>
-                        <a:schemeClr val="tx1"/>
-                      </a:solidFill>
-                      <a:prstDash val="solid"/>
-                      <a:round/>
-                      <a:headEnd type="none" w="med" len="med"/>
-                      <a:tailEnd type="none" w="med" len="med"/>
-                    </a:lnR>
-                    <a:lnT w="12700" cap="flat" cmpd="sng" algn="ctr">
-                      <a:solidFill>
-                        <a:schemeClr val="tx1"/>
-                      </a:solidFill>
-                      <a:prstDash val="solid"/>
-                      <a:round/>
-                      <a:headEnd type="none" w="med" len="med"/>
-                      <a:tailEnd type="none" w="med" len="med"/>
-                    </a:lnT>
-                    <a:lnB w="12700" cap="flat" cmpd="sng" algn="ctr">
-                      <a:solidFill>
-                        <a:schemeClr val="tx1"/>
-                      </a:solidFill>
-                      <a:prstDash val="solid"/>
-                      <a:round/>
-                      <a:headEnd type="none" w="med" len="med"/>
-                      <a:tailEnd type="none" w="med" len="med"/>
-                    </a:lnB>
-                    <a:noFill/>
-                  </a:tcPr>
-                </a:tc>
-                <a:extLst>
-                  <a:ext uri="{0D108BD9-81ED-4DB2-BD59-A6C34878D82A}">
-                    <a16:rowId xmlns:a16="http://schemas.microsoft.com/office/drawing/2014/main" val="10008"/>
-                  </a:ext>
-                </a:extLst>
-              </a:tr>
-            </a:tbl>
-          </a:graphicData>
-        </a:graphic>
-      </p:graphicFrame>
-    </p:spTree>
-  </p:cSld>
-  <p:clrMapOvr>
-    <a:masterClrMapping/>
-  </p:clrMapOvr>
-</p:sld>
-</file>
-
 <file path=ppt/slides/slide2.xml><?xml version="1.0" encoding="utf-8"?>
 <p:sld xmlns:a="http://schemas.openxmlformats.org/drawingml/2006/main" xmlns:r="http://schemas.openxmlformats.org/officeDocument/2006/relationships" xmlns:p="http://schemas.openxmlformats.org/presentationml/2006/main">
   <p:cSld>
@@ -18106,3252 +14640,6 @@
           </a:p>
         </p:txBody>
       </p:sp>
-    </p:spTree>
-  </p:cSld>
-  <p:clrMapOvr>
-    <a:masterClrMapping/>
-  </p:clrMapOvr>
-</p:sld>
-</file>
-
-<file path=ppt/slides/slide20.xml><?xml version="1.0" encoding="utf-8"?>
-<p:sld xmlns:a="http://schemas.openxmlformats.org/drawingml/2006/main" xmlns:r="http://schemas.openxmlformats.org/officeDocument/2006/relationships" xmlns:p="http://schemas.openxmlformats.org/presentationml/2006/main">
-  <p:cSld>
-    <p:spTree>
-      <p:nvGrpSpPr>
-        <p:cNvPr id="1" name=""/>
-        <p:cNvGrpSpPr/>
-        <p:nvPr/>
-      </p:nvGrpSpPr>
-      <p:grpSpPr>
-        <a:xfrm>
-          <a:off x="0" y="0"/>
-          <a:ext cx="0" cy="0"/>
-          <a:chOff x="0" y="0"/>
-          <a:chExt cx="0" cy="0"/>
-        </a:xfrm>
-      </p:grpSpPr>
-      <p:sp>
-        <p:nvSpPr>
-          <p:cNvPr id="2" name="Title 1"/>
-          <p:cNvSpPr>
-            <a:spLocks noGrp="1"/>
-          </p:cNvSpPr>
-          <p:nvPr>
-            <p:ph type="title"/>
-          </p:nvPr>
-        </p:nvSpPr>
-        <p:spPr/>
-        <p:txBody>
-          <a:bodyPr/>
-          <a:lstStyle/>
-          <a:p>
-            <a:r>
-              <a:rPr dirty="0"/>
-              <a:t>숫자 예제: 서명과 검증 (M="PQC")</a:t>
-            </a:r>
-          </a:p>
-        </p:txBody>
-      </p:sp>
-      <mc:AlternateContent xmlns:mc="http://schemas.openxmlformats.org/markup-compatibility/2006">
-        <mc:Choice xmlns:a14="http://schemas.microsoft.com/office/drawing/2010/main" Requires="a14">
-          <p:sp>
-            <p:nvSpPr>
-              <p:cNvPr id="3" name="Content Placeholder 2"/>
-              <p:cNvSpPr>
-                <a:spLocks noGrp="1"/>
-              </p:cNvSpPr>
-              <p:nvPr>
-                <p:ph idx="1"/>
-              </p:nvPr>
-            </p:nvSpPr>
-            <p:spPr/>
-            <p:txBody>
-              <a:bodyPr/>
-              <a:lstStyle>
-                <a:lvl1pPr>
-                  <a:defRPr sz="1800"/>
-                </a:lvl1pPr>
-                <a:lvl2pPr>
-                  <a:defRPr sz="1800"/>
-                </a:lvl2pPr>
-              </a:lstStyle>
-              <a:p>
-                <a:r>
-                  <a:rPr sz="1800" dirty="0"/>
-                  <a:t>메시지 </a:t>
-                </a:r>
-                <a14:m>
-                  <m:oMath xmlns:m="http://schemas.openxmlformats.org/officeDocument/2006/math">
-                    <m:r>
-                      <a:rPr lang="en-US" i="1">
-                        <a:latin typeface="Cambria Math"/>
-                      </a:rPr>
-                      <m:t>𝑀</m:t>
-                    </m:r>
-                  </m:oMath>
-                </a14:m>
-                <a:r>
-                  <a:rPr sz="1800" dirty="0"/>
-                  <a:t> = "PQC"(ASCII 3바이트)를 서명</a:t>
-                </a:r>
-              </a:p>
-              <a:p>
-                <a:r>
-                  <a:rPr sz="1800" dirty="0"/>
-                  <a:t>해시: </a:t>
-                </a:r>
-                <a14:m>
-                  <m:oMath xmlns:m="http://schemas.openxmlformats.org/officeDocument/2006/math">
-                    <m:r>
-                      <a:rPr lang="en-US" i="1">
-                        <a:latin typeface="Cambria Math"/>
-                      </a:rPr>
-                      <m:t>𝐻</m:t>
-                    </m:r>
-                    <m:r>
-                      <a:rPr lang="en-US" i="1">
-                        <a:latin typeface="Cambria Math"/>
-                      </a:rPr>
-                      <m:t>(</m:t>
-                    </m:r>
-                    <m:r>
-                      <a:rPr lang="en-US" i="1">
-                        <a:latin typeface="Cambria Math"/>
-                      </a:rPr>
-                      <m:t>𝑀</m:t>
-                    </m:r>
-                    <m:r>
-                      <a:rPr lang="en-US" i="1">
-                        <a:latin typeface="Cambria Math"/>
-                      </a:rPr>
-                      <m:t>)</m:t>
-                    </m:r>
-                  </m:oMath>
-                </a14:m>
-                <a:r>
-                  <a:rPr sz="1800" dirty="0"/>
-                  <a:t> = 0x1E = 00011110₂ → </a:t>
-                </a:r>
-                <a14:m>
-                  <m:oMath xmlns:m="http://schemas.openxmlformats.org/officeDocument/2006/math">
-                    <m:r>
-                      <a:rPr lang="en-US" i="1">
-                        <a:latin typeface="Cambria Math"/>
-                      </a:rPr>
-                      <m:t>h</m:t>
-                    </m:r>
-                    <m:r>
-                      <a:rPr lang="en-US" i="1">
-                        <a:latin typeface="Cambria Math"/>
-                      </a:rPr>
-                      <m:t>=(</m:t>
-                    </m:r>
-                    <m:sSub>
-                      <m:sSubPr>
-                        <m:ctrlPr>
-                          <a:rPr lang="en-US" i="1">
-                            <a:latin typeface="Cambria Math" panose="02040503050406030204" pitchFamily="18" charset="0"/>
-                          </a:rPr>
-                        </m:ctrlPr>
-                      </m:sSubPr>
-                      <m:e>
-                        <m:r>
-                          <a:rPr lang="en-US" i="1">
-                            <a:latin typeface="Cambria Math"/>
-                          </a:rPr>
-                          <m:t>h</m:t>
-                        </m:r>
-                      </m:e>
-                      <m:sub>
-                        <m:r>
-                          <a:rPr lang="en-US" i="1">
-                            <a:latin typeface="Cambria Math"/>
-                          </a:rPr>
-                          <m:t>0</m:t>
-                        </m:r>
-                      </m:sub>
-                    </m:sSub>
-                    <m:r>
-                      <a:rPr lang="en-US" i="1">
-                        <a:latin typeface="Cambria Math"/>
-                      </a:rPr>
-                      <m:t>,…,</m:t>
-                    </m:r>
-                    <m:sSub>
-                      <m:sSubPr>
-                        <m:ctrlPr>
-                          <a:rPr lang="en-US" i="1">
-                            <a:latin typeface="Cambria Math" panose="02040503050406030204" pitchFamily="18" charset="0"/>
-                          </a:rPr>
-                        </m:ctrlPr>
-                      </m:sSubPr>
-                      <m:e>
-                        <m:r>
-                          <a:rPr lang="en-US" i="1">
-                            <a:latin typeface="Cambria Math"/>
-                          </a:rPr>
-                          <m:t>h</m:t>
-                        </m:r>
-                      </m:e>
-                      <m:sub>
-                        <m:r>
-                          <a:rPr lang="en-US" i="1">
-                            <a:latin typeface="Cambria Math"/>
-                          </a:rPr>
-                          <m:t>7</m:t>
-                        </m:r>
-                      </m:sub>
-                    </m:sSub>
-                    <m:r>
-                      <a:rPr lang="en-US" i="1">
-                        <a:latin typeface="Cambria Math"/>
-                      </a:rPr>
-                      <m:t>)=(0,0,0,1,1,1,1,0)</m:t>
-                    </m:r>
-                  </m:oMath>
-                </a14:m>
-                <a:endParaRPr sz="1800" dirty="0"/>
-              </a:p>
-            </p:txBody>
-          </p:sp>
-        </mc:Choice>
-        <mc:Fallback>
-          <p:sp>
-            <p:nvSpPr>
-              <p:cNvPr id="3" name="Content Placeholder 2"/>
-              <p:cNvSpPr>
-                <a:spLocks noGrp="1" noRot="1" noChangeAspect="1" noMove="1" noResize="1" noEditPoints="1" noAdjustHandles="1" noChangeArrowheads="1" noChangeShapeType="1" noTextEdit="1"/>
-              </p:cNvSpPr>
-              <p:nvPr>
-                <p:ph idx="1"/>
-              </p:nvPr>
-            </p:nvSpPr>
-            <p:spPr>
-              <a:blipFill>
-                <a:blip r:embed="rId2"/>
-                <a:stretch>
-                  <a:fillRect l="-232"/>
-                </a:stretch>
-              </a:blipFill>
-            </p:spPr>
-            <p:txBody>
-              <a:bodyPr/>
-              <a:lstStyle/>
-              <a:p>
-                <a:r>
-                  <a:rPr lang="ko-KR" altLang="en-US">
-                    <a:noFill/>
-                  </a:rPr>
-                  <a:t> </a:t>
-                </a:r>
-              </a:p>
-            </p:txBody>
-          </p:sp>
-        </mc:Fallback>
-      </mc:AlternateContent>
-      <p:sp>
-        <p:nvSpPr>
-          <p:cNvPr id="4" name="슬라이드 번호 개체 틀"/>
-          <p:cNvSpPr>
-            <a:spLocks noGrp="1"/>
-          </p:cNvSpPr>
-          <p:nvPr>
-            <p:ph type="sldNum" sz="quarter" idx="12"/>
-          </p:nvPr>
-        </p:nvSpPr>
-        <p:spPr/>
-        <p:txBody>
-          <a:bodyPr/>
-          <a:lstStyle/>
-          <a:p>
-            <a:fld id="{4438A2D4-3867-488E-A04E-7BFFCAED45A6}" type="slidenum">
-              <a:rPr lang="ko-KR" altLang="en-US" smtClean="0"/>
-              <a:t>20</a:t>
-            </a:fld>
-            <a:endParaRPr lang="ko-KR" altLang="en-US" dirty="0"/>
-          </a:p>
-        </p:txBody>
-      </p:sp>
-      <p:graphicFrame>
-        <p:nvGraphicFramePr>
-          <p:cNvPr id="5" name="Table 4"/>
-          <p:cNvGraphicFramePr>
-            <a:graphicFrameLocks noGrp="1"/>
-          </p:cNvGraphicFramePr>
-          <p:nvPr>
-            <p:extLst>
-              <p:ext uri="{D42A27DB-BD31-4B8C-83A1-F6EECF244321}">
-                <p14:modId xmlns:p14="http://schemas.microsoft.com/office/powerpoint/2010/main" val="2610668507"/>
-              </p:ext>
-            </p:extLst>
-          </p:nvPr>
-        </p:nvGraphicFramePr>
-        <p:xfrm>
-          <a:off x="841247" y="2704571"/>
-          <a:ext cx="10512553" cy="3291840"/>
-        </p:xfrm>
-        <a:graphic>
-          <a:graphicData uri="http://schemas.openxmlformats.org/drawingml/2006/table">
-            <a:tbl>
-              <a:tblPr firstRow="1" bandRow="1">
-                <a:tableStyleId>{5C22544A-7EE6-4342-B048-85BDC9FD1C3A}</a:tableStyleId>
-              </a:tblPr>
-              <a:tblGrid>
-                <a:gridCol w="1118357">
-                  <a:extLst>
-                    <a:ext uri="{9D8B030D-6E8A-4147-A177-3AD203B41FA5}">
-                      <a16:colId xmlns:a16="http://schemas.microsoft.com/office/drawing/2014/main" val="20000"/>
-                    </a:ext>
-                  </a:extLst>
-                </a:gridCol>
-                <a:gridCol w="1118357">
-                  <a:extLst>
-                    <a:ext uri="{9D8B030D-6E8A-4147-A177-3AD203B41FA5}">
-                      <a16:colId xmlns:a16="http://schemas.microsoft.com/office/drawing/2014/main" val="20001"/>
-                    </a:ext>
-                  </a:extLst>
-                </a:gridCol>
-                <a:gridCol w="1901206">
-                  <a:extLst>
-                    <a:ext uri="{9D8B030D-6E8A-4147-A177-3AD203B41FA5}">
-                      <a16:colId xmlns:a16="http://schemas.microsoft.com/office/drawing/2014/main" val="20002"/>
-                    </a:ext>
-                  </a:extLst>
-                </a:gridCol>
-                <a:gridCol w="2236713">
-                  <a:extLst>
-                    <a:ext uri="{9D8B030D-6E8A-4147-A177-3AD203B41FA5}">
-                      <a16:colId xmlns:a16="http://schemas.microsoft.com/office/drawing/2014/main" val="20003"/>
-                    </a:ext>
-                  </a:extLst>
-                </a:gridCol>
-                <a:gridCol w="2460385">
-                  <a:extLst>
-                    <a:ext uri="{9D8B030D-6E8A-4147-A177-3AD203B41FA5}">
-                      <a16:colId xmlns:a16="http://schemas.microsoft.com/office/drawing/2014/main" val="20004"/>
-                    </a:ext>
-                  </a:extLst>
-                </a:gridCol>
-                <a:gridCol w="1677535">
-                  <a:extLst>
-                    <a:ext uri="{9D8B030D-6E8A-4147-A177-3AD203B41FA5}">
-                      <a16:colId xmlns:a16="http://schemas.microsoft.com/office/drawing/2014/main" val="20005"/>
-                    </a:ext>
-                  </a:extLst>
-                </a:gridCol>
-              </a:tblGrid>
-              <a:tr h="365760">
-                <a:tc>
-                  <a:txBody>
-                    <a:bodyPr/>
-                    <a:lstStyle/>
-                    <a:p>
-                      <a:pPr algn="ctr"/>
-                      <a:r>
-                        <a:rPr sz="1800" b="1" dirty="0">
-                          <a:solidFill>
-                            <a:schemeClr val="bg1"/>
-                          </a:solidFill>
-                        </a:rPr>
-                        <a:t>j</a:t>
-                      </a:r>
-                    </a:p>
-                  </a:txBody>
-                  <a:tcPr anchor="ctr">
-                    <a:lnL w="12700" cap="flat" cmpd="sng" algn="ctr">
-                      <a:solidFill>
-                        <a:schemeClr val="tx1"/>
-                      </a:solidFill>
-                      <a:prstDash val="solid"/>
-                      <a:round/>
-                      <a:headEnd type="none" w="med" len="med"/>
-                      <a:tailEnd type="none" w="med" len="med"/>
-                    </a:lnL>
-                    <a:lnR w="12700" cap="flat" cmpd="sng" algn="ctr">
-                      <a:solidFill>
-                        <a:schemeClr val="tx1"/>
-                      </a:solidFill>
-                      <a:prstDash val="solid"/>
-                      <a:round/>
-                      <a:headEnd type="none" w="med" len="med"/>
-                      <a:tailEnd type="none" w="med" len="med"/>
-                    </a:lnR>
-                    <a:lnT w="12700" cap="flat" cmpd="sng" algn="ctr">
-                      <a:solidFill>
-                        <a:schemeClr val="tx1"/>
-                      </a:solidFill>
-                      <a:prstDash val="solid"/>
-                      <a:round/>
-                      <a:headEnd type="none" w="med" len="med"/>
-                      <a:tailEnd type="none" w="med" len="med"/>
-                    </a:lnT>
-                    <a:lnB w="12700" cap="flat" cmpd="sng" algn="ctr">
-                      <a:solidFill>
-                        <a:schemeClr val="tx1"/>
-                      </a:solidFill>
-                      <a:prstDash val="solid"/>
-                      <a:round/>
-                      <a:headEnd type="none" w="med" len="med"/>
-                      <a:tailEnd type="none" w="med" len="med"/>
-                    </a:lnB>
-                    <a:solidFill>
-                      <a:schemeClr val="accent2"/>
-                    </a:solidFill>
-                  </a:tcPr>
-                </a:tc>
-                <a:tc>
-                  <a:txBody>
-                    <a:bodyPr/>
-                    <a:lstStyle/>
-                    <a:p>
-                      <a:pPr algn="ctr"/>
-                      <a:r>
-                        <a:rPr sz="1800" b="1" dirty="0">
-                          <a:solidFill>
-                            <a:schemeClr val="bg1"/>
-                          </a:solidFill>
-                        </a:rPr>
-                        <a:t>hj</a:t>
-                      </a:r>
-                    </a:p>
-                  </a:txBody>
-                  <a:tcPr anchor="ctr">
-                    <a:lnL w="12700" cap="flat" cmpd="sng" algn="ctr">
-                      <a:solidFill>
-                        <a:schemeClr val="tx1"/>
-                      </a:solidFill>
-                      <a:prstDash val="solid"/>
-                      <a:round/>
-                      <a:headEnd type="none" w="med" len="med"/>
-                      <a:tailEnd type="none" w="med" len="med"/>
-                    </a:lnL>
-                    <a:lnR w="12700" cap="flat" cmpd="sng" algn="ctr">
-                      <a:solidFill>
-                        <a:schemeClr val="tx1"/>
-                      </a:solidFill>
-                      <a:prstDash val="solid"/>
-                      <a:round/>
-                      <a:headEnd type="none" w="med" len="med"/>
-                      <a:tailEnd type="none" w="med" len="med"/>
-                    </a:lnR>
-                    <a:lnT w="12700" cap="flat" cmpd="sng" algn="ctr">
-                      <a:solidFill>
-                        <a:schemeClr val="tx1"/>
-                      </a:solidFill>
-                      <a:prstDash val="solid"/>
-                      <a:round/>
-                      <a:headEnd type="none" w="med" len="med"/>
-                      <a:tailEnd type="none" w="med" len="med"/>
-                    </a:lnT>
-                    <a:lnB w="12700" cap="flat" cmpd="sng" algn="ctr">
-                      <a:solidFill>
-                        <a:schemeClr val="tx1"/>
-                      </a:solidFill>
-                      <a:prstDash val="solid"/>
-                      <a:round/>
-                      <a:headEnd type="none" w="med" len="med"/>
-                      <a:tailEnd type="none" w="med" len="med"/>
-                    </a:lnB>
-                    <a:solidFill>
-                      <a:schemeClr val="accent2"/>
-                    </a:solidFill>
-                  </a:tcPr>
-                </a:tc>
-                <a:tc>
-                  <a:txBody>
-                    <a:bodyPr/>
-                    <a:lstStyle/>
-                    <a:p>
-                      <a:pPr algn="ctr"/>
-                      <a:r>
-                        <a:rPr sz="1800" b="1" dirty="0">
-                          <a:solidFill>
-                            <a:schemeClr val="bg1"/>
-                          </a:solidFill>
-                        </a:rPr>
-                        <a:t>sj</a:t>
-                      </a:r>
-                    </a:p>
-                  </a:txBody>
-                  <a:tcPr anchor="ctr">
-                    <a:lnL w="12700" cap="flat" cmpd="sng" algn="ctr">
-                      <a:solidFill>
-                        <a:schemeClr val="tx1"/>
-                      </a:solidFill>
-                      <a:prstDash val="solid"/>
-                      <a:round/>
-                      <a:headEnd type="none" w="med" len="med"/>
-                      <a:tailEnd type="none" w="med" len="med"/>
-                    </a:lnL>
-                    <a:lnR w="12700" cap="flat" cmpd="sng" algn="ctr">
-                      <a:solidFill>
-                        <a:schemeClr val="tx1"/>
-                      </a:solidFill>
-                      <a:prstDash val="solid"/>
-                      <a:round/>
-                      <a:headEnd type="none" w="med" len="med"/>
-                      <a:tailEnd type="none" w="med" len="med"/>
-                    </a:lnR>
-                    <a:lnT w="12700" cap="flat" cmpd="sng" algn="ctr">
-                      <a:solidFill>
-                        <a:schemeClr val="tx1"/>
-                      </a:solidFill>
-                      <a:prstDash val="solid"/>
-                      <a:round/>
-                      <a:headEnd type="none" w="med" len="med"/>
-                      <a:tailEnd type="none" w="med" len="med"/>
-                    </a:lnT>
-                    <a:lnB w="12700" cap="flat" cmpd="sng" algn="ctr">
-                      <a:solidFill>
-                        <a:schemeClr val="tx1"/>
-                      </a:solidFill>
-                      <a:prstDash val="solid"/>
-                      <a:round/>
-                      <a:headEnd type="none" w="med" len="med"/>
-                      <a:tailEnd type="none" w="med" len="med"/>
-                    </a:lnB>
-                    <a:solidFill>
-                      <a:schemeClr val="accent2"/>
-                    </a:solidFill>
-                  </a:tcPr>
-                </a:tc>
-                <a:tc>
-                  <a:txBody>
-                    <a:bodyPr/>
-                    <a:lstStyle/>
-                    <a:p>
-                      <a:pPr algn="ctr"/>
-                      <a:r>
-                        <a:rPr sz="1800" b="1" dirty="0">
-                          <a:solidFill>
-                            <a:schemeClr val="bg1"/>
-                          </a:solidFill>
-                        </a:rPr>
-                        <a:t>G(sj)</a:t>
-                      </a:r>
-                    </a:p>
-                  </a:txBody>
-                  <a:tcPr anchor="ctr">
-                    <a:lnL w="12700" cap="flat" cmpd="sng" algn="ctr">
-                      <a:solidFill>
-                        <a:schemeClr val="tx1"/>
-                      </a:solidFill>
-                      <a:prstDash val="solid"/>
-                      <a:round/>
-                      <a:headEnd type="none" w="med" len="med"/>
-                      <a:tailEnd type="none" w="med" len="med"/>
-                    </a:lnL>
-                    <a:lnR w="12700" cap="flat" cmpd="sng" algn="ctr">
-                      <a:solidFill>
-                        <a:schemeClr val="tx1"/>
-                      </a:solidFill>
-                      <a:prstDash val="solid"/>
-                      <a:round/>
-                      <a:headEnd type="none" w="med" len="med"/>
-                      <a:tailEnd type="none" w="med" len="med"/>
-                    </a:lnR>
-                    <a:lnT w="12700" cap="flat" cmpd="sng" algn="ctr">
-                      <a:solidFill>
-                        <a:schemeClr val="tx1"/>
-                      </a:solidFill>
-                      <a:prstDash val="solid"/>
-                      <a:round/>
-                      <a:headEnd type="none" w="med" len="med"/>
-                      <a:tailEnd type="none" w="med" len="med"/>
-                    </a:lnT>
-                    <a:lnB w="12700" cap="flat" cmpd="sng" algn="ctr">
-                      <a:solidFill>
-                        <a:schemeClr val="tx1"/>
-                      </a:solidFill>
-                      <a:prstDash val="solid"/>
-                      <a:round/>
-                      <a:headEnd type="none" w="med" len="med"/>
-                      <a:tailEnd type="none" w="med" len="med"/>
-                    </a:lnB>
-                    <a:solidFill>
-                      <a:schemeClr val="accent2"/>
-                    </a:solidFill>
-                  </a:tcPr>
-                </a:tc>
-                <a:tc>
-                  <a:txBody>
-                    <a:bodyPr/>
-                    <a:lstStyle/>
-                    <a:p>
-                      <a:pPr algn="ctr"/>
-                      <a:r>
-                        <a:rPr sz="1800" b="1" dirty="0">
-                          <a:solidFill>
-                            <a:schemeClr val="bg1"/>
-                          </a:solidFill>
-                        </a:rPr>
-                        <a:t>y(hj,j)</a:t>
-                      </a:r>
-                    </a:p>
-                  </a:txBody>
-                  <a:tcPr anchor="ctr">
-                    <a:lnL w="12700" cap="flat" cmpd="sng" algn="ctr">
-                      <a:solidFill>
-                        <a:schemeClr val="tx1"/>
-                      </a:solidFill>
-                      <a:prstDash val="solid"/>
-                      <a:round/>
-                      <a:headEnd type="none" w="med" len="med"/>
-                      <a:tailEnd type="none" w="med" len="med"/>
-                    </a:lnL>
-                    <a:lnR w="12700" cap="flat" cmpd="sng" algn="ctr">
-                      <a:solidFill>
-                        <a:schemeClr val="tx1"/>
-                      </a:solidFill>
-                      <a:prstDash val="solid"/>
-                      <a:round/>
-                      <a:headEnd type="none" w="med" len="med"/>
-                      <a:tailEnd type="none" w="med" len="med"/>
-                    </a:lnR>
-                    <a:lnT w="12700" cap="flat" cmpd="sng" algn="ctr">
-                      <a:solidFill>
-                        <a:schemeClr val="tx1"/>
-                      </a:solidFill>
-                      <a:prstDash val="solid"/>
-                      <a:round/>
-                      <a:headEnd type="none" w="med" len="med"/>
-                      <a:tailEnd type="none" w="med" len="med"/>
-                    </a:lnT>
-                    <a:lnB w="12700" cap="flat" cmpd="sng" algn="ctr">
-                      <a:solidFill>
-                        <a:schemeClr val="tx1"/>
-                      </a:solidFill>
-                      <a:prstDash val="solid"/>
-                      <a:round/>
-                      <a:headEnd type="none" w="med" len="med"/>
-                      <a:tailEnd type="none" w="med" len="med"/>
-                    </a:lnB>
-                    <a:solidFill>
-                      <a:schemeClr val="accent2"/>
-                    </a:solidFill>
-                  </a:tcPr>
-                </a:tc>
-                <a:tc>
-                  <a:txBody>
-                    <a:bodyPr/>
-                    <a:lstStyle/>
-                    <a:p>
-                      <a:pPr algn="ctr"/>
-                      <a:r>
-                        <a:rPr sz="1800" b="1" dirty="0">
-                          <a:solidFill>
-                            <a:schemeClr val="bg1"/>
-                          </a:solidFill>
-                        </a:rPr>
-                        <a:t>일치</a:t>
-                      </a:r>
-                    </a:p>
-                  </a:txBody>
-                  <a:tcPr anchor="ctr">
-                    <a:lnL w="12700" cap="flat" cmpd="sng" algn="ctr">
-                      <a:solidFill>
-                        <a:schemeClr val="tx1"/>
-                      </a:solidFill>
-                      <a:prstDash val="solid"/>
-                      <a:round/>
-                      <a:headEnd type="none" w="med" len="med"/>
-                      <a:tailEnd type="none" w="med" len="med"/>
-                    </a:lnL>
-                    <a:lnR w="12700" cap="flat" cmpd="sng" algn="ctr">
-                      <a:solidFill>
-                        <a:schemeClr val="tx1"/>
-                      </a:solidFill>
-                      <a:prstDash val="solid"/>
-                      <a:round/>
-                      <a:headEnd type="none" w="med" len="med"/>
-                      <a:tailEnd type="none" w="med" len="med"/>
-                    </a:lnR>
-                    <a:lnT w="12700" cap="flat" cmpd="sng" algn="ctr">
-                      <a:solidFill>
-                        <a:schemeClr val="tx1"/>
-                      </a:solidFill>
-                      <a:prstDash val="solid"/>
-                      <a:round/>
-                      <a:headEnd type="none" w="med" len="med"/>
-                      <a:tailEnd type="none" w="med" len="med"/>
-                    </a:lnT>
-                    <a:lnB w="12700" cap="flat" cmpd="sng" algn="ctr">
-                      <a:solidFill>
-                        <a:schemeClr val="tx1"/>
-                      </a:solidFill>
-                      <a:prstDash val="solid"/>
-                      <a:round/>
-                      <a:headEnd type="none" w="med" len="med"/>
-                      <a:tailEnd type="none" w="med" len="med"/>
-                    </a:lnB>
-                    <a:solidFill>
-                      <a:schemeClr val="accent2"/>
-                    </a:solidFill>
-                  </a:tcPr>
-                </a:tc>
-                <a:extLst>
-                  <a:ext uri="{0D108BD9-81ED-4DB2-BD59-A6C34878D82A}">
-                    <a16:rowId xmlns:a16="http://schemas.microsoft.com/office/drawing/2014/main" val="10000"/>
-                  </a:ext>
-                </a:extLst>
-              </a:tr>
-              <a:tr h="365760">
-                <a:tc>
-                  <a:txBody>
-                    <a:bodyPr/>
-                    <a:lstStyle/>
-                    <a:p>
-                      <a:pPr algn="ctr"/>
-                      <a:r>
-                        <a:rPr sz="1800" dirty="0"/>
-                        <a:t>0</a:t>
-                      </a:r>
-                    </a:p>
-                  </a:txBody>
-                  <a:tcPr anchor="ctr">
-                    <a:lnL w="12700" cap="flat" cmpd="sng" algn="ctr">
-                      <a:solidFill>
-                        <a:schemeClr val="tx1"/>
-                      </a:solidFill>
-                      <a:prstDash val="solid"/>
-                      <a:round/>
-                      <a:headEnd type="none" w="med" len="med"/>
-                      <a:tailEnd type="none" w="med" len="med"/>
-                    </a:lnL>
-                    <a:lnR w="12700" cap="flat" cmpd="sng" algn="ctr">
-                      <a:solidFill>
-                        <a:schemeClr val="tx1"/>
-                      </a:solidFill>
-                      <a:prstDash val="solid"/>
-                      <a:round/>
-                      <a:headEnd type="none" w="med" len="med"/>
-                      <a:tailEnd type="none" w="med" len="med"/>
-                    </a:lnR>
-                    <a:lnT w="12700" cap="flat" cmpd="sng" algn="ctr">
-                      <a:solidFill>
-                        <a:schemeClr val="tx1"/>
-                      </a:solidFill>
-                      <a:prstDash val="solid"/>
-                      <a:round/>
-                      <a:headEnd type="none" w="med" len="med"/>
-                      <a:tailEnd type="none" w="med" len="med"/>
-                    </a:lnT>
-                    <a:lnB w="12700" cap="flat" cmpd="sng" algn="ctr">
-                      <a:solidFill>
-                        <a:schemeClr val="tx1"/>
-                      </a:solidFill>
-                      <a:prstDash val="solid"/>
-                      <a:round/>
-                      <a:headEnd type="none" w="med" len="med"/>
-                      <a:tailEnd type="none" w="med" len="med"/>
-                    </a:lnB>
-                    <a:noFill/>
-                  </a:tcPr>
-                </a:tc>
-                <a:tc>
-                  <a:txBody>
-                    <a:bodyPr/>
-                    <a:lstStyle/>
-                    <a:p>
-                      <a:pPr algn="ctr"/>
-                      <a:r>
-                        <a:rPr sz="1800" dirty="0"/>
-                        <a:t>0</a:t>
-                      </a:r>
-                    </a:p>
-                  </a:txBody>
-                  <a:tcPr anchor="ctr">
-                    <a:lnL w="12700" cap="flat" cmpd="sng" algn="ctr">
-                      <a:solidFill>
-                        <a:schemeClr val="tx1"/>
-                      </a:solidFill>
-                      <a:prstDash val="solid"/>
-                      <a:round/>
-                      <a:headEnd type="none" w="med" len="med"/>
-                      <a:tailEnd type="none" w="med" len="med"/>
-                    </a:lnL>
-                    <a:lnR w="12700" cap="flat" cmpd="sng" algn="ctr">
-                      <a:solidFill>
-                        <a:schemeClr val="tx1"/>
-                      </a:solidFill>
-                      <a:prstDash val="solid"/>
-                      <a:round/>
-                      <a:headEnd type="none" w="med" len="med"/>
-                      <a:tailEnd type="none" w="med" len="med"/>
-                    </a:lnR>
-                    <a:lnT w="12700" cap="flat" cmpd="sng" algn="ctr">
-                      <a:solidFill>
-                        <a:schemeClr val="tx1"/>
-                      </a:solidFill>
-                      <a:prstDash val="solid"/>
-                      <a:round/>
-                      <a:headEnd type="none" w="med" len="med"/>
-                      <a:tailEnd type="none" w="med" len="med"/>
-                    </a:lnT>
-                    <a:lnB w="12700" cap="flat" cmpd="sng" algn="ctr">
-                      <a:solidFill>
-                        <a:schemeClr val="tx1"/>
-                      </a:solidFill>
-                      <a:prstDash val="solid"/>
-                      <a:round/>
-                      <a:headEnd type="none" w="med" len="med"/>
-                      <a:tailEnd type="none" w="med" len="med"/>
-                    </a:lnB>
-                    <a:noFill/>
-                  </a:tcPr>
-                </a:tc>
-                <a:tc>
-                  <a:txBody>
-                    <a:bodyPr/>
-                    <a:lstStyle/>
-                    <a:p>
-                      <a:pPr algn="ctr"/>
-                      <a:r>
-                        <a:rPr sz="1800" dirty="0"/>
-                        <a:t>0x00</a:t>
-                      </a:r>
-                    </a:p>
-                  </a:txBody>
-                  <a:tcPr anchor="ctr">
-                    <a:lnL w="12700" cap="flat" cmpd="sng" algn="ctr">
-                      <a:solidFill>
-                        <a:schemeClr val="tx1"/>
-                      </a:solidFill>
-                      <a:prstDash val="solid"/>
-                      <a:round/>
-                      <a:headEnd type="none" w="med" len="med"/>
-                      <a:tailEnd type="none" w="med" len="med"/>
-                    </a:lnL>
-                    <a:lnR w="12700" cap="flat" cmpd="sng" algn="ctr">
-                      <a:solidFill>
-                        <a:schemeClr val="tx1"/>
-                      </a:solidFill>
-                      <a:prstDash val="solid"/>
-                      <a:round/>
-                      <a:headEnd type="none" w="med" len="med"/>
-                      <a:tailEnd type="none" w="med" len="med"/>
-                    </a:lnR>
-                    <a:lnT w="12700" cap="flat" cmpd="sng" algn="ctr">
-                      <a:solidFill>
-                        <a:schemeClr val="tx1"/>
-                      </a:solidFill>
-                      <a:prstDash val="solid"/>
-                      <a:round/>
-                      <a:headEnd type="none" w="med" len="med"/>
-                      <a:tailEnd type="none" w="med" len="med"/>
-                    </a:lnT>
-                    <a:lnB w="12700" cap="flat" cmpd="sng" algn="ctr">
-                      <a:solidFill>
-                        <a:schemeClr val="tx1"/>
-                      </a:solidFill>
-                      <a:prstDash val="solid"/>
-                      <a:round/>
-                      <a:headEnd type="none" w="med" len="med"/>
-                      <a:tailEnd type="none" w="med" len="med"/>
-                    </a:lnB>
-                    <a:noFill/>
-                  </a:tcPr>
-                </a:tc>
-                <a:tc>
-                  <a:txBody>
-                    <a:bodyPr/>
-                    <a:lstStyle/>
-                    <a:p>
-                      <a:pPr algn="ctr"/>
-                      <a:r>
-                        <a:rPr sz="1800" dirty="0"/>
-                        <a:t>0x6E</a:t>
-                      </a:r>
-                    </a:p>
-                  </a:txBody>
-                  <a:tcPr anchor="ctr">
-                    <a:lnL w="12700" cap="flat" cmpd="sng" algn="ctr">
-                      <a:solidFill>
-                        <a:schemeClr val="tx1"/>
-                      </a:solidFill>
-                      <a:prstDash val="solid"/>
-                      <a:round/>
-                      <a:headEnd type="none" w="med" len="med"/>
-                      <a:tailEnd type="none" w="med" len="med"/>
-                    </a:lnL>
-                    <a:lnR w="12700" cap="flat" cmpd="sng" algn="ctr">
-                      <a:solidFill>
-                        <a:schemeClr val="tx1"/>
-                      </a:solidFill>
-                      <a:prstDash val="solid"/>
-                      <a:round/>
-                      <a:headEnd type="none" w="med" len="med"/>
-                      <a:tailEnd type="none" w="med" len="med"/>
-                    </a:lnR>
-                    <a:lnT w="12700" cap="flat" cmpd="sng" algn="ctr">
-                      <a:solidFill>
-                        <a:schemeClr val="tx1"/>
-                      </a:solidFill>
-                      <a:prstDash val="solid"/>
-                      <a:round/>
-                      <a:headEnd type="none" w="med" len="med"/>
-                      <a:tailEnd type="none" w="med" len="med"/>
-                    </a:lnT>
-                    <a:lnB w="12700" cap="flat" cmpd="sng" algn="ctr">
-                      <a:solidFill>
-                        <a:schemeClr val="tx1"/>
-                      </a:solidFill>
-                      <a:prstDash val="solid"/>
-                      <a:round/>
-                      <a:headEnd type="none" w="med" len="med"/>
-                      <a:tailEnd type="none" w="med" len="med"/>
-                    </a:lnB>
-                    <a:noFill/>
-                  </a:tcPr>
-                </a:tc>
-                <a:tc>
-                  <a:txBody>
-                    <a:bodyPr/>
-                    <a:lstStyle/>
-                    <a:p>
-                      <a:pPr algn="ctr"/>
-                      <a:r>
-                        <a:rPr sz="1800" dirty="0"/>
-                        <a:t>0x6E</a:t>
-                      </a:r>
-                    </a:p>
-                  </a:txBody>
-                  <a:tcPr anchor="ctr">
-                    <a:lnL w="12700" cap="flat" cmpd="sng" algn="ctr">
-                      <a:solidFill>
-                        <a:schemeClr val="tx1"/>
-                      </a:solidFill>
-                      <a:prstDash val="solid"/>
-                      <a:round/>
-                      <a:headEnd type="none" w="med" len="med"/>
-                      <a:tailEnd type="none" w="med" len="med"/>
-                    </a:lnL>
-                    <a:lnR w="12700" cap="flat" cmpd="sng" algn="ctr">
-                      <a:solidFill>
-                        <a:schemeClr val="tx1"/>
-                      </a:solidFill>
-                      <a:prstDash val="solid"/>
-                      <a:round/>
-                      <a:headEnd type="none" w="med" len="med"/>
-                      <a:tailEnd type="none" w="med" len="med"/>
-                    </a:lnR>
-                    <a:lnT w="12700" cap="flat" cmpd="sng" algn="ctr">
-                      <a:solidFill>
-                        <a:schemeClr val="tx1"/>
-                      </a:solidFill>
-                      <a:prstDash val="solid"/>
-                      <a:round/>
-                      <a:headEnd type="none" w="med" len="med"/>
-                      <a:tailEnd type="none" w="med" len="med"/>
-                    </a:lnT>
-                    <a:lnB w="12700" cap="flat" cmpd="sng" algn="ctr">
-                      <a:solidFill>
-                        <a:schemeClr val="tx1"/>
-                      </a:solidFill>
-                      <a:prstDash val="solid"/>
-                      <a:round/>
-                      <a:headEnd type="none" w="med" len="med"/>
-                      <a:tailEnd type="none" w="med" len="med"/>
-                    </a:lnB>
-                    <a:noFill/>
-                  </a:tcPr>
-                </a:tc>
-                <a:tc>
-                  <a:txBody>
-                    <a:bodyPr/>
-                    <a:lstStyle/>
-                    <a:p>
-                      <a:pPr algn="ctr"/>
-                      <a:r>
-                        <a:rPr sz="1800" dirty="0"/>
-                        <a:t>✓</a:t>
-                      </a:r>
-                    </a:p>
-                  </a:txBody>
-                  <a:tcPr anchor="ctr">
-                    <a:lnL w="12700" cap="flat" cmpd="sng" algn="ctr">
-                      <a:solidFill>
-                        <a:schemeClr val="tx1"/>
-                      </a:solidFill>
-                      <a:prstDash val="solid"/>
-                      <a:round/>
-                      <a:headEnd type="none" w="med" len="med"/>
-                      <a:tailEnd type="none" w="med" len="med"/>
-                    </a:lnL>
-                    <a:lnR w="12700" cap="flat" cmpd="sng" algn="ctr">
-                      <a:solidFill>
-                        <a:schemeClr val="tx1"/>
-                      </a:solidFill>
-                      <a:prstDash val="solid"/>
-                      <a:round/>
-                      <a:headEnd type="none" w="med" len="med"/>
-                      <a:tailEnd type="none" w="med" len="med"/>
-                    </a:lnR>
-                    <a:lnT w="12700" cap="flat" cmpd="sng" algn="ctr">
-                      <a:solidFill>
-                        <a:schemeClr val="tx1"/>
-                      </a:solidFill>
-                      <a:prstDash val="solid"/>
-                      <a:round/>
-                      <a:headEnd type="none" w="med" len="med"/>
-                      <a:tailEnd type="none" w="med" len="med"/>
-                    </a:lnT>
-                    <a:lnB w="12700" cap="flat" cmpd="sng" algn="ctr">
-                      <a:solidFill>
-                        <a:schemeClr val="tx1"/>
-                      </a:solidFill>
-                      <a:prstDash val="solid"/>
-                      <a:round/>
-                      <a:headEnd type="none" w="med" len="med"/>
-                      <a:tailEnd type="none" w="med" len="med"/>
-                    </a:lnB>
-                    <a:noFill/>
-                  </a:tcPr>
-                </a:tc>
-                <a:extLst>
-                  <a:ext uri="{0D108BD9-81ED-4DB2-BD59-A6C34878D82A}">
-                    <a16:rowId xmlns:a16="http://schemas.microsoft.com/office/drawing/2014/main" val="10001"/>
-                  </a:ext>
-                </a:extLst>
-              </a:tr>
-              <a:tr h="365760">
-                <a:tc>
-                  <a:txBody>
-                    <a:bodyPr/>
-                    <a:lstStyle/>
-                    <a:p>
-                      <a:pPr algn="ctr"/>
-                      <a:r>
-                        <a:rPr sz="1800" dirty="0"/>
-                        <a:t>1</a:t>
-                      </a:r>
-                    </a:p>
-                  </a:txBody>
-                  <a:tcPr anchor="ctr">
-                    <a:lnL w="12700" cap="flat" cmpd="sng" algn="ctr">
-                      <a:solidFill>
-                        <a:schemeClr val="tx1"/>
-                      </a:solidFill>
-                      <a:prstDash val="solid"/>
-                      <a:round/>
-                      <a:headEnd type="none" w="med" len="med"/>
-                      <a:tailEnd type="none" w="med" len="med"/>
-                    </a:lnL>
-                    <a:lnR w="12700" cap="flat" cmpd="sng" algn="ctr">
-                      <a:solidFill>
-                        <a:schemeClr val="tx1"/>
-                      </a:solidFill>
-                      <a:prstDash val="solid"/>
-                      <a:round/>
-                      <a:headEnd type="none" w="med" len="med"/>
-                      <a:tailEnd type="none" w="med" len="med"/>
-                    </a:lnR>
-                    <a:lnT w="12700" cap="flat" cmpd="sng" algn="ctr">
-                      <a:solidFill>
-                        <a:schemeClr val="tx1"/>
-                      </a:solidFill>
-                      <a:prstDash val="solid"/>
-                      <a:round/>
-                      <a:headEnd type="none" w="med" len="med"/>
-                      <a:tailEnd type="none" w="med" len="med"/>
-                    </a:lnT>
-                    <a:lnB w="12700" cap="flat" cmpd="sng" algn="ctr">
-                      <a:solidFill>
-                        <a:schemeClr val="tx1"/>
-                      </a:solidFill>
-                      <a:prstDash val="solid"/>
-                      <a:round/>
-                      <a:headEnd type="none" w="med" len="med"/>
-                      <a:tailEnd type="none" w="med" len="med"/>
-                    </a:lnB>
-                    <a:noFill/>
-                  </a:tcPr>
-                </a:tc>
-                <a:tc>
-                  <a:txBody>
-                    <a:bodyPr/>
-                    <a:lstStyle/>
-                    <a:p>
-                      <a:pPr algn="ctr"/>
-                      <a:r>
-                        <a:rPr sz="1800" dirty="0"/>
-                        <a:t>0</a:t>
-                      </a:r>
-                    </a:p>
-                  </a:txBody>
-                  <a:tcPr anchor="ctr">
-                    <a:lnL w="12700" cap="flat" cmpd="sng" algn="ctr">
-                      <a:solidFill>
-                        <a:schemeClr val="tx1"/>
-                      </a:solidFill>
-                      <a:prstDash val="solid"/>
-                      <a:round/>
-                      <a:headEnd type="none" w="med" len="med"/>
-                      <a:tailEnd type="none" w="med" len="med"/>
-                    </a:lnL>
-                    <a:lnR w="12700" cap="flat" cmpd="sng" algn="ctr">
-                      <a:solidFill>
-                        <a:schemeClr val="tx1"/>
-                      </a:solidFill>
-                      <a:prstDash val="solid"/>
-                      <a:round/>
-                      <a:headEnd type="none" w="med" len="med"/>
-                      <a:tailEnd type="none" w="med" len="med"/>
-                    </a:lnR>
-                    <a:lnT w="12700" cap="flat" cmpd="sng" algn="ctr">
-                      <a:solidFill>
-                        <a:schemeClr val="tx1"/>
-                      </a:solidFill>
-                      <a:prstDash val="solid"/>
-                      <a:round/>
-                      <a:headEnd type="none" w="med" len="med"/>
-                      <a:tailEnd type="none" w="med" len="med"/>
-                    </a:lnT>
-                    <a:lnB w="12700" cap="flat" cmpd="sng" algn="ctr">
-                      <a:solidFill>
-                        <a:schemeClr val="tx1"/>
-                      </a:solidFill>
-                      <a:prstDash val="solid"/>
-                      <a:round/>
-                      <a:headEnd type="none" w="med" len="med"/>
-                      <a:tailEnd type="none" w="med" len="med"/>
-                    </a:lnB>
-                    <a:noFill/>
-                  </a:tcPr>
-                </a:tc>
-                <a:tc>
-                  <a:txBody>
-                    <a:bodyPr/>
-                    <a:lstStyle/>
-                    <a:p>
-                      <a:pPr algn="ctr"/>
-                      <a:r>
-                        <a:rPr sz="1800" dirty="0"/>
-                        <a:t>0x01</a:t>
-                      </a:r>
-                    </a:p>
-                  </a:txBody>
-                  <a:tcPr anchor="ctr">
-                    <a:lnL w="12700" cap="flat" cmpd="sng" algn="ctr">
-                      <a:solidFill>
-                        <a:schemeClr val="tx1"/>
-                      </a:solidFill>
-                      <a:prstDash val="solid"/>
-                      <a:round/>
-                      <a:headEnd type="none" w="med" len="med"/>
-                      <a:tailEnd type="none" w="med" len="med"/>
-                    </a:lnL>
-                    <a:lnR w="12700" cap="flat" cmpd="sng" algn="ctr">
-                      <a:solidFill>
-                        <a:schemeClr val="tx1"/>
-                      </a:solidFill>
-                      <a:prstDash val="solid"/>
-                      <a:round/>
-                      <a:headEnd type="none" w="med" len="med"/>
-                      <a:tailEnd type="none" w="med" len="med"/>
-                    </a:lnR>
-                    <a:lnT w="12700" cap="flat" cmpd="sng" algn="ctr">
-                      <a:solidFill>
-                        <a:schemeClr val="tx1"/>
-                      </a:solidFill>
-                      <a:prstDash val="solid"/>
-                      <a:round/>
-                      <a:headEnd type="none" w="med" len="med"/>
-                      <a:tailEnd type="none" w="med" len="med"/>
-                    </a:lnT>
-                    <a:lnB w="12700" cap="flat" cmpd="sng" algn="ctr">
-                      <a:solidFill>
-                        <a:schemeClr val="tx1"/>
-                      </a:solidFill>
-                      <a:prstDash val="solid"/>
-                      <a:round/>
-                      <a:headEnd type="none" w="med" len="med"/>
-                      <a:tailEnd type="none" w="med" len="med"/>
-                    </a:lnB>
-                    <a:noFill/>
-                  </a:tcPr>
-                </a:tc>
-                <a:tc>
-                  <a:txBody>
-                    <a:bodyPr/>
-                    <a:lstStyle/>
-                    <a:p>
-                      <a:pPr algn="ctr"/>
-                      <a:r>
-                        <a:rPr sz="1800" dirty="0"/>
-                        <a:t>0x4B</a:t>
-                      </a:r>
-                    </a:p>
-                  </a:txBody>
-                  <a:tcPr anchor="ctr">
-                    <a:lnL w="12700" cap="flat" cmpd="sng" algn="ctr">
-                      <a:solidFill>
-                        <a:schemeClr val="tx1"/>
-                      </a:solidFill>
-                      <a:prstDash val="solid"/>
-                      <a:round/>
-                      <a:headEnd type="none" w="med" len="med"/>
-                      <a:tailEnd type="none" w="med" len="med"/>
-                    </a:lnL>
-                    <a:lnR w="12700" cap="flat" cmpd="sng" algn="ctr">
-                      <a:solidFill>
-                        <a:schemeClr val="tx1"/>
-                      </a:solidFill>
-                      <a:prstDash val="solid"/>
-                      <a:round/>
-                      <a:headEnd type="none" w="med" len="med"/>
-                      <a:tailEnd type="none" w="med" len="med"/>
-                    </a:lnR>
-                    <a:lnT w="12700" cap="flat" cmpd="sng" algn="ctr">
-                      <a:solidFill>
-                        <a:schemeClr val="tx1"/>
-                      </a:solidFill>
-                      <a:prstDash val="solid"/>
-                      <a:round/>
-                      <a:headEnd type="none" w="med" len="med"/>
-                      <a:tailEnd type="none" w="med" len="med"/>
-                    </a:lnT>
-                    <a:lnB w="12700" cap="flat" cmpd="sng" algn="ctr">
-                      <a:solidFill>
-                        <a:schemeClr val="tx1"/>
-                      </a:solidFill>
-                      <a:prstDash val="solid"/>
-                      <a:round/>
-                      <a:headEnd type="none" w="med" len="med"/>
-                      <a:tailEnd type="none" w="med" len="med"/>
-                    </a:lnB>
-                    <a:noFill/>
-                  </a:tcPr>
-                </a:tc>
-                <a:tc>
-                  <a:txBody>
-                    <a:bodyPr/>
-                    <a:lstStyle/>
-                    <a:p>
-                      <a:pPr algn="ctr"/>
-                      <a:r>
-                        <a:rPr sz="1800" dirty="0"/>
-                        <a:t>0x4B</a:t>
-                      </a:r>
-                    </a:p>
-                  </a:txBody>
-                  <a:tcPr anchor="ctr">
-                    <a:lnL w="12700" cap="flat" cmpd="sng" algn="ctr">
-                      <a:solidFill>
-                        <a:schemeClr val="tx1"/>
-                      </a:solidFill>
-                      <a:prstDash val="solid"/>
-                      <a:round/>
-                      <a:headEnd type="none" w="med" len="med"/>
-                      <a:tailEnd type="none" w="med" len="med"/>
-                    </a:lnL>
-                    <a:lnR w="12700" cap="flat" cmpd="sng" algn="ctr">
-                      <a:solidFill>
-                        <a:schemeClr val="tx1"/>
-                      </a:solidFill>
-                      <a:prstDash val="solid"/>
-                      <a:round/>
-                      <a:headEnd type="none" w="med" len="med"/>
-                      <a:tailEnd type="none" w="med" len="med"/>
-                    </a:lnR>
-                    <a:lnT w="12700" cap="flat" cmpd="sng" algn="ctr">
-                      <a:solidFill>
-                        <a:schemeClr val="tx1"/>
-                      </a:solidFill>
-                      <a:prstDash val="solid"/>
-                      <a:round/>
-                      <a:headEnd type="none" w="med" len="med"/>
-                      <a:tailEnd type="none" w="med" len="med"/>
-                    </a:lnT>
-                    <a:lnB w="12700" cap="flat" cmpd="sng" algn="ctr">
-                      <a:solidFill>
-                        <a:schemeClr val="tx1"/>
-                      </a:solidFill>
-                      <a:prstDash val="solid"/>
-                      <a:round/>
-                      <a:headEnd type="none" w="med" len="med"/>
-                      <a:tailEnd type="none" w="med" len="med"/>
-                    </a:lnB>
-                    <a:noFill/>
-                  </a:tcPr>
-                </a:tc>
-                <a:tc>
-                  <a:txBody>
-                    <a:bodyPr/>
-                    <a:lstStyle/>
-                    <a:p>
-                      <a:pPr algn="ctr"/>
-                      <a:r>
-                        <a:rPr sz="1800" dirty="0"/>
-                        <a:t>✓</a:t>
-                      </a:r>
-                    </a:p>
-                  </a:txBody>
-                  <a:tcPr anchor="ctr">
-                    <a:lnL w="12700" cap="flat" cmpd="sng" algn="ctr">
-                      <a:solidFill>
-                        <a:schemeClr val="tx1"/>
-                      </a:solidFill>
-                      <a:prstDash val="solid"/>
-                      <a:round/>
-                      <a:headEnd type="none" w="med" len="med"/>
-                      <a:tailEnd type="none" w="med" len="med"/>
-                    </a:lnL>
-                    <a:lnR w="12700" cap="flat" cmpd="sng" algn="ctr">
-                      <a:solidFill>
-                        <a:schemeClr val="tx1"/>
-                      </a:solidFill>
-                      <a:prstDash val="solid"/>
-                      <a:round/>
-                      <a:headEnd type="none" w="med" len="med"/>
-                      <a:tailEnd type="none" w="med" len="med"/>
-                    </a:lnR>
-                    <a:lnT w="12700" cap="flat" cmpd="sng" algn="ctr">
-                      <a:solidFill>
-                        <a:schemeClr val="tx1"/>
-                      </a:solidFill>
-                      <a:prstDash val="solid"/>
-                      <a:round/>
-                      <a:headEnd type="none" w="med" len="med"/>
-                      <a:tailEnd type="none" w="med" len="med"/>
-                    </a:lnT>
-                    <a:lnB w="12700" cap="flat" cmpd="sng" algn="ctr">
-                      <a:solidFill>
-                        <a:schemeClr val="tx1"/>
-                      </a:solidFill>
-                      <a:prstDash val="solid"/>
-                      <a:round/>
-                      <a:headEnd type="none" w="med" len="med"/>
-                      <a:tailEnd type="none" w="med" len="med"/>
-                    </a:lnB>
-                    <a:noFill/>
-                  </a:tcPr>
-                </a:tc>
-                <a:extLst>
-                  <a:ext uri="{0D108BD9-81ED-4DB2-BD59-A6C34878D82A}">
-                    <a16:rowId xmlns:a16="http://schemas.microsoft.com/office/drawing/2014/main" val="10002"/>
-                  </a:ext>
-                </a:extLst>
-              </a:tr>
-              <a:tr h="365760">
-                <a:tc>
-                  <a:txBody>
-                    <a:bodyPr/>
-                    <a:lstStyle/>
-                    <a:p>
-                      <a:pPr algn="ctr"/>
-                      <a:r>
-                        <a:rPr sz="1800" dirty="0"/>
-                        <a:t>2</a:t>
-                      </a:r>
-                    </a:p>
-                  </a:txBody>
-                  <a:tcPr anchor="ctr">
-                    <a:lnL w="12700" cap="flat" cmpd="sng" algn="ctr">
-                      <a:solidFill>
-                        <a:schemeClr val="tx1"/>
-                      </a:solidFill>
-                      <a:prstDash val="solid"/>
-                      <a:round/>
-                      <a:headEnd type="none" w="med" len="med"/>
-                      <a:tailEnd type="none" w="med" len="med"/>
-                    </a:lnL>
-                    <a:lnR w="12700" cap="flat" cmpd="sng" algn="ctr">
-                      <a:solidFill>
-                        <a:schemeClr val="tx1"/>
-                      </a:solidFill>
-                      <a:prstDash val="solid"/>
-                      <a:round/>
-                      <a:headEnd type="none" w="med" len="med"/>
-                      <a:tailEnd type="none" w="med" len="med"/>
-                    </a:lnR>
-                    <a:lnT w="12700" cap="flat" cmpd="sng" algn="ctr">
-                      <a:solidFill>
-                        <a:schemeClr val="tx1"/>
-                      </a:solidFill>
-                      <a:prstDash val="solid"/>
-                      <a:round/>
-                      <a:headEnd type="none" w="med" len="med"/>
-                      <a:tailEnd type="none" w="med" len="med"/>
-                    </a:lnT>
-                    <a:lnB w="12700" cap="flat" cmpd="sng" algn="ctr">
-                      <a:solidFill>
-                        <a:schemeClr val="tx1"/>
-                      </a:solidFill>
-                      <a:prstDash val="solid"/>
-                      <a:round/>
-                      <a:headEnd type="none" w="med" len="med"/>
-                      <a:tailEnd type="none" w="med" len="med"/>
-                    </a:lnB>
-                    <a:noFill/>
-                  </a:tcPr>
-                </a:tc>
-                <a:tc>
-                  <a:txBody>
-                    <a:bodyPr/>
-                    <a:lstStyle/>
-                    <a:p>
-                      <a:pPr algn="ctr"/>
-                      <a:r>
-                        <a:rPr sz="1800" dirty="0"/>
-                        <a:t>0</a:t>
-                      </a:r>
-                    </a:p>
-                  </a:txBody>
-                  <a:tcPr anchor="ctr">
-                    <a:lnL w="12700" cap="flat" cmpd="sng" algn="ctr">
-                      <a:solidFill>
-                        <a:schemeClr val="tx1"/>
-                      </a:solidFill>
-                      <a:prstDash val="solid"/>
-                      <a:round/>
-                      <a:headEnd type="none" w="med" len="med"/>
-                      <a:tailEnd type="none" w="med" len="med"/>
-                    </a:lnL>
-                    <a:lnR w="12700" cap="flat" cmpd="sng" algn="ctr">
-                      <a:solidFill>
-                        <a:schemeClr val="tx1"/>
-                      </a:solidFill>
-                      <a:prstDash val="solid"/>
-                      <a:round/>
-                      <a:headEnd type="none" w="med" len="med"/>
-                      <a:tailEnd type="none" w="med" len="med"/>
-                    </a:lnR>
-                    <a:lnT w="12700" cap="flat" cmpd="sng" algn="ctr">
-                      <a:solidFill>
-                        <a:schemeClr val="tx1"/>
-                      </a:solidFill>
-                      <a:prstDash val="solid"/>
-                      <a:round/>
-                      <a:headEnd type="none" w="med" len="med"/>
-                      <a:tailEnd type="none" w="med" len="med"/>
-                    </a:lnT>
-                    <a:lnB w="12700" cap="flat" cmpd="sng" algn="ctr">
-                      <a:solidFill>
-                        <a:schemeClr val="tx1"/>
-                      </a:solidFill>
-                      <a:prstDash val="solid"/>
-                      <a:round/>
-                      <a:headEnd type="none" w="med" len="med"/>
-                      <a:tailEnd type="none" w="med" len="med"/>
-                    </a:lnB>
-                    <a:noFill/>
-                  </a:tcPr>
-                </a:tc>
-                <a:tc>
-                  <a:txBody>
-                    <a:bodyPr/>
-                    <a:lstStyle/>
-                    <a:p>
-                      <a:pPr algn="ctr"/>
-                      <a:r>
-                        <a:rPr sz="1800" dirty="0"/>
-                        <a:t>0x02</a:t>
-                      </a:r>
-                    </a:p>
-                  </a:txBody>
-                  <a:tcPr anchor="ctr">
-                    <a:lnL w="12700" cap="flat" cmpd="sng" algn="ctr">
-                      <a:solidFill>
-                        <a:schemeClr val="tx1"/>
-                      </a:solidFill>
-                      <a:prstDash val="solid"/>
-                      <a:round/>
-                      <a:headEnd type="none" w="med" len="med"/>
-                      <a:tailEnd type="none" w="med" len="med"/>
-                    </a:lnL>
-                    <a:lnR w="12700" cap="flat" cmpd="sng" algn="ctr">
-                      <a:solidFill>
-                        <a:schemeClr val="tx1"/>
-                      </a:solidFill>
-                      <a:prstDash val="solid"/>
-                      <a:round/>
-                      <a:headEnd type="none" w="med" len="med"/>
-                      <a:tailEnd type="none" w="med" len="med"/>
-                    </a:lnR>
-                    <a:lnT w="12700" cap="flat" cmpd="sng" algn="ctr">
-                      <a:solidFill>
-                        <a:schemeClr val="tx1"/>
-                      </a:solidFill>
-                      <a:prstDash val="solid"/>
-                      <a:round/>
-                      <a:headEnd type="none" w="med" len="med"/>
-                      <a:tailEnd type="none" w="med" len="med"/>
-                    </a:lnT>
-                    <a:lnB w="12700" cap="flat" cmpd="sng" algn="ctr">
-                      <a:solidFill>
-                        <a:schemeClr val="tx1"/>
-                      </a:solidFill>
-                      <a:prstDash val="solid"/>
-                      <a:round/>
-                      <a:headEnd type="none" w="med" len="med"/>
-                      <a:tailEnd type="none" w="med" len="med"/>
-                    </a:lnB>
-                    <a:noFill/>
-                  </a:tcPr>
-                </a:tc>
-                <a:tc>
-                  <a:txBody>
-                    <a:bodyPr/>
-                    <a:lstStyle/>
-                    <a:p>
-                      <a:pPr algn="ctr"/>
-                      <a:r>
-                        <a:rPr sz="1800" dirty="0"/>
-                        <a:t>0xDB</a:t>
-                      </a:r>
-                    </a:p>
-                  </a:txBody>
-                  <a:tcPr anchor="ctr">
-                    <a:lnL w="12700" cap="flat" cmpd="sng" algn="ctr">
-                      <a:solidFill>
-                        <a:schemeClr val="tx1"/>
-                      </a:solidFill>
-                      <a:prstDash val="solid"/>
-                      <a:round/>
-                      <a:headEnd type="none" w="med" len="med"/>
-                      <a:tailEnd type="none" w="med" len="med"/>
-                    </a:lnL>
-                    <a:lnR w="12700" cap="flat" cmpd="sng" algn="ctr">
-                      <a:solidFill>
-                        <a:schemeClr val="tx1"/>
-                      </a:solidFill>
-                      <a:prstDash val="solid"/>
-                      <a:round/>
-                      <a:headEnd type="none" w="med" len="med"/>
-                      <a:tailEnd type="none" w="med" len="med"/>
-                    </a:lnR>
-                    <a:lnT w="12700" cap="flat" cmpd="sng" algn="ctr">
-                      <a:solidFill>
-                        <a:schemeClr val="tx1"/>
-                      </a:solidFill>
-                      <a:prstDash val="solid"/>
-                      <a:round/>
-                      <a:headEnd type="none" w="med" len="med"/>
-                      <a:tailEnd type="none" w="med" len="med"/>
-                    </a:lnT>
-                    <a:lnB w="12700" cap="flat" cmpd="sng" algn="ctr">
-                      <a:solidFill>
-                        <a:schemeClr val="tx1"/>
-                      </a:solidFill>
-                      <a:prstDash val="solid"/>
-                      <a:round/>
-                      <a:headEnd type="none" w="med" len="med"/>
-                      <a:tailEnd type="none" w="med" len="med"/>
-                    </a:lnB>
-                    <a:noFill/>
-                  </a:tcPr>
-                </a:tc>
-                <a:tc>
-                  <a:txBody>
-                    <a:bodyPr/>
-                    <a:lstStyle/>
-                    <a:p>
-                      <a:pPr algn="ctr"/>
-                      <a:r>
-                        <a:rPr sz="1800" dirty="0"/>
-                        <a:t>0xDB</a:t>
-                      </a:r>
-                    </a:p>
-                  </a:txBody>
-                  <a:tcPr anchor="ctr">
-                    <a:lnL w="12700" cap="flat" cmpd="sng" algn="ctr">
-                      <a:solidFill>
-                        <a:schemeClr val="tx1"/>
-                      </a:solidFill>
-                      <a:prstDash val="solid"/>
-                      <a:round/>
-                      <a:headEnd type="none" w="med" len="med"/>
-                      <a:tailEnd type="none" w="med" len="med"/>
-                    </a:lnL>
-                    <a:lnR w="12700" cap="flat" cmpd="sng" algn="ctr">
-                      <a:solidFill>
-                        <a:schemeClr val="tx1"/>
-                      </a:solidFill>
-                      <a:prstDash val="solid"/>
-                      <a:round/>
-                      <a:headEnd type="none" w="med" len="med"/>
-                      <a:tailEnd type="none" w="med" len="med"/>
-                    </a:lnR>
-                    <a:lnT w="12700" cap="flat" cmpd="sng" algn="ctr">
-                      <a:solidFill>
-                        <a:schemeClr val="tx1"/>
-                      </a:solidFill>
-                      <a:prstDash val="solid"/>
-                      <a:round/>
-                      <a:headEnd type="none" w="med" len="med"/>
-                      <a:tailEnd type="none" w="med" len="med"/>
-                    </a:lnT>
-                    <a:lnB w="12700" cap="flat" cmpd="sng" algn="ctr">
-                      <a:solidFill>
-                        <a:schemeClr val="tx1"/>
-                      </a:solidFill>
-                      <a:prstDash val="solid"/>
-                      <a:round/>
-                      <a:headEnd type="none" w="med" len="med"/>
-                      <a:tailEnd type="none" w="med" len="med"/>
-                    </a:lnB>
-                    <a:noFill/>
-                  </a:tcPr>
-                </a:tc>
-                <a:tc>
-                  <a:txBody>
-                    <a:bodyPr/>
-                    <a:lstStyle/>
-                    <a:p>
-                      <a:pPr algn="ctr"/>
-                      <a:r>
-                        <a:rPr sz="1800" dirty="0"/>
-                        <a:t>✓</a:t>
-                      </a:r>
-                    </a:p>
-                  </a:txBody>
-                  <a:tcPr anchor="ctr">
-                    <a:lnL w="12700" cap="flat" cmpd="sng" algn="ctr">
-                      <a:solidFill>
-                        <a:schemeClr val="tx1"/>
-                      </a:solidFill>
-                      <a:prstDash val="solid"/>
-                      <a:round/>
-                      <a:headEnd type="none" w="med" len="med"/>
-                      <a:tailEnd type="none" w="med" len="med"/>
-                    </a:lnL>
-                    <a:lnR w="12700" cap="flat" cmpd="sng" algn="ctr">
-                      <a:solidFill>
-                        <a:schemeClr val="tx1"/>
-                      </a:solidFill>
-                      <a:prstDash val="solid"/>
-                      <a:round/>
-                      <a:headEnd type="none" w="med" len="med"/>
-                      <a:tailEnd type="none" w="med" len="med"/>
-                    </a:lnR>
-                    <a:lnT w="12700" cap="flat" cmpd="sng" algn="ctr">
-                      <a:solidFill>
-                        <a:schemeClr val="tx1"/>
-                      </a:solidFill>
-                      <a:prstDash val="solid"/>
-                      <a:round/>
-                      <a:headEnd type="none" w="med" len="med"/>
-                      <a:tailEnd type="none" w="med" len="med"/>
-                    </a:lnT>
-                    <a:lnB w="12700" cap="flat" cmpd="sng" algn="ctr">
-                      <a:solidFill>
-                        <a:schemeClr val="tx1"/>
-                      </a:solidFill>
-                      <a:prstDash val="solid"/>
-                      <a:round/>
-                      <a:headEnd type="none" w="med" len="med"/>
-                      <a:tailEnd type="none" w="med" len="med"/>
-                    </a:lnB>
-                    <a:noFill/>
-                  </a:tcPr>
-                </a:tc>
-                <a:extLst>
-                  <a:ext uri="{0D108BD9-81ED-4DB2-BD59-A6C34878D82A}">
-                    <a16:rowId xmlns:a16="http://schemas.microsoft.com/office/drawing/2014/main" val="10003"/>
-                  </a:ext>
-                </a:extLst>
-              </a:tr>
-              <a:tr h="365760">
-                <a:tc>
-                  <a:txBody>
-                    <a:bodyPr/>
-                    <a:lstStyle/>
-                    <a:p>
-                      <a:pPr algn="ctr"/>
-                      <a:r>
-                        <a:rPr sz="1800" dirty="0"/>
-                        <a:t>3</a:t>
-                      </a:r>
-                    </a:p>
-                  </a:txBody>
-                  <a:tcPr anchor="ctr">
-                    <a:lnL w="12700" cap="flat" cmpd="sng" algn="ctr">
-                      <a:solidFill>
-                        <a:schemeClr val="tx1"/>
-                      </a:solidFill>
-                      <a:prstDash val="solid"/>
-                      <a:round/>
-                      <a:headEnd type="none" w="med" len="med"/>
-                      <a:tailEnd type="none" w="med" len="med"/>
-                    </a:lnL>
-                    <a:lnR w="12700" cap="flat" cmpd="sng" algn="ctr">
-                      <a:solidFill>
-                        <a:schemeClr val="tx1"/>
-                      </a:solidFill>
-                      <a:prstDash val="solid"/>
-                      <a:round/>
-                      <a:headEnd type="none" w="med" len="med"/>
-                      <a:tailEnd type="none" w="med" len="med"/>
-                    </a:lnR>
-                    <a:lnT w="12700" cap="flat" cmpd="sng" algn="ctr">
-                      <a:solidFill>
-                        <a:schemeClr val="tx1"/>
-                      </a:solidFill>
-                      <a:prstDash val="solid"/>
-                      <a:round/>
-                      <a:headEnd type="none" w="med" len="med"/>
-                      <a:tailEnd type="none" w="med" len="med"/>
-                    </a:lnT>
-                    <a:lnB w="12700" cap="flat" cmpd="sng" algn="ctr">
-                      <a:solidFill>
-                        <a:schemeClr val="tx1"/>
-                      </a:solidFill>
-                      <a:prstDash val="solid"/>
-                      <a:round/>
-                      <a:headEnd type="none" w="med" len="med"/>
-                      <a:tailEnd type="none" w="med" len="med"/>
-                    </a:lnB>
-                    <a:noFill/>
-                  </a:tcPr>
-                </a:tc>
-                <a:tc>
-                  <a:txBody>
-                    <a:bodyPr/>
-                    <a:lstStyle/>
-                    <a:p>
-                      <a:pPr algn="ctr"/>
-                      <a:r>
-                        <a:rPr sz="1800" dirty="0"/>
-                        <a:t>1</a:t>
-                      </a:r>
-                    </a:p>
-                  </a:txBody>
-                  <a:tcPr anchor="ctr">
-                    <a:lnL w="12700" cap="flat" cmpd="sng" algn="ctr">
-                      <a:solidFill>
-                        <a:schemeClr val="tx1"/>
-                      </a:solidFill>
-                      <a:prstDash val="solid"/>
-                      <a:round/>
-                      <a:headEnd type="none" w="med" len="med"/>
-                      <a:tailEnd type="none" w="med" len="med"/>
-                    </a:lnL>
-                    <a:lnR w="12700" cap="flat" cmpd="sng" algn="ctr">
-                      <a:solidFill>
-                        <a:schemeClr val="tx1"/>
-                      </a:solidFill>
-                      <a:prstDash val="solid"/>
-                      <a:round/>
-                      <a:headEnd type="none" w="med" len="med"/>
-                      <a:tailEnd type="none" w="med" len="med"/>
-                    </a:lnR>
-                    <a:lnT w="12700" cap="flat" cmpd="sng" algn="ctr">
-                      <a:solidFill>
-                        <a:schemeClr val="tx1"/>
-                      </a:solidFill>
-                      <a:prstDash val="solid"/>
-                      <a:round/>
-                      <a:headEnd type="none" w="med" len="med"/>
-                      <a:tailEnd type="none" w="med" len="med"/>
-                    </a:lnT>
-                    <a:lnB w="12700" cap="flat" cmpd="sng" algn="ctr">
-                      <a:solidFill>
-                        <a:schemeClr val="tx1"/>
-                      </a:solidFill>
-                      <a:prstDash val="solid"/>
-                      <a:round/>
-                      <a:headEnd type="none" w="med" len="med"/>
-                      <a:tailEnd type="none" w="med" len="med"/>
-                    </a:lnB>
-                    <a:noFill/>
-                  </a:tcPr>
-                </a:tc>
-                <a:tc>
-                  <a:txBody>
-                    <a:bodyPr/>
-                    <a:lstStyle/>
-                    <a:p>
-                      <a:pPr algn="ctr"/>
-                      <a:r>
-                        <a:rPr sz="1800" dirty="0"/>
-                        <a:t>0x67</a:t>
-                      </a:r>
-                    </a:p>
-                  </a:txBody>
-                  <a:tcPr anchor="ctr">
-                    <a:lnL w="12700" cap="flat" cmpd="sng" algn="ctr">
-                      <a:solidFill>
-                        <a:schemeClr val="tx1"/>
-                      </a:solidFill>
-                      <a:prstDash val="solid"/>
-                      <a:round/>
-                      <a:headEnd type="none" w="med" len="med"/>
-                      <a:tailEnd type="none" w="med" len="med"/>
-                    </a:lnL>
-                    <a:lnR w="12700" cap="flat" cmpd="sng" algn="ctr">
-                      <a:solidFill>
-                        <a:schemeClr val="tx1"/>
-                      </a:solidFill>
-                      <a:prstDash val="solid"/>
-                      <a:round/>
-                      <a:headEnd type="none" w="med" len="med"/>
-                      <a:tailEnd type="none" w="med" len="med"/>
-                    </a:lnR>
-                    <a:lnT w="12700" cap="flat" cmpd="sng" algn="ctr">
-                      <a:solidFill>
-                        <a:schemeClr val="tx1"/>
-                      </a:solidFill>
-                      <a:prstDash val="solid"/>
-                      <a:round/>
-                      <a:headEnd type="none" w="med" len="med"/>
-                      <a:tailEnd type="none" w="med" len="med"/>
-                    </a:lnT>
-                    <a:lnB w="12700" cap="flat" cmpd="sng" algn="ctr">
-                      <a:solidFill>
-                        <a:schemeClr val="tx1"/>
-                      </a:solidFill>
-                      <a:prstDash val="solid"/>
-                      <a:round/>
-                      <a:headEnd type="none" w="med" len="med"/>
-                      <a:tailEnd type="none" w="med" len="med"/>
-                    </a:lnB>
-                    <a:noFill/>
-                  </a:tcPr>
-                </a:tc>
-                <a:tc>
-                  <a:txBody>
-                    <a:bodyPr/>
-                    <a:lstStyle/>
-                    <a:p>
-                      <a:pPr algn="ctr"/>
-                      <a:r>
-                        <a:rPr sz="1800" dirty="0"/>
-                        <a:t>0xCD</a:t>
-                      </a:r>
-                    </a:p>
-                  </a:txBody>
-                  <a:tcPr anchor="ctr">
-                    <a:lnL w="12700" cap="flat" cmpd="sng" algn="ctr">
-                      <a:solidFill>
-                        <a:schemeClr val="tx1"/>
-                      </a:solidFill>
-                      <a:prstDash val="solid"/>
-                      <a:round/>
-                      <a:headEnd type="none" w="med" len="med"/>
-                      <a:tailEnd type="none" w="med" len="med"/>
-                    </a:lnL>
-                    <a:lnR w="12700" cap="flat" cmpd="sng" algn="ctr">
-                      <a:solidFill>
-                        <a:schemeClr val="tx1"/>
-                      </a:solidFill>
-                      <a:prstDash val="solid"/>
-                      <a:round/>
-                      <a:headEnd type="none" w="med" len="med"/>
-                      <a:tailEnd type="none" w="med" len="med"/>
-                    </a:lnR>
-                    <a:lnT w="12700" cap="flat" cmpd="sng" algn="ctr">
-                      <a:solidFill>
-                        <a:schemeClr val="tx1"/>
-                      </a:solidFill>
-                      <a:prstDash val="solid"/>
-                      <a:round/>
-                      <a:headEnd type="none" w="med" len="med"/>
-                      <a:tailEnd type="none" w="med" len="med"/>
-                    </a:lnT>
-                    <a:lnB w="12700" cap="flat" cmpd="sng" algn="ctr">
-                      <a:solidFill>
-                        <a:schemeClr val="tx1"/>
-                      </a:solidFill>
-                      <a:prstDash val="solid"/>
-                      <a:round/>
-                      <a:headEnd type="none" w="med" len="med"/>
-                      <a:tailEnd type="none" w="med" len="med"/>
-                    </a:lnB>
-                    <a:noFill/>
-                  </a:tcPr>
-                </a:tc>
-                <a:tc>
-                  <a:txBody>
-                    <a:bodyPr/>
-                    <a:lstStyle/>
-                    <a:p>
-                      <a:pPr algn="ctr"/>
-                      <a:r>
-                        <a:rPr sz="1800" dirty="0"/>
-                        <a:t>0xCD</a:t>
-                      </a:r>
-                    </a:p>
-                  </a:txBody>
-                  <a:tcPr anchor="ctr">
-                    <a:lnL w="12700" cap="flat" cmpd="sng" algn="ctr">
-                      <a:solidFill>
-                        <a:schemeClr val="tx1"/>
-                      </a:solidFill>
-                      <a:prstDash val="solid"/>
-                      <a:round/>
-                      <a:headEnd type="none" w="med" len="med"/>
-                      <a:tailEnd type="none" w="med" len="med"/>
-                    </a:lnL>
-                    <a:lnR w="12700" cap="flat" cmpd="sng" algn="ctr">
-                      <a:solidFill>
-                        <a:schemeClr val="tx1"/>
-                      </a:solidFill>
-                      <a:prstDash val="solid"/>
-                      <a:round/>
-                      <a:headEnd type="none" w="med" len="med"/>
-                      <a:tailEnd type="none" w="med" len="med"/>
-                    </a:lnR>
-                    <a:lnT w="12700" cap="flat" cmpd="sng" algn="ctr">
-                      <a:solidFill>
-                        <a:schemeClr val="tx1"/>
-                      </a:solidFill>
-                      <a:prstDash val="solid"/>
-                      <a:round/>
-                      <a:headEnd type="none" w="med" len="med"/>
-                      <a:tailEnd type="none" w="med" len="med"/>
-                    </a:lnT>
-                    <a:lnB w="12700" cap="flat" cmpd="sng" algn="ctr">
-                      <a:solidFill>
-                        <a:schemeClr val="tx1"/>
-                      </a:solidFill>
-                      <a:prstDash val="solid"/>
-                      <a:round/>
-                      <a:headEnd type="none" w="med" len="med"/>
-                      <a:tailEnd type="none" w="med" len="med"/>
-                    </a:lnB>
-                    <a:noFill/>
-                  </a:tcPr>
-                </a:tc>
-                <a:tc>
-                  <a:txBody>
-                    <a:bodyPr/>
-                    <a:lstStyle/>
-                    <a:p>
-                      <a:pPr algn="ctr"/>
-                      <a:r>
-                        <a:rPr sz="1800" dirty="0"/>
-                        <a:t>✓</a:t>
-                      </a:r>
-                    </a:p>
-                  </a:txBody>
-                  <a:tcPr anchor="ctr">
-                    <a:lnL w="12700" cap="flat" cmpd="sng" algn="ctr">
-                      <a:solidFill>
-                        <a:schemeClr val="tx1"/>
-                      </a:solidFill>
-                      <a:prstDash val="solid"/>
-                      <a:round/>
-                      <a:headEnd type="none" w="med" len="med"/>
-                      <a:tailEnd type="none" w="med" len="med"/>
-                    </a:lnL>
-                    <a:lnR w="12700" cap="flat" cmpd="sng" algn="ctr">
-                      <a:solidFill>
-                        <a:schemeClr val="tx1"/>
-                      </a:solidFill>
-                      <a:prstDash val="solid"/>
-                      <a:round/>
-                      <a:headEnd type="none" w="med" len="med"/>
-                      <a:tailEnd type="none" w="med" len="med"/>
-                    </a:lnR>
-                    <a:lnT w="12700" cap="flat" cmpd="sng" algn="ctr">
-                      <a:solidFill>
-                        <a:schemeClr val="tx1"/>
-                      </a:solidFill>
-                      <a:prstDash val="solid"/>
-                      <a:round/>
-                      <a:headEnd type="none" w="med" len="med"/>
-                      <a:tailEnd type="none" w="med" len="med"/>
-                    </a:lnT>
-                    <a:lnB w="12700" cap="flat" cmpd="sng" algn="ctr">
-                      <a:solidFill>
-                        <a:schemeClr val="tx1"/>
-                      </a:solidFill>
-                      <a:prstDash val="solid"/>
-                      <a:round/>
-                      <a:headEnd type="none" w="med" len="med"/>
-                      <a:tailEnd type="none" w="med" len="med"/>
-                    </a:lnB>
-                    <a:noFill/>
-                  </a:tcPr>
-                </a:tc>
-                <a:extLst>
-                  <a:ext uri="{0D108BD9-81ED-4DB2-BD59-A6C34878D82A}">
-                    <a16:rowId xmlns:a16="http://schemas.microsoft.com/office/drawing/2014/main" val="10004"/>
-                  </a:ext>
-                </a:extLst>
-              </a:tr>
-              <a:tr h="365760">
-                <a:tc>
-                  <a:txBody>
-                    <a:bodyPr/>
-                    <a:lstStyle/>
-                    <a:p>
-                      <a:pPr algn="ctr"/>
-                      <a:r>
-                        <a:rPr sz="1800" dirty="0"/>
-                        <a:t>4</a:t>
-                      </a:r>
-                    </a:p>
-                  </a:txBody>
-                  <a:tcPr anchor="ctr">
-                    <a:lnL w="12700" cap="flat" cmpd="sng" algn="ctr">
-                      <a:solidFill>
-                        <a:schemeClr val="tx1"/>
-                      </a:solidFill>
-                      <a:prstDash val="solid"/>
-                      <a:round/>
-                      <a:headEnd type="none" w="med" len="med"/>
-                      <a:tailEnd type="none" w="med" len="med"/>
-                    </a:lnL>
-                    <a:lnR w="12700" cap="flat" cmpd="sng" algn="ctr">
-                      <a:solidFill>
-                        <a:schemeClr val="tx1"/>
-                      </a:solidFill>
-                      <a:prstDash val="solid"/>
-                      <a:round/>
-                      <a:headEnd type="none" w="med" len="med"/>
-                      <a:tailEnd type="none" w="med" len="med"/>
-                    </a:lnR>
-                    <a:lnT w="12700" cap="flat" cmpd="sng" algn="ctr">
-                      <a:solidFill>
-                        <a:schemeClr val="tx1"/>
-                      </a:solidFill>
-                      <a:prstDash val="solid"/>
-                      <a:round/>
-                      <a:headEnd type="none" w="med" len="med"/>
-                      <a:tailEnd type="none" w="med" len="med"/>
-                    </a:lnT>
-                    <a:lnB w="12700" cap="flat" cmpd="sng" algn="ctr">
-                      <a:solidFill>
-                        <a:schemeClr val="tx1"/>
-                      </a:solidFill>
-                      <a:prstDash val="solid"/>
-                      <a:round/>
-                      <a:headEnd type="none" w="med" len="med"/>
-                      <a:tailEnd type="none" w="med" len="med"/>
-                    </a:lnB>
-                    <a:noFill/>
-                  </a:tcPr>
-                </a:tc>
-                <a:tc>
-                  <a:txBody>
-                    <a:bodyPr/>
-                    <a:lstStyle/>
-                    <a:p>
-                      <a:pPr algn="ctr"/>
-                      <a:r>
-                        <a:rPr sz="1800" dirty="0"/>
-                        <a:t>1</a:t>
-                      </a:r>
-                    </a:p>
-                  </a:txBody>
-                  <a:tcPr anchor="ctr">
-                    <a:lnL w="12700" cap="flat" cmpd="sng" algn="ctr">
-                      <a:solidFill>
-                        <a:schemeClr val="tx1"/>
-                      </a:solidFill>
-                      <a:prstDash val="solid"/>
-                      <a:round/>
-                      <a:headEnd type="none" w="med" len="med"/>
-                      <a:tailEnd type="none" w="med" len="med"/>
-                    </a:lnL>
-                    <a:lnR w="12700" cap="flat" cmpd="sng" algn="ctr">
-                      <a:solidFill>
-                        <a:schemeClr val="tx1"/>
-                      </a:solidFill>
-                      <a:prstDash val="solid"/>
-                      <a:round/>
-                      <a:headEnd type="none" w="med" len="med"/>
-                      <a:tailEnd type="none" w="med" len="med"/>
-                    </a:lnR>
-                    <a:lnT w="12700" cap="flat" cmpd="sng" algn="ctr">
-                      <a:solidFill>
-                        <a:schemeClr val="tx1"/>
-                      </a:solidFill>
-                      <a:prstDash val="solid"/>
-                      <a:round/>
-                      <a:headEnd type="none" w="med" len="med"/>
-                      <a:tailEnd type="none" w="med" len="med"/>
-                    </a:lnT>
-                    <a:lnB w="12700" cap="flat" cmpd="sng" algn="ctr">
-                      <a:solidFill>
-                        <a:schemeClr val="tx1"/>
-                      </a:solidFill>
-                      <a:prstDash val="solid"/>
-                      <a:round/>
-                      <a:headEnd type="none" w="med" len="med"/>
-                      <a:tailEnd type="none" w="med" len="med"/>
-                    </a:lnB>
-                    <a:noFill/>
-                  </a:tcPr>
-                </a:tc>
-                <a:tc>
-                  <a:txBody>
-                    <a:bodyPr/>
-                    <a:lstStyle/>
-                    <a:p>
-                      <a:pPr algn="ctr"/>
-                      <a:r>
-                        <a:rPr sz="1800" dirty="0"/>
-                        <a:t>0x68</a:t>
-                      </a:r>
-                    </a:p>
-                  </a:txBody>
-                  <a:tcPr anchor="ctr">
-                    <a:lnL w="12700" cap="flat" cmpd="sng" algn="ctr">
-                      <a:solidFill>
-                        <a:schemeClr val="tx1"/>
-                      </a:solidFill>
-                      <a:prstDash val="solid"/>
-                      <a:round/>
-                      <a:headEnd type="none" w="med" len="med"/>
-                      <a:tailEnd type="none" w="med" len="med"/>
-                    </a:lnL>
-                    <a:lnR w="12700" cap="flat" cmpd="sng" algn="ctr">
-                      <a:solidFill>
-                        <a:schemeClr val="tx1"/>
-                      </a:solidFill>
-                      <a:prstDash val="solid"/>
-                      <a:round/>
-                      <a:headEnd type="none" w="med" len="med"/>
-                      <a:tailEnd type="none" w="med" len="med"/>
-                    </a:lnR>
-                    <a:lnT w="12700" cap="flat" cmpd="sng" algn="ctr">
-                      <a:solidFill>
-                        <a:schemeClr val="tx1"/>
-                      </a:solidFill>
-                      <a:prstDash val="solid"/>
-                      <a:round/>
-                      <a:headEnd type="none" w="med" len="med"/>
-                      <a:tailEnd type="none" w="med" len="med"/>
-                    </a:lnT>
-                    <a:lnB w="12700" cap="flat" cmpd="sng" algn="ctr">
-                      <a:solidFill>
-                        <a:schemeClr val="tx1"/>
-                      </a:solidFill>
-                      <a:prstDash val="solid"/>
-                      <a:round/>
-                      <a:headEnd type="none" w="med" len="med"/>
-                      <a:tailEnd type="none" w="med" len="med"/>
-                    </a:lnB>
-                    <a:noFill/>
-                  </a:tcPr>
-                </a:tc>
-                <a:tc>
-                  <a:txBody>
-                    <a:bodyPr/>
-                    <a:lstStyle/>
-                    <a:p>
-                      <a:pPr algn="ctr"/>
-                      <a:r>
-                        <a:rPr sz="1800" dirty="0"/>
-                        <a:t>0xAA</a:t>
-                      </a:r>
-                    </a:p>
-                  </a:txBody>
-                  <a:tcPr anchor="ctr">
-                    <a:lnL w="12700" cap="flat" cmpd="sng" algn="ctr">
-                      <a:solidFill>
-                        <a:schemeClr val="tx1"/>
-                      </a:solidFill>
-                      <a:prstDash val="solid"/>
-                      <a:round/>
-                      <a:headEnd type="none" w="med" len="med"/>
-                      <a:tailEnd type="none" w="med" len="med"/>
-                    </a:lnL>
-                    <a:lnR w="12700" cap="flat" cmpd="sng" algn="ctr">
-                      <a:solidFill>
-                        <a:schemeClr val="tx1"/>
-                      </a:solidFill>
-                      <a:prstDash val="solid"/>
-                      <a:round/>
-                      <a:headEnd type="none" w="med" len="med"/>
-                      <a:tailEnd type="none" w="med" len="med"/>
-                    </a:lnR>
-                    <a:lnT w="12700" cap="flat" cmpd="sng" algn="ctr">
-                      <a:solidFill>
-                        <a:schemeClr val="tx1"/>
-                      </a:solidFill>
-                      <a:prstDash val="solid"/>
-                      <a:round/>
-                      <a:headEnd type="none" w="med" len="med"/>
-                      <a:tailEnd type="none" w="med" len="med"/>
-                    </a:lnT>
-                    <a:lnB w="12700" cap="flat" cmpd="sng" algn="ctr">
-                      <a:solidFill>
-                        <a:schemeClr val="tx1"/>
-                      </a:solidFill>
-                      <a:prstDash val="solid"/>
-                      <a:round/>
-                      <a:headEnd type="none" w="med" len="med"/>
-                      <a:tailEnd type="none" w="med" len="med"/>
-                    </a:lnB>
-                    <a:noFill/>
-                  </a:tcPr>
-                </a:tc>
-                <a:tc>
-                  <a:txBody>
-                    <a:bodyPr/>
-                    <a:lstStyle/>
-                    <a:p>
-                      <a:pPr algn="ctr"/>
-                      <a:r>
-                        <a:rPr sz="1800" dirty="0"/>
-                        <a:t>0xAA</a:t>
-                      </a:r>
-                    </a:p>
-                  </a:txBody>
-                  <a:tcPr anchor="ctr">
-                    <a:lnL w="12700" cap="flat" cmpd="sng" algn="ctr">
-                      <a:solidFill>
-                        <a:schemeClr val="tx1"/>
-                      </a:solidFill>
-                      <a:prstDash val="solid"/>
-                      <a:round/>
-                      <a:headEnd type="none" w="med" len="med"/>
-                      <a:tailEnd type="none" w="med" len="med"/>
-                    </a:lnL>
-                    <a:lnR w="12700" cap="flat" cmpd="sng" algn="ctr">
-                      <a:solidFill>
-                        <a:schemeClr val="tx1"/>
-                      </a:solidFill>
-                      <a:prstDash val="solid"/>
-                      <a:round/>
-                      <a:headEnd type="none" w="med" len="med"/>
-                      <a:tailEnd type="none" w="med" len="med"/>
-                    </a:lnR>
-                    <a:lnT w="12700" cap="flat" cmpd="sng" algn="ctr">
-                      <a:solidFill>
-                        <a:schemeClr val="tx1"/>
-                      </a:solidFill>
-                      <a:prstDash val="solid"/>
-                      <a:round/>
-                      <a:headEnd type="none" w="med" len="med"/>
-                      <a:tailEnd type="none" w="med" len="med"/>
-                    </a:lnT>
-                    <a:lnB w="12700" cap="flat" cmpd="sng" algn="ctr">
-                      <a:solidFill>
-                        <a:schemeClr val="tx1"/>
-                      </a:solidFill>
-                      <a:prstDash val="solid"/>
-                      <a:round/>
-                      <a:headEnd type="none" w="med" len="med"/>
-                      <a:tailEnd type="none" w="med" len="med"/>
-                    </a:lnB>
-                    <a:noFill/>
-                  </a:tcPr>
-                </a:tc>
-                <a:tc>
-                  <a:txBody>
-                    <a:bodyPr/>
-                    <a:lstStyle/>
-                    <a:p>
-                      <a:pPr algn="ctr"/>
-                      <a:r>
-                        <a:rPr sz="1800" dirty="0"/>
-                        <a:t>✓</a:t>
-                      </a:r>
-                    </a:p>
-                  </a:txBody>
-                  <a:tcPr anchor="ctr">
-                    <a:lnL w="12700" cap="flat" cmpd="sng" algn="ctr">
-                      <a:solidFill>
-                        <a:schemeClr val="tx1"/>
-                      </a:solidFill>
-                      <a:prstDash val="solid"/>
-                      <a:round/>
-                      <a:headEnd type="none" w="med" len="med"/>
-                      <a:tailEnd type="none" w="med" len="med"/>
-                    </a:lnL>
-                    <a:lnR w="12700" cap="flat" cmpd="sng" algn="ctr">
-                      <a:solidFill>
-                        <a:schemeClr val="tx1"/>
-                      </a:solidFill>
-                      <a:prstDash val="solid"/>
-                      <a:round/>
-                      <a:headEnd type="none" w="med" len="med"/>
-                      <a:tailEnd type="none" w="med" len="med"/>
-                    </a:lnR>
-                    <a:lnT w="12700" cap="flat" cmpd="sng" algn="ctr">
-                      <a:solidFill>
-                        <a:schemeClr val="tx1"/>
-                      </a:solidFill>
-                      <a:prstDash val="solid"/>
-                      <a:round/>
-                      <a:headEnd type="none" w="med" len="med"/>
-                      <a:tailEnd type="none" w="med" len="med"/>
-                    </a:lnT>
-                    <a:lnB w="12700" cap="flat" cmpd="sng" algn="ctr">
-                      <a:solidFill>
-                        <a:schemeClr val="tx1"/>
-                      </a:solidFill>
-                      <a:prstDash val="solid"/>
-                      <a:round/>
-                      <a:headEnd type="none" w="med" len="med"/>
-                      <a:tailEnd type="none" w="med" len="med"/>
-                    </a:lnB>
-                    <a:noFill/>
-                  </a:tcPr>
-                </a:tc>
-                <a:extLst>
-                  <a:ext uri="{0D108BD9-81ED-4DB2-BD59-A6C34878D82A}">
-                    <a16:rowId xmlns:a16="http://schemas.microsoft.com/office/drawing/2014/main" val="10005"/>
-                  </a:ext>
-                </a:extLst>
-              </a:tr>
-              <a:tr h="365760">
-                <a:tc>
-                  <a:txBody>
-                    <a:bodyPr/>
-                    <a:lstStyle/>
-                    <a:p>
-                      <a:pPr algn="ctr"/>
-                      <a:r>
-                        <a:rPr sz="1800" dirty="0"/>
-                        <a:t>5</a:t>
-                      </a:r>
-                    </a:p>
-                  </a:txBody>
-                  <a:tcPr anchor="ctr">
-                    <a:lnL w="12700" cap="flat" cmpd="sng" algn="ctr">
-                      <a:solidFill>
-                        <a:schemeClr val="tx1"/>
-                      </a:solidFill>
-                      <a:prstDash val="solid"/>
-                      <a:round/>
-                      <a:headEnd type="none" w="med" len="med"/>
-                      <a:tailEnd type="none" w="med" len="med"/>
-                    </a:lnL>
-                    <a:lnR w="12700" cap="flat" cmpd="sng" algn="ctr">
-                      <a:solidFill>
-                        <a:schemeClr val="tx1"/>
-                      </a:solidFill>
-                      <a:prstDash val="solid"/>
-                      <a:round/>
-                      <a:headEnd type="none" w="med" len="med"/>
-                      <a:tailEnd type="none" w="med" len="med"/>
-                    </a:lnR>
-                    <a:lnT w="12700" cap="flat" cmpd="sng" algn="ctr">
-                      <a:solidFill>
-                        <a:schemeClr val="tx1"/>
-                      </a:solidFill>
-                      <a:prstDash val="solid"/>
-                      <a:round/>
-                      <a:headEnd type="none" w="med" len="med"/>
-                      <a:tailEnd type="none" w="med" len="med"/>
-                    </a:lnT>
-                    <a:lnB w="12700" cap="flat" cmpd="sng" algn="ctr">
-                      <a:solidFill>
-                        <a:schemeClr val="tx1"/>
-                      </a:solidFill>
-                      <a:prstDash val="solid"/>
-                      <a:round/>
-                      <a:headEnd type="none" w="med" len="med"/>
-                      <a:tailEnd type="none" w="med" len="med"/>
-                    </a:lnB>
-                    <a:noFill/>
-                  </a:tcPr>
-                </a:tc>
-                <a:tc>
-                  <a:txBody>
-                    <a:bodyPr/>
-                    <a:lstStyle/>
-                    <a:p>
-                      <a:pPr algn="ctr"/>
-                      <a:r>
-                        <a:rPr sz="1800" dirty="0"/>
-                        <a:t>1</a:t>
-                      </a:r>
-                    </a:p>
-                  </a:txBody>
-                  <a:tcPr anchor="ctr">
-                    <a:lnL w="12700" cap="flat" cmpd="sng" algn="ctr">
-                      <a:solidFill>
-                        <a:schemeClr val="tx1"/>
-                      </a:solidFill>
-                      <a:prstDash val="solid"/>
-                      <a:round/>
-                      <a:headEnd type="none" w="med" len="med"/>
-                      <a:tailEnd type="none" w="med" len="med"/>
-                    </a:lnL>
-                    <a:lnR w="12700" cap="flat" cmpd="sng" algn="ctr">
-                      <a:solidFill>
-                        <a:schemeClr val="tx1"/>
-                      </a:solidFill>
-                      <a:prstDash val="solid"/>
-                      <a:round/>
-                      <a:headEnd type="none" w="med" len="med"/>
-                      <a:tailEnd type="none" w="med" len="med"/>
-                    </a:lnR>
-                    <a:lnT w="12700" cap="flat" cmpd="sng" algn="ctr">
-                      <a:solidFill>
-                        <a:schemeClr val="tx1"/>
-                      </a:solidFill>
-                      <a:prstDash val="solid"/>
-                      <a:round/>
-                      <a:headEnd type="none" w="med" len="med"/>
-                      <a:tailEnd type="none" w="med" len="med"/>
-                    </a:lnT>
-                    <a:lnB w="12700" cap="flat" cmpd="sng" algn="ctr">
-                      <a:solidFill>
-                        <a:schemeClr val="tx1"/>
-                      </a:solidFill>
-                      <a:prstDash val="solid"/>
-                      <a:round/>
-                      <a:headEnd type="none" w="med" len="med"/>
-                      <a:tailEnd type="none" w="med" len="med"/>
-                    </a:lnB>
-                    <a:noFill/>
-                  </a:tcPr>
-                </a:tc>
-                <a:tc>
-                  <a:txBody>
-                    <a:bodyPr/>
-                    <a:lstStyle/>
-                    <a:p>
-                      <a:pPr algn="ctr"/>
-                      <a:r>
-                        <a:rPr sz="1800" dirty="0"/>
-                        <a:t>0x69</a:t>
-                      </a:r>
-                    </a:p>
-                  </a:txBody>
-                  <a:tcPr anchor="ctr">
-                    <a:lnL w="12700" cap="flat" cmpd="sng" algn="ctr">
-                      <a:solidFill>
-                        <a:schemeClr val="tx1"/>
-                      </a:solidFill>
-                      <a:prstDash val="solid"/>
-                      <a:round/>
-                      <a:headEnd type="none" w="med" len="med"/>
-                      <a:tailEnd type="none" w="med" len="med"/>
-                    </a:lnL>
-                    <a:lnR w="12700" cap="flat" cmpd="sng" algn="ctr">
-                      <a:solidFill>
-                        <a:schemeClr val="tx1"/>
-                      </a:solidFill>
-                      <a:prstDash val="solid"/>
-                      <a:round/>
-                      <a:headEnd type="none" w="med" len="med"/>
-                      <a:tailEnd type="none" w="med" len="med"/>
-                    </a:lnR>
-                    <a:lnT w="12700" cap="flat" cmpd="sng" algn="ctr">
-                      <a:solidFill>
-                        <a:schemeClr val="tx1"/>
-                      </a:solidFill>
-                      <a:prstDash val="solid"/>
-                      <a:round/>
-                      <a:headEnd type="none" w="med" len="med"/>
-                      <a:tailEnd type="none" w="med" len="med"/>
-                    </a:lnT>
-                    <a:lnB w="12700" cap="flat" cmpd="sng" algn="ctr">
-                      <a:solidFill>
-                        <a:schemeClr val="tx1"/>
-                      </a:solidFill>
-                      <a:prstDash val="solid"/>
-                      <a:round/>
-                      <a:headEnd type="none" w="med" len="med"/>
-                      <a:tailEnd type="none" w="med" len="med"/>
-                    </a:lnB>
-                    <a:noFill/>
-                  </a:tcPr>
-                </a:tc>
-                <a:tc>
-                  <a:txBody>
-                    <a:bodyPr/>
-                    <a:lstStyle/>
-                    <a:p>
-                      <a:pPr algn="ctr"/>
-                      <a:r>
-                        <a:rPr sz="1800" dirty="0"/>
-                        <a:t>0xDE</a:t>
-                      </a:r>
-                    </a:p>
-                  </a:txBody>
-                  <a:tcPr anchor="ctr">
-                    <a:lnL w="12700" cap="flat" cmpd="sng" algn="ctr">
-                      <a:solidFill>
-                        <a:schemeClr val="tx1"/>
-                      </a:solidFill>
-                      <a:prstDash val="solid"/>
-                      <a:round/>
-                      <a:headEnd type="none" w="med" len="med"/>
-                      <a:tailEnd type="none" w="med" len="med"/>
-                    </a:lnL>
-                    <a:lnR w="12700" cap="flat" cmpd="sng" algn="ctr">
-                      <a:solidFill>
-                        <a:schemeClr val="tx1"/>
-                      </a:solidFill>
-                      <a:prstDash val="solid"/>
-                      <a:round/>
-                      <a:headEnd type="none" w="med" len="med"/>
-                      <a:tailEnd type="none" w="med" len="med"/>
-                    </a:lnR>
-                    <a:lnT w="12700" cap="flat" cmpd="sng" algn="ctr">
-                      <a:solidFill>
-                        <a:schemeClr val="tx1"/>
-                      </a:solidFill>
-                      <a:prstDash val="solid"/>
-                      <a:round/>
-                      <a:headEnd type="none" w="med" len="med"/>
-                      <a:tailEnd type="none" w="med" len="med"/>
-                    </a:lnT>
-                    <a:lnB w="12700" cap="flat" cmpd="sng" algn="ctr">
-                      <a:solidFill>
-                        <a:schemeClr val="tx1"/>
-                      </a:solidFill>
-                      <a:prstDash val="solid"/>
-                      <a:round/>
-                      <a:headEnd type="none" w="med" len="med"/>
-                      <a:tailEnd type="none" w="med" len="med"/>
-                    </a:lnB>
-                    <a:noFill/>
-                  </a:tcPr>
-                </a:tc>
-                <a:tc>
-                  <a:txBody>
-                    <a:bodyPr/>
-                    <a:lstStyle/>
-                    <a:p>
-                      <a:pPr algn="ctr"/>
-                      <a:r>
-                        <a:rPr sz="1800" dirty="0"/>
-                        <a:t>0xDE</a:t>
-                      </a:r>
-                    </a:p>
-                  </a:txBody>
-                  <a:tcPr anchor="ctr">
-                    <a:lnL w="12700" cap="flat" cmpd="sng" algn="ctr">
-                      <a:solidFill>
-                        <a:schemeClr val="tx1"/>
-                      </a:solidFill>
-                      <a:prstDash val="solid"/>
-                      <a:round/>
-                      <a:headEnd type="none" w="med" len="med"/>
-                      <a:tailEnd type="none" w="med" len="med"/>
-                    </a:lnL>
-                    <a:lnR w="12700" cap="flat" cmpd="sng" algn="ctr">
-                      <a:solidFill>
-                        <a:schemeClr val="tx1"/>
-                      </a:solidFill>
-                      <a:prstDash val="solid"/>
-                      <a:round/>
-                      <a:headEnd type="none" w="med" len="med"/>
-                      <a:tailEnd type="none" w="med" len="med"/>
-                    </a:lnR>
-                    <a:lnT w="12700" cap="flat" cmpd="sng" algn="ctr">
-                      <a:solidFill>
-                        <a:schemeClr val="tx1"/>
-                      </a:solidFill>
-                      <a:prstDash val="solid"/>
-                      <a:round/>
-                      <a:headEnd type="none" w="med" len="med"/>
-                      <a:tailEnd type="none" w="med" len="med"/>
-                    </a:lnT>
-                    <a:lnB w="12700" cap="flat" cmpd="sng" algn="ctr">
-                      <a:solidFill>
-                        <a:schemeClr val="tx1"/>
-                      </a:solidFill>
-                      <a:prstDash val="solid"/>
-                      <a:round/>
-                      <a:headEnd type="none" w="med" len="med"/>
-                      <a:tailEnd type="none" w="med" len="med"/>
-                    </a:lnB>
-                    <a:noFill/>
-                  </a:tcPr>
-                </a:tc>
-                <a:tc>
-                  <a:txBody>
-                    <a:bodyPr/>
-                    <a:lstStyle/>
-                    <a:p>
-                      <a:pPr algn="ctr"/>
-                      <a:r>
-                        <a:rPr sz="1800" dirty="0"/>
-                        <a:t>✓</a:t>
-                      </a:r>
-                    </a:p>
-                  </a:txBody>
-                  <a:tcPr anchor="ctr">
-                    <a:lnL w="12700" cap="flat" cmpd="sng" algn="ctr">
-                      <a:solidFill>
-                        <a:schemeClr val="tx1"/>
-                      </a:solidFill>
-                      <a:prstDash val="solid"/>
-                      <a:round/>
-                      <a:headEnd type="none" w="med" len="med"/>
-                      <a:tailEnd type="none" w="med" len="med"/>
-                    </a:lnL>
-                    <a:lnR w="12700" cap="flat" cmpd="sng" algn="ctr">
-                      <a:solidFill>
-                        <a:schemeClr val="tx1"/>
-                      </a:solidFill>
-                      <a:prstDash val="solid"/>
-                      <a:round/>
-                      <a:headEnd type="none" w="med" len="med"/>
-                      <a:tailEnd type="none" w="med" len="med"/>
-                    </a:lnR>
-                    <a:lnT w="12700" cap="flat" cmpd="sng" algn="ctr">
-                      <a:solidFill>
-                        <a:schemeClr val="tx1"/>
-                      </a:solidFill>
-                      <a:prstDash val="solid"/>
-                      <a:round/>
-                      <a:headEnd type="none" w="med" len="med"/>
-                      <a:tailEnd type="none" w="med" len="med"/>
-                    </a:lnT>
-                    <a:lnB w="12700" cap="flat" cmpd="sng" algn="ctr">
-                      <a:solidFill>
-                        <a:schemeClr val="tx1"/>
-                      </a:solidFill>
-                      <a:prstDash val="solid"/>
-                      <a:round/>
-                      <a:headEnd type="none" w="med" len="med"/>
-                      <a:tailEnd type="none" w="med" len="med"/>
-                    </a:lnB>
-                    <a:noFill/>
-                  </a:tcPr>
-                </a:tc>
-                <a:extLst>
-                  <a:ext uri="{0D108BD9-81ED-4DB2-BD59-A6C34878D82A}">
-                    <a16:rowId xmlns:a16="http://schemas.microsoft.com/office/drawing/2014/main" val="10006"/>
-                  </a:ext>
-                </a:extLst>
-              </a:tr>
-              <a:tr h="365760">
-                <a:tc>
-                  <a:txBody>
-                    <a:bodyPr/>
-                    <a:lstStyle/>
-                    <a:p>
-                      <a:pPr algn="ctr"/>
-                      <a:r>
-                        <a:rPr sz="1800" dirty="0"/>
-                        <a:t>6</a:t>
-                      </a:r>
-                    </a:p>
-                  </a:txBody>
-                  <a:tcPr anchor="ctr">
-                    <a:lnL w="12700" cap="flat" cmpd="sng" algn="ctr">
-                      <a:solidFill>
-                        <a:schemeClr val="tx1"/>
-                      </a:solidFill>
-                      <a:prstDash val="solid"/>
-                      <a:round/>
-                      <a:headEnd type="none" w="med" len="med"/>
-                      <a:tailEnd type="none" w="med" len="med"/>
-                    </a:lnL>
-                    <a:lnR w="12700" cap="flat" cmpd="sng" algn="ctr">
-                      <a:solidFill>
-                        <a:schemeClr val="tx1"/>
-                      </a:solidFill>
-                      <a:prstDash val="solid"/>
-                      <a:round/>
-                      <a:headEnd type="none" w="med" len="med"/>
-                      <a:tailEnd type="none" w="med" len="med"/>
-                    </a:lnR>
-                    <a:lnT w="12700" cap="flat" cmpd="sng" algn="ctr">
-                      <a:solidFill>
-                        <a:schemeClr val="tx1"/>
-                      </a:solidFill>
-                      <a:prstDash val="solid"/>
-                      <a:round/>
-                      <a:headEnd type="none" w="med" len="med"/>
-                      <a:tailEnd type="none" w="med" len="med"/>
-                    </a:lnT>
-                    <a:lnB w="12700" cap="flat" cmpd="sng" algn="ctr">
-                      <a:solidFill>
-                        <a:schemeClr val="tx1"/>
-                      </a:solidFill>
-                      <a:prstDash val="solid"/>
-                      <a:round/>
-                      <a:headEnd type="none" w="med" len="med"/>
-                      <a:tailEnd type="none" w="med" len="med"/>
-                    </a:lnB>
-                    <a:noFill/>
-                  </a:tcPr>
-                </a:tc>
-                <a:tc>
-                  <a:txBody>
-                    <a:bodyPr/>
-                    <a:lstStyle/>
-                    <a:p>
-                      <a:pPr algn="ctr"/>
-                      <a:r>
-                        <a:rPr sz="1800" dirty="0"/>
-                        <a:t>1</a:t>
-                      </a:r>
-                    </a:p>
-                  </a:txBody>
-                  <a:tcPr anchor="ctr">
-                    <a:lnL w="12700" cap="flat" cmpd="sng" algn="ctr">
-                      <a:solidFill>
-                        <a:schemeClr val="tx1"/>
-                      </a:solidFill>
-                      <a:prstDash val="solid"/>
-                      <a:round/>
-                      <a:headEnd type="none" w="med" len="med"/>
-                      <a:tailEnd type="none" w="med" len="med"/>
-                    </a:lnL>
-                    <a:lnR w="12700" cap="flat" cmpd="sng" algn="ctr">
-                      <a:solidFill>
-                        <a:schemeClr val="tx1"/>
-                      </a:solidFill>
-                      <a:prstDash val="solid"/>
-                      <a:round/>
-                      <a:headEnd type="none" w="med" len="med"/>
-                      <a:tailEnd type="none" w="med" len="med"/>
-                    </a:lnR>
-                    <a:lnT w="12700" cap="flat" cmpd="sng" algn="ctr">
-                      <a:solidFill>
-                        <a:schemeClr val="tx1"/>
-                      </a:solidFill>
-                      <a:prstDash val="solid"/>
-                      <a:round/>
-                      <a:headEnd type="none" w="med" len="med"/>
-                      <a:tailEnd type="none" w="med" len="med"/>
-                    </a:lnT>
-                    <a:lnB w="12700" cap="flat" cmpd="sng" algn="ctr">
-                      <a:solidFill>
-                        <a:schemeClr val="tx1"/>
-                      </a:solidFill>
-                      <a:prstDash val="solid"/>
-                      <a:round/>
-                      <a:headEnd type="none" w="med" len="med"/>
-                      <a:tailEnd type="none" w="med" len="med"/>
-                    </a:lnB>
-                    <a:noFill/>
-                  </a:tcPr>
-                </a:tc>
-                <a:tc>
-                  <a:txBody>
-                    <a:bodyPr/>
-                    <a:lstStyle/>
-                    <a:p>
-                      <a:pPr algn="ctr"/>
-                      <a:r>
-                        <a:rPr sz="1800" dirty="0"/>
-                        <a:t>0x6A</a:t>
-                      </a:r>
-                    </a:p>
-                  </a:txBody>
-                  <a:tcPr anchor="ctr">
-                    <a:lnL w="12700" cap="flat" cmpd="sng" algn="ctr">
-                      <a:solidFill>
-                        <a:schemeClr val="tx1"/>
-                      </a:solidFill>
-                      <a:prstDash val="solid"/>
-                      <a:round/>
-                      <a:headEnd type="none" w="med" len="med"/>
-                      <a:tailEnd type="none" w="med" len="med"/>
-                    </a:lnL>
-                    <a:lnR w="12700" cap="flat" cmpd="sng" algn="ctr">
-                      <a:solidFill>
-                        <a:schemeClr val="tx1"/>
-                      </a:solidFill>
-                      <a:prstDash val="solid"/>
-                      <a:round/>
-                      <a:headEnd type="none" w="med" len="med"/>
-                      <a:tailEnd type="none" w="med" len="med"/>
-                    </a:lnR>
-                    <a:lnT w="12700" cap="flat" cmpd="sng" algn="ctr">
-                      <a:solidFill>
-                        <a:schemeClr val="tx1"/>
-                      </a:solidFill>
-                      <a:prstDash val="solid"/>
-                      <a:round/>
-                      <a:headEnd type="none" w="med" len="med"/>
-                      <a:tailEnd type="none" w="med" len="med"/>
-                    </a:lnT>
-                    <a:lnB w="12700" cap="flat" cmpd="sng" algn="ctr">
-                      <a:solidFill>
-                        <a:schemeClr val="tx1"/>
-                      </a:solidFill>
-                      <a:prstDash val="solid"/>
-                      <a:round/>
-                      <a:headEnd type="none" w="med" len="med"/>
-                      <a:tailEnd type="none" w="med" len="med"/>
-                    </a:lnB>
-                    <a:noFill/>
-                  </a:tcPr>
-                </a:tc>
-                <a:tc>
-                  <a:txBody>
-                    <a:bodyPr/>
-                    <a:lstStyle/>
-                    <a:p>
-                      <a:pPr algn="ctr"/>
-                      <a:r>
-                        <a:rPr sz="1800" dirty="0"/>
-                        <a:t>0x18</a:t>
-                      </a:r>
-                    </a:p>
-                  </a:txBody>
-                  <a:tcPr anchor="ctr">
-                    <a:lnL w="12700" cap="flat" cmpd="sng" algn="ctr">
-                      <a:solidFill>
-                        <a:schemeClr val="tx1"/>
-                      </a:solidFill>
-                      <a:prstDash val="solid"/>
-                      <a:round/>
-                      <a:headEnd type="none" w="med" len="med"/>
-                      <a:tailEnd type="none" w="med" len="med"/>
-                    </a:lnL>
-                    <a:lnR w="12700" cap="flat" cmpd="sng" algn="ctr">
-                      <a:solidFill>
-                        <a:schemeClr val="tx1"/>
-                      </a:solidFill>
-                      <a:prstDash val="solid"/>
-                      <a:round/>
-                      <a:headEnd type="none" w="med" len="med"/>
-                      <a:tailEnd type="none" w="med" len="med"/>
-                    </a:lnR>
-                    <a:lnT w="12700" cap="flat" cmpd="sng" algn="ctr">
-                      <a:solidFill>
-                        <a:schemeClr val="tx1"/>
-                      </a:solidFill>
-                      <a:prstDash val="solid"/>
-                      <a:round/>
-                      <a:headEnd type="none" w="med" len="med"/>
-                      <a:tailEnd type="none" w="med" len="med"/>
-                    </a:lnT>
-                    <a:lnB w="12700" cap="flat" cmpd="sng" algn="ctr">
-                      <a:solidFill>
-                        <a:schemeClr val="tx1"/>
-                      </a:solidFill>
-                      <a:prstDash val="solid"/>
-                      <a:round/>
-                      <a:headEnd type="none" w="med" len="med"/>
-                      <a:tailEnd type="none" w="med" len="med"/>
-                    </a:lnB>
-                    <a:noFill/>
-                  </a:tcPr>
-                </a:tc>
-                <a:tc>
-                  <a:txBody>
-                    <a:bodyPr/>
-                    <a:lstStyle/>
-                    <a:p>
-                      <a:pPr algn="ctr"/>
-                      <a:r>
-                        <a:rPr sz="1800" dirty="0"/>
-                        <a:t>0x18</a:t>
-                      </a:r>
-                    </a:p>
-                  </a:txBody>
-                  <a:tcPr anchor="ctr">
-                    <a:lnL w="12700" cap="flat" cmpd="sng" algn="ctr">
-                      <a:solidFill>
-                        <a:schemeClr val="tx1"/>
-                      </a:solidFill>
-                      <a:prstDash val="solid"/>
-                      <a:round/>
-                      <a:headEnd type="none" w="med" len="med"/>
-                      <a:tailEnd type="none" w="med" len="med"/>
-                    </a:lnL>
-                    <a:lnR w="12700" cap="flat" cmpd="sng" algn="ctr">
-                      <a:solidFill>
-                        <a:schemeClr val="tx1"/>
-                      </a:solidFill>
-                      <a:prstDash val="solid"/>
-                      <a:round/>
-                      <a:headEnd type="none" w="med" len="med"/>
-                      <a:tailEnd type="none" w="med" len="med"/>
-                    </a:lnR>
-                    <a:lnT w="12700" cap="flat" cmpd="sng" algn="ctr">
-                      <a:solidFill>
-                        <a:schemeClr val="tx1"/>
-                      </a:solidFill>
-                      <a:prstDash val="solid"/>
-                      <a:round/>
-                      <a:headEnd type="none" w="med" len="med"/>
-                      <a:tailEnd type="none" w="med" len="med"/>
-                    </a:lnT>
-                    <a:lnB w="12700" cap="flat" cmpd="sng" algn="ctr">
-                      <a:solidFill>
-                        <a:schemeClr val="tx1"/>
-                      </a:solidFill>
-                      <a:prstDash val="solid"/>
-                      <a:round/>
-                      <a:headEnd type="none" w="med" len="med"/>
-                      <a:tailEnd type="none" w="med" len="med"/>
-                    </a:lnB>
-                    <a:noFill/>
-                  </a:tcPr>
-                </a:tc>
-                <a:tc>
-                  <a:txBody>
-                    <a:bodyPr/>
-                    <a:lstStyle/>
-                    <a:p>
-                      <a:pPr algn="ctr"/>
-                      <a:r>
-                        <a:rPr sz="1800" dirty="0"/>
-                        <a:t>✓</a:t>
-                      </a:r>
-                    </a:p>
-                  </a:txBody>
-                  <a:tcPr anchor="ctr">
-                    <a:lnL w="12700" cap="flat" cmpd="sng" algn="ctr">
-                      <a:solidFill>
-                        <a:schemeClr val="tx1"/>
-                      </a:solidFill>
-                      <a:prstDash val="solid"/>
-                      <a:round/>
-                      <a:headEnd type="none" w="med" len="med"/>
-                      <a:tailEnd type="none" w="med" len="med"/>
-                    </a:lnL>
-                    <a:lnR w="12700" cap="flat" cmpd="sng" algn="ctr">
-                      <a:solidFill>
-                        <a:schemeClr val="tx1"/>
-                      </a:solidFill>
-                      <a:prstDash val="solid"/>
-                      <a:round/>
-                      <a:headEnd type="none" w="med" len="med"/>
-                      <a:tailEnd type="none" w="med" len="med"/>
-                    </a:lnR>
-                    <a:lnT w="12700" cap="flat" cmpd="sng" algn="ctr">
-                      <a:solidFill>
-                        <a:schemeClr val="tx1"/>
-                      </a:solidFill>
-                      <a:prstDash val="solid"/>
-                      <a:round/>
-                      <a:headEnd type="none" w="med" len="med"/>
-                      <a:tailEnd type="none" w="med" len="med"/>
-                    </a:lnT>
-                    <a:lnB w="12700" cap="flat" cmpd="sng" algn="ctr">
-                      <a:solidFill>
-                        <a:schemeClr val="tx1"/>
-                      </a:solidFill>
-                      <a:prstDash val="solid"/>
-                      <a:round/>
-                      <a:headEnd type="none" w="med" len="med"/>
-                      <a:tailEnd type="none" w="med" len="med"/>
-                    </a:lnB>
-                    <a:noFill/>
-                  </a:tcPr>
-                </a:tc>
-                <a:extLst>
-                  <a:ext uri="{0D108BD9-81ED-4DB2-BD59-A6C34878D82A}">
-                    <a16:rowId xmlns:a16="http://schemas.microsoft.com/office/drawing/2014/main" val="10007"/>
-                  </a:ext>
-                </a:extLst>
-              </a:tr>
-              <a:tr h="365760">
-                <a:tc>
-                  <a:txBody>
-                    <a:bodyPr/>
-                    <a:lstStyle/>
-                    <a:p>
-                      <a:pPr algn="ctr"/>
-                      <a:r>
-                        <a:rPr sz="1800" dirty="0"/>
-                        <a:t>7</a:t>
-                      </a:r>
-                    </a:p>
-                  </a:txBody>
-                  <a:tcPr anchor="ctr">
-                    <a:lnL w="12700" cap="flat" cmpd="sng" algn="ctr">
-                      <a:solidFill>
-                        <a:schemeClr val="tx1"/>
-                      </a:solidFill>
-                      <a:prstDash val="solid"/>
-                      <a:round/>
-                      <a:headEnd type="none" w="med" len="med"/>
-                      <a:tailEnd type="none" w="med" len="med"/>
-                    </a:lnL>
-                    <a:lnR w="12700" cap="flat" cmpd="sng" algn="ctr">
-                      <a:solidFill>
-                        <a:schemeClr val="tx1"/>
-                      </a:solidFill>
-                      <a:prstDash val="solid"/>
-                      <a:round/>
-                      <a:headEnd type="none" w="med" len="med"/>
-                      <a:tailEnd type="none" w="med" len="med"/>
-                    </a:lnR>
-                    <a:lnT w="12700" cap="flat" cmpd="sng" algn="ctr">
-                      <a:solidFill>
-                        <a:schemeClr val="tx1"/>
-                      </a:solidFill>
-                      <a:prstDash val="solid"/>
-                      <a:round/>
-                      <a:headEnd type="none" w="med" len="med"/>
-                      <a:tailEnd type="none" w="med" len="med"/>
-                    </a:lnT>
-                    <a:lnB w="12700" cap="flat" cmpd="sng" algn="ctr">
-                      <a:solidFill>
-                        <a:schemeClr val="tx1"/>
-                      </a:solidFill>
-                      <a:prstDash val="solid"/>
-                      <a:round/>
-                      <a:headEnd type="none" w="med" len="med"/>
-                      <a:tailEnd type="none" w="med" len="med"/>
-                    </a:lnB>
-                    <a:noFill/>
-                  </a:tcPr>
-                </a:tc>
-                <a:tc>
-                  <a:txBody>
-                    <a:bodyPr/>
-                    <a:lstStyle/>
-                    <a:p>
-                      <a:pPr algn="ctr"/>
-                      <a:r>
-                        <a:rPr sz="1800" dirty="0"/>
-                        <a:t>0</a:t>
-                      </a:r>
-                    </a:p>
-                  </a:txBody>
-                  <a:tcPr anchor="ctr">
-                    <a:lnL w="12700" cap="flat" cmpd="sng" algn="ctr">
-                      <a:solidFill>
-                        <a:schemeClr val="tx1"/>
-                      </a:solidFill>
-                      <a:prstDash val="solid"/>
-                      <a:round/>
-                      <a:headEnd type="none" w="med" len="med"/>
-                      <a:tailEnd type="none" w="med" len="med"/>
-                    </a:lnL>
-                    <a:lnR w="12700" cap="flat" cmpd="sng" algn="ctr">
-                      <a:solidFill>
-                        <a:schemeClr val="tx1"/>
-                      </a:solidFill>
-                      <a:prstDash val="solid"/>
-                      <a:round/>
-                      <a:headEnd type="none" w="med" len="med"/>
-                      <a:tailEnd type="none" w="med" len="med"/>
-                    </a:lnR>
-                    <a:lnT w="12700" cap="flat" cmpd="sng" algn="ctr">
-                      <a:solidFill>
-                        <a:schemeClr val="tx1"/>
-                      </a:solidFill>
-                      <a:prstDash val="solid"/>
-                      <a:round/>
-                      <a:headEnd type="none" w="med" len="med"/>
-                      <a:tailEnd type="none" w="med" len="med"/>
-                    </a:lnT>
-                    <a:lnB w="12700" cap="flat" cmpd="sng" algn="ctr">
-                      <a:solidFill>
-                        <a:schemeClr val="tx1"/>
-                      </a:solidFill>
-                      <a:prstDash val="solid"/>
-                      <a:round/>
-                      <a:headEnd type="none" w="med" len="med"/>
-                      <a:tailEnd type="none" w="med" len="med"/>
-                    </a:lnB>
-                    <a:noFill/>
-                  </a:tcPr>
-                </a:tc>
-                <a:tc>
-                  <a:txBody>
-                    <a:bodyPr/>
-                    <a:lstStyle/>
-                    <a:p>
-                      <a:pPr algn="ctr"/>
-                      <a:r>
-                        <a:rPr sz="1800" dirty="0"/>
-                        <a:t>0x07</a:t>
-                      </a:r>
-                    </a:p>
-                  </a:txBody>
-                  <a:tcPr anchor="ctr">
-                    <a:lnL w="12700" cap="flat" cmpd="sng" algn="ctr">
-                      <a:solidFill>
-                        <a:schemeClr val="tx1"/>
-                      </a:solidFill>
-                      <a:prstDash val="solid"/>
-                      <a:round/>
-                      <a:headEnd type="none" w="med" len="med"/>
-                      <a:tailEnd type="none" w="med" len="med"/>
-                    </a:lnL>
-                    <a:lnR w="12700" cap="flat" cmpd="sng" algn="ctr">
-                      <a:solidFill>
-                        <a:schemeClr val="tx1"/>
-                      </a:solidFill>
-                      <a:prstDash val="solid"/>
-                      <a:round/>
-                      <a:headEnd type="none" w="med" len="med"/>
-                      <a:tailEnd type="none" w="med" len="med"/>
-                    </a:lnR>
-                    <a:lnT w="12700" cap="flat" cmpd="sng" algn="ctr">
-                      <a:solidFill>
-                        <a:schemeClr val="tx1"/>
-                      </a:solidFill>
-                      <a:prstDash val="solid"/>
-                      <a:round/>
-                      <a:headEnd type="none" w="med" len="med"/>
-                      <a:tailEnd type="none" w="med" len="med"/>
-                    </a:lnT>
-                    <a:lnB w="12700" cap="flat" cmpd="sng" algn="ctr">
-                      <a:solidFill>
-                        <a:schemeClr val="tx1"/>
-                      </a:solidFill>
-                      <a:prstDash val="solid"/>
-                      <a:round/>
-                      <a:headEnd type="none" w="med" len="med"/>
-                      <a:tailEnd type="none" w="med" len="med"/>
-                    </a:lnB>
-                    <a:noFill/>
-                  </a:tcPr>
-                </a:tc>
-                <a:tc>
-                  <a:txBody>
-                    <a:bodyPr/>
-                    <a:lstStyle/>
-                    <a:p>
-                      <a:pPr algn="ctr"/>
-                      <a:r>
-                        <a:rPr sz="1800" dirty="0"/>
-                        <a:t>0xCA</a:t>
-                      </a:r>
-                    </a:p>
-                  </a:txBody>
-                  <a:tcPr anchor="ctr">
-                    <a:lnL w="12700" cap="flat" cmpd="sng" algn="ctr">
-                      <a:solidFill>
-                        <a:schemeClr val="tx1"/>
-                      </a:solidFill>
-                      <a:prstDash val="solid"/>
-                      <a:round/>
-                      <a:headEnd type="none" w="med" len="med"/>
-                      <a:tailEnd type="none" w="med" len="med"/>
-                    </a:lnL>
-                    <a:lnR w="12700" cap="flat" cmpd="sng" algn="ctr">
-                      <a:solidFill>
-                        <a:schemeClr val="tx1"/>
-                      </a:solidFill>
-                      <a:prstDash val="solid"/>
-                      <a:round/>
-                      <a:headEnd type="none" w="med" len="med"/>
-                      <a:tailEnd type="none" w="med" len="med"/>
-                    </a:lnR>
-                    <a:lnT w="12700" cap="flat" cmpd="sng" algn="ctr">
-                      <a:solidFill>
-                        <a:schemeClr val="tx1"/>
-                      </a:solidFill>
-                      <a:prstDash val="solid"/>
-                      <a:round/>
-                      <a:headEnd type="none" w="med" len="med"/>
-                      <a:tailEnd type="none" w="med" len="med"/>
-                    </a:lnT>
-                    <a:lnB w="12700" cap="flat" cmpd="sng" algn="ctr">
-                      <a:solidFill>
-                        <a:schemeClr val="tx1"/>
-                      </a:solidFill>
-                      <a:prstDash val="solid"/>
-                      <a:round/>
-                      <a:headEnd type="none" w="med" len="med"/>
-                      <a:tailEnd type="none" w="med" len="med"/>
-                    </a:lnB>
-                    <a:noFill/>
-                  </a:tcPr>
-                </a:tc>
-                <a:tc>
-                  <a:txBody>
-                    <a:bodyPr/>
-                    <a:lstStyle/>
-                    <a:p>
-                      <a:pPr algn="ctr"/>
-                      <a:r>
-                        <a:rPr sz="1800" dirty="0"/>
-                        <a:t>0xCA</a:t>
-                      </a:r>
-                    </a:p>
-                  </a:txBody>
-                  <a:tcPr anchor="ctr">
-                    <a:lnL w="12700" cap="flat" cmpd="sng" algn="ctr">
-                      <a:solidFill>
-                        <a:schemeClr val="tx1"/>
-                      </a:solidFill>
-                      <a:prstDash val="solid"/>
-                      <a:round/>
-                      <a:headEnd type="none" w="med" len="med"/>
-                      <a:tailEnd type="none" w="med" len="med"/>
-                    </a:lnL>
-                    <a:lnR w="12700" cap="flat" cmpd="sng" algn="ctr">
-                      <a:solidFill>
-                        <a:schemeClr val="tx1"/>
-                      </a:solidFill>
-                      <a:prstDash val="solid"/>
-                      <a:round/>
-                      <a:headEnd type="none" w="med" len="med"/>
-                      <a:tailEnd type="none" w="med" len="med"/>
-                    </a:lnR>
-                    <a:lnT w="12700" cap="flat" cmpd="sng" algn="ctr">
-                      <a:solidFill>
-                        <a:schemeClr val="tx1"/>
-                      </a:solidFill>
-                      <a:prstDash val="solid"/>
-                      <a:round/>
-                      <a:headEnd type="none" w="med" len="med"/>
-                      <a:tailEnd type="none" w="med" len="med"/>
-                    </a:lnT>
-                    <a:lnB w="12700" cap="flat" cmpd="sng" algn="ctr">
-                      <a:solidFill>
-                        <a:schemeClr val="tx1"/>
-                      </a:solidFill>
-                      <a:prstDash val="solid"/>
-                      <a:round/>
-                      <a:headEnd type="none" w="med" len="med"/>
-                      <a:tailEnd type="none" w="med" len="med"/>
-                    </a:lnB>
-                    <a:noFill/>
-                  </a:tcPr>
-                </a:tc>
-                <a:tc>
-                  <a:txBody>
-                    <a:bodyPr/>
-                    <a:lstStyle/>
-                    <a:p>
-                      <a:pPr algn="ctr"/>
-                      <a:r>
-                        <a:rPr sz="1800" dirty="0"/>
-                        <a:t>✓</a:t>
-                      </a:r>
-                    </a:p>
-                  </a:txBody>
-                  <a:tcPr anchor="ctr">
-                    <a:lnL w="12700" cap="flat" cmpd="sng" algn="ctr">
-                      <a:solidFill>
-                        <a:schemeClr val="tx1"/>
-                      </a:solidFill>
-                      <a:prstDash val="solid"/>
-                      <a:round/>
-                      <a:headEnd type="none" w="med" len="med"/>
-                      <a:tailEnd type="none" w="med" len="med"/>
-                    </a:lnL>
-                    <a:lnR w="12700" cap="flat" cmpd="sng" algn="ctr">
-                      <a:solidFill>
-                        <a:schemeClr val="tx1"/>
-                      </a:solidFill>
-                      <a:prstDash val="solid"/>
-                      <a:round/>
-                      <a:headEnd type="none" w="med" len="med"/>
-                      <a:tailEnd type="none" w="med" len="med"/>
-                    </a:lnR>
-                    <a:lnT w="12700" cap="flat" cmpd="sng" algn="ctr">
-                      <a:solidFill>
-                        <a:schemeClr val="tx1"/>
-                      </a:solidFill>
-                      <a:prstDash val="solid"/>
-                      <a:round/>
-                      <a:headEnd type="none" w="med" len="med"/>
-                      <a:tailEnd type="none" w="med" len="med"/>
-                    </a:lnT>
-                    <a:lnB w="12700" cap="flat" cmpd="sng" algn="ctr">
-                      <a:solidFill>
-                        <a:schemeClr val="tx1"/>
-                      </a:solidFill>
-                      <a:prstDash val="solid"/>
-                      <a:round/>
-                      <a:headEnd type="none" w="med" len="med"/>
-                      <a:tailEnd type="none" w="med" len="med"/>
-                    </a:lnB>
-                    <a:noFill/>
-                  </a:tcPr>
-                </a:tc>
-                <a:extLst>
-                  <a:ext uri="{0D108BD9-81ED-4DB2-BD59-A6C34878D82A}">
-                    <a16:rowId xmlns:a16="http://schemas.microsoft.com/office/drawing/2014/main" val="10008"/>
-                  </a:ext>
-                </a:extLst>
-              </a:tr>
-            </a:tbl>
-          </a:graphicData>
-        </a:graphic>
-      </p:graphicFrame>
     </p:spTree>
   </p:cSld>
   <p:clrMapOvr>
@@ -25663,1355 +18951,6 @@
                 <a:extLst>
                   <a:ext uri="{0D108BD9-81ED-4DB2-BD59-A6C34878D82A}">
                     <a16:rowId xmlns:a16="http://schemas.microsoft.com/office/drawing/2014/main" val="10003"/>
-                  </a:ext>
-                </a:extLst>
-              </a:tr>
-            </a:tbl>
-          </a:graphicData>
-        </a:graphic>
-      </p:graphicFrame>
-    </p:spTree>
-  </p:cSld>
-  <p:clrMapOvr>
-    <a:masterClrMapping/>
-  </p:clrMapOvr>
-</p:sld>
-</file>
-
-<file path=ppt/slides/slide7.xml><?xml version="1.0" encoding="utf-8"?>
-<p:sld xmlns:a="http://schemas.openxmlformats.org/drawingml/2006/main" xmlns:r="http://schemas.openxmlformats.org/officeDocument/2006/relationships" xmlns:p="http://schemas.openxmlformats.org/presentationml/2006/main">
-  <p:cSld>
-    <p:spTree>
-      <p:nvGrpSpPr>
-        <p:cNvPr id="1" name=""/>
-        <p:cNvGrpSpPr/>
-        <p:nvPr/>
-      </p:nvGrpSpPr>
-      <p:grpSpPr>
-        <a:xfrm>
-          <a:off x="0" y="0"/>
-          <a:ext cx="0" cy="0"/>
-          <a:chOff x="0" y="0"/>
-          <a:chExt cx="0" cy="0"/>
-        </a:xfrm>
-      </p:grpSpPr>
-      <p:sp>
-        <p:nvSpPr>
-          <p:cNvPr id="2" name="Title 1"/>
-          <p:cNvSpPr>
-            <a:spLocks noGrp="1"/>
-          </p:cNvSpPr>
-          <p:nvPr>
-            <p:ph type="title"/>
-          </p:nvPr>
-        </p:nvSpPr>
-        <p:spPr/>
-        <p:txBody>
-          <a:bodyPr/>
-          <a:lstStyle/>
-          <a:p>
-            <a:r>
-              <a:rPr dirty="0"/>
-              <a:t>숫자 예제: 토이 해시 함수로 세 게임 확인</a:t>
-            </a:r>
-          </a:p>
-        </p:txBody>
-      </p:sp>
-      <mc:AlternateContent xmlns:mc="http://schemas.openxmlformats.org/markup-compatibility/2006">
-        <mc:Choice xmlns:a14="http://schemas.microsoft.com/office/drawing/2010/main" Requires="a14">
-          <p:sp>
-            <p:nvSpPr>
-              <p:cNvPr id="3" name="Content Placeholder 2"/>
-              <p:cNvSpPr>
-                <a:spLocks noGrp="1"/>
-              </p:cNvSpPr>
-              <p:nvPr>
-                <p:ph idx="1"/>
-              </p:nvPr>
-            </p:nvSpPr>
-            <p:spPr/>
-            <p:txBody>
-              <a:bodyPr/>
-              <a:lstStyle>
-                <a:lvl1pPr>
-                  <a:defRPr sz="1800"/>
-                </a:lvl1pPr>
-                <a:lvl2pPr>
-                  <a:defRPr sz="1800"/>
-                </a:lvl2pPr>
-              </a:lstStyle>
-              <a:p>
-                <a:r>
-                  <a:rPr sz="1800" dirty="0"/>
-                  <a:t>토이 함수 </a:t>
-                </a:r>
-                <a14:m>
-                  <m:oMath xmlns:m="http://schemas.openxmlformats.org/officeDocument/2006/math">
-                    <m:r>
-                      <a:rPr lang="en-US" i="1">
-                        <a:latin typeface="Cambria Math"/>
-                      </a:rPr>
-                      <m:t>h</m:t>
-                    </m:r>
-                    <m:r>
-                      <a:rPr lang="en-US" i="1">
-                        <a:latin typeface="Cambria Math"/>
-                      </a:rPr>
-                      <m:t>:{0,…,7}→{0,…,4},</m:t>
-                    </m:r>
-                    <m:r>
-                      <m:rPr>
-                        <m:nor/>
-                      </m:rPr>
-                      <a:rPr lang="en-US" i="0">
-                        <a:latin typeface="Cambria Math"/>
-                      </a:rPr>
-                      <m:t> </m:t>
-                    </m:r>
-                    <m:r>
-                      <a:rPr lang="en-US" i="1">
-                        <a:latin typeface="Cambria Math"/>
-                      </a:rPr>
-                      <m:t>h</m:t>
-                    </m:r>
-                    <m:r>
-                      <a:rPr lang="en-US" i="1">
-                        <a:latin typeface="Cambria Math"/>
-                      </a:rPr>
-                      <m:t>(</m:t>
-                    </m:r>
-                    <m:r>
-                      <a:rPr lang="en-US" i="1">
-                        <a:latin typeface="Cambria Math"/>
-                      </a:rPr>
-                      <m:t>𝑥</m:t>
-                    </m:r>
-                    <m:r>
-                      <a:rPr lang="en-US" i="1">
-                        <a:latin typeface="Cambria Math"/>
-                      </a:rPr>
-                      <m:t>)=(3</m:t>
-                    </m:r>
-                    <m:r>
-                      <a:rPr lang="en-US" i="1">
-                        <a:latin typeface="Cambria Math"/>
-                      </a:rPr>
-                      <m:t>𝑥</m:t>
-                    </m:r>
-                    <m:r>
-                      <a:rPr lang="en-US" i="1">
-                        <a:latin typeface="Cambria Math"/>
-                      </a:rPr>
-                      <m:t>+1)</m:t>
-                    </m:r>
-                    <m:r>
-                      <m:rPr>
-                        <m:nor/>
-                      </m:rPr>
-                      <a:rPr lang="en-US" i="0">
-                        <a:latin typeface="Cambria Math"/>
-                      </a:rPr>
-                      <m:t> </m:t>
-                    </m:r>
-                    <m:r>
-                      <m:rPr>
-                        <m:sty m:val="p"/>
-                      </m:rPr>
-                      <a:rPr lang="en-US" i="0">
-                        <a:latin typeface="Cambria Math"/>
-                      </a:rPr>
-                      <m:t>mod</m:t>
-                    </m:r>
-                    <m:r>
-                      <m:rPr>
-                        <m:nor/>
-                      </m:rPr>
-                      <a:rPr lang="en-US" i="0">
-                        <a:latin typeface="Cambria Math"/>
-                      </a:rPr>
-                      <m:t> </m:t>
-                    </m:r>
-                    <m:r>
-                      <a:rPr lang="en-US" i="1">
-                        <a:latin typeface="Cambria Math"/>
-                      </a:rPr>
-                      <m:t>5</m:t>
-                    </m:r>
-                  </m:oMath>
-                </a14:m>
-                <a:r>
-                  <a:rPr sz="1800" dirty="0"/>
-                  <a:t> — 비둘기집 원리로 충돌이 반드시 존재</a:t>
-                </a:r>
-              </a:p>
-              <a:p>
-                <a:r>
-                  <a:rPr sz="1800" dirty="0"/>
-                  <a:t>사전영상 게임: y=2 → h(x)=2인 x=2, 7 (선형 합동식으로 즉시 풀림) → PR 깨짐</a:t>
-                </a:r>
-              </a:p>
-              <a:p>
-                <a:r>
-                  <a:rPr sz="1800" dirty="0"/>
-                  <a:t>2차 사전영상 게임: x=0 → h(0)=1과 같은 값 x'=5 (표 훑기) → 2PR 깨짐</a:t>
-                </a:r>
-              </a:p>
-              <a:p>
-                <a:r>
-                  <a:rPr sz="1800" dirty="0"/>
-                  <a:t>충돌 게임: 표에서 (1,6)이 h=4로 즉시 관찰됨 → CR 깨짐</a:t>
-                </a:r>
-              </a:p>
-            </p:txBody>
-          </p:sp>
-        </mc:Choice>
-        <mc:Fallback>
-          <p:sp>
-            <p:nvSpPr>
-              <p:cNvPr id="3" name="Content Placeholder 2"/>
-              <p:cNvSpPr>
-                <a:spLocks noGrp="1" noRot="1" noChangeAspect="1" noMove="1" noResize="1" noEditPoints="1" noAdjustHandles="1" noChangeArrowheads="1" noChangeShapeType="1" noTextEdit="1"/>
-              </p:cNvSpPr>
-              <p:nvPr>
-                <p:ph idx="1"/>
-              </p:nvPr>
-            </p:nvSpPr>
-            <p:spPr>
-              <a:blipFill>
-                <a:blip r:embed="rId2"/>
-                <a:stretch>
-                  <a:fillRect l="-232"/>
-                </a:stretch>
-              </a:blipFill>
-            </p:spPr>
-            <p:txBody>
-              <a:bodyPr/>
-              <a:lstStyle/>
-              <a:p>
-                <a:r>
-                  <a:rPr lang="ko-KR" altLang="en-US">
-                    <a:noFill/>
-                  </a:rPr>
-                  <a:t> </a:t>
-                </a:r>
-              </a:p>
-            </p:txBody>
-          </p:sp>
-        </mc:Fallback>
-      </mc:AlternateContent>
-      <p:sp>
-        <p:nvSpPr>
-          <p:cNvPr id="4" name="슬라이드 번호 개체 틀"/>
-          <p:cNvSpPr>
-            <a:spLocks noGrp="1"/>
-          </p:cNvSpPr>
-          <p:nvPr>
-            <p:ph type="sldNum" sz="quarter" idx="12"/>
-          </p:nvPr>
-        </p:nvSpPr>
-        <p:spPr/>
-        <p:txBody>
-          <a:bodyPr/>
-          <a:lstStyle/>
-          <a:p>
-            <a:fld id="{4438A2D4-3867-488E-A04E-7BFFCAED45A6}" type="slidenum">
-              <a:rPr lang="ko-KR" altLang="en-US" smtClean="0"/>
-              <a:t>7</a:t>
-            </a:fld>
-            <a:endParaRPr lang="ko-KR" altLang="en-US" dirty="0"/>
-          </a:p>
-        </p:txBody>
-      </p:sp>
-      <p:graphicFrame>
-        <p:nvGraphicFramePr>
-          <p:cNvPr id="5" name="Table 4"/>
-          <p:cNvGraphicFramePr>
-            <a:graphicFrameLocks noGrp="1"/>
-          </p:cNvGraphicFramePr>
-          <p:nvPr>
-            <p:extLst>
-              <p:ext uri="{D42A27DB-BD31-4B8C-83A1-F6EECF244321}">
-                <p14:modId xmlns:p14="http://schemas.microsoft.com/office/powerpoint/2010/main" val="1770285611"/>
-              </p:ext>
-            </p:extLst>
-          </p:nvPr>
-        </p:nvGraphicFramePr>
-        <p:xfrm>
-          <a:off x="841248" y="4297680"/>
-          <a:ext cx="10552176" cy="914400"/>
-        </p:xfrm>
-        <a:graphic>
-          <a:graphicData uri="http://schemas.openxmlformats.org/drawingml/2006/table">
-            <a:tbl>
-              <a:tblPr firstRow="1" bandRow="1">
-                <a:tableStyleId>{5C22544A-7EE6-4342-B048-85BDC9FD1C3A}</a:tableStyleId>
-              </a:tblPr>
-              <a:tblGrid>
-                <a:gridCol w="1188720">
-                  <a:extLst>
-                    <a:ext uri="{9D8B030D-6E8A-4147-A177-3AD203B41FA5}">
-                      <a16:colId xmlns:a16="http://schemas.microsoft.com/office/drawing/2014/main" val="20000"/>
-                    </a:ext>
-                  </a:extLst>
-                </a:gridCol>
-                <a:gridCol w="1170432">
-                  <a:extLst>
-                    <a:ext uri="{9D8B030D-6E8A-4147-A177-3AD203B41FA5}">
-                      <a16:colId xmlns:a16="http://schemas.microsoft.com/office/drawing/2014/main" val="20001"/>
-                    </a:ext>
-                  </a:extLst>
-                </a:gridCol>
-                <a:gridCol w="1170432">
-                  <a:extLst>
-                    <a:ext uri="{9D8B030D-6E8A-4147-A177-3AD203B41FA5}">
-                      <a16:colId xmlns:a16="http://schemas.microsoft.com/office/drawing/2014/main" val="20002"/>
-                    </a:ext>
-                  </a:extLst>
-                </a:gridCol>
-                <a:gridCol w="1170432">
-                  <a:extLst>
-                    <a:ext uri="{9D8B030D-6E8A-4147-A177-3AD203B41FA5}">
-                      <a16:colId xmlns:a16="http://schemas.microsoft.com/office/drawing/2014/main" val="20003"/>
-                    </a:ext>
-                  </a:extLst>
-                </a:gridCol>
-                <a:gridCol w="1170432">
-                  <a:extLst>
-                    <a:ext uri="{9D8B030D-6E8A-4147-A177-3AD203B41FA5}">
-                      <a16:colId xmlns:a16="http://schemas.microsoft.com/office/drawing/2014/main" val="20004"/>
-                    </a:ext>
-                  </a:extLst>
-                </a:gridCol>
-                <a:gridCol w="1170432">
-                  <a:extLst>
-                    <a:ext uri="{9D8B030D-6E8A-4147-A177-3AD203B41FA5}">
-                      <a16:colId xmlns:a16="http://schemas.microsoft.com/office/drawing/2014/main" val="20005"/>
-                    </a:ext>
-                  </a:extLst>
-                </a:gridCol>
-                <a:gridCol w="1170432">
-                  <a:extLst>
-                    <a:ext uri="{9D8B030D-6E8A-4147-A177-3AD203B41FA5}">
-                      <a16:colId xmlns:a16="http://schemas.microsoft.com/office/drawing/2014/main" val="20006"/>
-                    </a:ext>
-                  </a:extLst>
-                </a:gridCol>
-                <a:gridCol w="1170432">
-                  <a:extLst>
-                    <a:ext uri="{9D8B030D-6E8A-4147-A177-3AD203B41FA5}">
-                      <a16:colId xmlns:a16="http://schemas.microsoft.com/office/drawing/2014/main" val="20007"/>
-                    </a:ext>
-                  </a:extLst>
-                </a:gridCol>
-                <a:gridCol w="1170432">
-                  <a:extLst>
-                    <a:ext uri="{9D8B030D-6E8A-4147-A177-3AD203B41FA5}">
-                      <a16:colId xmlns:a16="http://schemas.microsoft.com/office/drawing/2014/main" val="20008"/>
-                    </a:ext>
-                  </a:extLst>
-                </a:gridCol>
-              </a:tblGrid>
-              <a:tr h="457200">
-                <a:tc>
-                  <a:txBody>
-                    <a:bodyPr/>
-                    <a:lstStyle/>
-                    <a:p>
-                      <a:pPr algn="ctr"/>
-                      <a:r>
-                        <a:rPr sz="1800" b="1" dirty="0">
-                          <a:solidFill>
-                            <a:schemeClr val="bg1"/>
-                          </a:solidFill>
-                        </a:rPr>
-                        <a:t>x</a:t>
-                      </a:r>
-                    </a:p>
-                  </a:txBody>
-                  <a:tcPr anchor="ctr">
-                    <a:lnL w="12700" cap="flat" cmpd="sng" algn="ctr">
-                      <a:solidFill>
-                        <a:schemeClr val="tx1"/>
-                      </a:solidFill>
-                      <a:prstDash val="solid"/>
-                      <a:round/>
-                      <a:headEnd type="none" w="med" len="med"/>
-                      <a:tailEnd type="none" w="med" len="med"/>
-                    </a:lnL>
-                    <a:lnR w="12700" cap="flat" cmpd="sng" algn="ctr">
-                      <a:solidFill>
-                        <a:schemeClr val="tx1"/>
-                      </a:solidFill>
-                      <a:prstDash val="solid"/>
-                      <a:round/>
-                      <a:headEnd type="none" w="med" len="med"/>
-                      <a:tailEnd type="none" w="med" len="med"/>
-                    </a:lnR>
-                    <a:lnT w="12700" cap="flat" cmpd="sng" algn="ctr">
-                      <a:solidFill>
-                        <a:schemeClr val="tx1"/>
-                      </a:solidFill>
-                      <a:prstDash val="solid"/>
-                      <a:round/>
-                      <a:headEnd type="none" w="med" len="med"/>
-                      <a:tailEnd type="none" w="med" len="med"/>
-                    </a:lnT>
-                    <a:lnB w="12700" cap="flat" cmpd="sng" algn="ctr">
-                      <a:solidFill>
-                        <a:schemeClr val="tx1"/>
-                      </a:solidFill>
-                      <a:prstDash val="solid"/>
-                      <a:round/>
-                      <a:headEnd type="none" w="med" len="med"/>
-                      <a:tailEnd type="none" w="med" len="med"/>
-                    </a:lnB>
-                    <a:solidFill>
-                      <a:schemeClr val="accent2"/>
-                    </a:solidFill>
-                  </a:tcPr>
-                </a:tc>
-                <a:tc>
-                  <a:txBody>
-                    <a:bodyPr/>
-                    <a:lstStyle/>
-                    <a:p>
-                      <a:pPr algn="ctr"/>
-                      <a:r>
-                        <a:rPr sz="1800" b="1" dirty="0">
-                          <a:solidFill>
-                            <a:schemeClr val="bg1"/>
-                          </a:solidFill>
-                        </a:rPr>
-                        <a:t>0</a:t>
-                      </a:r>
-                    </a:p>
-                  </a:txBody>
-                  <a:tcPr anchor="ctr">
-                    <a:lnL w="12700" cap="flat" cmpd="sng" algn="ctr">
-                      <a:solidFill>
-                        <a:schemeClr val="tx1"/>
-                      </a:solidFill>
-                      <a:prstDash val="solid"/>
-                      <a:round/>
-                      <a:headEnd type="none" w="med" len="med"/>
-                      <a:tailEnd type="none" w="med" len="med"/>
-                    </a:lnL>
-                    <a:lnR w="12700" cap="flat" cmpd="sng" algn="ctr">
-                      <a:solidFill>
-                        <a:schemeClr val="tx1"/>
-                      </a:solidFill>
-                      <a:prstDash val="solid"/>
-                      <a:round/>
-                      <a:headEnd type="none" w="med" len="med"/>
-                      <a:tailEnd type="none" w="med" len="med"/>
-                    </a:lnR>
-                    <a:lnT w="12700" cap="flat" cmpd="sng" algn="ctr">
-                      <a:solidFill>
-                        <a:schemeClr val="tx1"/>
-                      </a:solidFill>
-                      <a:prstDash val="solid"/>
-                      <a:round/>
-                      <a:headEnd type="none" w="med" len="med"/>
-                      <a:tailEnd type="none" w="med" len="med"/>
-                    </a:lnT>
-                    <a:lnB w="12700" cap="flat" cmpd="sng" algn="ctr">
-                      <a:solidFill>
-                        <a:schemeClr val="tx1"/>
-                      </a:solidFill>
-                      <a:prstDash val="solid"/>
-                      <a:round/>
-                      <a:headEnd type="none" w="med" len="med"/>
-                      <a:tailEnd type="none" w="med" len="med"/>
-                    </a:lnB>
-                    <a:solidFill>
-                      <a:schemeClr val="accent2"/>
-                    </a:solidFill>
-                  </a:tcPr>
-                </a:tc>
-                <a:tc>
-                  <a:txBody>
-                    <a:bodyPr/>
-                    <a:lstStyle/>
-                    <a:p>
-                      <a:pPr algn="ctr"/>
-                      <a:r>
-                        <a:rPr sz="1800" b="1" dirty="0">
-                          <a:solidFill>
-                            <a:schemeClr val="bg1"/>
-                          </a:solidFill>
-                        </a:rPr>
-                        <a:t>1</a:t>
-                      </a:r>
-                    </a:p>
-                  </a:txBody>
-                  <a:tcPr anchor="ctr">
-                    <a:lnL w="12700" cap="flat" cmpd="sng" algn="ctr">
-                      <a:solidFill>
-                        <a:schemeClr val="tx1"/>
-                      </a:solidFill>
-                      <a:prstDash val="solid"/>
-                      <a:round/>
-                      <a:headEnd type="none" w="med" len="med"/>
-                      <a:tailEnd type="none" w="med" len="med"/>
-                    </a:lnL>
-                    <a:lnR w="12700" cap="flat" cmpd="sng" algn="ctr">
-                      <a:solidFill>
-                        <a:schemeClr val="tx1"/>
-                      </a:solidFill>
-                      <a:prstDash val="solid"/>
-                      <a:round/>
-                      <a:headEnd type="none" w="med" len="med"/>
-                      <a:tailEnd type="none" w="med" len="med"/>
-                    </a:lnR>
-                    <a:lnT w="12700" cap="flat" cmpd="sng" algn="ctr">
-                      <a:solidFill>
-                        <a:schemeClr val="tx1"/>
-                      </a:solidFill>
-                      <a:prstDash val="solid"/>
-                      <a:round/>
-                      <a:headEnd type="none" w="med" len="med"/>
-                      <a:tailEnd type="none" w="med" len="med"/>
-                    </a:lnT>
-                    <a:lnB w="12700" cap="flat" cmpd="sng" algn="ctr">
-                      <a:solidFill>
-                        <a:schemeClr val="tx1"/>
-                      </a:solidFill>
-                      <a:prstDash val="solid"/>
-                      <a:round/>
-                      <a:headEnd type="none" w="med" len="med"/>
-                      <a:tailEnd type="none" w="med" len="med"/>
-                    </a:lnB>
-                    <a:solidFill>
-                      <a:schemeClr val="accent2"/>
-                    </a:solidFill>
-                  </a:tcPr>
-                </a:tc>
-                <a:tc>
-                  <a:txBody>
-                    <a:bodyPr/>
-                    <a:lstStyle/>
-                    <a:p>
-                      <a:pPr algn="ctr"/>
-                      <a:r>
-                        <a:rPr sz="1800" b="1" dirty="0">
-                          <a:solidFill>
-                            <a:schemeClr val="bg1"/>
-                          </a:solidFill>
-                        </a:rPr>
-                        <a:t>2</a:t>
-                      </a:r>
-                    </a:p>
-                  </a:txBody>
-                  <a:tcPr anchor="ctr">
-                    <a:lnL w="12700" cap="flat" cmpd="sng" algn="ctr">
-                      <a:solidFill>
-                        <a:schemeClr val="tx1"/>
-                      </a:solidFill>
-                      <a:prstDash val="solid"/>
-                      <a:round/>
-                      <a:headEnd type="none" w="med" len="med"/>
-                      <a:tailEnd type="none" w="med" len="med"/>
-                    </a:lnL>
-                    <a:lnR w="12700" cap="flat" cmpd="sng" algn="ctr">
-                      <a:solidFill>
-                        <a:schemeClr val="tx1"/>
-                      </a:solidFill>
-                      <a:prstDash val="solid"/>
-                      <a:round/>
-                      <a:headEnd type="none" w="med" len="med"/>
-                      <a:tailEnd type="none" w="med" len="med"/>
-                    </a:lnR>
-                    <a:lnT w="12700" cap="flat" cmpd="sng" algn="ctr">
-                      <a:solidFill>
-                        <a:schemeClr val="tx1"/>
-                      </a:solidFill>
-                      <a:prstDash val="solid"/>
-                      <a:round/>
-                      <a:headEnd type="none" w="med" len="med"/>
-                      <a:tailEnd type="none" w="med" len="med"/>
-                    </a:lnT>
-                    <a:lnB w="12700" cap="flat" cmpd="sng" algn="ctr">
-                      <a:solidFill>
-                        <a:schemeClr val="tx1"/>
-                      </a:solidFill>
-                      <a:prstDash val="solid"/>
-                      <a:round/>
-                      <a:headEnd type="none" w="med" len="med"/>
-                      <a:tailEnd type="none" w="med" len="med"/>
-                    </a:lnB>
-                    <a:solidFill>
-                      <a:schemeClr val="accent2"/>
-                    </a:solidFill>
-                  </a:tcPr>
-                </a:tc>
-                <a:tc>
-                  <a:txBody>
-                    <a:bodyPr/>
-                    <a:lstStyle/>
-                    <a:p>
-                      <a:pPr algn="ctr"/>
-                      <a:r>
-                        <a:rPr sz="1800" b="1" dirty="0">
-                          <a:solidFill>
-                            <a:schemeClr val="bg1"/>
-                          </a:solidFill>
-                        </a:rPr>
-                        <a:t>3</a:t>
-                      </a:r>
-                    </a:p>
-                  </a:txBody>
-                  <a:tcPr anchor="ctr">
-                    <a:lnL w="12700" cap="flat" cmpd="sng" algn="ctr">
-                      <a:solidFill>
-                        <a:schemeClr val="tx1"/>
-                      </a:solidFill>
-                      <a:prstDash val="solid"/>
-                      <a:round/>
-                      <a:headEnd type="none" w="med" len="med"/>
-                      <a:tailEnd type="none" w="med" len="med"/>
-                    </a:lnL>
-                    <a:lnR w="12700" cap="flat" cmpd="sng" algn="ctr">
-                      <a:solidFill>
-                        <a:schemeClr val="tx1"/>
-                      </a:solidFill>
-                      <a:prstDash val="solid"/>
-                      <a:round/>
-                      <a:headEnd type="none" w="med" len="med"/>
-                      <a:tailEnd type="none" w="med" len="med"/>
-                    </a:lnR>
-                    <a:lnT w="12700" cap="flat" cmpd="sng" algn="ctr">
-                      <a:solidFill>
-                        <a:schemeClr val="tx1"/>
-                      </a:solidFill>
-                      <a:prstDash val="solid"/>
-                      <a:round/>
-                      <a:headEnd type="none" w="med" len="med"/>
-                      <a:tailEnd type="none" w="med" len="med"/>
-                    </a:lnT>
-                    <a:lnB w="12700" cap="flat" cmpd="sng" algn="ctr">
-                      <a:solidFill>
-                        <a:schemeClr val="tx1"/>
-                      </a:solidFill>
-                      <a:prstDash val="solid"/>
-                      <a:round/>
-                      <a:headEnd type="none" w="med" len="med"/>
-                      <a:tailEnd type="none" w="med" len="med"/>
-                    </a:lnB>
-                    <a:solidFill>
-                      <a:schemeClr val="accent2"/>
-                    </a:solidFill>
-                  </a:tcPr>
-                </a:tc>
-                <a:tc>
-                  <a:txBody>
-                    <a:bodyPr/>
-                    <a:lstStyle/>
-                    <a:p>
-                      <a:pPr algn="ctr"/>
-                      <a:r>
-                        <a:rPr sz="1800" b="1" dirty="0">
-                          <a:solidFill>
-                            <a:schemeClr val="bg1"/>
-                          </a:solidFill>
-                        </a:rPr>
-                        <a:t>4</a:t>
-                      </a:r>
-                    </a:p>
-                  </a:txBody>
-                  <a:tcPr anchor="ctr">
-                    <a:lnL w="12700" cap="flat" cmpd="sng" algn="ctr">
-                      <a:solidFill>
-                        <a:schemeClr val="tx1"/>
-                      </a:solidFill>
-                      <a:prstDash val="solid"/>
-                      <a:round/>
-                      <a:headEnd type="none" w="med" len="med"/>
-                      <a:tailEnd type="none" w="med" len="med"/>
-                    </a:lnL>
-                    <a:lnR w="12700" cap="flat" cmpd="sng" algn="ctr">
-                      <a:solidFill>
-                        <a:schemeClr val="tx1"/>
-                      </a:solidFill>
-                      <a:prstDash val="solid"/>
-                      <a:round/>
-                      <a:headEnd type="none" w="med" len="med"/>
-                      <a:tailEnd type="none" w="med" len="med"/>
-                    </a:lnR>
-                    <a:lnT w="12700" cap="flat" cmpd="sng" algn="ctr">
-                      <a:solidFill>
-                        <a:schemeClr val="tx1"/>
-                      </a:solidFill>
-                      <a:prstDash val="solid"/>
-                      <a:round/>
-                      <a:headEnd type="none" w="med" len="med"/>
-                      <a:tailEnd type="none" w="med" len="med"/>
-                    </a:lnT>
-                    <a:lnB w="12700" cap="flat" cmpd="sng" algn="ctr">
-                      <a:solidFill>
-                        <a:schemeClr val="tx1"/>
-                      </a:solidFill>
-                      <a:prstDash val="solid"/>
-                      <a:round/>
-                      <a:headEnd type="none" w="med" len="med"/>
-                      <a:tailEnd type="none" w="med" len="med"/>
-                    </a:lnB>
-                    <a:solidFill>
-                      <a:schemeClr val="accent2"/>
-                    </a:solidFill>
-                  </a:tcPr>
-                </a:tc>
-                <a:tc>
-                  <a:txBody>
-                    <a:bodyPr/>
-                    <a:lstStyle/>
-                    <a:p>
-                      <a:pPr algn="ctr"/>
-                      <a:r>
-                        <a:rPr sz="1800" b="1" dirty="0">
-                          <a:solidFill>
-                            <a:schemeClr val="bg1"/>
-                          </a:solidFill>
-                        </a:rPr>
-                        <a:t>5</a:t>
-                      </a:r>
-                    </a:p>
-                  </a:txBody>
-                  <a:tcPr anchor="ctr">
-                    <a:lnL w="12700" cap="flat" cmpd="sng" algn="ctr">
-                      <a:solidFill>
-                        <a:schemeClr val="tx1"/>
-                      </a:solidFill>
-                      <a:prstDash val="solid"/>
-                      <a:round/>
-                      <a:headEnd type="none" w="med" len="med"/>
-                      <a:tailEnd type="none" w="med" len="med"/>
-                    </a:lnL>
-                    <a:lnR w="12700" cap="flat" cmpd="sng" algn="ctr">
-                      <a:solidFill>
-                        <a:schemeClr val="tx1"/>
-                      </a:solidFill>
-                      <a:prstDash val="solid"/>
-                      <a:round/>
-                      <a:headEnd type="none" w="med" len="med"/>
-                      <a:tailEnd type="none" w="med" len="med"/>
-                    </a:lnR>
-                    <a:lnT w="12700" cap="flat" cmpd="sng" algn="ctr">
-                      <a:solidFill>
-                        <a:schemeClr val="tx1"/>
-                      </a:solidFill>
-                      <a:prstDash val="solid"/>
-                      <a:round/>
-                      <a:headEnd type="none" w="med" len="med"/>
-                      <a:tailEnd type="none" w="med" len="med"/>
-                    </a:lnT>
-                    <a:lnB w="12700" cap="flat" cmpd="sng" algn="ctr">
-                      <a:solidFill>
-                        <a:schemeClr val="tx1"/>
-                      </a:solidFill>
-                      <a:prstDash val="solid"/>
-                      <a:round/>
-                      <a:headEnd type="none" w="med" len="med"/>
-                      <a:tailEnd type="none" w="med" len="med"/>
-                    </a:lnB>
-                    <a:solidFill>
-                      <a:schemeClr val="accent2"/>
-                    </a:solidFill>
-                  </a:tcPr>
-                </a:tc>
-                <a:tc>
-                  <a:txBody>
-                    <a:bodyPr/>
-                    <a:lstStyle/>
-                    <a:p>
-                      <a:pPr algn="ctr"/>
-                      <a:r>
-                        <a:rPr sz="1800" b="1" dirty="0">
-                          <a:solidFill>
-                            <a:schemeClr val="bg1"/>
-                          </a:solidFill>
-                        </a:rPr>
-                        <a:t>6</a:t>
-                      </a:r>
-                    </a:p>
-                  </a:txBody>
-                  <a:tcPr anchor="ctr">
-                    <a:lnL w="12700" cap="flat" cmpd="sng" algn="ctr">
-                      <a:solidFill>
-                        <a:schemeClr val="tx1"/>
-                      </a:solidFill>
-                      <a:prstDash val="solid"/>
-                      <a:round/>
-                      <a:headEnd type="none" w="med" len="med"/>
-                      <a:tailEnd type="none" w="med" len="med"/>
-                    </a:lnL>
-                    <a:lnR w="12700" cap="flat" cmpd="sng" algn="ctr">
-                      <a:solidFill>
-                        <a:schemeClr val="tx1"/>
-                      </a:solidFill>
-                      <a:prstDash val="solid"/>
-                      <a:round/>
-                      <a:headEnd type="none" w="med" len="med"/>
-                      <a:tailEnd type="none" w="med" len="med"/>
-                    </a:lnR>
-                    <a:lnT w="12700" cap="flat" cmpd="sng" algn="ctr">
-                      <a:solidFill>
-                        <a:schemeClr val="tx1"/>
-                      </a:solidFill>
-                      <a:prstDash val="solid"/>
-                      <a:round/>
-                      <a:headEnd type="none" w="med" len="med"/>
-                      <a:tailEnd type="none" w="med" len="med"/>
-                    </a:lnT>
-                    <a:lnB w="12700" cap="flat" cmpd="sng" algn="ctr">
-                      <a:solidFill>
-                        <a:schemeClr val="tx1"/>
-                      </a:solidFill>
-                      <a:prstDash val="solid"/>
-                      <a:round/>
-                      <a:headEnd type="none" w="med" len="med"/>
-                      <a:tailEnd type="none" w="med" len="med"/>
-                    </a:lnB>
-                    <a:solidFill>
-                      <a:schemeClr val="accent2"/>
-                    </a:solidFill>
-                  </a:tcPr>
-                </a:tc>
-                <a:tc>
-                  <a:txBody>
-                    <a:bodyPr/>
-                    <a:lstStyle/>
-                    <a:p>
-                      <a:pPr algn="ctr"/>
-                      <a:r>
-                        <a:rPr sz="1800" b="1" dirty="0">
-                          <a:solidFill>
-                            <a:schemeClr val="bg1"/>
-                          </a:solidFill>
-                        </a:rPr>
-                        <a:t>7</a:t>
-                      </a:r>
-                    </a:p>
-                  </a:txBody>
-                  <a:tcPr anchor="ctr">
-                    <a:lnL w="12700" cap="flat" cmpd="sng" algn="ctr">
-                      <a:solidFill>
-                        <a:schemeClr val="tx1"/>
-                      </a:solidFill>
-                      <a:prstDash val="solid"/>
-                      <a:round/>
-                      <a:headEnd type="none" w="med" len="med"/>
-                      <a:tailEnd type="none" w="med" len="med"/>
-                    </a:lnL>
-                    <a:lnR w="12700" cap="flat" cmpd="sng" algn="ctr">
-                      <a:solidFill>
-                        <a:schemeClr val="tx1"/>
-                      </a:solidFill>
-                      <a:prstDash val="solid"/>
-                      <a:round/>
-                      <a:headEnd type="none" w="med" len="med"/>
-                      <a:tailEnd type="none" w="med" len="med"/>
-                    </a:lnR>
-                    <a:lnT w="12700" cap="flat" cmpd="sng" algn="ctr">
-                      <a:solidFill>
-                        <a:schemeClr val="tx1"/>
-                      </a:solidFill>
-                      <a:prstDash val="solid"/>
-                      <a:round/>
-                      <a:headEnd type="none" w="med" len="med"/>
-                      <a:tailEnd type="none" w="med" len="med"/>
-                    </a:lnT>
-                    <a:lnB w="12700" cap="flat" cmpd="sng" algn="ctr">
-                      <a:solidFill>
-                        <a:schemeClr val="tx1"/>
-                      </a:solidFill>
-                      <a:prstDash val="solid"/>
-                      <a:round/>
-                      <a:headEnd type="none" w="med" len="med"/>
-                      <a:tailEnd type="none" w="med" len="med"/>
-                    </a:lnB>
-                    <a:solidFill>
-                      <a:schemeClr val="accent2"/>
-                    </a:solidFill>
-                  </a:tcPr>
-                </a:tc>
-                <a:extLst>
-                  <a:ext uri="{0D108BD9-81ED-4DB2-BD59-A6C34878D82A}">
-                    <a16:rowId xmlns:a16="http://schemas.microsoft.com/office/drawing/2014/main" val="10000"/>
-                  </a:ext>
-                </a:extLst>
-              </a:tr>
-              <a:tr h="457200">
-                <a:tc>
-                  <a:txBody>
-                    <a:bodyPr/>
-                    <a:lstStyle/>
-                    <a:p>
-                      <a:pPr algn="ctr"/>
-                      <a:r>
-                        <a:rPr sz="1800" dirty="0"/>
-                        <a:t>h(x)</a:t>
-                      </a:r>
-                    </a:p>
-                  </a:txBody>
-                  <a:tcPr anchor="ctr">
-                    <a:lnL w="12700" cap="flat" cmpd="sng" algn="ctr">
-                      <a:solidFill>
-                        <a:schemeClr val="tx1"/>
-                      </a:solidFill>
-                      <a:prstDash val="solid"/>
-                      <a:round/>
-                      <a:headEnd type="none" w="med" len="med"/>
-                      <a:tailEnd type="none" w="med" len="med"/>
-                    </a:lnL>
-                    <a:lnR w="12700" cap="flat" cmpd="sng" algn="ctr">
-                      <a:solidFill>
-                        <a:schemeClr val="tx1"/>
-                      </a:solidFill>
-                      <a:prstDash val="solid"/>
-                      <a:round/>
-                      <a:headEnd type="none" w="med" len="med"/>
-                      <a:tailEnd type="none" w="med" len="med"/>
-                    </a:lnR>
-                    <a:lnT w="12700" cap="flat" cmpd="sng" algn="ctr">
-                      <a:solidFill>
-                        <a:schemeClr val="tx1"/>
-                      </a:solidFill>
-                      <a:prstDash val="solid"/>
-                      <a:round/>
-                      <a:headEnd type="none" w="med" len="med"/>
-                      <a:tailEnd type="none" w="med" len="med"/>
-                    </a:lnT>
-                    <a:lnB w="12700" cap="flat" cmpd="sng" algn="ctr">
-                      <a:solidFill>
-                        <a:schemeClr val="tx1"/>
-                      </a:solidFill>
-                      <a:prstDash val="solid"/>
-                      <a:round/>
-                      <a:headEnd type="none" w="med" len="med"/>
-                      <a:tailEnd type="none" w="med" len="med"/>
-                    </a:lnB>
-                    <a:noFill/>
-                  </a:tcPr>
-                </a:tc>
-                <a:tc>
-                  <a:txBody>
-                    <a:bodyPr/>
-                    <a:lstStyle/>
-                    <a:p>
-                      <a:pPr algn="ctr"/>
-                      <a:r>
-                        <a:rPr sz="1800" dirty="0"/>
-                        <a:t>1</a:t>
-                      </a:r>
-                    </a:p>
-                  </a:txBody>
-                  <a:tcPr anchor="ctr">
-                    <a:lnL w="12700" cap="flat" cmpd="sng" algn="ctr">
-                      <a:solidFill>
-                        <a:schemeClr val="tx1"/>
-                      </a:solidFill>
-                      <a:prstDash val="solid"/>
-                      <a:round/>
-                      <a:headEnd type="none" w="med" len="med"/>
-                      <a:tailEnd type="none" w="med" len="med"/>
-                    </a:lnL>
-                    <a:lnR w="12700" cap="flat" cmpd="sng" algn="ctr">
-                      <a:solidFill>
-                        <a:schemeClr val="tx1"/>
-                      </a:solidFill>
-                      <a:prstDash val="solid"/>
-                      <a:round/>
-                      <a:headEnd type="none" w="med" len="med"/>
-                      <a:tailEnd type="none" w="med" len="med"/>
-                    </a:lnR>
-                    <a:lnT w="12700" cap="flat" cmpd="sng" algn="ctr">
-                      <a:solidFill>
-                        <a:schemeClr val="tx1"/>
-                      </a:solidFill>
-                      <a:prstDash val="solid"/>
-                      <a:round/>
-                      <a:headEnd type="none" w="med" len="med"/>
-                      <a:tailEnd type="none" w="med" len="med"/>
-                    </a:lnT>
-                    <a:lnB w="12700" cap="flat" cmpd="sng" algn="ctr">
-                      <a:solidFill>
-                        <a:schemeClr val="tx1"/>
-                      </a:solidFill>
-                      <a:prstDash val="solid"/>
-                      <a:round/>
-                      <a:headEnd type="none" w="med" len="med"/>
-                      <a:tailEnd type="none" w="med" len="med"/>
-                    </a:lnB>
-                    <a:noFill/>
-                  </a:tcPr>
-                </a:tc>
-                <a:tc>
-                  <a:txBody>
-                    <a:bodyPr/>
-                    <a:lstStyle/>
-                    <a:p>
-                      <a:pPr algn="ctr"/>
-                      <a:r>
-                        <a:rPr sz="1800" dirty="0"/>
-                        <a:t>4</a:t>
-                      </a:r>
-                    </a:p>
-                  </a:txBody>
-                  <a:tcPr anchor="ctr">
-                    <a:lnL w="12700" cap="flat" cmpd="sng" algn="ctr">
-                      <a:solidFill>
-                        <a:schemeClr val="tx1"/>
-                      </a:solidFill>
-                      <a:prstDash val="solid"/>
-                      <a:round/>
-                      <a:headEnd type="none" w="med" len="med"/>
-                      <a:tailEnd type="none" w="med" len="med"/>
-                    </a:lnL>
-                    <a:lnR w="12700" cap="flat" cmpd="sng" algn="ctr">
-                      <a:solidFill>
-                        <a:schemeClr val="tx1"/>
-                      </a:solidFill>
-                      <a:prstDash val="solid"/>
-                      <a:round/>
-                      <a:headEnd type="none" w="med" len="med"/>
-                      <a:tailEnd type="none" w="med" len="med"/>
-                    </a:lnR>
-                    <a:lnT w="12700" cap="flat" cmpd="sng" algn="ctr">
-                      <a:solidFill>
-                        <a:schemeClr val="tx1"/>
-                      </a:solidFill>
-                      <a:prstDash val="solid"/>
-                      <a:round/>
-                      <a:headEnd type="none" w="med" len="med"/>
-                      <a:tailEnd type="none" w="med" len="med"/>
-                    </a:lnT>
-                    <a:lnB w="12700" cap="flat" cmpd="sng" algn="ctr">
-                      <a:solidFill>
-                        <a:schemeClr val="tx1"/>
-                      </a:solidFill>
-                      <a:prstDash val="solid"/>
-                      <a:round/>
-                      <a:headEnd type="none" w="med" len="med"/>
-                      <a:tailEnd type="none" w="med" len="med"/>
-                    </a:lnB>
-                    <a:noFill/>
-                  </a:tcPr>
-                </a:tc>
-                <a:tc>
-                  <a:txBody>
-                    <a:bodyPr/>
-                    <a:lstStyle/>
-                    <a:p>
-                      <a:pPr algn="ctr"/>
-                      <a:r>
-                        <a:rPr sz="1800" dirty="0"/>
-                        <a:t>2</a:t>
-                      </a:r>
-                    </a:p>
-                  </a:txBody>
-                  <a:tcPr anchor="ctr">
-                    <a:lnL w="12700" cap="flat" cmpd="sng" algn="ctr">
-                      <a:solidFill>
-                        <a:schemeClr val="tx1"/>
-                      </a:solidFill>
-                      <a:prstDash val="solid"/>
-                      <a:round/>
-                      <a:headEnd type="none" w="med" len="med"/>
-                      <a:tailEnd type="none" w="med" len="med"/>
-                    </a:lnL>
-                    <a:lnR w="12700" cap="flat" cmpd="sng" algn="ctr">
-                      <a:solidFill>
-                        <a:schemeClr val="tx1"/>
-                      </a:solidFill>
-                      <a:prstDash val="solid"/>
-                      <a:round/>
-                      <a:headEnd type="none" w="med" len="med"/>
-                      <a:tailEnd type="none" w="med" len="med"/>
-                    </a:lnR>
-                    <a:lnT w="12700" cap="flat" cmpd="sng" algn="ctr">
-                      <a:solidFill>
-                        <a:schemeClr val="tx1"/>
-                      </a:solidFill>
-                      <a:prstDash val="solid"/>
-                      <a:round/>
-                      <a:headEnd type="none" w="med" len="med"/>
-                      <a:tailEnd type="none" w="med" len="med"/>
-                    </a:lnT>
-                    <a:lnB w="12700" cap="flat" cmpd="sng" algn="ctr">
-                      <a:solidFill>
-                        <a:schemeClr val="tx1"/>
-                      </a:solidFill>
-                      <a:prstDash val="solid"/>
-                      <a:round/>
-                      <a:headEnd type="none" w="med" len="med"/>
-                      <a:tailEnd type="none" w="med" len="med"/>
-                    </a:lnB>
-                    <a:noFill/>
-                  </a:tcPr>
-                </a:tc>
-                <a:tc>
-                  <a:txBody>
-                    <a:bodyPr/>
-                    <a:lstStyle/>
-                    <a:p>
-                      <a:pPr algn="ctr"/>
-                      <a:r>
-                        <a:rPr sz="1800" dirty="0"/>
-                        <a:t>0</a:t>
-                      </a:r>
-                    </a:p>
-                  </a:txBody>
-                  <a:tcPr anchor="ctr">
-                    <a:lnL w="12700" cap="flat" cmpd="sng" algn="ctr">
-                      <a:solidFill>
-                        <a:schemeClr val="tx1"/>
-                      </a:solidFill>
-                      <a:prstDash val="solid"/>
-                      <a:round/>
-                      <a:headEnd type="none" w="med" len="med"/>
-                      <a:tailEnd type="none" w="med" len="med"/>
-                    </a:lnL>
-                    <a:lnR w="12700" cap="flat" cmpd="sng" algn="ctr">
-                      <a:solidFill>
-                        <a:schemeClr val="tx1"/>
-                      </a:solidFill>
-                      <a:prstDash val="solid"/>
-                      <a:round/>
-                      <a:headEnd type="none" w="med" len="med"/>
-                      <a:tailEnd type="none" w="med" len="med"/>
-                    </a:lnR>
-                    <a:lnT w="12700" cap="flat" cmpd="sng" algn="ctr">
-                      <a:solidFill>
-                        <a:schemeClr val="tx1"/>
-                      </a:solidFill>
-                      <a:prstDash val="solid"/>
-                      <a:round/>
-                      <a:headEnd type="none" w="med" len="med"/>
-                      <a:tailEnd type="none" w="med" len="med"/>
-                    </a:lnT>
-                    <a:lnB w="12700" cap="flat" cmpd="sng" algn="ctr">
-                      <a:solidFill>
-                        <a:schemeClr val="tx1"/>
-                      </a:solidFill>
-                      <a:prstDash val="solid"/>
-                      <a:round/>
-                      <a:headEnd type="none" w="med" len="med"/>
-                      <a:tailEnd type="none" w="med" len="med"/>
-                    </a:lnB>
-                    <a:noFill/>
-                  </a:tcPr>
-                </a:tc>
-                <a:tc>
-                  <a:txBody>
-                    <a:bodyPr/>
-                    <a:lstStyle/>
-                    <a:p>
-                      <a:pPr algn="ctr"/>
-                      <a:r>
-                        <a:rPr sz="1800" dirty="0"/>
-                        <a:t>3</a:t>
-                      </a:r>
-                    </a:p>
-                  </a:txBody>
-                  <a:tcPr anchor="ctr">
-                    <a:lnL w="12700" cap="flat" cmpd="sng" algn="ctr">
-                      <a:solidFill>
-                        <a:schemeClr val="tx1"/>
-                      </a:solidFill>
-                      <a:prstDash val="solid"/>
-                      <a:round/>
-                      <a:headEnd type="none" w="med" len="med"/>
-                      <a:tailEnd type="none" w="med" len="med"/>
-                    </a:lnL>
-                    <a:lnR w="12700" cap="flat" cmpd="sng" algn="ctr">
-                      <a:solidFill>
-                        <a:schemeClr val="tx1"/>
-                      </a:solidFill>
-                      <a:prstDash val="solid"/>
-                      <a:round/>
-                      <a:headEnd type="none" w="med" len="med"/>
-                      <a:tailEnd type="none" w="med" len="med"/>
-                    </a:lnR>
-                    <a:lnT w="12700" cap="flat" cmpd="sng" algn="ctr">
-                      <a:solidFill>
-                        <a:schemeClr val="tx1"/>
-                      </a:solidFill>
-                      <a:prstDash val="solid"/>
-                      <a:round/>
-                      <a:headEnd type="none" w="med" len="med"/>
-                      <a:tailEnd type="none" w="med" len="med"/>
-                    </a:lnT>
-                    <a:lnB w="12700" cap="flat" cmpd="sng" algn="ctr">
-                      <a:solidFill>
-                        <a:schemeClr val="tx1"/>
-                      </a:solidFill>
-                      <a:prstDash val="solid"/>
-                      <a:round/>
-                      <a:headEnd type="none" w="med" len="med"/>
-                      <a:tailEnd type="none" w="med" len="med"/>
-                    </a:lnB>
-                    <a:noFill/>
-                  </a:tcPr>
-                </a:tc>
-                <a:tc>
-                  <a:txBody>
-                    <a:bodyPr/>
-                    <a:lstStyle/>
-                    <a:p>
-                      <a:pPr algn="ctr"/>
-                      <a:r>
-                        <a:rPr sz="1800" dirty="0"/>
-                        <a:t>1</a:t>
-                      </a:r>
-                    </a:p>
-                  </a:txBody>
-                  <a:tcPr anchor="ctr">
-                    <a:lnL w="12700" cap="flat" cmpd="sng" algn="ctr">
-                      <a:solidFill>
-                        <a:schemeClr val="tx1"/>
-                      </a:solidFill>
-                      <a:prstDash val="solid"/>
-                      <a:round/>
-                      <a:headEnd type="none" w="med" len="med"/>
-                      <a:tailEnd type="none" w="med" len="med"/>
-                    </a:lnL>
-                    <a:lnR w="12700" cap="flat" cmpd="sng" algn="ctr">
-                      <a:solidFill>
-                        <a:schemeClr val="tx1"/>
-                      </a:solidFill>
-                      <a:prstDash val="solid"/>
-                      <a:round/>
-                      <a:headEnd type="none" w="med" len="med"/>
-                      <a:tailEnd type="none" w="med" len="med"/>
-                    </a:lnR>
-                    <a:lnT w="12700" cap="flat" cmpd="sng" algn="ctr">
-                      <a:solidFill>
-                        <a:schemeClr val="tx1"/>
-                      </a:solidFill>
-                      <a:prstDash val="solid"/>
-                      <a:round/>
-                      <a:headEnd type="none" w="med" len="med"/>
-                      <a:tailEnd type="none" w="med" len="med"/>
-                    </a:lnT>
-                    <a:lnB w="12700" cap="flat" cmpd="sng" algn="ctr">
-                      <a:solidFill>
-                        <a:schemeClr val="tx1"/>
-                      </a:solidFill>
-                      <a:prstDash val="solid"/>
-                      <a:round/>
-                      <a:headEnd type="none" w="med" len="med"/>
-                      <a:tailEnd type="none" w="med" len="med"/>
-                    </a:lnB>
-                    <a:noFill/>
-                  </a:tcPr>
-                </a:tc>
-                <a:tc>
-                  <a:txBody>
-                    <a:bodyPr/>
-                    <a:lstStyle/>
-                    <a:p>
-                      <a:pPr algn="ctr"/>
-                      <a:r>
-                        <a:rPr sz="1800" dirty="0"/>
-                        <a:t>4</a:t>
-                      </a:r>
-                    </a:p>
-                  </a:txBody>
-                  <a:tcPr anchor="ctr">
-                    <a:lnL w="12700" cap="flat" cmpd="sng" algn="ctr">
-                      <a:solidFill>
-                        <a:schemeClr val="tx1"/>
-                      </a:solidFill>
-                      <a:prstDash val="solid"/>
-                      <a:round/>
-                      <a:headEnd type="none" w="med" len="med"/>
-                      <a:tailEnd type="none" w="med" len="med"/>
-                    </a:lnL>
-                    <a:lnR w="12700" cap="flat" cmpd="sng" algn="ctr">
-                      <a:solidFill>
-                        <a:schemeClr val="tx1"/>
-                      </a:solidFill>
-                      <a:prstDash val="solid"/>
-                      <a:round/>
-                      <a:headEnd type="none" w="med" len="med"/>
-                      <a:tailEnd type="none" w="med" len="med"/>
-                    </a:lnR>
-                    <a:lnT w="12700" cap="flat" cmpd="sng" algn="ctr">
-                      <a:solidFill>
-                        <a:schemeClr val="tx1"/>
-                      </a:solidFill>
-                      <a:prstDash val="solid"/>
-                      <a:round/>
-                      <a:headEnd type="none" w="med" len="med"/>
-                      <a:tailEnd type="none" w="med" len="med"/>
-                    </a:lnT>
-                    <a:lnB w="12700" cap="flat" cmpd="sng" algn="ctr">
-                      <a:solidFill>
-                        <a:schemeClr val="tx1"/>
-                      </a:solidFill>
-                      <a:prstDash val="solid"/>
-                      <a:round/>
-                      <a:headEnd type="none" w="med" len="med"/>
-                      <a:tailEnd type="none" w="med" len="med"/>
-                    </a:lnB>
-                    <a:noFill/>
-                  </a:tcPr>
-                </a:tc>
-                <a:tc>
-                  <a:txBody>
-                    <a:bodyPr/>
-                    <a:lstStyle/>
-                    <a:p>
-                      <a:pPr algn="ctr"/>
-                      <a:r>
-                        <a:rPr sz="1800" dirty="0"/>
-                        <a:t>2</a:t>
-                      </a:r>
-                    </a:p>
-                  </a:txBody>
-                  <a:tcPr anchor="ctr">
-                    <a:lnL w="12700" cap="flat" cmpd="sng" algn="ctr">
-                      <a:solidFill>
-                        <a:schemeClr val="tx1"/>
-                      </a:solidFill>
-                      <a:prstDash val="solid"/>
-                      <a:round/>
-                      <a:headEnd type="none" w="med" len="med"/>
-                      <a:tailEnd type="none" w="med" len="med"/>
-                    </a:lnL>
-                    <a:lnR w="12700" cap="flat" cmpd="sng" algn="ctr">
-                      <a:solidFill>
-                        <a:schemeClr val="tx1"/>
-                      </a:solidFill>
-                      <a:prstDash val="solid"/>
-                      <a:round/>
-                      <a:headEnd type="none" w="med" len="med"/>
-                      <a:tailEnd type="none" w="med" len="med"/>
-                    </a:lnR>
-                    <a:lnT w="12700" cap="flat" cmpd="sng" algn="ctr">
-                      <a:solidFill>
-                        <a:schemeClr val="tx1"/>
-                      </a:solidFill>
-                      <a:prstDash val="solid"/>
-                      <a:round/>
-                      <a:headEnd type="none" w="med" len="med"/>
-                      <a:tailEnd type="none" w="med" len="med"/>
-                    </a:lnT>
-                    <a:lnB w="12700" cap="flat" cmpd="sng" algn="ctr">
-                      <a:solidFill>
-                        <a:schemeClr val="tx1"/>
-                      </a:solidFill>
-                      <a:prstDash val="solid"/>
-                      <a:round/>
-                      <a:headEnd type="none" w="med" len="med"/>
-                      <a:tailEnd type="none" w="med" len="med"/>
-                    </a:lnB>
-                    <a:noFill/>
-                  </a:tcPr>
-                </a:tc>
-                <a:extLst>
-                  <a:ext uri="{0D108BD9-81ED-4DB2-BD59-A6C34878D82A}">
-                    <a16:rowId xmlns:a16="http://schemas.microsoft.com/office/drawing/2014/main" val="10001"/>
                   </a:ext>
                 </a:extLst>
               </a:tr>

--- a/presentation/0909_15_Hash-Functions-and-Lamport-OTS.pptx
+++ b/presentation/0909_15_Hash-Functions-and-Lamport-OTS.pptx
@@ -5,7 +5,7 @@
     <p:sldMasterId id="2147483648" r:id="rId1"/>
   </p:sldMasterIdLst>
   <p:notesMasterIdLst>
-    <p:notesMasterId r:id="rId27"/>
+    <p:notesMasterId r:id="rId23"/>
   </p:notesMasterIdLst>
   <p:sldIdLst>
     <p:sldId id="256" r:id="rId2"/>
@@ -14,21 +14,21 @@
     <p:sldId id="259" r:id="rId5"/>
     <p:sldId id="260" r:id="rId6"/>
     <p:sldId id="261" r:id="rId7"/>
-    <p:sldId id="263" r:id="rId9"/>
-    <p:sldId id="264" r:id="rId10"/>
-    <p:sldId id="265" r:id="rId11"/>
-    <p:sldId id="266" r:id="rId12"/>
-    <p:sldId id="267" r:id="rId13"/>
-    <p:sldId id="268" r:id="rId14"/>
-    <p:sldId id="269" r:id="rId15"/>
-    <p:sldId id="270" r:id="rId16"/>
-    <p:sldId id="272" r:id="rId18"/>
-    <p:sldId id="273" r:id="rId19"/>
-    <p:sldId id="276" r:id="rId22"/>
-    <p:sldId id="277" r:id="rId23"/>
-    <p:sldId id="278" r:id="rId24"/>
-    <p:sldId id="279" r:id="rId25"/>
-    <p:sldId id="280" r:id="rId26"/>
+    <p:sldId id="263" r:id="rId8"/>
+    <p:sldId id="264" r:id="rId9"/>
+    <p:sldId id="265" r:id="rId10"/>
+    <p:sldId id="266" r:id="rId11"/>
+    <p:sldId id="267" r:id="rId12"/>
+    <p:sldId id="268" r:id="rId13"/>
+    <p:sldId id="269" r:id="rId14"/>
+    <p:sldId id="270" r:id="rId15"/>
+    <p:sldId id="272" r:id="rId16"/>
+    <p:sldId id="273" r:id="rId17"/>
+    <p:sldId id="276" r:id="rId18"/>
+    <p:sldId id="277" r:id="rId19"/>
+    <p:sldId id="278" r:id="rId20"/>
+    <p:sldId id="279" r:id="rId21"/>
+    <p:sldId id="280" r:id="rId22"/>
   </p:sldIdLst>
   <p:sldSz cx="12192000" cy="6858000"/>
   <p:notesSz cx="6858000" cy="9144000"/>
@@ -232,7 +232,7 @@
           <a:p>
             <a:fld id="{B52B40C2-3351-40A2-B46D-4B4F877A79B2}" type="datetimeFigureOut">
               <a:rPr lang="ko-KR" altLang="en-US" smtClean="0"/>
-              <a:t>2026-09-07</a:t>
+              <a:t>2026-09-08</a:t>
             </a:fld>
             <a:endParaRPr lang="ko-KR" altLang="en-US" dirty="0"/>
           </a:p>
@@ -564,7 +564,7 @@
           <a:p>
             <a:fld id="{513BC5EA-D886-4875-B891-B25A6CC49088}" type="slidenum">
               <a:rPr lang="ko-KR" altLang="en-US" smtClean="0"/>
-              <a:t>8</a:t>
+              <a:t>7</a:t>
             </a:fld>
             <a:endParaRPr lang="ko-KR" altLang="en-US" dirty="0"/>
           </a:p>
@@ -3352,7 +3352,7 @@
             <a:fld id="{2ADF637E-82D6-4563-BCF0-C9101F2B5148}" type="datetime1">
               <a:rPr lang="ko-KR" altLang="en-US" smtClean="0"/>
               <a:pPr/>
-              <a:t>2026-09-07</a:t>
+              <a:t>2026-09-08</a:t>
             </a:fld>
             <a:endParaRPr lang="ko-KR" altLang="en-US" dirty="0"/>
           </a:p>
@@ -3567,7 +3567,7 @@
           <a:p>
             <a:fld id="{C9178607-39E6-4CB2-B3CB-AB428B3B6195}" type="datetime1">
               <a:rPr lang="ko-KR" altLang="en-US" smtClean="0"/>
-              <a:t>2026-09-07</a:t>
+              <a:t>2026-09-08</a:t>
             </a:fld>
             <a:endParaRPr lang="ko-KR" altLang="en-US" dirty="0"/>
           </a:p>
@@ -3775,7 +3775,7 @@
           <a:p>
             <a:fld id="{F578A2F2-325F-46A6-8956-F2A49A35BAF8}" type="datetime1">
               <a:rPr lang="ko-KR" altLang="en-US" smtClean="0"/>
-              <a:t>2026-09-07</a:t>
+              <a:t>2026-09-08</a:t>
             </a:fld>
             <a:endParaRPr lang="ko-KR" altLang="en-US" dirty="0"/>
           </a:p>
@@ -4027,7 +4027,7 @@
             <a:fld id="{D58CD677-7AD2-4A27-94BD-C65458D22428}" type="datetime1">
               <a:rPr lang="ko-KR" altLang="en-US" smtClean="0"/>
               <a:pPr/>
-              <a:t>2026-09-07</a:t>
+              <a:t>2026-09-08</a:t>
             </a:fld>
             <a:endParaRPr lang="ko-KR" altLang="en-US" dirty="0"/>
           </a:p>
@@ -6621,7 +6621,7 @@
           <a:p>
             <a:fld id="{2BEF52EC-B397-4D0A-AE91-E0D6840C85A1}" type="datetime1">
               <a:rPr lang="ko-KR" altLang="en-US" smtClean="0"/>
-              <a:t>2026-09-07</a:t>
+              <a:t>2026-09-08</a:t>
             </a:fld>
             <a:endParaRPr lang="ko-KR" altLang="en-US" dirty="0"/>
           </a:p>
@@ -6902,7 +6902,7 @@
           <a:p>
             <a:fld id="{32DD6007-6A42-4C9B-B218-6A32B3A38C67}" type="datetime1">
               <a:rPr lang="ko-KR" altLang="en-US" smtClean="0"/>
-              <a:t>2026-09-07</a:t>
+              <a:t>2026-09-08</a:t>
             </a:fld>
             <a:endParaRPr lang="ko-KR" altLang="en-US" dirty="0"/>
           </a:p>
@@ -7314,7 +7314,7 @@
           <a:p>
             <a:fld id="{F66658DF-8B5F-4351-A42C-BF3495DE7ABE}" type="datetime1">
               <a:rPr lang="ko-KR" altLang="en-US" smtClean="0"/>
-              <a:t>2026-09-07</a:t>
+              <a:t>2026-09-08</a:t>
             </a:fld>
             <a:endParaRPr lang="ko-KR" altLang="en-US" dirty="0"/>
           </a:p>
@@ -7455,7 +7455,7 @@
           <a:p>
             <a:fld id="{74359C48-8150-4FAB-8BEF-6AD61CFC9BBE}" type="datetime1">
               <a:rPr lang="ko-KR" altLang="en-US" smtClean="0"/>
-              <a:t>2026-09-07</a:t>
+              <a:t>2026-09-08</a:t>
             </a:fld>
             <a:endParaRPr lang="ko-KR" altLang="en-US" dirty="0"/>
           </a:p>
@@ -7568,7 +7568,7 @@
           <a:p>
             <a:fld id="{2D41DBCF-1091-470D-AC72-5CF3D00280AC}" type="datetime1">
               <a:rPr lang="ko-KR" altLang="en-US" smtClean="0"/>
-              <a:t>2026-09-07</a:t>
+              <a:t>2026-09-08</a:t>
             </a:fld>
             <a:endParaRPr lang="ko-KR" altLang="en-US" dirty="0"/>
           </a:p>
@@ -7879,7 +7879,7 @@
           <a:p>
             <a:fld id="{4024AE7C-57FB-4DBB-B90C-59145D637BF6}" type="datetime1">
               <a:rPr lang="ko-KR" altLang="en-US" smtClean="0"/>
-              <a:t>2026-09-07</a:t>
+              <a:t>2026-09-08</a:t>
             </a:fld>
             <a:endParaRPr lang="ko-KR" altLang="en-US" dirty="0"/>
           </a:p>
@@ -8167,7 +8167,7 @@
           <a:p>
             <a:fld id="{17D92253-43A0-46E3-918E-3929407A8C01}" type="datetime1">
               <a:rPr lang="ko-KR" altLang="en-US" smtClean="0"/>
-              <a:t>2026-09-07</a:t>
+              <a:t>2026-09-08</a:t>
             </a:fld>
             <a:endParaRPr lang="ko-KR" altLang="en-US" dirty="0"/>
           </a:p>
@@ -9228,7 +9228,7 @@
           <a:p>
             <a:fld id="{75D61A29-800E-482A-B0FD-5A04401ECD92}" type="datetime1">
               <a:rPr lang="ko-KR" altLang="en-US" smtClean="0"/>
-              <a:t>2026-09-07</a:t>
+              <a:t>2026-09-08</a:t>
             </a:fld>
             <a:endParaRPr lang="ko-KR" altLang="en-US" dirty="0"/>
           </a:p>
@@ -9784,13 +9784,13 @@
           <a:p>
             <a:r>
               <a:rPr dirty="0"/>
-              <a:t>증명: 균일성 가정 하의 사전영상 저항성</a:t>
+              <a:t>일반 공격 비용: 고전 vs 양자</a:t>
             </a:r>
           </a:p>
         </p:txBody>
       </p:sp>
-      <mc:AlternateContent xmlns:mc="http://schemas.openxmlformats.org/markup-compatibility/2006">
-        <mc:Choice xmlns:a14="http://schemas.microsoft.com/office/drawing/2010/main" Requires="a14">
+      <mc:AlternateContent xmlns:mc="http://schemas.openxmlformats.org/markup-compatibility/2006" xmlns:a14="http://schemas.microsoft.com/office/drawing/2010/main">
+        <mc:Choice Requires="a14">
           <p:sp>
             <p:nvSpPr>
               <p:cNvPr id="3" name="Content Placeholder 2"/>
@@ -9815,424 +9815,52 @@
               <a:p>
                 <a:r>
                   <a:rPr sz="1800" dirty="0"/>
-                  <a:t>CR ⇒ PR과 2PR ⇒ PR은 "균일한 해시 함수"라는 가정 하에 같은 기법으로 성립한다</a:t>
+                  <a:t>일반 공격(generic attack)은 해시 함수의 특정 설계를 이용하지 않는다</a:t>
                 </a:r>
               </a:p>
               <a:p>
                 <a:r>
                   <a:rPr sz="1800" dirty="0"/>
-                  <a:t>기법: 무작위 입력을 해싱해 얻은 목표값을 상대 게임의 오라클에 넘긴다</a:t>
-                </a:r>
-              </a:p>
-              <a:p>
-                <a:r>
-                  <a:rPr sz="1800" dirty="0"/>
-                  <a:t>CR ⇒ PR: </a:t>
+                  <a:t>안전하려면 출력 길이가 최소 256비트여야 한다 — 충돌 저항성엔 </a:t>
                 </a:r>
                 <a14:m>
                   <m:oMath xmlns:m="http://schemas.openxmlformats.org/officeDocument/2006/math">
-                    <m:sSub>
-                      <m:sSubPr>
+                    <m:sSup>
+                      <m:sSupPr>
                         <m:ctrlPr>
                           <a:rPr lang="en-US" i="1">
                             <a:latin typeface="Cambria Math" panose="02040503050406030204" pitchFamily="18" charset="0"/>
                           </a:rPr>
                         </m:ctrlPr>
-                      </m:sSubPr>
+                      </m:sSupPr>
                       <m:e>
                         <m:r>
                           <a:rPr lang="en-US" i="1">
                             <a:latin typeface="Cambria Math"/>
                           </a:rPr>
-                          <m:t>𝑥</m:t>
+                          <m:t>2</m:t>
                         </m:r>
                       </m:e>
-                      <m:sub>
+                      <m:sup>
                         <m:r>
                           <a:rPr lang="en-US" i="1">
                             <a:latin typeface="Cambria Math"/>
                           </a:rPr>
-                          <m:t>1</m:t>
+                          <m:t>128</m:t>
                         </m:r>
-                      </m:sub>
-                    </m:sSub>
+                      </m:sup>
+                    </m:sSup>
                   </m:oMath>
                 </a14:m>
                 <a:r>
                   <a:rPr sz="1800" dirty="0"/>
-                  <a:t>을 무작위로 뽑아 </a:t>
-                </a:r>
-                <a14:m>
-                  <m:oMath xmlns:m="http://schemas.openxmlformats.org/officeDocument/2006/math">
-                    <m:r>
-                      <a:rPr lang="en-US" i="1">
-                        <a:latin typeface="Cambria Math"/>
-                      </a:rPr>
-                      <m:t>𝑦</m:t>
-                    </m:r>
-                    <m:r>
-                      <a:rPr lang="en-US" i="1">
-                        <a:latin typeface="Cambria Math"/>
-                      </a:rPr>
-                      <m:t>=</m:t>
-                    </m:r>
-                    <m:r>
-                      <a:rPr lang="en-US" i="1">
-                        <a:latin typeface="Cambria Math"/>
-                      </a:rPr>
-                      <m:t>𝐻</m:t>
-                    </m:r>
-                    <m:r>
-                      <a:rPr lang="en-US" i="1">
-                        <a:latin typeface="Cambria Math"/>
-                      </a:rPr>
-                      <m:t>(</m:t>
-                    </m:r>
-                    <m:sSub>
-                      <m:sSubPr>
-                        <m:ctrlPr>
-                          <a:rPr lang="en-US" i="1">
-                            <a:latin typeface="Cambria Math" panose="02040503050406030204" pitchFamily="18" charset="0"/>
-                          </a:rPr>
-                        </m:ctrlPr>
-                      </m:sSubPr>
-                      <m:e>
-                        <m:r>
-                          <a:rPr lang="en-US" i="1">
-                            <a:latin typeface="Cambria Math"/>
-                          </a:rPr>
-                          <m:t>𝑥</m:t>
-                        </m:r>
-                      </m:e>
-                      <m:sub>
-                        <m:r>
-                          <a:rPr lang="en-US" i="1">
-                            <a:latin typeface="Cambria Math"/>
-                          </a:rPr>
-                          <m:t>1</m:t>
-                        </m:r>
-                      </m:sub>
-                    </m:sSub>
-                    <m:r>
-                      <a:rPr lang="en-US" i="1">
-                        <a:latin typeface="Cambria Math"/>
-                      </a:rPr>
-                      <m:t>)</m:t>
-                    </m:r>
-                  </m:oMath>
-                </a14:m>
-                <a:r>
-                  <a:rPr sz="1800" dirty="0"/>
-                  <a:t> 계산 → PR 깨는 A로 </a:t>
-                </a:r>
-                <a14:m>
-                  <m:oMath xmlns:m="http://schemas.openxmlformats.org/officeDocument/2006/math">
-                    <m:r>
-                      <a:rPr lang="en-US" i="1">
-                        <a:latin typeface="Cambria Math"/>
-                      </a:rPr>
-                      <m:t>𝐴</m:t>
-                    </m:r>
-                    <m:r>
-                      <a:rPr lang="en-US" i="1">
-                        <a:latin typeface="Cambria Math"/>
-                      </a:rPr>
-                      <m:t>(</m:t>
-                    </m:r>
-                    <m:r>
-                      <a:rPr lang="en-US" i="1">
-                        <a:latin typeface="Cambria Math"/>
-                      </a:rPr>
-                      <m:t>𝑦</m:t>
-                    </m:r>
-                    <m:r>
-                      <a:rPr lang="en-US" i="1">
-                        <a:latin typeface="Cambria Math"/>
-                      </a:rPr>
-                      <m:t>)=</m:t>
-                    </m:r>
-                    <m:sSub>
-                      <m:sSubPr>
-                        <m:ctrlPr>
-                          <a:rPr lang="en-US" i="1">
-                            <a:latin typeface="Cambria Math" panose="02040503050406030204" pitchFamily="18" charset="0"/>
-                          </a:rPr>
-                        </m:ctrlPr>
-                      </m:sSubPr>
-                      <m:e>
-                        <m:r>
-                          <a:rPr lang="en-US" i="1">
-                            <a:latin typeface="Cambria Math"/>
-                          </a:rPr>
-                          <m:t>𝑥</m:t>
-                        </m:r>
-                      </m:e>
-                      <m:sub>
-                        <m:r>
-                          <a:rPr lang="en-US" i="1">
-                            <a:latin typeface="Cambria Math"/>
-                          </a:rPr>
-                          <m:t>2</m:t>
-                        </m:r>
-                      </m:sub>
-                    </m:sSub>
-                  </m:oMath>
-                </a14:m>
-                <a:r>
-                  <a:rPr sz="1800" dirty="0"/>
-                  <a:t> 획득 → </a:t>
-                </a:r>
-                <a14:m>
-                  <m:oMath xmlns:m="http://schemas.openxmlformats.org/officeDocument/2006/math">
-                    <m:r>
-                      <a:rPr lang="en-US" i="1">
-                        <a:latin typeface="Cambria Math"/>
-                      </a:rPr>
-                      <m:t>(</m:t>
-                    </m:r>
-                    <m:sSub>
-                      <m:sSubPr>
-                        <m:ctrlPr>
-                          <a:rPr lang="en-US" i="1">
-                            <a:latin typeface="Cambria Math" panose="02040503050406030204" pitchFamily="18" charset="0"/>
-                          </a:rPr>
-                        </m:ctrlPr>
-                      </m:sSubPr>
-                      <m:e>
-                        <m:r>
-                          <a:rPr lang="en-US" i="1">
-                            <a:latin typeface="Cambria Math"/>
-                          </a:rPr>
-                          <m:t>𝑥</m:t>
-                        </m:r>
-                      </m:e>
-                      <m:sub>
-                        <m:r>
-                          <a:rPr lang="en-US" i="1">
-                            <a:latin typeface="Cambria Math"/>
-                          </a:rPr>
-                          <m:t>1</m:t>
-                        </m:r>
-                      </m:sub>
-                    </m:sSub>
-                    <m:r>
-                      <a:rPr lang="en-US" i="1">
-                        <a:latin typeface="Cambria Math"/>
-                      </a:rPr>
-                      <m:t>,</m:t>
-                    </m:r>
-                    <m:sSub>
-                      <m:sSubPr>
-                        <m:ctrlPr>
-                          <a:rPr lang="en-US" i="1">
-                            <a:latin typeface="Cambria Math" panose="02040503050406030204" pitchFamily="18" charset="0"/>
-                          </a:rPr>
-                        </m:ctrlPr>
-                      </m:sSubPr>
-                      <m:e>
-                        <m:r>
-                          <a:rPr lang="en-US" i="1">
-                            <a:latin typeface="Cambria Math"/>
-                          </a:rPr>
-                          <m:t>𝑥</m:t>
-                        </m:r>
-                      </m:e>
-                      <m:sub>
-                        <m:r>
-                          <a:rPr lang="en-US" i="1">
-                            <a:latin typeface="Cambria Math"/>
-                          </a:rPr>
-                          <m:t>2</m:t>
-                        </m:r>
-                      </m:sub>
-                    </m:sSub>
-                    <m:r>
-                      <a:rPr lang="en-US" i="1">
-                        <a:latin typeface="Cambria Math"/>
-                      </a:rPr>
-                      <m:t>)</m:t>
-                    </m:r>
-                  </m:oMath>
-                </a14:m>
-                <a:r>
-                  <a:rPr sz="1800" dirty="0"/>
-                  <a:t>가 충돌 후보</a:t>
-                </a:r>
-              </a:p>
-              <a:p>
-                <a:r>
-                  <a:rPr sz="1800" dirty="0"/>
-                  <a:t>균일성 가정 하에 </a:t>
-                </a:r>
-                <a14:m>
-                  <m:oMath xmlns:m="http://schemas.openxmlformats.org/officeDocument/2006/math">
-                    <m:r>
-                      <a:rPr lang="en-US" i="1">
-                        <a:latin typeface="Cambria Math"/>
-                      </a:rPr>
-                      <m:t>𝑦</m:t>
-                    </m:r>
-                  </m:oMath>
-                </a14:m>
-                <a:r>
-                  <a:rPr sz="1800" dirty="0"/>
-                  <a:t>의 사전영상이 다수 존재 → A가 정확히 </a:t>
-                </a:r>
-                <a14:m>
-                  <m:oMath xmlns:m="http://schemas.openxmlformats.org/officeDocument/2006/math">
-                    <m:sSub>
-                      <m:sSubPr>
-                        <m:ctrlPr>
-                          <a:rPr lang="en-US" i="1">
-                            <a:latin typeface="Cambria Math" panose="02040503050406030204" pitchFamily="18" charset="0"/>
-                          </a:rPr>
-                        </m:ctrlPr>
-                      </m:sSubPr>
-                      <m:e>
-                        <m:r>
-                          <a:rPr lang="en-US" i="1">
-                            <a:latin typeface="Cambria Math"/>
-                          </a:rPr>
-                          <m:t>𝑥</m:t>
-                        </m:r>
-                      </m:e>
-                      <m:sub>
-                        <m:r>
-                          <a:rPr lang="en-US" i="1">
-                            <a:latin typeface="Cambria Math"/>
-                          </a:rPr>
-                          <m:t>1</m:t>
-                        </m:r>
-                      </m:sub>
-                    </m:sSub>
-                  </m:oMath>
-                </a14:m>
-                <a:r>
-                  <a:rPr sz="1800" dirty="0"/>
-                  <a:t>을 돌려줄 확률은 무시 가능 → </a:t>
-                </a:r>
-                <a14:m>
-                  <m:oMath xmlns:m="http://schemas.openxmlformats.org/officeDocument/2006/math">
-                    <m:sSub>
-                      <m:sSubPr>
-                        <m:ctrlPr>
-                          <a:rPr lang="en-US" i="1">
-                            <a:latin typeface="Cambria Math" panose="02040503050406030204" pitchFamily="18" charset="0"/>
-                          </a:rPr>
-                        </m:ctrlPr>
-                      </m:sSubPr>
-                      <m:e>
-                        <m:r>
-                          <a:rPr lang="en-US" i="1">
-                            <a:latin typeface="Cambria Math"/>
-                          </a:rPr>
-                          <m:t>𝑥</m:t>
-                        </m:r>
-                      </m:e>
-                      <m:sub>
-                        <m:r>
-                          <a:rPr lang="en-US" i="1">
-                            <a:latin typeface="Cambria Math"/>
-                          </a:rPr>
-                          <m:t>2</m:t>
-                        </m:r>
-                      </m:sub>
-                    </m:sSub>
-                    <m:r>
-                      <a:rPr lang="en-US" i="1">
-                        <a:latin typeface="Cambria Math"/>
-                      </a:rPr>
-                      <m:t>≠</m:t>
-                    </m:r>
-                    <m:sSub>
-                      <m:sSubPr>
-                        <m:ctrlPr>
-                          <a:rPr lang="en-US" i="1">
-                            <a:latin typeface="Cambria Math" panose="02040503050406030204" pitchFamily="18" charset="0"/>
-                          </a:rPr>
-                        </m:ctrlPr>
-                      </m:sSubPr>
-                      <m:e>
-                        <m:r>
-                          <a:rPr lang="en-US" i="1">
-                            <a:latin typeface="Cambria Math"/>
-                          </a:rPr>
-                          <m:t>𝑥</m:t>
-                        </m:r>
-                      </m:e>
-                      <m:sub>
-                        <m:r>
-                          <a:rPr lang="en-US" i="1">
-                            <a:latin typeface="Cambria Math"/>
-                          </a:rPr>
-                          <m:t>1</m:t>
-                        </m:r>
-                      </m:sub>
-                    </m:sSub>
-                  </m:oMath>
-                </a14:m>
-                <a:r>
-                  <a:rPr sz="1800" dirty="0"/>
-                  <a:t>일 확률이 높다</a:t>
-                </a:r>
-              </a:p>
-              <a:p>
-                <a:r>
-                  <a:rPr sz="1800" dirty="0"/>
-                  <a:t>균일성이 없으면 깨진다: </a:t>
-                </a:r>
-                <a14:m>
-                  <m:oMath xmlns:m="http://schemas.openxmlformats.org/officeDocument/2006/math">
-                    <m:r>
-                      <a:rPr lang="en-US" i="1">
-                        <a:latin typeface="Cambria Math"/>
-                      </a:rPr>
-                      <m:t>𝑦</m:t>
-                    </m:r>
-                  </m:oMath>
-                </a14:m>
-                <a:r>
-                  <a:rPr sz="1800" dirty="0"/>
-                  <a:t>의 사전영상이 유일하면 A는 항상 </a:t>
-                </a:r>
-                <a14:m>
-                  <m:oMath xmlns:m="http://schemas.openxmlformats.org/officeDocument/2006/math">
-                    <m:sSub>
-                      <m:sSubPr>
-                        <m:ctrlPr>
-                          <a:rPr lang="en-US" i="1">
-                            <a:latin typeface="Cambria Math" panose="02040503050406030204" pitchFamily="18" charset="0"/>
-                          </a:rPr>
-                        </m:ctrlPr>
-                      </m:sSubPr>
-                      <m:e>
-                        <m:r>
-                          <a:rPr lang="en-US" i="1">
-                            <a:latin typeface="Cambria Math"/>
-                          </a:rPr>
-                          <m:t>𝑥</m:t>
-                        </m:r>
-                      </m:e>
-                      <m:sub>
-                        <m:r>
-                          <a:rPr lang="en-US" i="1">
-                            <a:latin typeface="Cambria Math"/>
-                          </a:rPr>
-                          <m:t>1</m:t>
-                        </m:r>
-                      </m:sub>
-                    </m:sSub>
-                  </m:oMath>
-                </a14:m>
-                <a:r>
-                  <a:rPr sz="1800" dirty="0"/>
-                  <a:t> 자체만 반환할 수 있다</a:t>
+                  <a:t> 연산이 필요</a:t>
                 </a:r>
               </a:p>
             </p:txBody>
           </p:sp>
         </mc:Choice>
-        <mc:Fallback>
+        <mc:Fallback xmlns="">
           <p:sp>
             <p:nvSpPr>
               <p:cNvPr id="3" name="Content Placeholder 2"/>
@@ -10284,181 +9912,6 @@
             <a:fld id="{4438A2D4-3867-488E-A04E-7BFFCAED45A6}" type="slidenum">
               <a:rPr lang="ko-KR" altLang="en-US" smtClean="0"/>
               <a:t>10</a:t>
-            </a:fld>
-            <a:endParaRPr lang="ko-KR" altLang="en-US" dirty="0"/>
-          </a:p>
-        </p:txBody>
-      </p:sp>
-    </p:spTree>
-  </p:cSld>
-  <p:clrMapOvr>
-    <a:masterClrMapping/>
-  </p:clrMapOvr>
-</p:sld>
-</file>
-
-<file path=ppt/slides/slide11.xml><?xml version="1.0" encoding="utf-8"?>
-<p:sld xmlns:a="http://schemas.openxmlformats.org/drawingml/2006/main" xmlns:r="http://schemas.openxmlformats.org/officeDocument/2006/relationships" xmlns:p="http://schemas.openxmlformats.org/presentationml/2006/main">
-  <p:cSld>
-    <p:spTree>
-      <p:nvGrpSpPr>
-        <p:cNvPr id="1" name=""/>
-        <p:cNvGrpSpPr/>
-        <p:nvPr/>
-      </p:nvGrpSpPr>
-      <p:grpSpPr>
-        <a:xfrm>
-          <a:off x="0" y="0"/>
-          <a:ext cx="0" cy="0"/>
-          <a:chOff x="0" y="0"/>
-          <a:chExt cx="0" cy="0"/>
-        </a:xfrm>
-      </p:grpSpPr>
-      <p:sp>
-        <p:nvSpPr>
-          <p:cNvPr id="2" name="Title 1"/>
-          <p:cNvSpPr>
-            <a:spLocks noGrp="1"/>
-          </p:cNvSpPr>
-          <p:nvPr>
-            <p:ph type="title"/>
-          </p:nvPr>
-        </p:nvSpPr>
-        <p:spPr/>
-        <p:txBody>
-          <a:bodyPr/>
-          <a:lstStyle/>
-          <a:p>
-            <a:r>
-              <a:rPr dirty="0"/>
-              <a:t>일반 공격 비용: 고전 vs 양자</a:t>
-            </a:r>
-          </a:p>
-        </p:txBody>
-      </p:sp>
-      <mc:AlternateContent xmlns:mc="http://schemas.openxmlformats.org/markup-compatibility/2006">
-        <mc:Choice xmlns:a14="http://schemas.microsoft.com/office/drawing/2010/main" Requires="a14">
-          <p:sp>
-            <p:nvSpPr>
-              <p:cNvPr id="3" name="Content Placeholder 2"/>
-              <p:cNvSpPr>
-                <a:spLocks noGrp="1"/>
-              </p:cNvSpPr>
-              <p:nvPr>
-                <p:ph idx="1"/>
-              </p:nvPr>
-            </p:nvSpPr>
-            <p:spPr/>
-            <p:txBody>
-              <a:bodyPr/>
-              <a:lstStyle>
-                <a:lvl1pPr>
-                  <a:defRPr sz="1800"/>
-                </a:lvl1pPr>
-                <a:lvl2pPr>
-                  <a:defRPr sz="1800"/>
-                </a:lvl2pPr>
-              </a:lstStyle>
-              <a:p>
-                <a:r>
-                  <a:rPr sz="1800" dirty="0"/>
-                  <a:t>일반 공격(generic attack)은 해시 함수의 특정 설계를 이용하지 않는다</a:t>
-                </a:r>
-              </a:p>
-              <a:p>
-                <a:r>
-                  <a:rPr sz="1800" dirty="0"/>
-                  <a:t>안전하려면 출력 길이가 최소 256비트여야 한다 — 충돌 저항성엔 </a:t>
-                </a:r>
-                <a14:m>
-                  <m:oMath xmlns:m="http://schemas.openxmlformats.org/officeDocument/2006/math">
-                    <m:sSup>
-                      <m:sSupPr>
-                        <m:ctrlPr>
-                          <a:rPr lang="en-US" i="1">
-                            <a:latin typeface="Cambria Math" panose="02040503050406030204" pitchFamily="18" charset="0"/>
-                          </a:rPr>
-                        </m:ctrlPr>
-                      </m:sSupPr>
-                      <m:e>
-                        <m:r>
-                          <a:rPr lang="en-US" i="1">
-                            <a:latin typeface="Cambria Math"/>
-                          </a:rPr>
-                          <m:t>2</m:t>
-                        </m:r>
-                      </m:e>
-                      <m:sup>
-                        <m:r>
-                          <a:rPr lang="en-US" i="1">
-                            <a:latin typeface="Cambria Math"/>
-                          </a:rPr>
-                          <m:t>128</m:t>
-                        </m:r>
-                      </m:sup>
-                    </m:sSup>
-                  </m:oMath>
-                </a14:m>
-                <a:r>
-                  <a:rPr sz="1800" dirty="0"/>
-                  <a:t> 연산이 필요</a:t>
-                </a:r>
-              </a:p>
-            </p:txBody>
-          </p:sp>
-        </mc:Choice>
-        <mc:Fallback>
-          <p:sp>
-            <p:nvSpPr>
-              <p:cNvPr id="3" name="Content Placeholder 2"/>
-              <p:cNvSpPr>
-                <a:spLocks noGrp="1" noRot="1" noChangeAspect="1" noMove="1" noResize="1" noEditPoints="1" noAdjustHandles="1" noChangeArrowheads="1" noChangeShapeType="1" noTextEdit="1"/>
-              </p:cNvSpPr>
-              <p:nvPr>
-                <p:ph idx="1"/>
-              </p:nvPr>
-            </p:nvSpPr>
-            <p:spPr>
-              <a:blipFill>
-                <a:blip r:embed="rId2"/>
-                <a:stretch>
-                  <a:fillRect l="-232"/>
-                </a:stretch>
-              </a:blipFill>
-            </p:spPr>
-            <p:txBody>
-              <a:bodyPr/>
-              <a:lstStyle/>
-              <a:p>
-                <a:r>
-                  <a:rPr lang="ko-KR" altLang="en-US">
-                    <a:noFill/>
-                  </a:rPr>
-                  <a:t> </a:t>
-                </a:r>
-              </a:p>
-            </p:txBody>
-          </p:sp>
-        </mc:Fallback>
-      </mc:AlternateContent>
-      <p:sp>
-        <p:nvSpPr>
-          <p:cNvPr id="4" name="슬라이드 번호 개체 틀"/>
-          <p:cNvSpPr>
-            <a:spLocks noGrp="1"/>
-          </p:cNvSpPr>
-          <p:nvPr>
-            <p:ph type="sldNum" sz="quarter" idx="12"/>
-          </p:nvPr>
-        </p:nvSpPr>
-        <p:spPr/>
-        <p:txBody>
-          <a:bodyPr/>
-          <a:lstStyle/>
-          <a:p>
-            <a:fld id="{4438A2D4-3867-488E-A04E-7BFFCAED45A6}" type="slidenum">
-              <a:rPr lang="ko-KR" altLang="en-US" smtClean="0"/>
-              <a:t>11</a:t>
             </a:fld>
             <a:endParaRPr lang="ko-KR" altLang="en-US" dirty="0"/>
           </a:p>
@@ -11233,7 +10686,7 @@
 </p:sld>
 </file>
 
-<file path=ppt/slides/slide12.xml><?xml version="1.0" encoding="utf-8"?>
+<file path=ppt/slides/slide11.xml><?xml version="1.0" encoding="utf-8"?>
 <p:sld xmlns:a="http://schemas.openxmlformats.org/drawingml/2006/main" xmlns:r="http://schemas.openxmlformats.org/officeDocument/2006/relationships" xmlns:p="http://schemas.openxmlformats.org/presentationml/2006/main">
   <p:cSld>
     <p:spTree>
@@ -11317,7 +10770,7 @@
           <a:p>
             <a:fld id="{4438A2D4-3867-488E-A04E-7BFFCAED45A6}" type="slidenum">
               <a:rPr lang="ko-KR" altLang="en-US" smtClean="0"/>
-              <a:t>12</a:t>
+              <a:t>11</a:t>
             </a:fld>
             <a:endParaRPr lang="ko-KR" altLang="en-US" dirty="0"/>
           </a:p>
@@ -12273,7 +11726,7 @@
 </p:sld>
 </file>
 
-<file path=ppt/slides/slide13.xml><?xml version="1.0" encoding="utf-8"?>
+<file path=ppt/slides/slide12.xml><?xml version="1.0" encoding="utf-8"?>
 <p:sld xmlns:a="http://schemas.openxmlformats.org/drawingml/2006/main" xmlns:r="http://schemas.openxmlformats.org/officeDocument/2006/relationships" xmlns:p="http://schemas.openxmlformats.org/presentationml/2006/main">
   <p:cSld>
     <p:spTree>
@@ -12351,7 +11804,7 @@
           <a:p>
             <a:fld id="{4438A2D4-3867-488E-A04E-7BFFCAED45A6}" type="slidenum">
               <a:rPr lang="ko-KR" altLang="en-US" smtClean="0"/>
-              <a:t>13</a:t>
+              <a:t>12</a:t>
             </a:fld>
             <a:endParaRPr lang="ko-KR" altLang="en-US" dirty="0"/>
           </a:p>
@@ -12365,7 +11818,7 @@
 </p:sld>
 </file>
 
-<file path=ppt/slides/slide14.xml><?xml version="1.0" encoding="utf-8"?>
+<file path=ppt/slides/slide13.xml><?xml version="1.0" encoding="utf-8"?>
 <p:sld xmlns:a="http://schemas.openxmlformats.org/drawingml/2006/main" xmlns:r="http://schemas.openxmlformats.org/officeDocument/2006/relationships" xmlns:p="http://schemas.openxmlformats.org/presentationml/2006/main">
   <p:cSld>
     <p:spTree>
@@ -12461,7 +11914,7 @@
           <a:p>
             <a:fld id="{4438A2D4-3867-488E-A04E-7BFFCAED45A6}" type="slidenum">
               <a:rPr lang="ko-KR" altLang="en-US" smtClean="0"/>
-              <a:t>14</a:t>
+              <a:t>13</a:t>
             </a:fld>
             <a:endParaRPr lang="ko-KR" altLang="en-US" dirty="0"/>
           </a:p>
@@ -12475,7 +11928,7 @@
 </p:sld>
 </file>
 
-<file path=ppt/slides/slide15.xml><?xml version="1.0" encoding="utf-8"?>
+<file path=ppt/slides/slide14.xml><?xml version="1.0" encoding="utf-8"?>
 <p:sld xmlns:a="http://schemas.openxmlformats.org/drawingml/2006/main" xmlns:r="http://schemas.openxmlformats.org/officeDocument/2006/relationships" xmlns:p="http://schemas.openxmlformats.org/presentationml/2006/main">
   <p:cSld>
     <p:spTree>
@@ -12514,8 +11967,8 @@
           </a:p>
         </p:txBody>
       </p:sp>
-      <mc:AlternateContent xmlns:mc="http://schemas.openxmlformats.org/markup-compatibility/2006">
-        <mc:Choice xmlns:a14="http://schemas.microsoft.com/office/drawing/2010/main" Requires="a14">
+      <mc:AlternateContent xmlns:mc="http://schemas.openxmlformats.org/markup-compatibility/2006" xmlns:a14="http://schemas.microsoft.com/office/drawing/2010/main">
+        <mc:Choice Requires="a14">
           <p:sp>
             <p:nvSpPr>
               <p:cNvPr id="3" name="Content Placeholder 2"/>
@@ -13214,7 +12667,7 @@
             </p:txBody>
           </p:sp>
         </mc:Choice>
-        <mc:Fallback>
+        <mc:Fallback xmlns="">
           <p:sp>
             <p:nvSpPr>
               <p:cNvPr id="3" name="Content Placeholder 2"/>
@@ -13269,7 +12722,7 @@
           <a:p>
             <a:fld id="{4438A2D4-3867-488E-A04E-7BFFCAED45A6}" type="slidenum">
               <a:rPr lang="ko-KR" altLang="en-US" smtClean="0"/>
-              <a:t>15</a:t>
+              <a:t>14</a:t>
             </a:fld>
             <a:endParaRPr lang="ko-KR" altLang="en-US" dirty="0"/>
           </a:p>
@@ -13313,7 +12766,7 @@
 </p:sld>
 </file>
 
-<file path=ppt/slides/slide17.xml><?xml version="1.0" encoding="utf-8"?>
+<file path=ppt/slides/slide15.xml><?xml version="1.0" encoding="utf-8"?>
 <p:sld xmlns:a="http://schemas.openxmlformats.org/drawingml/2006/main" xmlns:r="http://schemas.openxmlformats.org/officeDocument/2006/relationships" xmlns:p="http://schemas.openxmlformats.org/presentationml/2006/main">
   <p:cSld>
     <p:spTree>
@@ -13352,8 +12805,8 @@
           </a:p>
         </p:txBody>
       </p:sp>
-      <mc:AlternateContent xmlns:mc="http://schemas.openxmlformats.org/markup-compatibility/2006">
-        <mc:Choice xmlns:a14="http://schemas.microsoft.com/office/drawing/2010/main" Requires="a14">
+      <mc:AlternateContent xmlns:mc="http://schemas.openxmlformats.org/markup-compatibility/2006" xmlns:a14="http://schemas.microsoft.com/office/drawing/2010/main">
+        <mc:Choice Requires="a14">
           <p:sp>
             <p:nvSpPr>
               <p:cNvPr id="3" name="Content Placeholder 2"/>
@@ -13728,7 +13181,7 @@
             </p:txBody>
           </p:sp>
         </mc:Choice>
-        <mc:Fallback>
+        <mc:Fallback xmlns="">
           <p:sp>
             <p:nvSpPr>
               <p:cNvPr id="3" name="Content Placeholder 2"/>
@@ -13783,7 +13236,7 @@
           <a:p>
             <a:fld id="{4438A2D4-3867-488E-A04E-7BFFCAED45A6}" type="slidenum">
               <a:rPr lang="ko-KR" altLang="en-US" smtClean="0"/>
-              <a:t>17</a:t>
+              <a:t>15</a:t>
             </a:fld>
             <a:endParaRPr lang="ko-KR" altLang="en-US" dirty="0"/>
           </a:p>
@@ -13827,7 +13280,7 @@
 </p:sld>
 </file>
 
-<file path=ppt/slides/slide18.xml><?xml version="1.0" encoding="utf-8"?>
+<file path=ppt/slides/slide16.xml><?xml version="1.0" encoding="utf-8"?>
 <p:sld xmlns:a="http://schemas.openxmlformats.org/drawingml/2006/main" xmlns:r="http://schemas.openxmlformats.org/officeDocument/2006/relationships" xmlns:p="http://schemas.openxmlformats.org/presentationml/2006/main">
   <p:cSld>
     <p:spTree>
@@ -13866,8 +13319,8 @@
           </a:p>
         </p:txBody>
       </p:sp>
-      <mc:AlternateContent xmlns:mc="http://schemas.openxmlformats.org/markup-compatibility/2006">
-        <mc:Choice xmlns:a14="http://schemas.microsoft.com/office/drawing/2010/main" Requires="a14">
+      <mc:AlternateContent xmlns:mc="http://schemas.openxmlformats.org/markup-compatibility/2006" xmlns:a14="http://schemas.microsoft.com/office/drawing/2010/main">
+        <mc:Choice Requires="a14">
           <p:sp>
             <p:nvSpPr>
               <p:cNvPr id="3" name="Content Placeholder 2"/>
@@ -14403,7 +13856,7 @@
             </p:txBody>
           </p:sp>
         </mc:Choice>
-        <mc:Fallback>
+        <mc:Fallback xmlns="">
           <p:sp>
             <p:nvSpPr>
               <p:cNvPr id="3" name="Content Placeholder 2"/>
@@ -14458,7 +13911,7 @@
           <a:p>
             <a:fld id="{4438A2D4-3867-488E-A04E-7BFFCAED45A6}" type="slidenum">
               <a:rPr lang="ko-KR" altLang="en-US" smtClean="0"/>
-              <a:t>18</a:t>
+              <a:t>16</a:t>
             </a:fld>
             <a:endParaRPr lang="ko-KR" altLang="en-US" dirty="0"/>
           </a:p>
@@ -14494,6 +13947,1237 @@
           </a:prstGeom>
         </p:spPr>
       </p:pic>
+    </p:spTree>
+  </p:cSld>
+  <p:clrMapOvr>
+    <a:masterClrMapping/>
+  </p:clrMapOvr>
+</p:sld>
+</file>
+
+<file path=ppt/slides/slide17.xml><?xml version="1.0" encoding="utf-8"?>
+<p:sld xmlns:a="http://schemas.openxmlformats.org/drawingml/2006/main" xmlns:r="http://schemas.openxmlformats.org/officeDocument/2006/relationships" xmlns:p="http://schemas.openxmlformats.org/presentationml/2006/main">
+  <p:cSld>
+    <p:spTree>
+      <p:nvGrpSpPr>
+        <p:cNvPr id="1" name=""/>
+        <p:cNvGrpSpPr/>
+        <p:nvPr/>
+      </p:nvGrpSpPr>
+      <p:grpSpPr>
+        <a:xfrm>
+          <a:off x="0" y="0"/>
+          <a:ext cx="0" cy="0"/>
+          <a:chOff x="0" y="0"/>
+          <a:chExt cx="0" cy="0"/>
+        </a:xfrm>
+      </p:grpSpPr>
+      <p:sp>
+        <p:nvSpPr>
+          <p:cNvPr id="2" name="Title 1"/>
+          <p:cNvSpPr>
+            <a:spLocks noGrp="1"/>
+          </p:cNvSpPr>
+          <p:nvPr>
+            <p:ph type="title"/>
+          </p:nvPr>
+        </p:nvSpPr>
+        <p:spPr/>
+        <p:txBody>
+          <a:bodyPr/>
+          <a:lstStyle/>
+          <a:p>
+            <a:r>
+              <a:rPr dirty="0"/>
+              <a:t>노출 문제와 OTS 안전성 정의</a:t>
+            </a:r>
+          </a:p>
+        </p:txBody>
+      </p:sp>
+      <p:sp>
+        <p:nvSpPr>
+          <p:cNvPr id="3" name="Content Placeholder 2"/>
+          <p:cNvSpPr>
+            <a:spLocks noGrp="1"/>
+          </p:cNvSpPr>
+          <p:nvPr>
+            <p:ph idx="1"/>
+          </p:nvPr>
+        </p:nvSpPr>
+        <p:spPr>
+          <a:xfrm>
+            <a:off x="838138" y="1294790"/>
+            <a:ext cx="10515599" cy="4700016"/>
+          </a:xfrm>
+        </p:spPr>
+        <p:txBody>
+          <a:bodyPr/>
+          <a:lstStyle/>
+          <a:p>
+            <a:r>
+              <a:rPr sz="1800" dirty="0"/>
+              <a:t>서명 하나 (M, S)는 개인키 X의 절반 성분을 노출한다</a:t>
+            </a:r>
+          </a:p>
+          <a:p>
+            <a:r>
+              <a:rPr sz="1800" dirty="0"/>
+              <a:t>두 번째 서명은 추가로 1/4을 노출 </a:t>
+            </a:r>
+            <a:br>
+              <a:rPr lang="en-US" sz="1800" dirty="0"/>
+            </a:br>
+            <a:r>
+              <a:rPr sz="1800" dirty="0"/>
+              <a:t>— 같은 개인키로 메시지 하나만 서명해야 함 → 일회성 서명 스킴(</a:t>
+            </a:r>
+            <a:r>
+              <a:rPr lang="en-US" sz="1800" dirty="0"/>
+              <a:t>one-time</a:t>
+            </a:r>
+            <a:r>
+              <a:rPr lang="ko-KR" altLang="en-US" sz="1800" dirty="0"/>
+              <a:t> </a:t>
+            </a:r>
+            <a:r>
+              <a:rPr lang="en-US" altLang="ko-KR" sz="1800" dirty="0"/>
+              <a:t>signature</a:t>
+            </a:r>
+            <a:r>
+              <a:rPr lang="ko-KR" altLang="en-US" sz="1800" dirty="0"/>
+              <a:t> </a:t>
+            </a:r>
+            <a:r>
+              <a:rPr lang="en-US" altLang="ko-KR" sz="1800" dirty="0"/>
+              <a:t>scheme</a:t>
+            </a:r>
+            <a:r>
+              <a:rPr lang="en-US" sz="1800" dirty="0"/>
+              <a:t>, </a:t>
+            </a:r>
+            <a:r>
+              <a:rPr sz="1800" dirty="0"/>
+              <a:t>OTS)</a:t>
+            </a:r>
+          </a:p>
+          <a:p>
+            <a:r>
+              <a:rPr sz="1800" dirty="0"/>
+              <a:t>OTS 안전성: 계산량 제한된 공격자가 서명 오라클에 단 한 번만 질의할 수 있는 조건에서 존재적 위조 불가능</a:t>
+            </a:r>
+          </a:p>
+        </p:txBody>
+      </p:sp>
+      <p:sp>
+        <p:nvSpPr>
+          <p:cNvPr id="4" name="슬라이드 번호 개체 틀"/>
+          <p:cNvSpPr>
+            <a:spLocks noGrp="1"/>
+          </p:cNvSpPr>
+          <p:nvPr>
+            <p:ph type="sldNum" sz="quarter" idx="12"/>
+          </p:nvPr>
+        </p:nvSpPr>
+        <p:spPr/>
+        <p:txBody>
+          <a:bodyPr/>
+          <a:lstStyle/>
+          <a:p>
+            <a:fld id="{4438A2D4-3867-488E-A04E-7BFFCAED45A6}" type="slidenum">
+              <a:rPr lang="ko-KR" altLang="en-US" smtClean="0"/>
+              <a:t>17</a:t>
+            </a:fld>
+            <a:endParaRPr lang="ko-KR" altLang="en-US" dirty="0"/>
+          </a:p>
+        </p:txBody>
+      </p:sp>
+      <p:pic>
+        <p:nvPicPr>
+          <p:cNvPr id="7" name="그림 6">
+            <a:extLst>
+              <a:ext uri="{FF2B5EF4-FFF2-40B4-BE49-F238E27FC236}">
+                <a16:creationId xmlns:a16="http://schemas.microsoft.com/office/drawing/2014/main" id="{9E63E38A-36C4-FAC5-D41E-2045D69C3EBA}"/>
+              </a:ext>
+            </a:extLst>
+          </p:cNvPr>
+          <p:cNvPicPr>
+            <a:picLocks noChangeAspect="1"/>
+          </p:cNvPicPr>
+          <p:nvPr/>
+        </p:nvPicPr>
+        <p:blipFill>
+          <a:blip r:embed="rId2"/>
+          <a:stretch>
+            <a:fillRect/>
+          </a:stretch>
+        </p:blipFill>
+        <p:spPr>
+          <a:xfrm>
+            <a:off x="4038358" y="3644798"/>
+            <a:ext cx="4115157" cy="2651990"/>
+          </a:xfrm>
+          <a:prstGeom prst="rect">
+            <a:avLst/>
+          </a:prstGeom>
+        </p:spPr>
+      </p:pic>
+    </p:spTree>
+  </p:cSld>
+  <p:clrMapOvr>
+    <a:masterClrMapping/>
+  </p:clrMapOvr>
+</p:sld>
+</file>
+
+<file path=ppt/slides/slide18.xml><?xml version="1.0" encoding="utf-8"?>
+<p:sld xmlns:a="http://schemas.openxmlformats.org/drawingml/2006/main" xmlns:r="http://schemas.openxmlformats.org/officeDocument/2006/relationships" xmlns:p="http://schemas.openxmlformats.org/presentationml/2006/main">
+  <p:cSld>
+    <p:spTree>
+      <p:nvGrpSpPr>
+        <p:cNvPr id="1" name=""/>
+        <p:cNvGrpSpPr/>
+        <p:nvPr/>
+      </p:nvGrpSpPr>
+      <p:grpSpPr>
+        <a:xfrm>
+          <a:off x="0" y="0"/>
+          <a:ext cx="0" cy="0"/>
+          <a:chOff x="0" y="0"/>
+          <a:chExt cx="0" cy="0"/>
+        </a:xfrm>
+      </p:grpSpPr>
+      <p:sp>
+        <p:nvSpPr>
+          <p:cNvPr id="2" name="Title 1"/>
+          <p:cNvSpPr>
+            <a:spLocks noGrp="1"/>
+          </p:cNvSpPr>
+          <p:nvPr>
+            <p:ph type="title"/>
+          </p:nvPr>
+        </p:nvSpPr>
+        <p:spPr/>
+        <p:txBody>
+          <a:bodyPr/>
+          <a:lstStyle/>
+          <a:p>
+            <a:r>
+              <a:rPr dirty="0"/>
+              <a:t>안전성 증명</a:t>
+            </a:r>
+          </a:p>
+        </p:txBody>
+      </p:sp>
+      <mc:AlternateContent xmlns:mc="http://schemas.openxmlformats.org/markup-compatibility/2006" xmlns:a14="http://schemas.microsoft.com/office/drawing/2010/main">
+        <mc:Choice Requires="a14">
+          <p:sp>
+            <p:nvSpPr>
+              <p:cNvPr id="3" name="Content Placeholder 2"/>
+              <p:cNvSpPr>
+                <a:spLocks noGrp="1"/>
+              </p:cNvSpPr>
+              <p:nvPr>
+                <p:ph idx="1"/>
+              </p:nvPr>
+            </p:nvSpPr>
+            <p:spPr/>
+            <p:txBody>
+              <a:bodyPr/>
+              <a:lstStyle>
+                <a:lvl1pPr>
+                  <a:defRPr sz="1800"/>
+                </a:lvl1pPr>
+                <a:lvl2pPr>
+                  <a:defRPr sz="1800"/>
+                </a:lvl2pPr>
+              </a:lstStyle>
+              <a:p>
+                <a:r>
+                  <a:rPr sz="1800" dirty="0"/>
+                  <a:t>Claim: H가 충돌 저항이고 G가 사전영상 저항이면 Lamport 스킴은 안전한 OTS다</a:t>
+                </a:r>
+              </a:p>
+              <a:p>
+                <a:r>
+                  <a:rPr sz="1800" dirty="0"/>
+                  <a:t>공격자가 </a:t>
+                </a:r>
+                <a14:m>
+                  <m:oMath xmlns:m="http://schemas.openxmlformats.org/officeDocument/2006/math">
+                    <m:sSub>
+                      <m:sSubPr>
+                        <m:ctrlPr>
+                          <a:rPr lang="en-US" i="1">
+                            <a:latin typeface="Cambria Math" panose="02040503050406030204" pitchFamily="18" charset="0"/>
+                          </a:rPr>
+                        </m:ctrlPr>
+                      </m:sSubPr>
+                      <m:e>
+                        <m:r>
+                          <a:rPr lang="en-US" i="1">
+                            <a:latin typeface="Cambria Math"/>
+                          </a:rPr>
+                          <m:t>𝑀</m:t>
+                        </m:r>
+                      </m:e>
+                      <m:sub>
+                        <m:r>
+                          <a:rPr lang="en-US" i="1">
+                            <a:latin typeface="Cambria Math"/>
+                          </a:rPr>
+                          <m:t>1</m:t>
+                        </m:r>
+                      </m:sub>
+                    </m:sSub>
+                  </m:oMath>
+                </a14:m>
+                <a:r>
+                  <a:rPr sz="1800" dirty="0"/>
+                  <a:t>의 서명 </a:t>
+                </a:r>
+                <a14:m>
+                  <m:oMath xmlns:m="http://schemas.openxmlformats.org/officeDocument/2006/math">
+                    <m:r>
+                      <a:rPr lang="en-US" i="1">
+                        <a:latin typeface="Cambria Math"/>
+                      </a:rPr>
+                      <m:t>(</m:t>
+                    </m:r>
+                    <m:sSub>
+                      <m:sSubPr>
+                        <m:ctrlPr>
+                          <a:rPr lang="en-US" i="1">
+                            <a:latin typeface="Cambria Math" panose="02040503050406030204" pitchFamily="18" charset="0"/>
+                          </a:rPr>
+                        </m:ctrlPr>
+                      </m:sSubPr>
+                      <m:e>
+                        <m:r>
+                          <a:rPr lang="en-US" i="1">
+                            <a:latin typeface="Cambria Math"/>
+                          </a:rPr>
+                          <m:t>𝑀</m:t>
+                        </m:r>
+                      </m:e>
+                      <m:sub>
+                        <m:r>
+                          <a:rPr lang="en-US" i="1">
+                            <a:latin typeface="Cambria Math"/>
+                          </a:rPr>
+                          <m:t>1</m:t>
+                        </m:r>
+                      </m:sub>
+                    </m:sSub>
+                    <m:r>
+                      <a:rPr lang="en-US" i="1">
+                        <a:latin typeface="Cambria Math"/>
+                      </a:rPr>
+                      <m:t>,</m:t>
+                    </m:r>
+                    <m:r>
+                      <a:rPr lang="en-US" i="1">
+                        <a:latin typeface="Cambria Math"/>
+                      </a:rPr>
+                      <m:t>𝑆</m:t>
+                    </m:r>
+                    <m:r>
+                      <a:rPr lang="en-US" i="1">
+                        <a:latin typeface="Cambria Math"/>
+                      </a:rPr>
+                      <m:t>)</m:t>
+                    </m:r>
+                  </m:oMath>
+                </a14:m>
+                <a:r>
+                  <a:rPr sz="1800" dirty="0"/>
+                  <a:t>을 획득한 뒤 </a:t>
+                </a:r>
+                <a14:m>
+                  <m:oMath xmlns:m="http://schemas.openxmlformats.org/officeDocument/2006/math">
+                    <m:sSub>
+                      <m:sSubPr>
+                        <m:ctrlPr>
+                          <a:rPr lang="en-US" i="1">
+                            <a:latin typeface="Cambria Math" panose="02040503050406030204" pitchFamily="18" charset="0"/>
+                          </a:rPr>
+                        </m:ctrlPr>
+                      </m:sSubPr>
+                      <m:e>
+                        <m:r>
+                          <a:rPr lang="en-US" i="1">
+                            <a:latin typeface="Cambria Math"/>
+                          </a:rPr>
+                          <m:t>𝑀</m:t>
+                        </m:r>
+                      </m:e>
+                      <m:sub>
+                        <m:r>
+                          <a:rPr lang="en-US" i="1">
+                            <a:latin typeface="Cambria Math"/>
+                          </a:rPr>
+                          <m:t>2</m:t>
+                        </m:r>
+                      </m:sub>
+                    </m:sSub>
+                    <m:r>
+                      <a:rPr lang="en-US" i="1">
+                        <a:latin typeface="Cambria Math"/>
+                      </a:rPr>
+                      <m:t>≠</m:t>
+                    </m:r>
+                    <m:sSub>
+                      <m:sSubPr>
+                        <m:ctrlPr>
+                          <a:rPr lang="en-US" i="1">
+                            <a:latin typeface="Cambria Math" panose="02040503050406030204" pitchFamily="18" charset="0"/>
+                          </a:rPr>
+                        </m:ctrlPr>
+                      </m:sSubPr>
+                      <m:e>
+                        <m:r>
+                          <a:rPr lang="en-US" i="1">
+                            <a:latin typeface="Cambria Math"/>
+                          </a:rPr>
+                          <m:t>𝑀</m:t>
+                        </m:r>
+                      </m:e>
+                      <m:sub>
+                        <m:r>
+                          <a:rPr lang="en-US" i="1">
+                            <a:latin typeface="Cambria Math"/>
+                          </a:rPr>
+                          <m:t>1</m:t>
+                        </m:r>
+                      </m:sub>
+                    </m:sSub>
+                  </m:oMath>
+                </a14:m>
+                <a:r>
+                  <a:rPr sz="1800" dirty="0"/>
+                  <a:t>에 대한 위조를 시도한다고 하자</a:t>
+                </a:r>
+              </a:p>
+              <a:p>
+                <a:r>
+                  <a:rPr sz="1800" dirty="0"/>
+                  <a:t>H의 충돌 저항성에 의해 </a:t>
+                </a:r>
+                <a14:m>
+                  <m:oMath xmlns:m="http://schemas.openxmlformats.org/officeDocument/2006/math">
+                    <m:r>
+                      <a:rPr lang="en-US" i="1">
+                        <a:latin typeface="Cambria Math"/>
+                      </a:rPr>
+                      <m:t>𝐻</m:t>
+                    </m:r>
+                    <m:r>
+                      <a:rPr lang="en-US" i="1">
+                        <a:latin typeface="Cambria Math"/>
+                      </a:rPr>
+                      <m:t>(</m:t>
+                    </m:r>
+                    <m:sSub>
+                      <m:sSubPr>
+                        <m:ctrlPr>
+                          <a:rPr lang="en-US" i="1">
+                            <a:latin typeface="Cambria Math" panose="02040503050406030204" pitchFamily="18" charset="0"/>
+                          </a:rPr>
+                        </m:ctrlPr>
+                      </m:sSubPr>
+                      <m:e>
+                        <m:r>
+                          <a:rPr lang="en-US" i="1">
+                            <a:latin typeface="Cambria Math"/>
+                          </a:rPr>
+                          <m:t>𝑀</m:t>
+                        </m:r>
+                      </m:e>
+                      <m:sub>
+                        <m:r>
+                          <a:rPr lang="en-US" i="1">
+                            <a:latin typeface="Cambria Math"/>
+                          </a:rPr>
+                          <m:t>1</m:t>
+                        </m:r>
+                      </m:sub>
+                    </m:sSub>
+                    <m:r>
+                      <a:rPr lang="en-US" i="1">
+                        <a:latin typeface="Cambria Math"/>
+                      </a:rPr>
+                      <m:t>)≠</m:t>
+                    </m:r>
+                    <m:r>
+                      <a:rPr lang="en-US" i="1">
+                        <a:latin typeface="Cambria Math"/>
+                      </a:rPr>
+                      <m:t>𝐻</m:t>
+                    </m:r>
+                    <m:r>
+                      <a:rPr lang="en-US" i="1">
+                        <a:latin typeface="Cambria Math"/>
+                      </a:rPr>
+                      <m:t>(</m:t>
+                    </m:r>
+                    <m:sSub>
+                      <m:sSubPr>
+                        <m:ctrlPr>
+                          <a:rPr lang="en-US" i="1">
+                            <a:latin typeface="Cambria Math" panose="02040503050406030204" pitchFamily="18" charset="0"/>
+                          </a:rPr>
+                        </m:ctrlPr>
+                      </m:sSubPr>
+                      <m:e>
+                        <m:r>
+                          <a:rPr lang="en-US" i="1">
+                            <a:latin typeface="Cambria Math"/>
+                          </a:rPr>
+                          <m:t>𝑀</m:t>
+                        </m:r>
+                      </m:e>
+                      <m:sub>
+                        <m:r>
+                          <a:rPr lang="en-US" i="1">
+                            <a:latin typeface="Cambria Math"/>
+                          </a:rPr>
+                          <m:t>2</m:t>
+                        </m:r>
+                      </m:sub>
+                    </m:sSub>
+                    <m:r>
+                      <a:rPr lang="en-US" i="1">
+                        <a:latin typeface="Cambria Math"/>
+                      </a:rPr>
+                      <m:t>)</m:t>
+                    </m:r>
+                  </m:oMath>
+                </a14:m>
+                <a:r>
+                  <a:rPr sz="1800" dirty="0"/>
+                  <a:t> → 최소 한 위치 j에서 비트가 다르다</a:t>
+                </a:r>
+              </a:p>
+              <a:p>
+                <a:r>
+                  <a:rPr sz="1800" dirty="0"/>
+                  <a:t>일반성 있게 </a:t>
+                </a:r>
+                <a14:m>
+                  <m:oMath xmlns:m="http://schemas.openxmlformats.org/officeDocument/2006/math">
+                    <m:sSub>
+                      <m:sSubPr>
+                        <m:ctrlPr>
+                          <a:rPr lang="en-US" i="1">
+                            <a:latin typeface="Cambria Math" panose="02040503050406030204" pitchFamily="18" charset="0"/>
+                          </a:rPr>
+                        </m:ctrlPr>
+                      </m:sSubPr>
+                      <m:e>
+                        <m:r>
+                          <a:rPr lang="en-US" i="1">
+                            <a:latin typeface="Cambria Math"/>
+                          </a:rPr>
+                          <m:t>h</m:t>
+                        </m:r>
+                      </m:e>
+                      <m:sub>
+                        <m:r>
+                          <a:rPr lang="en-US" i="1">
+                            <a:latin typeface="Cambria Math"/>
+                          </a:rPr>
+                          <m:t>𝑗</m:t>
+                        </m:r>
+                      </m:sub>
+                    </m:sSub>
+                    <m:r>
+                      <a:rPr lang="en-US" i="1">
+                        <a:latin typeface="Cambria Math"/>
+                      </a:rPr>
+                      <m:t>=0,</m:t>
+                    </m:r>
+                    <m:r>
+                      <m:rPr>
+                        <m:nor/>
+                      </m:rPr>
+                      <a:rPr lang="en-US" i="0">
+                        <a:latin typeface="Cambria Math"/>
+                      </a:rPr>
+                      <m:t> </m:t>
+                    </m:r>
+                    <m:sSubSup>
+                      <m:sSubSupPr>
+                        <m:ctrlPr>
+                          <a:rPr lang="en-US" i="1">
+                            <a:latin typeface="Cambria Math" panose="02040503050406030204" pitchFamily="18" charset="0"/>
+                          </a:rPr>
+                        </m:ctrlPr>
+                      </m:sSubSupPr>
+                      <m:e>
+                        <m:r>
+                          <a:rPr lang="en-US" i="1">
+                            <a:latin typeface="Cambria Math"/>
+                          </a:rPr>
+                          <m:t>h</m:t>
+                        </m:r>
+                      </m:e>
+                      <m:sub>
+                        <m:r>
+                          <a:rPr lang="en-US" i="1">
+                            <a:latin typeface="Cambria Math"/>
+                          </a:rPr>
+                          <m:t>𝑗</m:t>
+                        </m:r>
+                      </m:sub>
+                      <m:sup>
+                        <m:r>
+                          <a:rPr lang="en-US" i="1">
+                            <a:latin typeface="Cambria Math"/>
+                          </a:rPr>
+                          <m:t>′</m:t>
+                        </m:r>
+                      </m:sup>
+                    </m:sSubSup>
+                    <m:r>
+                      <a:rPr lang="en-US" i="1">
+                        <a:latin typeface="Cambria Math"/>
+                      </a:rPr>
+                      <m:t>=1</m:t>
+                    </m:r>
+                  </m:oMath>
+                </a14:m>
+                <a:r>
+                  <a:rPr sz="1800" dirty="0"/>
+                  <a:t>이라 하면, </a:t>
+                </a:r>
+                <a14:m>
+                  <m:oMath xmlns:m="http://schemas.openxmlformats.org/officeDocument/2006/math">
+                    <m:sSub>
+                      <m:sSubPr>
+                        <m:ctrlPr>
+                          <a:rPr lang="en-US" i="1">
+                            <a:latin typeface="Cambria Math" panose="02040503050406030204" pitchFamily="18" charset="0"/>
+                          </a:rPr>
+                        </m:ctrlPr>
+                      </m:sSubPr>
+                      <m:e>
+                        <m:r>
+                          <a:rPr lang="en-US" i="1">
+                            <a:latin typeface="Cambria Math"/>
+                          </a:rPr>
+                          <m:t>𝑀</m:t>
+                        </m:r>
+                      </m:e>
+                      <m:sub>
+                        <m:r>
+                          <a:rPr lang="en-US" i="1">
+                            <a:latin typeface="Cambria Math"/>
+                          </a:rPr>
+                          <m:t>1</m:t>
+                        </m:r>
+                      </m:sub>
+                    </m:sSub>
+                  </m:oMath>
+                </a14:m>
+                <a:r>
+                  <a:rPr sz="1800" dirty="0"/>
+                  <a:t>의 서명은 </a:t>
+                </a:r>
+                <a14:m>
+                  <m:oMath xmlns:m="http://schemas.openxmlformats.org/officeDocument/2006/math">
+                    <m:sSub>
+                      <m:sSubPr>
+                        <m:ctrlPr>
+                          <a:rPr lang="en-US" i="1">
+                            <a:latin typeface="Cambria Math" panose="02040503050406030204" pitchFamily="18" charset="0"/>
+                          </a:rPr>
+                        </m:ctrlPr>
+                      </m:sSubPr>
+                      <m:e>
+                        <m:r>
+                          <a:rPr lang="en-US" i="1">
+                            <a:latin typeface="Cambria Math"/>
+                          </a:rPr>
+                          <m:t>𝑥</m:t>
+                        </m:r>
+                      </m:e>
+                      <m:sub>
+                        <m:r>
+                          <a:rPr lang="en-US" i="1">
+                            <a:latin typeface="Cambria Math"/>
+                          </a:rPr>
+                          <m:t>0,</m:t>
+                        </m:r>
+                        <m:r>
+                          <a:rPr lang="en-US" i="1">
+                            <a:latin typeface="Cambria Math"/>
+                          </a:rPr>
+                          <m:t>𝑗</m:t>
+                        </m:r>
+                      </m:sub>
+                    </m:sSub>
+                  </m:oMath>
+                </a14:m>
+                <a:r>
+                  <a:rPr sz="1800" dirty="0"/>
+                  <a:t>, </a:t>
+                </a:r>
+                <a14:m>
+                  <m:oMath xmlns:m="http://schemas.openxmlformats.org/officeDocument/2006/math">
+                    <m:sSub>
+                      <m:sSubPr>
+                        <m:ctrlPr>
+                          <a:rPr lang="en-US" i="1">
+                            <a:latin typeface="Cambria Math" panose="02040503050406030204" pitchFamily="18" charset="0"/>
+                          </a:rPr>
+                        </m:ctrlPr>
+                      </m:sSubPr>
+                      <m:e>
+                        <m:r>
+                          <a:rPr lang="en-US" i="1">
+                            <a:latin typeface="Cambria Math"/>
+                          </a:rPr>
+                          <m:t>𝑀</m:t>
+                        </m:r>
+                      </m:e>
+                      <m:sub>
+                        <m:r>
+                          <a:rPr lang="en-US" i="1">
+                            <a:latin typeface="Cambria Math"/>
+                          </a:rPr>
+                          <m:t>2</m:t>
+                        </m:r>
+                      </m:sub>
+                    </m:sSub>
+                  </m:oMath>
+                </a14:m>
+                <a:r>
+                  <a:rPr sz="1800" dirty="0"/>
+                  <a:t>의 위조엔 </a:t>
+                </a:r>
+                <a14:m>
+                  <m:oMath xmlns:m="http://schemas.openxmlformats.org/officeDocument/2006/math">
+                    <m:sSub>
+                      <m:sSubPr>
+                        <m:ctrlPr>
+                          <a:rPr lang="en-US" i="1">
+                            <a:latin typeface="Cambria Math" panose="02040503050406030204" pitchFamily="18" charset="0"/>
+                          </a:rPr>
+                        </m:ctrlPr>
+                      </m:sSubPr>
+                      <m:e>
+                        <m:r>
+                          <a:rPr lang="en-US" i="1">
+                            <a:latin typeface="Cambria Math"/>
+                          </a:rPr>
+                          <m:t>𝑥</m:t>
+                        </m:r>
+                      </m:e>
+                      <m:sub>
+                        <m:r>
+                          <a:rPr lang="en-US" i="1">
+                            <a:latin typeface="Cambria Math"/>
+                          </a:rPr>
+                          <m:t>1,</m:t>
+                        </m:r>
+                        <m:r>
+                          <a:rPr lang="en-US" i="1">
+                            <a:latin typeface="Cambria Math"/>
+                          </a:rPr>
+                          <m:t>𝑗</m:t>
+                        </m:r>
+                      </m:sub>
+                    </m:sSub>
+                  </m:oMath>
+                </a14:m>
+                <a:r>
+                  <a:rPr sz="1800" dirty="0"/>
+                  <a:t>가 필요하다</a:t>
+                </a:r>
+              </a:p>
+              <a:p>
+                <a14:m>
+                  <m:oMath xmlns:m="http://schemas.openxmlformats.org/officeDocument/2006/math">
+                    <m:sSub>
+                      <m:sSubPr>
+                        <m:ctrlPr>
+                          <a:rPr lang="en-US" i="1">
+                            <a:latin typeface="Cambria Math" panose="02040503050406030204" pitchFamily="18" charset="0"/>
+                          </a:rPr>
+                        </m:ctrlPr>
+                      </m:sSubPr>
+                      <m:e>
+                        <m:r>
+                          <a:rPr lang="en-US" i="1">
+                            <a:latin typeface="Cambria Math"/>
+                          </a:rPr>
+                          <m:t>𝑥</m:t>
+                        </m:r>
+                      </m:e>
+                      <m:sub>
+                        <m:r>
+                          <a:rPr lang="en-US" i="1">
+                            <a:latin typeface="Cambria Math"/>
+                          </a:rPr>
+                          <m:t>1,</m:t>
+                        </m:r>
+                        <m:r>
+                          <a:rPr lang="en-US" i="1">
+                            <a:latin typeface="Cambria Math"/>
+                          </a:rPr>
+                          <m:t>𝑗</m:t>
+                        </m:r>
+                      </m:sub>
+                    </m:sSub>
+                  </m:oMath>
+                </a14:m>
+                <a:r>
+                  <a:rPr sz="1800" dirty="0"/>
+                  <a:t>는 공개키 </a:t>
+                </a:r>
+                <a14:m>
+                  <m:oMath xmlns:m="http://schemas.openxmlformats.org/officeDocument/2006/math">
+                    <m:sSub>
+                      <m:sSubPr>
+                        <m:ctrlPr>
+                          <a:rPr lang="en-US" i="1">
+                            <a:latin typeface="Cambria Math" panose="02040503050406030204" pitchFamily="18" charset="0"/>
+                          </a:rPr>
+                        </m:ctrlPr>
+                      </m:sSubPr>
+                      <m:e>
+                        <m:r>
+                          <a:rPr lang="en-US" i="1">
+                            <a:latin typeface="Cambria Math"/>
+                          </a:rPr>
+                          <m:t>𝑦</m:t>
+                        </m:r>
+                      </m:e>
+                      <m:sub>
+                        <m:r>
+                          <a:rPr lang="en-US" i="1">
+                            <a:latin typeface="Cambria Math"/>
+                          </a:rPr>
+                          <m:t>1,</m:t>
+                        </m:r>
+                        <m:r>
+                          <a:rPr lang="en-US" i="1">
+                            <a:latin typeface="Cambria Math"/>
+                          </a:rPr>
+                          <m:t>𝑗</m:t>
+                        </m:r>
+                      </m:sub>
+                    </m:sSub>
+                  </m:oMath>
+                </a14:m>
+                <a:r>
+                  <a:rPr sz="1800" dirty="0"/>
+                  <a:t>의 사전영상 → G의 사전영상 저항성과 모순</a:t>
+                </a:r>
+              </a:p>
+            </p:txBody>
+          </p:sp>
+        </mc:Choice>
+        <mc:Fallback xmlns="">
+          <p:sp>
+            <p:nvSpPr>
+              <p:cNvPr id="3" name="Content Placeholder 2"/>
+              <p:cNvSpPr>
+                <a:spLocks noGrp="1" noRot="1" noChangeAspect="1" noMove="1" noResize="1" noEditPoints="1" noAdjustHandles="1" noChangeArrowheads="1" noChangeShapeType="1" noTextEdit="1"/>
+              </p:cNvSpPr>
+              <p:nvPr>
+                <p:ph idx="1"/>
+              </p:nvPr>
+            </p:nvSpPr>
+            <p:spPr>
+              <a:blipFill>
+                <a:blip r:embed="rId2"/>
+                <a:stretch>
+                  <a:fillRect l="-290"/>
+                </a:stretch>
+              </a:blipFill>
+            </p:spPr>
+            <p:txBody>
+              <a:bodyPr/>
+              <a:lstStyle/>
+              <a:p>
+                <a:r>
+                  <a:rPr lang="ko-KR" altLang="en-US">
+                    <a:noFill/>
+                  </a:rPr>
+                  <a:t> </a:t>
+                </a:r>
+              </a:p>
+            </p:txBody>
+          </p:sp>
+        </mc:Fallback>
+      </mc:AlternateContent>
+      <p:sp>
+        <p:nvSpPr>
+          <p:cNvPr id="4" name="슬라이드 번호 개체 틀"/>
+          <p:cNvSpPr>
+            <a:spLocks noGrp="1"/>
+          </p:cNvSpPr>
+          <p:nvPr>
+            <p:ph type="sldNum" sz="quarter" idx="12"/>
+          </p:nvPr>
+        </p:nvSpPr>
+        <p:spPr/>
+        <p:txBody>
+          <a:bodyPr/>
+          <a:lstStyle/>
+          <a:p>
+            <a:fld id="{4438A2D4-3867-488E-A04E-7BFFCAED45A6}" type="slidenum">
+              <a:rPr lang="ko-KR" altLang="en-US" smtClean="0"/>
+              <a:t>18</a:t>
+            </a:fld>
+            <a:endParaRPr lang="ko-KR" altLang="en-US" dirty="0"/>
+          </a:p>
+        </p:txBody>
+      </p:sp>
+    </p:spTree>
+  </p:cSld>
+  <p:clrMapOvr>
+    <a:masterClrMapping/>
+  </p:clrMapOvr>
+</p:sld>
+</file>
+
+<file path=ppt/slides/slide19.xml><?xml version="1.0" encoding="utf-8"?>
+<p:sld xmlns:a="http://schemas.openxmlformats.org/drawingml/2006/main" xmlns:r="http://schemas.openxmlformats.org/officeDocument/2006/relationships" xmlns:p="http://schemas.openxmlformats.org/presentationml/2006/main">
+  <p:cSld>
+    <p:spTree>
+      <p:nvGrpSpPr>
+        <p:cNvPr id="1" name=""/>
+        <p:cNvGrpSpPr/>
+        <p:nvPr/>
+      </p:nvGrpSpPr>
+      <p:grpSpPr>
+        <a:xfrm>
+          <a:off x="0" y="0"/>
+          <a:ext cx="0" cy="0"/>
+          <a:chOff x="0" y="0"/>
+          <a:chExt cx="0" cy="0"/>
+        </a:xfrm>
+      </p:grpSpPr>
+      <p:sp>
+        <p:nvSpPr>
+          <p:cNvPr id="2" name="Title 1"/>
+          <p:cNvSpPr>
+            <a:spLocks noGrp="1"/>
+          </p:cNvSpPr>
+          <p:nvPr>
+            <p:ph type="title"/>
+          </p:nvPr>
+        </p:nvSpPr>
+        <p:spPr/>
+        <p:txBody>
+          <a:bodyPr/>
+          <a:lstStyle/>
+          <a:p>
+            <a:r>
+              <a:rPr dirty="0"/>
+              <a:t>정량적 보안 수준</a:t>
+            </a:r>
+          </a:p>
+        </p:txBody>
+      </p:sp>
+      <mc:AlternateContent xmlns:mc="http://schemas.openxmlformats.org/markup-compatibility/2006" xmlns:a14="http://schemas.microsoft.com/office/drawing/2010/main">
+        <mc:Choice Requires="a14">
+          <p:sp>
+            <p:nvSpPr>
+              <p:cNvPr id="3" name="Content Placeholder 2"/>
+              <p:cNvSpPr>
+                <a:spLocks noGrp="1"/>
+              </p:cNvSpPr>
+              <p:nvPr>
+                <p:ph idx="1"/>
+              </p:nvPr>
+            </p:nvSpPr>
+            <p:spPr/>
+            <p:txBody>
+              <a:bodyPr/>
+              <a:lstStyle>
+                <a:lvl1pPr>
+                  <a:defRPr sz="1800"/>
+                </a:lvl1pPr>
+                <a:lvl2pPr>
+                  <a:defRPr sz="1800"/>
+                </a:lvl2pPr>
+              </a:lstStyle>
+              <a:p>
+                <a:r>
+                  <a:rPr sz="1800" dirty="0"/>
+                  <a:t>앞서 본 일반 공격 비용을 그대로 적용하면 Lamport OTS는 양자 기준 </a:t>
+                </a:r>
+                <a14:m>
+                  <m:oMath xmlns:m="http://schemas.openxmlformats.org/officeDocument/2006/math">
+                    <m:f>
+                      <m:fPr>
+                        <m:type m:val="lin"/>
+                        <m:ctrlPr>
+                          <a:rPr lang="en-US" i="1">
+                            <a:latin typeface="Cambria Math" panose="02040503050406030204" pitchFamily="18" charset="0"/>
+                          </a:rPr>
+                        </m:ctrlPr>
+                      </m:fPr>
+                      <m:num>
+                        <m:r>
+                          <a:rPr lang="en-US" i="1">
+                            <a:latin typeface="Cambria Math"/>
+                          </a:rPr>
+                          <m:t>𝑛</m:t>
+                        </m:r>
+                      </m:num>
+                      <m:den>
+                        <m:r>
+                          <a:rPr lang="en-US" i="1">
+                            <a:latin typeface="Cambria Math"/>
+                          </a:rPr>
+                          <m:t>2</m:t>
+                        </m:r>
+                      </m:den>
+                    </m:f>
+                  </m:oMath>
+                </a14:m>
+                <a:r>
+                  <a:rPr sz="1800" dirty="0"/>
+                  <a:t>비트 보안 수준을 갖는다</a:t>
+                </a:r>
+              </a:p>
+              <a:p>
+                <a:r>
+                  <a:rPr sz="1800" dirty="0"/>
+                  <a:t>G의 사전영상: Grover로 </a:t>
+                </a:r>
+                <a14:m>
+                  <m:oMath xmlns:m="http://schemas.openxmlformats.org/officeDocument/2006/math">
+                    <m:r>
+                      <a:rPr lang="en-US" i="1">
+                        <a:latin typeface="Cambria Math"/>
+                      </a:rPr>
+                      <m:t>𝑂</m:t>
+                    </m:r>
+                    <m:r>
+                      <a:rPr lang="en-US" i="1">
+                        <a:latin typeface="Cambria Math"/>
+                      </a:rPr>
+                      <m:t>(</m:t>
+                    </m:r>
+                    <m:sSup>
+                      <m:sSupPr>
+                        <m:ctrlPr>
+                          <a:rPr lang="en-US" i="1">
+                            <a:latin typeface="Cambria Math" panose="02040503050406030204" pitchFamily="18" charset="0"/>
+                          </a:rPr>
+                        </m:ctrlPr>
+                      </m:sSupPr>
+                      <m:e>
+                        <m:r>
+                          <a:rPr lang="en-US" i="1">
+                            <a:latin typeface="Cambria Math"/>
+                          </a:rPr>
+                          <m:t>2</m:t>
+                        </m:r>
+                      </m:e>
+                      <m:sup>
+                        <m:f>
+                          <m:fPr>
+                            <m:type m:val="lin"/>
+                            <m:ctrlPr>
+                              <a:rPr lang="en-US" i="1">
+                                <a:latin typeface="Cambria Math" panose="02040503050406030204" pitchFamily="18" charset="0"/>
+                              </a:rPr>
+                            </m:ctrlPr>
+                          </m:fPr>
+                          <m:num>
+                            <m:r>
+                              <a:rPr lang="en-US" i="1">
+                                <a:latin typeface="Cambria Math"/>
+                              </a:rPr>
+                              <m:t>𝑛</m:t>
+                            </m:r>
+                          </m:num>
+                          <m:den>
+                            <m:r>
+                              <a:rPr lang="en-US" i="1">
+                                <a:latin typeface="Cambria Math"/>
+                              </a:rPr>
+                              <m:t>2</m:t>
+                            </m:r>
+                          </m:den>
+                        </m:f>
+                      </m:sup>
+                    </m:sSup>
+                    <m:r>
+                      <a:rPr lang="en-US" i="1">
+                        <a:latin typeface="Cambria Math"/>
+                      </a:rPr>
+                      <m:t>)</m:t>
+                    </m:r>
+                  </m:oMath>
+                </a14:m>
+                <a:r>
+                  <a:rPr sz="1800" dirty="0"/>
+                  <a:t>, H의 충돌: van Oorschot–Wiener로 </a:t>
+                </a:r>
+                <a14:m>
+                  <m:oMath xmlns:m="http://schemas.openxmlformats.org/officeDocument/2006/math">
+                    <m:r>
+                      <a:rPr lang="en-US" i="1">
+                        <a:latin typeface="Cambria Math"/>
+                      </a:rPr>
+                      <m:t>𝑂</m:t>
+                    </m:r>
+                    <m:r>
+                      <a:rPr lang="en-US" i="1">
+                        <a:latin typeface="Cambria Math"/>
+                      </a:rPr>
+                      <m:t>(</m:t>
+                    </m:r>
+                    <m:sSup>
+                      <m:sSupPr>
+                        <m:ctrlPr>
+                          <a:rPr lang="en-US" i="1">
+                            <a:latin typeface="Cambria Math" panose="02040503050406030204" pitchFamily="18" charset="0"/>
+                          </a:rPr>
+                        </m:ctrlPr>
+                      </m:sSupPr>
+                      <m:e>
+                        <m:r>
+                          <a:rPr lang="en-US" i="1">
+                            <a:latin typeface="Cambria Math"/>
+                          </a:rPr>
+                          <m:t>2</m:t>
+                        </m:r>
+                      </m:e>
+                      <m:sup>
+                        <m:f>
+                          <m:fPr>
+                            <m:type m:val="lin"/>
+                            <m:ctrlPr>
+                              <a:rPr lang="en-US" i="1">
+                                <a:latin typeface="Cambria Math" panose="02040503050406030204" pitchFamily="18" charset="0"/>
+                              </a:rPr>
+                            </m:ctrlPr>
+                          </m:fPr>
+                          <m:num>
+                            <m:r>
+                              <a:rPr lang="en-US" i="1">
+                                <a:latin typeface="Cambria Math"/>
+                              </a:rPr>
+                              <m:t>𝑛</m:t>
+                            </m:r>
+                          </m:num>
+                          <m:den>
+                            <m:r>
+                              <a:rPr lang="en-US" i="1">
+                                <a:latin typeface="Cambria Math"/>
+                              </a:rPr>
+                              <m:t>2</m:t>
+                            </m:r>
+                          </m:den>
+                        </m:f>
+                      </m:sup>
+                    </m:sSup>
+                    <m:r>
+                      <a:rPr lang="en-US" i="1">
+                        <a:latin typeface="Cambria Math"/>
+                      </a:rPr>
+                      <m:t>)</m:t>
+                    </m:r>
+                  </m:oMath>
+                </a14:m>
+                <a:r>
+                  <a:rPr sz="1800" dirty="0"/>
+                  <a:t> — 둘 다 같은 비용으로 수렴</a:t>
+                </a:r>
+              </a:p>
+              <a:p>
+                <a:r>
+                  <a:rPr sz="1800" dirty="0"/>
+                  <a:t>고전·양자 모두에서 128비트 보안을 얻으려면 </a:t>
+                </a:r>
+                <a14:m>
+                  <m:oMath xmlns:m="http://schemas.openxmlformats.org/officeDocument/2006/math">
+                    <m:r>
+                      <a:rPr lang="en-US" i="1">
+                        <a:latin typeface="Cambria Math"/>
+                      </a:rPr>
+                      <m:t>𝑛</m:t>
+                    </m:r>
+                    <m:r>
+                      <a:rPr lang="en-US" i="1">
+                        <a:latin typeface="Cambria Math"/>
+                      </a:rPr>
+                      <m:t>=256</m:t>
+                    </m:r>
+                  </m:oMath>
+                </a14:m>
+                <a:r>
+                  <a:rPr sz="1800" dirty="0"/>
+                  <a:t>을 쓰면 된다</a:t>
+                </a:r>
+              </a:p>
+            </p:txBody>
+          </p:sp>
+        </mc:Choice>
+        <mc:Fallback xmlns="">
+          <p:sp>
+            <p:nvSpPr>
+              <p:cNvPr id="3" name="Content Placeholder 2"/>
+              <p:cNvSpPr>
+                <a:spLocks noGrp="1" noRot="1" noChangeAspect="1" noMove="1" noResize="1" noEditPoints="1" noAdjustHandles="1" noChangeArrowheads="1" noChangeShapeType="1" noTextEdit="1"/>
+              </p:cNvSpPr>
+              <p:nvPr>
+                <p:ph idx="1"/>
+              </p:nvPr>
+            </p:nvSpPr>
+            <p:spPr>
+              <a:blipFill>
+                <a:blip r:embed="rId2"/>
+                <a:stretch>
+                  <a:fillRect l="-232" t="-7902"/>
+                </a:stretch>
+              </a:blipFill>
+            </p:spPr>
+            <p:txBody>
+              <a:bodyPr/>
+              <a:lstStyle/>
+              <a:p>
+                <a:r>
+                  <a:rPr lang="ko-KR" altLang="en-US">
+                    <a:noFill/>
+                  </a:rPr>
+                  <a:t> </a:t>
+                </a:r>
+              </a:p>
+            </p:txBody>
+          </p:sp>
+        </mc:Fallback>
+      </mc:AlternateContent>
+      <p:sp>
+        <p:nvSpPr>
+          <p:cNvPr id="4" name="슬라이드 번호 개체 틀"/>
+          <p:cNvSpPr>
+            <a:spLocks noGrp="1"/>
+          </p:cNvSpPr>
+          <p:nvPr>
+            <p:ph type="sldNum" sz="quarter" idx="12"/>
+          </p:nvPr>
+        </p:nvSpPr>
+        <p:spPr/>
+        <p:txBody>
+          <a:bodyPr/>
+          <a:lstStyle/>
+          <a:p>
+            <a:fld id="{4438A2D4-3867-488E-A04E-7BFFCAED45A6}" type="slidenum">
+              <a:rPr lang="ko-KR" altLang="en-US" smtClean="0"/>
+              <a:t>19</a:t>
+            </a:fld>
+            <a:endParaRPr lang="ko-KR" altLang="en-US" dirty="0"/>
+          </a:p>
+        </p:txBody>
+      </p:sp>
     </p:spTree>
   </p:cSld>
   <p:clrMapOvr>
@@ -14648,1203 +15332,7 @@
 </p:sld>
 </file>
 
-<file path=ppt/slides/slide21.xml><?xml version="1.0" encoding="utf-8"?>
-<p:sld xmlns:a="http://schemas.openxmlformats.org/drawingml/2006/main" xmlns:r="http://schemas.openxmlformats.org/officeDocument/2006/relationships" xmlns:p="http://schemas.openxmlformats.org/presentationml/2006/main">
-  <p:cSld>
-    <p:spTree>
-      <p:nvGrpSpPr>
-        <p:cNvPr id="1" name=""/>
-        <p:cNvGrpSpPr/>
-        <p:nvPr/>
-      </p:nvGrpSpPr>
-      <p:grpSpPr>
-        <a:xfrm>
-          <a:off x="0" y="0"/>
-          <a:ext cx="0" cy="0"/>
-          <a:chOff x="0" y="0"/>
-          <a:chExt cx="0" cy="0"/>
-        </a:xfrm>
-      </p:grpSpPr>
-      <p:sp>
-        <p:nvSpPr>
-          <p:cNvPr id="2" name="Title 1"/>
-          <p:cNvSpPr>
-            <a:spLocks noGrp="1"/>
-          </p:cNvSpPr>
-          <p:nvPr>
-            <p:ph type="title"/>
-          </p:nvPr>
-        </p:nvSpPr>
-        <p:spPr/>
-        <p:txBody>
-          <a:bodyPr/>
-          <a:lstStyle/>
-          <a:p>
-            <a:r>
-              <a:rPr dirty="0"/>
-              <a:t>노출 문제와 OTS 안전성 정의</a:t>
-            </a:r>
-          </a:p>
-        </p:txBody>
-      </p:sp>
-      <p:sp>
-        <p:nvSpPr>
-          <p:cNvPr id="3" name="Content Placeholder 2"/>
-          <p:cNvSpPr>
-            <a:spLocks noGrp="1"/>
-          </p:cNvSpPr>
-          <p:nvPr>
-            <p:ph idx="1"/>
-          </p:nvPr>
-        </p:nvSpPr>
-        <p:spPr>
-          <a:xfrm>
-            <a:off x="838138" y="1294790"/>
-            <a:ext cx="10515599" cy="4700016"/>
-          </a:xfrm>
-        </p:spPr>
-        <p:txBody>
-          <a:bodyPr/>
-          <a:lstStyle/>
-          <a:p>
-            <a:r>
-              <a:rPr sz="1800" dirty="0"/>
-              <a:t>서명 하나 (M, S)는 개인키 X의 절반 성분을 노출한다</a:t>
-            </a:r>
-          </a:p>
-          <a:p>
-            <a:r>
-              <a:rPr sz="1800" dirty="0"/>
-              <a:t>두 번째 서명은 추가로 1/4을 노출 — 같은 개인키로 메시지 하나만 서명해야 함 → 일회성 서명 스킴(OTS)</a:t>
-            </a:r>
-          </a:p>
-          <a:p>
-            <a:r>
-              <a:rPr sz="1800" dirty="0"/>
-              <a:t>OTS 안전성: 계산량 제한된 공격자가 서명 오라클에 단 한 번만 질의할 수 있는 조건에서 존재적 위조 불가능</a:t>
-            </a:r>
-          </a:p>
-        </p:txBody>
-      </p:sp>
-      <p:sp>
-        <p:nvSpPr>
-          <p:cNvPr id="4" name="슬라이드 번호 개체 틀"/>
-          <p:cNvSpPr>
-            <a:spLocks noGrp="1"/>
-          </p:cNvSpPr>
-          <p:nvPr>
-            <p:ph type="sldNum" sz="quarter" idx="12"/>
-          </p:nvPr>
-        </p:nvSpPr>
-        <p:spPr/>
-        <p:txBody>
-          <a:bodyPr/>
-          <a:lstStyle/>
-          <a:p>
-            <a:fld id="{4438A2D4-3867-488E-A04E-7BFFCAED45A6}" type="slidenum">
-              <a:rPr lang="ko-KR" altLang="en-US" smtClean="0"/>
-              <a:t>21</a:t>
-            </a:fld>
-            <a:endParaRPr lang="ko-KR" altLang="en-US" dirty="0"/>
-          </a:p>
-        </p:txBody>
-      </p:sp>
-      <p:pic>
-        <p:nvPicPr>
-          <p:cNvPr id="7" name="그림 6">
-            <a:extLst>
-              <a:ext uri="{FF2B5EF4-FFF2-40B4-BE49-F238E27FC236}">
-                <a16:creationId xmlns:a16="http://schemas.microsoft.com/office/drawing/2014/main" id="{9E63E38A-36C4-FAC5-D41E-2045D69C3EBA}"/>
-              </a:ext>
-            </a:extLst>
-          </p:cNvPr>
-          <p:cNvPicPr>
-            <a:picLocks noChangeAspect="1"/>
-          </p:cNvPicPr>
-          <p:nvPr/>
-        </p:nvPicPr>
-        <p:blipFill>
-          <a:blip r:embed="rId2"/>
-          <a:stretch>
-            <a:fillRect/>
-          </a:stretch>
-        </p:blipFill>
-        <p:spPr>
-          <a:xfrm>
-            <a:off x="4038358" y="3644798"/>
-            <a:ext cx="4115157" cy="2651990"/>
-          </a:xfrm>
-          <a:prstGeom prst="rect">
-            <a:avLst/>
-          </a:prstGeom>
-        </p:spPr>
-      </p:pic>
-    </p:spTree>
-  </p:cSld>
-  <p:clrMapOvr>
-    <a:masterClrMapping/>
-  </p:clrMapOvr>
-</p:sld>
-</file>
-
-<file path=ppt/slides/slide22.xml><?xml version="1.0" encoding="utf-8"?>
-<p:sld xmlns:a="http://schemas.openxmlformats.org/drawingml/2006/main" xmlns:r="http://schemas.openxmlformats.org/officeDocument/2006/relationships" xmlns:p="http://schemas.openxmlformats.org/presentationml/2006/main">
-  <p:cSld>
-    <p:spTree>
-      <p:nvGrpSpPr>
-        <p:cNvPr id="1" name=""/>
-        <p:cNvGrpSpPr/>
-        <p:nvPr/>
-      </p:nvGrpSpPr>
-      <p:grpSpPr>
-        <a:xfrm>
-          <a:off x="0" y="0"/>
-          <a:ext cx="0" cy="0"/>
-          <a:chOff x="0" y="0"/>
-          <a:chExt cx="0" cy="0"/>
-        </a:xfrm>
-      </p:grpSpPr>
-      <p:sp>
-        <p:nvSpPr>
-          <p:cNvPr id="2" name="Title 1"/>
-          <p:cNvSpPr>
-            <a:spLocks noGrp="1"/>
-          </p:cNvSpPr>
-          <p:nvPr>
-            <p:ph type="title"/>
-          </p:nvPr>
-        </p:nvSpPr>
-        <p:spPr/>
-        <p:txBody>
-          <a:bodyPr/>
-          <a:lstStyle/>
-          <a:p>
-            <a:r>
-              <a:rPr dirty="0"/>
-              <a:t>안전성 증명</a:t>
-            </a:r>
-          </a:p>
-        </p:txBody>
-      </p:sp>
-      <mc:AlternateContent xmlns:mc="http://schemas.openxmlformats.org/markup-compatibility/2006">
-        <mc:Choice xmlns:a14="http://schemas.microsoft.com/office/drawing/2010/main" Requires="a14">
-          <p:sp>
-            <p:nvSpPr>
-              <p:cNvPr id="3" name="Content Placeholder 2"/>
-              <p:cNvSpPr>
-                <a:spLocks noGrp="1"/>
-              </p:cNvSpPr>
-              <p:nvPr>
-                <p:ph idx="1"/>
-              </p:nvPr>
-            </p:nvSpPr>
-            <p:spPr/>
-            <p:txBody>
-              <a:bodyPr/>
-              <a:lstStyle>
-                <a:lvl1pPr>
-                  <a:defRPr sz="1800"/>
-                </a:lvl1pPr>
-                <a:lvl2pPr>
-                  <a:defRPr sz="1800"/>
-                </a:lvl2pPr>
-              </a:lstStyle>
-              <a:p>
-                <a:r>
-                  <a:rPr sz="1800" dirty="0"/>
-                  <a:t>Claim: H가 충돌 저항이고 G가 사전영상 저항이면 Lamport 스킴은 안전한 OTS다</a:t>
-                </a:r>
-              </a:p>
-              <a:p>
-                <a:r>
-                  <a:rPr sz="1800" dirty="0"/>
-                  <a:t>공격자가 </a:t>
-                </a:r>
-                <a14:m>
-                  <m:oMath xmlns:m="http://schemas.openxmlformats.org/officeDocument/2006/math">
-                    <m:sSub>
-                      <m:sSubPr>
-                        <m:ctrlPr>
-                          <a:rPr lang="en-US" i="1">
-                            <a:latin typeface="Cambria Math" panose="02040503050406030204" pitchFamily="18" charset="0"/>
-                          </a:rPr>
-                        </m:ctrlPr>
-                      </m:sSubPr>
-                      <m:e>
-                        <m:r>
-                          <a:rPr lang="en-US" i="1">
-                            <a:latin typeface="Cambria Math"/>
-                          </a:rPr>
-                          <m:t>𝑀</m:t>
-                        </m:r>
-                      </m:e>
-                      <m:sub>
-                        <m:r>
-                          <a:rPr lang="en-US" i="1">
-                            <a:latin typeface="Cambria Math"/>
-                          </a:rPr>
-                          <m:t>1</m:t>
-                        </m:r>
-                      </m:sub>
-                    </m:sSub>
-                  </m:oMath>
-                </a14:m>
-                <a:r>
-                  <a:rPr sz="1800" dirty="0"/>
-                  <a:t>의 서명 </a:t>
-                </a:r>
-                <a14:m>
-                  <m:oMath xmlns:m="http://schemas.openxmlformats.org/officeDocument/2006/math">
-                    <m:r>
-                      <a:rPr lang="en-US" i="1">
-                        <a:latin typeface="Cambria Math"/>
-                      </a:rPr>
-                      <m:t>(</m:t>
-                    </m:r>
-                    <m:sSub>
-                      <m:sSubPr>
-                        <m:ctrlPr>
-                          <a:rPr lang="en-US" i="1">
-                            <a:latin typeface="Cambria Math" panose="02040503050406030204" pitchFamily="18" charset="0"/>
-                          </a:rPr>
-                        </m:ctrlPr>
-                      </m:sSubPr>
-                      <m:e>
-                        <m:r>
-                          <a:rPr lang="en-US" i="1">
-                            <a:latin typeface="Cambria Math"/>
-                          </a:rPr>
-                          <m:t>𝑀</m:t>
-                        </m:r>
-                      </m:e>
-                      <m:sub>
-                        <m:r>
-                          <a:rPr lang="en-US" i="1">
-                            <a:latin typeface="Cambria Math"/>
-                          </a:rPr>
-                          <m:t>1</m:t>
-                        </m:r>
-                      </m:sub>
-                    </m:sSub>
-                    <m:r>
-                      <a:rPr lang="en-US" i="1">
-                        <a:latin typeface="Cambria Math"/>
-                      </a:rPr>
-                      <m:t>,</m:t>
-                    </m:r>
-                    <m:r>
-                      <a:rPr lang="en-US" i="1">
-                        <a:latin typeface="Cambria Math"/>
-                      </a:rPr>
-                      <m:t>𝑆</m:t>
-                    </m:r>
-                    <m:r>
-                      <a:rPr lang="en-US" i="1">
-                        <a:latin typeface="Cambria Math"/>
-                      </a:rPr>
-                      <m:t>)</m:t>
-                    </m:r>
-                  </m:oMath>
-                </a14:m>
-                <a:r>
-                  <a:rPr sz="1800" dirty="0"/>
-                  <a:t>을 획득한 뒤 </a:t>
-                </a:r>
-                <a14:m>
-                  <m:oMath xmlns:m="http://schemas.openxmlformats.org/officeDocument/2006/math">
-                    <m:sSub>
-                      <m:sSubPr>
-                        <m:ctrlPr>
-                          <a:rPr lang="en-US" i="1">
-                            <a:latin typeface="Cambria Math" panose="02040503050406030204" pitchFamily="18" charset="0"/>
-                          </a:rPr>
-                        </m:ctrlPr>
-                      </m:sSubPr>
-                      <m:e>
-                        <m:r>
-                          <a:rPr lang="en-US" i="1">
-                            <a:latin typeface="Cambria Math"/>
-                          </a:rPr>
-                          <m:t>𝑀</m:t>
-                        </m:r>
-                      </m:e>
-                      <m:sub>
-                        <m:r>
-                          <a:rPr lang="en-US" i="1">
-                            <a:latin typeface="Cambria Math"/>
-                          </a:rPr>
-                          <m:t>2</m:t>
-                        </m:r>
-                      </m:sub>
-                    </m:sSub>
-                    <m:r>
-                      <a:rPr lang="en-US" i="1">
-                        <a:latin typeface="Cambria Math"/>
-                      </a:rPr>
-                      <m:t>≠</m:t>
-                    </m:r>
-                    <m:sSub>
-                      <m:sSubPr>
-                        <m:ctrlPr>
-                          <a:rPr lang="en-US" i="1">
-                            <a:latin typeface="Cambria Math" panose="02040503050406030204" pitchFamily="18" charset="0"/>
-                          </a:rPr>
-                        </m:ctrlPr>
-                      </m:sSubPr>
-                      <m:e>
-                        <m:r>
-                          <a:rPr lang="en-US" i="1">
-                            <a:latin typeface="Cambria Math"/>
-                          </a:rPr>
-                          <m:t>𝑀</m:t>
-                        </m:r>
-                      </m:e>
-                      <m:sub>
-                        <m:r>
-                          <a:rPr lang="en-US" i="1">
-                            <a:latin typeface="Cambria Math"/>
-                          </a:rPr>
-                          <m:t>1</m:t>
-                        </m:r>
-                      </m:sub>
-                    </m:sSub>
-                  </m:oMath>
-                </a14:m>
-                <a:r>
-                  <a:rPr sz="1800" dirty="0"/>
-                  <a:t>에 대한 위조를 시도한다고 하자</a:t>
-                </a:r>
-              </a:p>
-              <a:p>
-                <a:r>
-                  <a:rPr sz="1800" dirty="0"/>
-                  <a:t>H의 충돌 저항성에 의해 </a:t>
-                </a:r>
-                <a14:m>
-                  <m:oMath xmlns:m="http://schemas.openxmlformats.org/officeDocument/2006/math">
-                    <m:r>
-                      <a:rPr lang="en-US" i="1">
-                        <a:latin typeface="Cambria Math"/>
-                      </a:rPr>
-                      <m:t>𝐻</m:t>
-                    </m:r>
-                    <m:r>
-                      <a:rPr lang="en-US" i="1">
-                        <a:latin typeface="Cambria Math"/>
-                      </a:rPr>
-                      <m:t>(</m:t>
-                    </m:r>
-                    <m:sSub>
-                      <m:sSubPr>
-                        <m:ctrlPr>
-                          <a:rPr lang="en-US" i="1">
-                            <a:latin typeface="Cambria Math" panose="02040503050406030204" pitchFamily="18" charset="0"/>
-                          </a:rPr>
-                        </m:ctrlPr>
-                      </m:sSubPr>
-                      <m:e>
-                        <m:r>
-                          <a:rPr lang="en-US" i="1">
-                            <a:latin typeface="Cambria Math"/>
-                          </a:rPr>
-                          <m:t>𝑀</m:t>
-                        </m:r>
-                      </m:e>
-                      <m:sub>
-                        <m:r>
-                          <a:rPr lang="en-US" i="1">
-                            <a:latin typeface="Cambria Math"/>
-                          </a:rPr>
-                          <m:t>1</m:t>
-                        </m:r>
-                      </m:sub>
-                    </m:sSub>
-                    <m:r>
-                      <a:rPr lang="en-US" i="1">
-                        <a:latin typeface="Cambria Math"/>
-                      </a:rPr>
-                      <m:t>)≠</m:t>
-                    </m:r>
-                    <m:r>
-                      <a:rPr lang="en-US" i="1">
-                        <a:latin typeface="Cambria Math"/>
-                      </a:rPr>
-                      <m:t>𝐻</m:t>
-                    </m:r>
-                    <m:r>
-                      <a:rPr lang="en-US" i="1">
-                        <a:latin typeface="Cambria Math"/>
-                      </a:rPr>
-                      <m:t>(</m:t>
-                    </m:r>
-                    <m:sSub>
-                      <m:sSubPr>
-                        <m:ctrlPr>
-                          <a:rPr lang="en-US" i="1">
-                            <a:latin typeface="Cambria Math" panose="02040503050406030204" pitchFamily="18" charset="0"/>
-                          </a:rPr>
-                        </m:ctrlPr>
-                      </m:sSubPr>
-                      <m:e>
-                        <m:r>
-                          <a:rPr lang="en-US" i="1">
-                            <a:latin typeface="Cambria Math"/>
-                          </a:rPr>
-                          <m:t>𝑀</m:t>
-                        </m:r>
-                      </m:e>
-                      <m:sub>
-                        <m:r>
-                          <a:rPr lang="en-US" i="1">
-                            <a:latin typeface="Cambria Math"/>
-                          </a:rPr>
-                          <m:t>2</m:t>
-                        </m:r>
-                      </m:sub>
-                    </m:sSub>
-                    <m:r>
-                      <a:rPr lang="en-US" i="1">
-                        <a:latin typeface="Cambria Math"/>
-                      </a:rPr>
-                      <m:t>)</m:t>
-                    </m:r>
-                  </m:oMath>
-                </a14:m>
-                <a:r>
-                  <a:rPr sz="1800" dirty="0"/>
-                  <a:t> → 최소 한 위치 j에서 비트가 다르다</a:t>
-                </a:r>
-              </a:p>
-              <a:p>
-                <a:r>
-                  <a:rPr sz="1800" dirty="0"/>
-                  <a:t>일반성 있게 </a:t>
-                </a:r>
-                <a14:m>
-                  <m:oMath xmlns:m="http://schemas.openxmlformats.org/officeDocument/2006/math">
-                    <m:sSub>
-                      <m:sSubPr>
-                        <m:ctrlPr>
-                          <a:rPr lang="en-US" i="1">
-                            <a:latin typeface="Cambria Math" panose="02040503050406030204" pitchFamily="18" charset="0"/>
-                          </a:rPr>
-                        </m:ctrlPr>
-                      </m:sSubPr>
-                      <m:e>
-                        <m:r>
-                          <a:rPr lang="en-US" i="1">
-                            <a:latin typeface="Cambria Math"/>
-                          </a:rPr>
-                          <m:t>h</m:t>
-                        </m:r>
-                      </m:e>
-                      <m:sub>
-                        <m:r>
-                          <a:rPr lang="en-US" i="1">
-                            <a:latin typeface="Cambria Math"/>
-                          </a:rPr>
-                          <m:t>𝑗</m:t>
-                        </m:r>
-                      </m:sub>
-                    </m:sSub>
-                    <m:r>
-                      <a:rPr lang="en-US" i="1">
-                        <a:latin typeface="Cambria Math"/>
-                      </a:rPr>
-                      <m:t>=0,</m:t>
-                    </m:r>
-                    <m:r>
-                      <m:rPr>
-                        <m:nor/>
-                      </m:rPr>
-                      <a:rPr lang="en-US" i="0">
-                        <a:latin typeface="Cambria Math"/>
-                      </a:rPr>
-                      <m:t> </m:t>
-                    </m:r>
-                    <m:sSubSup>
-                      <m:sSubSupPr>
-                        <m:ctrlPr>
-                          <a:rPr lang="en-US" i="1">
-                            <a:latin typeface="Cambria Math" panose="02040503050406030204" pitchFamily="18" charset="0"/>
-                          </a:rPr>
-                        </m:ctrlPr>
-                      </m:sSubSupPr>
-                      <m:e>
-                        <m:r>
-                          <a:rPr lang="en-US" i="1">
-                            <a:latin typeface="Cambria Math"/>
-                          </a:rPr>
-                          <m:t>h</m:t>
-                        </m:r>
-                      </m:e>
-                      <m:sub>
-                        <m:r>
-                          <a:rPr lang="en-US" i="1">
-                            <a:latin typeface="Cambria Math"/>
-                          </a:rPr>
-                          <m:t>𝑗</m:t>
-                        </m:r>
-                      </m:sub>
-                      <m:sup>
-                        <m:r>
-                          <a:rPr lang="en-US" i="1">
-                            <a:latin typeface="Cambria Math"/>
-                          </a:rPr>
-                          <m:t>′</m:t>
-                        </m:r>
-                      </m:sup>
-                    </m:sSubSup>
-                    <m:r>
-                      <a:rPr lang="en-US" i="1">
-                        <a:latin typeface="Cambria Math"/>
-                      </a:rPr>
-                      <m:t>=1</m:t>
-                    </m:r>
-                  </m:oMath>
-                </a14:m>
-                <a:r>
-                  <a:rPr sz="1800" dirty="0"/>
-                  <a:t>이라 하면, </a:t>
-                </a:r>
-                <a14:m>
-                  <m:oMath xmlns:m="http://schemas.openxmlformats.org/officeDocument/2006/math">
-                    <m:sSub>
-                      <m:sSubPr>
-                        <m:ctrlPr>
-                          <a:rPr lang="en-US" i="1">
-                            <a:latin typeface="Cambria Math" panose="02040503050406030204" pitchFamily="18" charset="0"/>
-                          </a:rPr>
-                        </m:ctrlPr>
-                      </m:sSubPr>
-                      <m:e>
-                        <m:r>
-                          <a:rPr lang="en-US" i="1">
-                            <a:latin typeface="Cambria Math"/>
-                          </a:rPr>
-                          <m:t>𝑀</m:t>
-                        </m:r>
-                      </m:e>
-                      <m:sub>
-                        <m:r>
-                          <a:rPr lang="en-US" i="1">
-                            <a:latin typeface="Cambria Math"/>
-                          </a:rPr>
-                          <m:t>1</m:t>
-                        </m:r>
-                      </m:sub>
-                    </m:sSub>
-                  </m:oMath>
-                </a14:m>
-                <a:r>
-                  <a:rPr sz="1800" dirty="0"/>
-                  <a:t>의 서명은 </a:t>
-                </a:r>
-                <a14:m>
-                  <m:oMath xmlns:m="http://schemas.openxmlformats.org/officeDocument/2006/math">
-                    <m:sSub>
-                      <m:sSubPr>
-                        <m:ctrlPr>
-                          <a:rPr lang="en-US" i="1">
-                            <a:latin typeface="Cambria Math" panose="02040503050406030204" pitchFamily="18" charset="0"/>
-                          </a:rPr>
-                        </m:ctrlPr>
-                      </m:sSubPr>
-                      <m:e>
-                        <m:r>
-                          <a:rPr lang="en-US" i="1">
-                            <a:latin typeface="Cambria Math"/>
-                          </a:rPr>
-                          <m:t>𝑥</m:t>
-                        </m:r>
-                      </m:e>
-                      <m:sub>
-                        <m:r>
-                          <a:rPr lang="en-US" i="1">
-                            <a:latin typeface="Cambria Math"/>
-                          </a:rPr>
-                          <m:t>0,</m:t>
-                        </m:r>
-                        <m:r>
-                          <a:rPr lang="en-US" i="1">
-                            <a:latin typeface="Cambria Math"/>
-                          </a:rPr>
-                          <m:t>𝑗</m:t>
-                        </m:r>
-                      </m:sub>
-                    </m:sSub>
-                  </m:oMath>
-                </a14:m>
-                <a:r>
-                  <a:rPr sz="1800" dirty="0"/>
-                  <a:t>, </a:t>
-                </a:r>
-                <a14:m>
-                  <m:oMath xmlns:m="http://schemas.openxmlformats.org/officeDocument/2006/math">
-                    <m:sSub>
-                      <m:sSubPr>
-                        <m:ctrlPr>
-                          <a:rPr lang="en-US" i="1">
-                            <a:latin typeface="Cambria Math" panose="02040503050406030204" pitchFamily="18" charset="0"/>
-                          </a:rPr>
-                        </m:ctrlPr>
-                      </m:sSubPr>
-                      <m:e>
-                        <m:r>
-                          <a:rPr lang="en-US" i="1">
-                            <a:latin typeface="Cambria Math"/>
-                          </a:rPr>
-                          <m:t>𝑀</m:t>
-                        </m:r>
-                      </m:e>
-                      <m:sub>
-                        <m:r>
-                          <a:rPr lang="en-US" i="1">
-                            <a:latin typeface="Cambria Math"/>
-                          </a:rPr>
-                          <m:t>2</m:t>
-                        </m:r>
-                      </m:sub>
-                    </m:sSub>
-                  </m:oMath>
-                </a14:m>
-                <a:r>
-                  <a:rPr sz="1800" dirty="0"/>
-                  <a:t>의 위조엔 </a:t>
-                </a:r>
-                <a14:m>
-                  <m:oMath xmlns:m="http://schemas.openxmlformats.org/officeDocument/2006/math">
-                    <m:sSub>
-                      <m:sSubPr>
-                        <m:ctrlPr>
-                          <a:rPr lang="en-US" i="1">
-                            <a:latin typeface="Cambria Math" panose="02040503050406030204" pitchFamily="18" charset="0"/>
-                          </a:rPr>
-                        </m:ctrlPr>
-                      </m:sSubPr>
-                      <m:e>
-                        <m:r>
-                          <a:rPr lang="en-US" i="1">
-                            <a:latin typeface="Cambria Math"/>
-                          </a:rPr>
-                          <m:t>𝑥</m:t>
-                        </m:r>
-                      </m:e>
-                      <m:sub>
-                        <m:r>
-                          <a:rPr lang="en-US" i="1">
-                            <a:latin typeface="Cambria Math"/>
-                          </a:rPr>
-                          <m:t>1,</m:t>
-                        </m:r>
-                        <m:r>
-                          <a:rPr lang="en-US" i="1">
-                            <a:latin typeface="Cambria Math"/>
-                          </a:rPr>
-                          <m:t>𝑗</m:t>
-                        </m:r>
-                      </m:sub>
-                    </m:sSub>
-                  </m:oMath>
-                </a14:m>
-                <a:r>
-                  <a:rPr sz="1800" dirty="0"/>
-                  <a:t>가 필요하다</a:t>
-                </a:r>
-              </a:p>
-              <a:p>
-                <a14:m>
-                  <m:oMath xmlns:m="http://schemas.openxmlformats.org/officeDocument/2006/math">
-                    <m:sSub>
-                      <m:sSubPr>
-                        <m:ctrlPr>
-                          <a:rPr lang="en-US" i="1">
-                            <a:latin typeface="Cambria Math" panose="02040503050406030204" pitchFamily="18" charset="0"/>
-                          </a:rPr>
-                        </m:ctrlPr>
-                      </m:sSubPr>
-                      <m:e>
-                        <m:r>
-                          <a:rPr lang="en-US" i="1">
-                            <a:latin typeface="Cambria Math"/>
-                          </a:rPr>
-                          <m:t>𝑥</m:t>
-                        </m:r>
-                      </m:e>
-                      <m:sub>
-                        <m:r>
-                          <a:rPr lang="en-US" i="1">
-                            <a:latin typeface="Cambria Math"/>
-                          </a:rPr>
-                          <m:t>1,</m:t>
-                        </m:r>
-                        <m:r>
-                          <a:rPr lang="en-US" i="1">
-                            <a:latin typeface="Cambria Math"/>
-                          </a:rPr>
-                          <m:t>𝑗</m:t>
-                        </m:r>
-                      </m:sub>
-                    </m:sSub>
-                  </m:oMath>
-                </a14:m>
-                <a:r>
-                  <a:rPr sz="1800" dirty="0"/>
-                  <a:t>는 공개키 </a:t>
-                </a:r>
-                <a14:m>
-                  <m:oMath xmlns:m="http://schemas.openxmlformats.org/officeDocument/2006/math">
-                    <m:sSub>
-                      <m:sSubPr>
-                        <m:ctrlPr>
-                          <a:rPr lang="en-US" i="1">
-                            <a:latin typeface="Cambria Math" panose="02040503050406030204" pitchFamily="18" charset="0"/>
-                          </a:rPr>
-                        </m:ctrlPr>
-                      </m:sSubPr>
-                      <m:e>
-                        <m:r>
-                          <a:rPr lang="en-US" i="1">
-                            <a:latin typeface="Cambria Math"/>
-                          </a:rPr>
-                          <m:t>𝑦</m:t>
-                        </m:r>
-                      </m:e>
-                      <m:sub>
-                        <m:r>
-                          <a:rPr lang="en-US" i="1">
-                            <a:latin typeface="Cambria Math"/>
-                          </a:rPr>
-                          <m:t>1,</m:t>
-                        </m:r>
-                        <m:r>
-                          <a:rPr lang="en-US" i="1">
-                            <a:latin typeface="Cambria Math"/>
-                          </a:rPr>
-                          <m:t>𝑗</m:t>
-                        </m:r>
-                      </m:sub>
-                    </m:sSub>
-                  </m:oMath>
-                </a14:m>
-                <a:r>
-                  <a:rPr sz="1800" dirty="0"/>
-                  <a:t>의 사전영상 → G의 사전영상 저항성과 모순</a:t>
-                </a:r>
-              </a:p>
-            </p:txBody>
-          </p:sp>
-        </mc:Choice>
-        <mc:Fallback>
-          <p:sp>
-            <p:nvSpPr>
-              <p:cNvPr id="3" name="Content Placeholder 2"/>
-              <p:cNvSpPr>
-                <a:spLocks noGrp="1" noRot="1" noChangeAspect="1" noMove="1" noResize="1" noEditPoints="1" noAdjustHandles="1" noChangeArrowheads="1" noChangeShapeType="1" noTextEdit="1"/>
-              </p:cNvSpPr>
-              <p:nvPr>
-                <p:ph idx="1"/>
-              </p:nvPr>
-            </p:nvSpPr>
-            <p:spPr>
-              <a:blipFill>
-                <a:blip r:embed="rId2"/>
-                <a:stretch>
-                  <a:fillRect l="-290"/>
-                </a:stretch>
-              </a:blipFill>
-            </p:spPr>
-            <p:txBody>
-              <a:bodyPr/>
-              <a:lstStyle/>
-              <a:p>
-                <a:r>
-                  <a:rPr lang="ko-KR" altLang="en-US">
-                    <a:noFill/>
-                  </a:rPr>
-                  <a:t> </a:t>
-                </a:r>
-              </a:p>
-            </p:txBody>
-          </p:sp>
-        </mc:Fallback>
-      </mc:AlternateContent>
-      <p:sp>
-        <p:nvSpPr>
-          <p:cNvPr id="4" name="슬라이드 번호 개체 틀"/>
-          <p:cNvSpPr>
-            <a:spLocks noGrp="1"/>
-          </p:cNvSpPr>
-          <p:nvPr>
-            <p:ph type="sldNum" sz="quarter" idx="12"/>
-          </p:nvPr>
-        </p:nvSpPr>
-        <p:spPr/>
-        <p:txBody>
-          <a:bodyPr/>
-          <a:lstStyle/>
-          <a:p>
-            <a:fld id="{4438A2D4-3867-488E-A04E-7BFFCAED45A6}" type="slidenum">
-              <a:rPr lang="ko-KR" altLang="en-US" smtClean="0"/>
-              <a:t>22</a:t>
-            </a:fld>
-            <a:endParaRPr lang="ko-KR" altLang="en-US" dirty="0"/>
-          </a:p>
-        </p:txBody>
-      </p:sp>
-    </p:spTree>
-  </p:cSld>
-  <p:clrMapOvr>
-    <a:masterClrMapping/>
-  </p:clrMapOvr>
-</p:sld>
-</file>
-
-<file path=ppt/slides/slide23.xml><?xml version="1.0" encoding="utf-8"?>
-<p:sld xmlns:a="http://schemas.openxmlformats.org/drawingml/2006/main" xmlns:r="http://schemas.openxmlformats.org/officeDocument/2006/relationships" xmlns:p="http://schemas.openxmlformats.org/presentationml/2006/main">
-  <p:cSld>
-    <p:spTree>
-      <p:nvGrpSpPr>
-        <p:cNvPr id="1" name=""/>
-        <p:cNvGrpSpPr/>
-        <p:nvPr/>
-      </p:nvGrpSpPr>
-      <p:grpSpPr>
-        <a:xfrm>
-          <a:off x="0" y="0"/>
-          <a:ext cx="0" cy="0"/>
-          <a:chOff x="0" y="0"/>
-          <a:chExt cx="0" cy="0"/>
-        </a:xfrm>
-      </p:grpSpPr>
-      <p:sp>
-        <p:nvSpPr>
-          <p:cNvPr id="2" name="Title 1"/>
-          <p:cNvSpPr>
-            <a:spLocks noGrp="1"/>
-          </p:cNvSpPr>
-          <p:nvPr>
-            <p:ph type="title"/>
-          </p:nvPr>
-        </p:nvSpPr>
-        <p:spPr/>
-        <p:txBody>
-          <a:bodyPr/>
-          <a:lstStyle/>
-          <a:p>
-            <a:r>
-              <a:rPr dirty="0"/>
-              <a:t>정량적 보안 수준</a:t>
-            </a:r>
-          </a:p>
-        </p:txBody>
-      </p:sp>
-      <mc:AlternateContent xmlns:mc="http://schemas.openxmlformats.org/markup-compatibility/2006">
-        <mc:Choice xmlns:a14="http://schemas.microsoft.com/office/drawing/2010/main" Requires="a14">
-          <p:sp>
-            <p:nvSpPr>
-              <p:cNvPr id="3" name="Content Placeholder 2"/>
-              <p:cNvSpPr>
-                <a:spLocks noGrp="1"/>
-              </p:cNvSpPr>
-              <p:nvPr>
-                <p:ph idx="1"/>
-              </p:nvPr>
-            </p:nvSpPr>
-            <p:spPr/>
-            <p:txBody>
-              <a:bodyPr/>
-              <a:lstStyle>
-                <a:lvl1pPr>
-                  <a:defRPr sz="1800"/>
-                </a:lvl1pPr>
-                <a:lvl2pPr>
-                  <a:defRPr sz="1800"/>
-                </a:lvl2pPr>
-              </a:lstStyle>
-              <a:p>
-                <a:r>
-                  <a:rPr sz="1800" dirty="0"/>
-                  <a:t>앞서 본 일반 공격 비용을 그대로 적용하면 Lamport OTS는 양자 기준 </a:t>
-                </a:r>
-                <a14:m>
-                  <m:oMath xmlns:m="http://schemas.openxmlformats.org/officeDocument/2006/math">
-                    <m:f>
-                      <m:fPr>
-                        <m:type m:val="lin"/>
-                        <m:ctrlPr>
-                          <a:rPr lang="en-US" i="1">
-                            <a:latin typeface="Cambria Math" panose="02040503050406030204" pitchFamily="18" charset="0"/>
-                          </a:rPr>
-                        </m:ctrlPr>
-                      </m:fPr>
-                      <m:num>
-                        <m:r>
-                          <a:rPr lang="en-US" i="1">
-                            <a:latin typeface="Cambria Math"/>
-                          </a:rPr>
-                          <m:t>𝑛</m:t>
-                        </m:r>
-                      </m:num>
-                      <m:den>
-                        <m:r>
-                          <a:rPr lang="en-US" i="1">
-                            <a:latin typeface="Cambria Math"/>
-                          </a:rPr>
-                          <m:t>2</m:t>
-                        </m:r>
-                      </m:den>
-                    </m:f>
-                  </m:oMath>
-                </a14:m>
-                <a:r>
-                  <a:rPr sz="1800" dirty="0"/>
-                  <a:t>비트 보안 수준을 갖는다</a:t>
-                </a:r>
-              </a:p>
-              <a:p>
-                <a:r>
-                  <a:rPr sz="1800" dirty="0"/>
-                  <a:t>G의 사전영상: Grover로 </a:t>
-                </a:r>
-                <a14:m>
-                  <m:oMath xmlns:m="http://schemas.openxmlformats.org/officeDocument/2006/math">
-                    <m:r>
-                      <a:rPr lang="en-US" i="1">
-                        <a:latin typeface="Cambria Math"/>
-                      </a:rPr>
-                      <m:t>𝑂</m:t>
-                    </m:r>
-                    <m:r>
-                      <a:rPr lang="en-US" i="1">
-                        <a:latin typeface="Cambria Math"/>
-                      </a:rPr>
-                      <m:t>(</m:t>
-                    </m:r>
-                    <m:sSup>
-                      <m:sSupPr>
-                        <m:ctrlPr>
-                          <a:rPr lang="en-US" i="1">
-                            <a:latin typeface="Cambria Math" panose="02040503050406030204" pitchFamily="18" charset="0"/>
-                          </a:rPr>
-                        </m:ctrlPr>
-                      </m:sSupPr>
-                      <m:e>
-                        <m:r>
-                          <a:rPr lang="en-US" i="1">
-                            <a:latin typeface="Cambria Math"/>
-                          </a:rPr>
-                          <m:t>2</m:t>
-                        </m:r>
-                      </m:e>
-                      <m:sup>
-                        <m:f>
-                          <m:fPr>
-                            <m:type m:val="lin"/>
-                            <m:ctrlPr>
-                              <a:rPr lang="en-US" i="1">
-                                <a:latin typeface="Cambria Math" panose="02040503050406030204" pitchFamily="18" charset="0"/>
-                              </a:rPr>
-                            </m:ctrlPr>
-                          </m:fPr>
-                          <m:num>
-                            <m:r>
-                              <a:rPr lang="en-US" i="1">
-                                <a:latin typeface="Cambria Math"/>
-                              </a:rPr>
-                              <m:t>𝑛</m:t>
-                            </m:r>
-                          </m:num>
-                          <m:den>
-                            <m:r>
-                              <a:rPr lang="en-US" i="1">
-                                <a:latin typeface="Cambria Math"/>
-                              </a:rPr>
-                              <m:t>2</m:t>
-                            </m:r>
-                          </m:den>
-                        </m:f>
-                      </m:sup>
-                    </m:sSup>
-                    <m:r>
-                      <a:rPr lang="en-US" i="1">
-                        <a:latin typeface="Cambria Math"/>
-                      </a:rPr>
-                      <m:t>)</m:t>
-                    </m:r>
-                  </m:oMath>
-                </a14:m>
-                <a:r>
-                  <a:rPr sz="1800" dirty="0"/>
-                  <a:t>, H의 충돌: van Oorschot–Wiener로 </a:t>
-                </a:r>
-                <a14:m>
-                  <m:oMath xmlns:m="http://schemas.openxmlformats.org/officeDocument/2006/math">
-                    <m:r>
-                      <a:rPr lang="en-US" i="1">
-                        <a:latin typeface="Cambria Math"/>
-                      </a:rPr>
-                      <m:t>𝑂</m:t>
-                    </m:r>
-                    <m:r>
-                      <a:rPr lang="en-US" i="1">
-                        <a:latin typeface="Cambria Math"/>
-                      </a:rPr>
-                      <m:t>(</m:t>
-                    </m:r>
-                    <m:sSup>
-                      <m:sSupPr>
-                        <m:ctrlPr>
-                          <a:rPr lang="en-US" i="1">
-                            <a:latin typeface="Cambria Math" panose="02040503050406030204" pitchFamily="18" charset="0"/>
-                          </a:rPr>
-                        </m:ctrlPr>
-                      </m:sSupPr>
-                      <m:e>
-                        <m:r>
-                          <a:rPr lang="en-US" i="1">
-                            <a:latin typeface="Cambria Math"/>
-                          </a:rPr>
-                          <m:t>2</m:t>
-                        </m:r>
-                      </m:e>
-                      <m:sup>
-                        <m:f>
-                          <m:fPr>
-                            <m:type m:val="lin"/>
-                            <m:ctrlPr>
-                              <a:rPr lang="en-US" i="1">
-                                <a:latin typeface="Cambria Math" panose="02040503050406030204" pitchFamily="18" charset="0"/>
-                              </a:rPr>
-                            </m:ctrlPr>
-                          </m:fPr>
-                          <m:num>
-                            <m:r>
-                              <a:rPr lang="en-US" i="1">
-                                <a:latin typeface="Cambria Math"/>
-                              </a:rPr>
-                              <m:t>𝑛</m:t>
-                            </m:r>
-                          </m:num>
-                          <m:den>
-                            <m:r>
-                              <a:rPr lang="en-US" i="1">
-                                <a:latin typeface="Cambria Math"/>
-                              </a:rPr>
-                              <m:t>2</m:t>
-                            </m:r>
-                          </m:den>
-                        </m:f>
-                      </m:sup>
-                    </m:sSup>
-                    <m:r>
-                      <a:rPr lang="en-US" i="1">
-                        <a:latin typeface="Cambria Math"/>
-                      </a:rPr>
-                      <m:t>)</m:t>
-                    </m:r>
-                  </m:oMath>
-                </a14:m>
-                <a:r>
-                  <a:rPr sz="1800" dirty="0"/>
-                  <a:t> — 둘 다 같은 비용으로 수렴</a:t>
-                </a:r>
-              </a:p>
-              <a:p>
-                <a:r>
-                  <a:rPr sz="1800" dirty="0"/>
-                  <a:t>고전·양자 모두에서 128비트 보안을 얻으려면 </a:t>
-                </a:r>
-                <a14:m>
-                  <m:oMath xmlns:m="http://schemas.openxmlformats.org/officeDocument/2006/math">
-                    <m:r>
-                      <a:rPr lang="en-US" i="1">
-                        <a:latin typeface="Cambria Math"/>
-                      </a:rPr>
-                      <m:t>𝑛</m:t>
-                    </m:r>
-                    <m:r>
-                      <a:rPr lang="en-US" i="1">
-                        <a:latin typeface="Cambria Math"/>
-                      </a:rPr>
-                      <m:t>=256</m:t>
-                    </m:r>
-                  </m:oMath>
-                </a14:m>
-                <a:r>
-                  <a:rPr sz="1800" dirty="0"/>
-                  <a:t>을 쓰면 된다</a:t>
-                </a:r>
-              </a:p>
-            </p:txBody>
-          </p:sp>
-        </mc:Choice>
-        <mc:Fallback>
-          <p:sp>
-            <p:nvSpPr>
-              <p:cNvPr id="3" name="Content Placeholder 2"/>
-              <p:cNvSpPr>
-                <a:spLocks noGrp="1" noRot="1" noChangeAspect="1" noMove="1" noResize="1" noEditPoints="1" noAdjustHandles="1" noChangeArrowheads="1" noChangeShapeType="1" noTextEdit="1"/>
-              </p:cNvSpPr>
-              <p:nvPr>
-                <p:ph idx="1"/>
-              </p:nvPr>
-            </p:nvSpPr>
-            <p:spPr>
-              <a:blipFill>
-                <a:blip r:embed="rId2"/>
-                <a:stretch>
-                  <a:fillRect l="-232" t="-7902"/>
-                </a:stretch>
-              </a:blipFill>
-            </p:spPr>
-            <p:txBody>
-              <a:bodyPr/>
-              <a:lstStyle/>
-              <a:p>
-                <a:r>
-                  <a:rPr lang="ko-KR" altLang="en-US">
-                    <a:noFill/>
-                  </a:rPr>
-                  <a:t> </a:t>
-                </a:r>
-              </a:p>
-            </p:txBody>
-          </p:sp>
-        </mc:Fallback>
-      </mc:AlternateContent>
-      <p:sp>
-        <p:nvSpPr>
-          <p:cNvPr id="4" name="슬라이드 번호 개체 틀"/>
-          <p:cNvSpPr>
-            <a:spLocks noGrp="1"/>
-          </p:cNvSpPr>
-          <p:nvPr>
-            <p:ph type="sldNum" sz="quarter" idx="12"/>
-          </p:nvPr>
-        </p:nvSpPr>
-        <p:spPr/>
-        <p:txBody>
-          <a:bodyPr/>
-          <a:lstStyle/>
-          <a:p>
-            <a:fld id="{4438A2D4-3867-488E-A04E-7BFFCAED45A6}" type="slidenum">
-              <a:rPr lang="ko-KR" altLang="en-US" smtClean="0"/>
-              <a:t>23</a:t>
-            </a:fld>
-            <a:endParaRPr lang="ko-KR" altLang="en-US" dirty="0"/>
-          </a:p>
-        </p:txBody>
-      </p:sp>
-    </p:spTree>
-  </p:cSld>
-  <p:clrMapOvr>
-    <a:masterClrMapping/>
-  </p:clrMapOvr>
-</p:sld>
-</file>
-
-<file path=ppt/slides/slide24.xml><?xml version="1.0" encoding="utf-8"?>
+<file path=ppt/slides/slide20.xml><?xml version="1.0" encoding="utf-8"?>
 <p:sld xmlns:a="http://schemas.openxmlformats.org/drawingml/2006/main" xmlns:r="http://schemas.openxmlformats.org/officeDocument/2006/relationships" xmlns:p="http://schemas.openxmlformats.org/presentationml/2006/main">
   <p:cSld>
     <p:spTree>
@@ -15900,7 +15388,7 @@
           <a:p>
             <a:fld id="{4438A2D4-3867-488E-A04E-7BFFCAED45A6}" type="slidenum">
               <a:rPr lang="ko-KR" altLang="en-US" smtClean="0"/>
-              <a:t>24</a:t>
+              <a:t>20</a:t>
             </a:fld>
             <a:endParaRPr lang="ko-KR" altLang="en-US" dirty="0"/>
           </a:p>
@@ -16977,7 +16465,7 @@
 </p:sld>
 </file>
 
-<file path=ppt/slides/slide25.xml><?xml version="1.0" encoding="utf-8"?>
+<file path=ppt/slides/slide21.xml><?xml version="1.0" encoding="utf-8"?>
 <p:sld xmlns:a="http://schemas.openxmlformats.org/drawingml/2006/main" xmlns:r="http://schemas.openxmlformats.org/officeDocument/2006/relationships" xmlns:p="http://schemas.openxmlformats.org/presentationml/2006/main">
   <p:cSld>
     <p:spTree>
@@ -17103,7 +16591,7 @@
           <a:p>
             <a:fld id="{4438A2D4-3867-488E-A04E-7BFFCAED45A6}" type="slidenum">
               <a:rPr lang="ko-KR" altLang="en-US" smtClean="0"/>
-              <a:t>25</a:t>
+              <a:t>21</a:t>
             </a:fld>
             <a:endParaRPr lang="ko-KR" altLang="en-US" dirty="0"/>
           </a:p>
@@ -17248,8 +16736,8 @@
           </a:p>
         </p:txBody>
       </p:sp>
-      <mc:AlternateContent xmlns:mc="http://schemas.openxmlformats.org/markup-compatibility/2006">
-        <mc:Choice xmlns:a14="http://schemas.microsoft.com/office/drawing/2010/main" Requires="a14">
+      <mc:AlternateContent xmlns:mc="http://schemas.openxmlformats.org/markup-compatibility/2006" xmlns:a14="http://schemas.microsoft.com/office/drawing/2010/main">
+        <mc:Choice Requires="a14">
           <p:sp>
             <p:nvSpPr>
               <p:cNvPr id="3" name="Content Placeholder 2"/>
@@ -17537,7 +17025,7 @@
             </p:txBody>
           </p:sp>
         </mc:Choice>
-        <mc:Fallback>
+        <mc:Fallback xmlns="">
           <p:sp>
             <p:nvSpPr>
               <p:cNvPr id="3" name="Content Placeholder 2"/>
@@ -17641,8 +17129,8 @@
           </a:p>
         </p:txBody>
       </p:sp>
-      <mc:AlternateContent xmlns:mc="http://schemas.openxmlformats.org/markup-compatibility/2006">
-        <mc:Choice xmlns:a14="http://schemas.microsoft.com/office/drawing/2010/main" Requires="a14">
+      <mc:AlternateContent xmlns:mc="http://schemas.openxmlformats.org/markup-compatibility/2006" xmlns:a14="http://schemas.microsoft.com/office/drawing/2010/main">
+        <mc:Choice Requires="a14">
           <p:sp>
             <p:nvSpPr>
               <p:cNvPr id="3" name="Content Placeholder 2"/>
@@ -18106,7 +17594,7 @@
             </p:txBody>
           </p:sp>
         </mc:Choice>
-        <mc:Fallback>
+        <mc:Fallback xmlns="">
           <p:sp>
             <p:nvSpPr>
               <p:cNvPr id="3" name="Content Placeholder 2"/>
@@ -18966,7 +18454,7 @@
 </p:sld>
 </file>
 
-<file path=ppt/slides/slide8.xml><?xml version="1.0" encoding="utf-8"?>
+<file path=ppt/slides/slide7.xml><?xml version="1.0" encoding="utf-8"?>
 <p:sld xmlns:a="http://schemas.openxmlformats.org/drawingml/2006/main" xmlns:r="http://schemas.openxmlformats.org/officeDocument/2006/relationships" xmlns:p="http://schemas.openxmlformats.org/presentationml/2006/main">
   <p:cSld>
     <p:spTree>
@@ -19079,7 +18567,7 @@
           <a:p>
             <a:fld id="{4438A2D4-3867-488E-A04E-7BFFCAED45A6}" type="slidenum">
               <a:rPr lang="ko-KR" altLang="en-US" smtClean="0"/>
-              <a:t>8</a:t>
+              <a:t>7</a:t>
             </a:fld>
             <a:endParaRPr lang="ko-KR" altLang="en-US" dirty="0"/>
           </a:p>
@@ -19123,7 +18611,7 @@
 </p:sld>
 </file>
 
-<file path=ppt/slides/slide9.xml><?xml version="1.0" encoding="utf-8"?>
+<file path=ppt/slides/slide8.xml><?xml version="1.0" encoding="utf-8"?>
 <p:sld xmlns:a="http://schemas.openxmlformats.org/drawingml/2006/main" xmlns:r="http://schemas.openxmlformats.org/officeDocument/2006/relationships" xmlns:p="http://schemas.openxmlformats.org/presentationml/2006/main">
   <p:cSld>
     <p:spTree>
@@ -19162,8 +18650,8 @@
           </a:p>
         </p:txBody>
       </p:sp>
-      <mc:AlternateContent xmlns:mc="http://schemas.openxmlformats.org/markup-compatibility/2006">
-        <mc:Choice xmlns:a14="http://schemas.microsoft.com/office/drawing/2010/main" Requires="a14">
+      <mc:AlternateContent xmlns:mc="http://schemas.openxmlformats.org/markup-compatibility/2006" xmlns:a14="http://schemas.microsoft.com/office/drawing/2010/main">
+        <mc:Choice Requires="a14">
           <p:sp>
             <p:nvSpPr>
               <p:cNvPr id="3" name="Content Placeholder 2"/>
@@ -19655,7 +19143,554 @@
             </p:txBody>
           </p:sp>
         </mc:Choice>
-        <mc:Fallback>
+        <mc:Fallback xmlns="">
+          <p:sp>
+            <p:nvSpPr>
+              <p:cNvPr id="3" name="Content Placeholder 2"/>
+              <p:cNvSpPr>
+                <a:spLocks noGrp="1" noRot="1" noChangeAspect="1" noMove="1" noResize="1" noEditPoints="1" noAdjustHandles="1" noChangeArrowheads="1" noChangeShapeType="1" noTextEdit="1"/>
+              </p:cNvSpPr>
+              <p:nvPr>
+                <p:ph idx="1"/>
+              </p:nvPr>
+            </p:nvSpPr>
+            <p:spPr>
+              <a:blipFill>
+                <a:blip r:embed="rId2"/>
+                <a:stretch>
+                  <a:fillRect l="-232"/>
+                </a:stretch>
+              </a:blipFill>
+            </p:spPr>
+            <p:txBody>
+              <a:bodyPr/>
+              <a:lstStyle/>
+              <a:p>
+                <a:r>
+                  <a:rPr lang="ko-KR" altLang="en-US">
+                    <a:noFill/>
+                  </a:rPr>
+                  <a:t> </a:t>
+                </a:r>
+              </a:p>
+            </p:txBody>
+          </p:sp>
+        </mc:Fallback>
+      </mc:AlternateContent>
+      <p:sp>
+        <p:nvSpPr>
+          <p:cNvPr id="4" name="슬라이드 번호 개체 틀"/>
+          <p:cNvSpPr>
+            <a:spLocks noGrp="1"/>
+          </p:cNvSpPr>
+          <p:nvPr>
+            <p:ph type="sldNum" sz="quarter" idx="12"/>
+          </p:nvPr>
+        </p:nvSpPr>
+        <p:spPr/>
+        <p:txBody>
+          <a:bodyPr/>
+          <a:lstStyle/>
+          <a:p>
+            <a:fld id="{4438A2D4-3867-488E-A04E-7BFFCAED45A6}" type="slidenum">
+              <a:rPr lang="ko-KR" altLang="en-US" smtClean="0"/>
+              <a:t>8</a:t>
+            </a:fld>
+            <a:endParaRPr lang="ko-KR" altLang="en-US" dirty="0"/>
+          </a:p>
+        </p:txBody>
+      </p:sp>
+    </p:spTree>
+  </p:cSld>
+  <p:clrMapOvr>
+    <a:masterClrMapping/>
+  </p:clrMapOvr>
+</p:sld>
+</file>
+
+<file path=ppt/slides/slide9.xml><?xml version="1.0" encoding="utf-8"?>
+<p:sld xmlns:a="http://schemas.openxmlformats.org/drawingml/2006/main" xmlns:r="http://schemas.openxmlformats.org/officeDocument/2006/relationships" xmlns:p="http://schemas.openxmlformats.org/presentationml/2006/main">
+  <p:cSld>
+    <p:spTree>
+      <p:nvGrpSpPr>
+        <p:cNvPr id="1" name=""/>
+        <p:cNvGrpSpPr/>
+        <p:nvPr/>
+      </p:nvGrpSpPr>
+      <p:grpSpPr>
+        <a:xfrm>
+          <a:off x="0" y="0"/>
+          <a:ext cx="0" cy="0"/>
+          <a:chOff x="0" y="0"/>
+          <a:chExt cx="0" cy="0"/>
+        </a:xfrm>
+      </p:grpSpPr>
+      <p:sp>
+        <p:nvSpPr>
+          <p:cNvPr id="2" name="Title 1"/>
+          <p:cNvSpPr>
+            <a:spLocks noGrp="1"/>
+          </p:cNvSpPr>
+          <p:nvPr>
+            <p:ph type="title"/>
+          </p:nvPr>
+        </p:nvSpPr>
+        <p:spPr/>
+        <p:txBody>
+          <a:bodyPr/>
+          <a:lstStyle/>
+          <a:p>
+            <a:r>
+              <a:rPr dirty="0"/>
+              <a:t>증명: 균일성 가정 하의 사전영상 저항성</a:t>
+            </a:r>
+          </a:p>
+        </p:txBody>
+      </p:sp>
+      <mc:AlternateContent xmlns:mc="http://schemas.openxmlformats.org/markup-compatibility/2006" xmlns:a14="http://schemas.microsoft.com/office/drawing/2010/main">
+        <mc:Choice Requires="a14">
+          <p:sp>
+            <p:nvSpPr>
+              <p:cNvPr id="3" name="Content Placeholder 2"/>
+              <p:cNvSpPr>
+                <a:spLocks noGrp="1"/>
+              </p:cNvSpPr>
+              <p:nvPr>
+                <p:ph idx="1"/>
+              </p:nvPr>
+            </p:nvSpPr>
+            <p:spPr/>
+            <p:txBody>
+              <a:bodyPr/>
+              <a:lstStyle>
+                <a:lvl1pPr>
+                  <a:defRPr sz="1800"/>
+                </a:lvl1pPr>
+                <a:lvl2pPr>
+                  <a:defRPr sz="1800"/>
+                </a:lvl2pPr>
+              </a:lstStyle>
+              <a:p>
+                <a:r>
+                  <a:rPr sz="1800" dirty="0"/>
+                  <a:t>CR ⇒ PR과 2PR ⇒ PR은 "균일한 해시 함수"라는 가정 하에 같은 기법으로 성립한다</a:t>
+                </a:r>
+              </a:p>
+              <a:p>
+                <a:r>
+                  <a:rPr sz="1800" dirty="0"/>
+                  <a:t>기법: 무작위 입력을 해싱해 얻은 목표값을 상대 게임의 오라클에 넘긴다</a:t>
+                </a:r>
+              </a:p>
+              <a:p>
+                <a:r>
+                  <a:rPr sz="1800" dirty="0"/>
+                  <a:t>CR ⇒ PR: </a:t>
+                </a:r>
+                <a14:m>
+                  <m:oMath xmlns:m="http://schemas.openxmlformats.org/officeDocument/2006/math">
+                    <m:sSub>
+                      <m:sSubPr>
+                        <m:ctrlPr>
+                          <a:rPr lang="en-US" i="1">
+                            <a:latin typeface="Cambria Math" panose="02040503050406030204" pitchFamily="18" charset="0"/>
+                          </a:rPr>
+                        </m:ctrlPr>
+                      </m:sSubPr>
+                      <m:e>
+                        <m:r>
+                          <a:rPr lang="en-US" i="1">
+                            <a:latin typeface="Cambria Math"/>
+                          </a:rPr>
+                          <m:t>𝑥</m:t>
+                        </m:r>
+                      </m:e>
+                      <m:sub>
+                        <m:r>
+                          <a:rPr lang="en-US" i="1">
+                            <a:latin typeface="Cambria Math"/>
+                          </a:rPr>
+                          <m:t>1</m:t>
+                        </m:r>
+                      </m:sub>
+                    </m:sSub>
+                  </m:oMath>
+                </a14:m>
+                <a:r>
+                  <a:rPr sz="1800" dirty="0"/>
+                  <a:t>을 무작위로 뽑아 </a:t>
+                </a:r>
+                <a14:m>
+                  <m:oMath xmlns:m="http://schemas.openxmlformats.org/officeDocument/2006/math">
+                    <m:r>
+                      <a:rPr lang="en-US" i="1">
+                        <a:latin typeface="Cambria Math"/>
+                      </a:rPr>
+                      <m:t>𝑦</m:t>
+                    </m:r>
+                    <m:r>
+                      <a:rPr lang="en-US" i="1">
+                        <a:latin typeface="Cambria Math"/>
+                      </a:rPr>
+                      <m:t>=</m:t>
+                    </m:r>
+                    <m:r>
+                      <a:rPr lang="en-US" i="1">
+                        <a:latin typeface="Cambria Math"/>
+                      </a:rPr>
+                      <m:t>𝐻</m:t>
+                    </m:r>
+                    <m:r>
+                      <a:rPr lang="en-US" i="1">
+                        <a:latin typeface="Cambria Math"/>
+                      </a:rPr>
+                      <m:t>(</m:t>
+                    </m:r>
+                    <m:sSub>
+                      <m:sSubPr>
+                        <m:ctrlPr>
+                          <a:rPr lang="en-US" i="1">
+                            <a:latin typeface="Cambria Math" panose="02040503050406030204" pitchFamily="18" charset="0"/>
+                          </a:rPr>
+                        </m:ctrlPr>
+                      </m:sSubPr>
+                      <m:e>
+                        <m:r>
+                          <a:rPr lang="en-US" i="1">
+                            <a:latin typeface="Cambria Math"/>
+                          </a:rPr>
+                          <m:t>𝑥</m:t>
+                        </m:r>
+                      </m:e>
+                      <m:sub>
+                        <m:r>
+                          <a:rPr lang="en-US" i="1">
+                            <a:latin typeface="Cambria Math"/>
+                          </a:rPr>
+                          <m:t>1</m:t>
+                        </m:r>
+                      </m:sub>
+                    </m:sSub>
+                    <m:r>
+                      <a:rPr lang="en-US" i="1">
+                        <a:latin typeface="Cambria Math"/>
+                      </a:rPr>
+                      <m:t>)</m:t>
+                    </m:r>
+                  </m:oMath>
+                </a14:m>
+                <a:r>
+                  <a:rPr sz="1800" dirty="0"/>
+                  <a:t> 계산 → PR 깨는 A로 </a:t>
+                </a:r>
+                <a14:m>
+                  <m:oMath xmlns:m="http://schemas.openxmlformats.org/officeDocument/2006/math">
+                    <m:r>
+                      <a:rPr lang="en-US" i="1">
+                        <a:latin typeface="Cambria Math"/>
+                      </a:rPr>
+                      <m:t>𝐴</m:t>
+                    </m:r>
+                    <m:r>
+                      <a:rPr lang="en-US" i="1">
+                        <a:latin typeface="Cambria Math"/>
+                      </a:rPr>
+                      <m:t>(</m:t>
+                    </m:r>
+                    <m:r>
+                      <a:rPr lang="en-US" i="1">
+                        <a:latin typeface="Cambria Math"/>
+                      </a:rPr>
+                      <m:t>𝑦</m:t>
+                    </m:r>
+                    <m:r>
+                      <a:rPr lang="en-US" i="1">
+                        <a:latin typeface="Cambria Math"/>
+                      </a:rPr>
+                      <m:t>)=</m:t>
+                    </m:r>
+                    <m:sSub>
+                      <m:sSubPr>
+                        <m:ctrlPr>
+                          <a:rPr lang="en-US" i="1">
+                            <a:latin typeface="Cambria Math" panose="02040503050406030204" pitchFamily="18" charset="0"/>
+                          </a:rPr>
+                        </m:ctrlPr>
+                      </m:sSubPr>
+                      <m:e>
+                        <m:r>
+                          <a:rPr lang="en-US" i="1">
+                            <a:latin typeface="Cambria Math"/>
+                          </a:rPr>
+                          <m:t>𝑥</m:t>
+                        </m:r>
+                      </m:e>
+                      <m:sub>
+                        <m:r>
+                          <a:rPr lang="en-US" i="1">
+                            <a:latin typeface="Cambria Math"/>
+                          </a:rPr>
+                          <m:t>2</m:t>
+                        </m:r>
+                      </m:sub>
+                    </m:sSub>
+                  </m:oMath>
+                </a14:m>
+                <a:r>
+                  <a:rPr sz="1800" dirty="0"/>
+                  <a:t> 획득 → </a:t>
+                </a:r>
+                <a14:m>
+                  <m:oMath xmlns:m="http://schemas.openxmlformats.org/officeDocument/2006/math">
+                    <m:r>
+                      <a:rPr lang="en-US" i="1">
+                        <a:latin typeface="Cambria Math"/>
+                      </a:rPr>
+                      <m:t>(</m:t>
+                    </m:r>
+                    <m:sSub>
+                      <m:sSubPr>
+                        <m:ctrlPr>
+                          <a:rPr lang="en-US" i="1">
+                            <a:latin typeface="Cambria Math" panose="02040503050406030204" pitchFamily="18" charset="0"/>
+                          </a:rPr>
+                        </m:ctrlPr>
+                      </m:sSubPr>
+                      <m:e>
+                        <m:r>
+                          <a:rPr lang="en-US" i="1">
+                            <a:latin typeface="Cambria Math"/>
+                          </a:rPr>
+                          <m:t>𝑥</m:t>
+                        </m:r>
+                      </m:e>
+                      <m:sub>
+                        <m:r>
+                          <a:rPr lang="en-US" i="1">
+                            <a:latin typeface="Cambria Math"/>
+                          </a:rPr>
+                          <m:t>1</m:t>
+                        </m:r>
+                      </m:sub>
+                    </m:sSub>
+                    <m:r>
+                      <a:rPr lang="en-US" i="1">
+                        <a:latin typeface="Cambria Math"/>
+                      </a:rPr>
+                      <m:t>,</m:t>
+                    </m:r>
+                    <m:sSub>
+                      <m:sSubPr>
+                        <m:ctrlPr>
+                          <a:rPr lang="en-US" i="1">
+                            <a:latin typeface="Cambria Math" panose="02040503050406030204" pitchFamily="18" charset="0"/>
+                          </a:rPr>
+                        </m:ctrlPr>
+                      </m:sSubPr>
+                      <m:e>
+                        <m:r>
+                          <a:rPr lang="en-US" i="1">
+                            <a:latin typeface="Cambria Math"/>
+                          </a:rPr>
+                          <m:t>𝑥</m:t>
+                        </m:r>
+                      </m:e>
+                      <m:sub>
+                        <m:r>
+                          <a:rPr lang="en-US" i="1">
+                            <a:latin typeface="Cambria Math"/>
+                          </a:rPr>
+                          <m:t>2</m:t>
+                        </m:r>
+                      </m:sub>
+                    </m:sSub>
+                    <m:r>
+                      <a:rPr lang="en-US" i="1">
+                        <a:latin typeface="Cambria Math"/>
+                      </a:rPr>
+                      <m:t>)</m:t>
+                    </m:r>
+                  </m:oMath>
+                </a14:m>
+                <a:r>
+                  <a:rPr sz="1800" dirty="0"/>
+                  <a:t>가 충돌 후보</a:t>
+                </a:r>
+              </a:p>
+              <a:p>
+                <a:r>
+                  <a:rPr sz="1800" dirty="0"/>
+                  <a:t>균일성 가정 하에 </a:t>
+                </a:r>
+                <a14:m>
+                  <m:oMath xmlns:m="http://schemas.openxmlformats.org/officeDocument/2006/math">
+                    <m:r>
+                      <a:rPr lang="en-US" i="1">
+                        <a:latin typeface="Cambria Math"/>
+                      </a:rPr>
+                      <m:t>𝑦</m:t>
+                    </m:r>
+                  </m:oMath>
+                </a14:m>
+                <a:r>
+                  <a:rPr sz="1800" dirty="0"/>
+                  <a:t>의 사전영상이 다수 존재 → A가 정확히 </a:t>
+                </a:r>
+                <a14:m>
+                  <m:oMath xmlns:m="http://schemas.openxmlformats.org/officeDocument/2006/math">
+                    <m:sSub>
+                      <m:sSubPr>
+                        <m:ctrlPr>
+                          <a:rPr lang="en-US" i="1">
+                            <a:latin typeface="Cambria Math" panose="02040503050406030204" pitchFamily="18" charset="0"/>
+                          </a:rPr>
+                        </m:ctrlPr>
+                      </m:sSubPr>
+                      <m:e>
+                        <m:r>
+                          <a:rPr lang="en-US" i="1">
+                            <a:latin typeface="Cambria Math"/>
+                          </a:rPr>
+                          <m:t>𝑥</m:t>
+                        </m:r>
+                      </m:e>
+                      <m:sub>
+                        <m:r>
+                          <a:rPr lang="en-US" i="1">
+                            <a:latin typeface="Cambria Math"/>
+                          </a:rPr>
+                          <m:t>1</m:t>
+                        </m:r>
+                      </m:sub>
+                    </m:sSub>
+                  </m:oMath>
+                </a14:m>
+                <a:r>
+                  <a:rPr sz="1800" dirty="0"/>
+                  <a:t>을 돌려줄 확률은 무시 가능 → </a:t>
+                </a:r>
+                <a14:m>
+                  <m:oMath xmlns:m="http://schemas.openxmlformats.org/officeDocument/2006/math">
+                    <m:sSub>
+                      <m:sSubPr>
+                        <m:ctrlPr>
+                          <a:rPr lang="en-US" i="1">
+                            <a:latin typeface="Cambria Math" panose="02040503050406030204" pitchFamily="18" charset="0"/>
+                          </a:rPr>
+                        </m:ctrlPr>
+                      </m:sSubPr>
+                      <m:e>
+                        <m:r>
+                          <a:rPr lang="en-US" i="1">
+                            <a:latin typeface="Cambria Math"/>
+                          </a:rPr>
+                          <m:t>𝑥</m:t>
+                        </m:r>
+                      </m:e>
+                      <m:sub>
+                        <m:r>
+                          <a:rPr lang="en-US" i="1">
+                            <a:latin typeface="Cambria Math"/>
+                          </a:rPr>
+                          <m:t>2</m:t>
+                        </m:r>
+                      </m:sub>
+                    </m:sSub>
+                    <m:r>
+                      <a:rPr lang="en-US" i="1">
+                        <a:latin typeface="Cambria Math"/>
+                      </a:rPr>
+                      <m:t>≠</m:t>
+                    </m:r>
+                    <m:sSub>
+                      <m:sSubPr>
+                        <m:ctrlPr>
+                          <a:rPr lang="en-US" i="1">
+                            <a:latin typeface="Cambria Math" panose="02040503050406030204" pitchFamily="18" charset="0"/>
+                          </a:rPr>
+                        </m:ctrlPr>
+                      </m:sSubPr>
+                      <m:e>
+                        <m:r>
+                          <a:rPr lang="en-US" i="1">
+                            <a:latin typeface="Cambria Math"/>
+                          </a:rPr>
+                          <m:t>𝑥</m:t>
+                        </m:r>
+                      </m:e>
+                      <m:sub>
+                        <m:r>
+                          <a:rPr lang="en-US" i="1">
+                            <a:latin typeface="Cambria Math"/>
+                          </a:rPr>
+                          <m:t>1</m:t>
+                        </m:r>
+                      </m:sub>
+                    </m:sSub>
+                  </m:oMath>
+                </a14:m>
+                <a:r>
+                  <a:rPr sz="1800" dirty="0"/>
+                  <a:t>일 확률이 높다</a:t>
+                </a:r>
+              </a:p>
+              <a:p>
+                <a:r>
+                  <a:rPr sz="1800" dirty="0"/>
+                  <a:t>균일성이 없으면 깨진다: </a:t>
+                </a:r>
+                <a14:m>
+                  <m:oMath xmlns:m="http://schemas.openxmlformats.org/officeDocument/2006/math">
+                    <m:r>
+                      <a:rPr lang="en-US" i="1">
+                        <a:latin typeface="Cambria Math"/>
+                      </a:rPr>
+                      <m:t>𝑦</m:t>
+                    </m:r>
+                  </m:oMath>
+                </a14:m>
+                <a:r>
+                  <a:rPr sz="1800" dirty="0"/>
+                  <a:t>의 사전영상이 유일하면 A는 항상 </a:t>
+                </a:r>
+                <a14:m>
+                  <m:oMath xmlns:m="http://schemas.openxmlformats.org/officeDocument/2006/math">
+                    <m:sSub>
+                      <m:sSubPr>
+                        <m:ctrlPr>
+                          <a:rPr lang="en-US" i="1">
+                            <a:latin typeface="Cambria Math" panose="02040503050406030204" pitchFamily="18" charset="0"/>
+                          </a:rPr>
+                        </m:ctrlPr>
+                      </m:sSubPr>
+                      <m:e>
+                        <m:r>
+                          <a:rPr lang="en-US" i="1">
+                            <a:latin typeface="Cambria Math"/>
+                          </a:rPr>
+                          <m:t>𝑥</m:t>
+                        </m:r>
+                      </m:e>
+                      <m:sub>
+                        <m:r>
+                          <a:rPr lang="en-US" i="1">
+                            <a:latin typeface="Cambria Math"/>
+                          </a:rPr>
+                          <m:t>1</m:t>
+                        </m:r>
+                      </m:sub>
+                    </m:sSub>
+                  </m:oMath>
+                </a14:m>
+                <a:r>
+                  <a:rPr sz="1800" dirty="0"/>
+                  <a:t> 자체만 반환할 수 있다</a:t>
+                </a:r>
+              </a:p>
+            </p:txBody>
+          </p:sp>
+        </mc:Choice>
+        <mc:Fallback xmlns="">
           <p:sp>
             <p:nvSpPr>
               <p:cNvPr id="3" name="Content Placeholder 2"/>

--- a/presentation/0909_15_Hash-Functions-and-Lamport-OTS.pptx
+++ b/presentation/0909_15_Hash-Functions-and-Lamport-OTS.pptx
@@ -11967,8 +11967,8 @@
           </a:p>
         </p:txBody>
       </p:sp>
-      <mc:AlternateContent xmlns:mc="http://schemas.openxmlformats.org/markup-compatibility/2006" xmlns:a14="http://schemas.microsoft.com/office/drawing/2010/main">
-        <mc:Choice Requires="a14">
+      <mc:AlternateContent xmlns:mc="http://schemas.openxmlformats.org/markup-compatibility/2006">
+        <mc:Choice xmlns:a14="http://schemas.microsoft.com/office/drawing/2010/main" Requires="a14">
           <p:sp>
             <p:nvSpPr>
               <p:cNvPr id="3" name="Content Placeholder 2"/>
@@ -12336,14 +12336,7 @@
                 </a14:m>
                 <a:r>
                   <a:rPr sz="1800" dirty="0"/>
-                  <a:t> </a:t>
-                </a:r>
-                <a:br>
-                  <a:rPr lang="en-US" sz="1800" dirty="0"/>
-                </a:br>
-                <a:r>
-                  <a:rPr sz="1800" dirty="0"/>
-                  <a:t>— 개인키 </a:t>
+                  <a:t> — 개인키 </a:t>
                 </a:r>
                 <a14:m>
                   <m:oMath xmlns:m="http://schemas.openxmlformats.org/officeDocument/2006/math">
@@ -12667,7 +12660,7 @@
             </p:txBody>
           </p:sp>
         </mc:Choice>
-        <mc:Fallback xmlns="">
+        <mc:Fallback>
           <p:sp>
             <p:nvSpPr>
               <p:cNvPr id="3" name="Content Placeholder 2"/>
@@ -12686,7 +12679,7 @@
               <a:blipFill>
                 <a:blip r:embed="rId2"/>
                 <a:stretch>
-                  <a:fillRect l="-288"/>
+                  <a:fillRect l="-173"/>
                 </a:stretch>
               </a:blipFill>
             </p:spPr>
@@ -12750,8 +12743,8 @@
         </p:blipFill>
         <p:spPr>
           <a:xfrm>
-            <a:off x="8610600" y="1701690"/>
-            <a:ext cx="1292789" cy="3454620"/>
+            <a:off x="5557837" y="3453820"/>
+            <a:ext cx="1076325" cy="2876180"/>
           </a:xfrm>
           <a:prstGeom prst="rect">
             <a:avLst/>
@@ -12805,8 +12798,8 @@
           </a:p>
         </p:txBody>
       </p:sp>
-      <mc:AlternateContent xmlns:mc="http://schemas.openxmlformats.org/markup-compatibility/2006" xmlns:a14="http://schemas.microsoft.com/office/drawing/2010/main">
-        <mc:Choice Requires="a14">
+      <mc:AlternateContent xmlns:mc="http://schemas.openxmlformats.org/markup-compatibility/2006">
+        <mc:Choice xmlns:a14="http://schemas.microsoft.com/office/drawing/2010/main" Requires="a14">
           <p:sp>
             <p:nvSpPr>
               <p:cNvPr id="3" name="Content Placeholder 2"/>
@@ -12819,7 +12812,7 @@
             </p:nvSpPr>
             <p:spPr>
               <a:xfrm>
-                <a:off x="838200" y="1505069"/>
+                <a:off x="838138" y="1294790"/>
                 <a:ext cx="10515599" cy="4615185"/>
               </a:xfrm>
             </p:spPr>
@@ -13181,7 +13174,7 @@
             </p:txBody>
           </p:sp>
         </mc:Choice>
-        <mc:Fallback xmlns="">
+        <mc:Fallback>
           <p:sp>
             <p:nvSpPr>
               <p:cNvPr id="3" name="Content Placeholder 2"/>
@@ -13194,13 +13187,13 @@
             </p:nvSpPr>
             <p:spPr>
               <a:xfrm>
-                <a:off x="838200" y="1505069"/>
+                <a:off x="838138" y="1294790"/>
                 <a:ext cx="10515599" cy="4615185"/>
               </a:xfrm>
               <a:blipFill>
                 <a:blip r:embed="rId2"/>
                 <a:stretch>
-                  <a:fillRect l="-232"/>
+                  <a:fillRect l="-174"/>
                 </a:stretch>
               </a:blipFill>
             </p:spPr>

--- a/presentation/0909_15_Hash-Functions-and-Lamport-OTS.pptx
+++ b/presentation/0909_15_Hash-Functions-and-Lamport-OTS.pptx
@@ -11967,8 +11967,8 @@
           </a:p>
         </p:txBody>
       </p:sp>
-      <mc:AlternateContent xmlns:mc="http://schemas.openxmlformats.org/markup-compatibility/2006">
-        <mc:Choice xmlns:a14="http://schemas.microsoft.com/office/drawing/2010/main" Requires="a14">
+      <mc:AlternateContent xmlns:mc="http://schemas.openxmlformats.org/markup-compatibility/2006" xmlns:a14="http://schemas.microsoft.com/office/drawing/2010/main">
+        <mc:Choice Requires="a14">
           <p:sp>
             <p:nvSpPr>
               <p:cNvPr id="3" name="Content Placeholder 2"/>
@@ -12660,7 +12660,7 @@
             </p:txBody>
           </p:sp>
         </mc:Choice>
-        <mc:Fallback>
+        <mc:Fallback xmlns="">
           <p:sp>
             <p:nvSpPr>
               <p:cNvPr id="3" name="Content Placeholder 2"/>
@@ -12798,8 +12798,8 @@
           </a:p>
         </p:txBody>
       </p:sp>
-      <mc:AlternateContent xmlns:mc="http://schemas.openxmlformats.org/markup-compatibility/2006">
-        <mc:Choice xmlns:a14="http://schemas.microsoft.com/office/drawing/2010/main" Requires="a14">
+      <mc:AlternateContent xmlns:mc="http://schemas.openxmlformats.org/markup-compatibility/2006" xmlns:a14="http://schemas.microsoft.com/office/drawing/2010/main">
+        <mc:Choice Requires="a14">
           <p:sp>
             <p:nvSpPr>
               <p:cNvPr id="3" name="Content Placeholder 2"/>
@@ -13174,7 +13174,7 @@
             </p:txBody>
           </p:sp>
         </mc:Choice>
-        <mc:Fallback>
+        <mc:Fallback xmlns="">
           <p:sp>
             <p:nvSpPr>
               <p:cNvPr id="3" name="Content Placeholder 2"/>
@@ -15396,7 +15396,7 @@
           <p:nvPr>
             <p:extLst>
               <p:ext uri="{D42A27DB-BD31-4B8C-83A1-F6EECF244321}">
-                <p14:modId xmlns:p14="http://schemas.microsoft.com/office/powerpoint/2010/main" val="308982853"/>
+                <p14:modId xmlns:p14="http://schemas.microsoft.com/office/powerpoint/2010/main" val="876461498"/>
               </p:ext>
             </p:extLst>
           </p:nvPr>
@@ -16544,7 +16544,14 @@
             </a:r>
             <a:r>
               <a:rPr sz="1800" dirty="0"/>
-              <a:t> — 안전을 위해 n≥256 필요</a:t>
+              <a:t> </a:t>
+            </a:r>
+            <a:br>
+              <a:rPr lang="en-US" sz="1800" dirty="0"/>
+            </a:br>
+            <a:r>
+              <a:rPr sz="1800" dirty="0"/>
+              <a:t>— 안전을 위해 n≥256 필요</a:t>
             </a:r>
           </a:p>
           <a:p>
